--- a/presentation/Diabetes_Final_Presentation.pptx
+++ b/presentation/Diabetes_Final_Presentation.pptx
@@ -519,7 +519,7 @@
           <a:lstStyle/>
           <a:p>
             <a:r>
-              <a:t>Greet the audience. State project title, team and instructor. Keep brief — 30 seconds. Move to the next slide.</a:t>
+              <a:t>Greet the audience. State project title, team and instructor. Keep brief — 30 seconds. Move to the next slide. The two links at the bottom are clickable in slideshow mode.</a:t>
             </a:r>
           </a:p>
         </p:txBody>
@@ -1149,7 +1149,7 @@
           <a:lstStyle/>
           <a:p>
             <a:r>
-              <a:t>This is THE conclusion slide — 4 BIG metric badges at the top show results PROMINENTLY (this is what gets marks for 'how we show results'). Below them: conclusion bullets (left), limitations (left), and likely Q&amp;A (right). End with 'Thank you — any questions?'.</a:t>
+              <a:t>This is THE conclusion slide — 4 BIG metric badges at the top show results PROMINENTLY (this is what gets marks for 'how we show results'). Below them: conclusion bullets (left), limitations (left), and likely Q&amp;A (right). End with 'Thank you — any questions?'. The two links at the bottom are clickable in slideshow mode.</a:t>
             </a:r>
           </a:p>
         </p:txBody>
@@ -4826,13 +4826,7 @@
               </a:lnSpc>
             </a:pPr>
             <a:r>
-              <a:rPr sz="5400" b="1">
-                <a:solidFill>
-                  <a:srgbClr val="1E293B"/>
-                </a:solidFill>
-                <a:latin typeface="Calibri"/>
-              </a:rPr>
-              <a:t>Diabetes Risk Prediction</a:t>
+              <a:t>Diabetes Risk Prediction Using Random Forest</a:t>
             </a:r>
           </a:p>
         </p:txBody>
@@ -5182,6 +5176,108 @@
                 <a:latin typeface="Calibri"/>
               </a:rPr>
               <a:t>Semester 2  ·  2026</a:t>
+            </a:r>
+          </a:p>
+        </p:txBody>
+      </p:sp>
+      <p:sp>
+        <p:nvSpPr>
+          <p:cNvPr id="13" name="TextBox 12"/>
+          <p:cNvSpPr txBox="1"/>
+          <p:nvPr/>
+        </p:nvSpPr>
+        <p:spPr>
+          <a:xfrm>
+            <a:off x="640080" y="6126480"/>
+            <a:ext cx="10972800" cy="274320"/>
+          </a:xfrm>
+          <a:prstGeom prst="rect">
+            <a:avLst/>
+          </a:prstGeom>
+          <a:noFill/>
+        </p:spPr>
+        <p:txBody>
+          <a:bodyPr wrap="square" lIns="0" rIns="0" tIns="0" bIns="0" anchor="t">
+            <a:spAutoFit/>
+          </a:bodyPr>
+          <a:lstStyle/>
+          <a:p>
+            <a:pPr algn="l">
+              <a:lnSpc>
+                <a:spcPct val="115000"/>
+              </a:lnSpc>
+            </a:pPr>
+            <a:r>
+              <a:rPr sz="1000" b="1">
+                <a:solidFill>
+                  <a:srgbClr val="0F766E"/>
+                </a:solidFill>
+                <a:latin typeface="Calibri"/>
+              </a:rPr>
+              <a:t>RESOURCES</a:t>
+            </a:r>
+          </a:p>
+        </p:txBody>
+      </p:sp>
+      <p:sp>
+        <p:nvSpPr>
+          <p:cNvPr id="14" name="TextBox 13"/>
+          <p:cNvSpPr txBox="1"/>
+          <p:nvPr/>
+        </p:nvSpPr>
+        <p:spPr>
+          <a:xfrm>
+            <a:off x="640080" y="6400800"/>
+            <a:ext cx="10972800" cy="320040"/>
+          </a:xfrm>
+          <a:prstGeom prst="rect">
+            <a:avLst/>
+          </a:prstGeom>
+          <a:noFill/>
+        </p:spPr>
+        <p:txBody>
+          <a:bodyPr wrap="square" lIns="0" rIns="0" tIns="0" bIns="0">
+            <a:spAutoFit/>
+          </a:bodyPr>
+          <a:lstStyle/>
+          <a:p>
+            <a:r>
+              <a:rPr sz="1100" b="1">
+                <a:solidFill>
+                  <a:srgbClr val="475569"/>
+                </a:solidFill>
+                <a:latin typeface="Calibri"/>
+              </a:rPr>
+              <a:t>GitHub:  </a:t>
+            </a:r>
+            <a:r>
+              <a:rPr sz="1100" b="0" u="sng">
+                <a:solidFill>
+                  <a:srgbClr val="0F766E"/>
+                </a:solidFill>
+                <a:latin typeface="Calibri"/>
+                <a:hlinkClick r:id="rId2"/>
+              </a:rPr>
+              <a:t>https://github.com/muhammadammarff-design/diabetes-risk-prediction</a:t>
+            </a:r>
+            <a:r>
+              <a:rPr sz="1100" b="1">
+                <a:solidFill>
+                  <a:srgbClr val="475569"/>
+                </a:solidFill>
+                <a:latin typeface="Calibri"/>
+              </a:rPr>
+              <a:t>      ·      Live demo:  </a:t>
+            </a:r>
+            <a:r>
+              <a:rPr sz="1100" b="0" u="sng">
+                <a:solidFill>
+                  <a:srgbClr val="0F766E"/>
+                </a:solidFill>
+                <a:latin typeface="Calibri"/>
+                <a:hlinkClick r:id="rId3"/>
+              </a:rPr>
+              <a:t>https://diabetesriskpredictions.streamlit.app/</a:t>
             </a:r>
           </a:p>
         </p:txBody>
@@ -5448,30 +5544,6 @@
           </a:p>
         </p:txBody>
       </p:sp>
-      <p:pic>
-        <p:nvPicPr>
-          <p:cNvPr id="8" name="Picture 7" descr="05_correlation_heatmap.png"/>
-          <p:cNvPicPr>
-            <a:picLocks noChangeAspect="1"/>
-          </p:cNvPicPr>
-          <p:nvPr/>
-        </p:nvPicPr>
-        <p:blipFill>
-          <a:blip r:embed="rId2"/>
-          <a:stretch>
-            <a:fillRect/>
-          </a:stretch>
-        </p:blipFill>
-        <p:spPr>
-          <a:xfrm>
-            <a:off x="365760" y="1783080"/>
-            <a:ext cx="6400800" cy="4754880"/>
-          </a:xfrm>
-          <a:prstGeom prst="rect">
-            <a:avLst/>
-          </a:prstGeom>
-        </p:spPr>
-      </p:pic>
       <p:sp>
         <p:nvSpPr>
           <p:cNvPr id="9" name="TextBox 8"/>
@@ -6731,6 +6803,30 @@
           </a:p>
         </p:txBody>
       </p:sp>
+      <p:pic>
+        <p:nvPicPr>
+          <p:cNvPr id="40" name="Picture 39" descr="05_correlation_heatmap.png"/>
+          <p:cNvPicPr>
+            <a:picLocks noChangeAspect="1"/>
+          </p:cNvPicPr>
+          <p:nvPr/>
+        </p:nvPicPr>
+        <p:blipFill>
+          <a:blip r:embed="rId4"/>
+          <a:stretch>
+            <a:fillRect/>
+          </a:stretch>
+        </p:blipFill>
+        <p:spPr>
+          <a:xfrm>
+            <a:off x="365760" y="1737360"/>
+            <a:ext cx="6583680" cy="5839548"/>
+          </a:xfrm>
+          <a:prstGeom prst="rect">
+            <a:avLst/>
+          </a:prstGeom>
+        </p:spPr>
+      </p:pic>
     </p:spTree>
   </p:cSld>
   <p:clrMapOvr>
@@ -7457,6 +7553,71 @@
           </a:p>
         </p:txBody>
       </p:sp>
+      <p:sp>
+        <p:nvSpPr>
+          <p:cNvPr id="17" name="TextBox 16"/>
+          <p:cNvSpPr txBox="1"/>
+          <p:nvPr/>
+        </p:nvSpPr>
+        <p:spPr>
+          <a:xfrm>
+            <a:off x="365760" y="4389120"/>
+            <a:ext cx="11430000" cy="2011680"/>
+          </a:xfrm>
+          <a:prstGeom prst="rect">
+            <a:avLst/>
+          </a:prstGeom>
+          <a:noFill/>
+        </p:spPr>
+        <p:txBody>
+          <a:bodyPr wrap="square">
+            <a:spAutoFit/>
+          </a:bodyPr>
+          <a:lstStyle/>
+          <a:p>
+            <a:pPr>
+              <a:defRPr sz="1100" b="1">
+                <a:solidFill>
+                  <a:srgbClr val="0F766E"/>
+                </a:solidFill>
+              </a:defRPr>
+            </a:pPr>
+            <a:r>
+              <a:t>Code (from notebook):</a:t>
+            </a:r>
+          </a:p>
+          <a:p>
+            <a:pPr>
+              <a:defRPr sz="1000">
+                <a:latin typeface="Courier New"/>
+              </a:defRPr>
+            </a:pPr>
+            <a:r>
+              <a:t>from sklearn.model_selection import train_test_split</a:t>
+            </a:r>
+          </a:p>
+          <a:p>
+            <a:pPr>
+              <a:defRPr sz="1000">
+                <a:latin typeface="Courier New"/>
+              </a:defRPr>
+            </a:pPr>
+            <a:r>
+              <a:t>X_train, X_test, y_train, y_test = train_test_split(X, y, test_size=0.2, random_state=42, stratify=y)</a:t>
+            </a:r>
+          </a:p>
+          <a:p>
+            <a:pPr>
+              <a:defRPr sz="1000">
+                <a:latin typeface="Courier New"/>
+              </a:defRPr>
+            </a:pPr>
+            <a:r>
+              <a:t># Train: (55,245, 21)   |   Test: (13,812, 21)   ← Split done BEFORE any modeling</a:t>
+            </a:r>
+          </a:p>
+        </p:txBody>
+      </p:sp>
     </p:spTree>
   </p:cSld>
   <p:clrMapOvr>
@@ -12437,6 +12598,73 @@
           </a:p>
         </p:txBody>
       </p:sp>
+      <p:sp>
+        <p:nvSpPr>
+          <p:cNvPr id="32" name="TextBox 31"/>
+          <p:cNvSpPr txBox="1"/>
+          <p:nvPr/>
+        </p:nvSpPr>
+        <p:spPr>
+          <a:xfrm>
+            <a:off x="5669280" y="5029200"/>
+            <a:ext cx="6217920" cy="1554480"/>
+          </a:xfrm>
+          <a:prstGeom prst="rect">
+            <a:avLst/>
+          </a:prstGeom>
+          <a:noFill/>
+        </p:spPr>
+        <p:txBody>
+          <a:bodyPr wrap="square">
+            <a:spAutoFit/>
+          </a:bodyPr>
+          <a:lstStyle/>
+          <a:p>
+            <a:pPr>
+              <a:defRPr sz="1100" b="1">
+                <a:solidFill>
+                  <a:srgbClr val="0F766E"/>
+                </a:solidFill>
+              </a:defRPr>
+            </a:pPr>
+            <a:r>
+              <a:t>Confusion Matrix Explanation:</a:t>
+            </a:r>
+          </a:p>
+          <a:p>
+            <a:pPr>
+              <a:defRPr sz="900"/>
+            </a:pPr>
+            <a:r>
+              <a:t>TN 4696 = correctly predicted healthy</a:t>
+            </a:r>
+          </a:p>
+          <a:p>
+            <a:pPr>
+              <a:defRPr sz="900"/>
+            </a:pPr>
+            <a:r>
+              <a:t>FP 2096 = false alarm (why not 2095? = model decision boundary)</a:t>
+            </a:r>
+          </a:p>
+          <a:p>
+            <a:pPr>
+              <a:defRPr sz="900"/>
+            </a:pPr>
+            <a:r>
+              <a:t>FN 1446 = missed diabetic cases</a:t>
+            </a:r>
+          </a:p>
+          <a:p>
+            <a:pPr>
+              <a:defRPr sz="900"/>
+            </a:pPr>
+            <a:r>
+              <a:t>TP 5574 = correctly caught diabetics</a:t>
+            </a:r>
+          </a:p>
+        </p:txBody>
+      </p:sp>
     </p:spTree>
   </p:cSld>
   <p:clrMapOvr>
@@ -16622,6 +16850,70 @@
           </a:p>
         </p:txBody>
       </p:sp>
+      <p:sp>
+        <p:nvSpPr>
+          <p:cNvPr id="45" name="TextBox 44"/>
+          <p:cNvSpPr txBox="1"/>
+          <p:nvPr/>
+        </p:nvSpPr>
+        <p:spPr>
+          <a:xfrm>
+            <a:off x="640080" y="6263640"/>
+            <a:ext cx="10972800" cy="274320"/>
+          </a:xfrm>
+          <a:prstGeom prst="rect">
+            <a:avLst/>
+          </a:prstGeom>
+          <a:noFill/>
+        </p:spPr>
+        <p:txBody>
+          <a:bodyPr wrap="square" lIns="0" rIns="0" tIns="0" bIns="0">
+            <a:spAutoFit/>
+          </a:bodyPr>
+          <a:lstStyle/>
+          <a:p>
+            <a:pPr algn="ctr"/>
+            <a:r>
+              <a:rPr sz="1000" b="1">
+                <a:solidFill>
+                  <a:srgbClr val="475569"/>
+                </a:solidFill>
+                <a:latin typeface="Calibri"/>
+              </a:rPr>
+              <a:t>Code  ·  </a:t>
+            </a:r>
+            <a:r>
+              <a:rPr sz="1000" b="0" u="sng">
+                <a:solidFill>
+                  <a:srgbClr val="0F766E"/>
+                </a:solidFill>
+                <a:latin typeface="Calibri"/>
+                <a:hlinkClick r:id="rId2"/>
+              </a:rPr>
+              <a:t>github.com/muhammadammarff-design/diabetes-risk-prediction</a:t>
+            </a:r>
+            <a:r>
+              <a:rPr sz="1000" b="1">
+                <a:solidFill>
+                  <a:srgbClr val="475569"/>
+                </a:solidFill>
+                <a:latin typeface="Calibri"/>
+              </a:rPr>
+              <a:t>      ·      Live demo  ·  </a:t>
+            </a:r>
+            <a:r>
+              <a:rPr sz="1000" b="0" u="sng">
+                <a:solidFill>
+                  <a:srgbClr val="0F766E"/>
+                </a:solidFill>
+                <a:latin typeface="Calibri"/>
+                <a:hlinkClick r:id="rId3"/>
+              </a:rPr>
+              <a:t>diabetesriskpredictions.streamlit.app</a:t>
+            </a:r>
+          </a:p>
+        </p:txBody>
+      </p:sp>
     </p:spTree>
   </p:cSld>
   <p:clrMapOvr>
@@ -16827,15 +17119,82 @@
               <a:lnSpc>
                 <a:spcPct val="115000"/>
               </a:lnSpc>
-            </a:pPr>
-            <a:r>
-              <a:rPr sz="2800" b="1">
-                <a:solidFill>
-                  <a:srgbClr val="1E293B"/>
-                </a:solidFill>
-                <a:latin typeface="Calibri"/>
-              </a:rPr>
-              <a:t>What we will cover today</a:t>
+              <a:defRPr sz="1800"/>
+            </a:pPr>
+            <a:r>
+              <a:t>What we will cover today (9 sections)</a:t>
+            </a:r>
+          </a:p>
+          <a:p>
+            <a:pPr>
+              <a:defRPr sz="1300"/>
+            </a:pPr>
+            <a:r>
+              <a:t>·  01 · Introduction &amp; Problem</a:t>
+            </a:r>
+          </a:p>
+          <a:p>
+            <a:pPr>
+              <a:defRPr sz="1300"/>
+            </a:pPr>
+            <a:r>
+              <a:t>·  02 · Dataset Overview (with missing values)</a:t>
+            </a:r>
+          </a:p>
+          <a:p>
+            <a:pPr>
+              <a:defRPr sz="1300"/>
+            </a:pPr>
+            <a:r>
+              <a:t>·  03 · Target &amp; Features</a:t>
+            </a:r>
+          </a:p>
+          <a:p>
+            <a:pPr>
+              <a:defRPr sz="1300"/>
+            </a:pPr>
+            <a:r>
+              <a:t>·  04 · Methodology &amp; Workflow</a:t>
+            </a:r>
+          </a:p>
+          <a:p>
+            <a:pPr>
+              <a:defRPr sz="1300"/>
+            </a:pPr>
+            <a:r>
+              <a:t>·  05 · Data Cleaning (duplicates + 350 missing)</a:t>
+            </a:r>
+          </a:p>
+          <a:p>
+            <a:pPr>
+              <a:defRPr sz="1300"/>
+            </a:pPr>
+            <a:r>
+              <a:t>·  06 · EDA &amp; Correlation</a:t>
+            </a:r>
+          </a:p>
+          <a:p>
+            <a:pPr>
+              <a:defRPr sz="1300"/>
+            </a:pPr>
+            <a:r>
+              <a:t>·  07 · Train/Test Split + 4 Classifiers</a:t>
+            </a:r>
+          </a:p>
+          <a:p>
+            <a:pPr>
+              <a:defRPr sz="1300"/>
+            </a:pPr>
+            <a:r>
+              <a:t>·  08 · Random Forest Results</a:t>
+            </a:r>
+          </a:p>
+          <a:p>
+            <a:pPr>
+              <a:defRPr sz="1300"/>
+            </a:pPr>
+            <a:r>
+              <a:t>·  09 · Insights, Deployment &amp; Conclusion</a:t>
             </a:r>
           </a:p>
         </p:txBody>
@@ -16913,248 +17272,82 @@
               <a:spcAft>
                 <a:spcPts val="800"/>
               </a:spcAft>
-            </a:pPr>
-            <a:r>
-              <a:rPr sz="1300" b="1">
-                <a:solidFill>
-                  <a:srgbClr val="F59E0B"/>
-                </a:solidFill>
-                <a:latin typeface="Calibri"/>
-              </a:rPr>
-              <a:t>·  </a:t>
-            </a:r>
-            <a:r>
-              <a:rPr sz="1300">
-                <a:solidFill>
-                  <a:srgbClr val="1E293B"/>
-                </a:solidFill>
-                <a:latin typeface="Calibri"/>
-              </a:rPr>
-              <a:t>01  ·  Problem statement</a:t>
-            </a:r>
-          </a:p>
-          <a:p>
-            <a:pPr algn="l">
-              <a:lnSpc>
-                <a:spcPct val="135000"/>
-              </a:lnSpc>
-              <a:spcAft>
-                <a:spcPts val="800"/>
-              </a:spcAft>
-            </a:pPr>
-            <a:r>
-              <a:rPr sz="1300" b="1">
-                <a:solidFill>
-                  <a:srgbClr val="F59E0B"/>
-                </a:solidFill>
-                <a:latin typeface="Calibri"/>
-              </a:rPr>
-              <a:t>·  </a:t>
-            </a:r>
-            <a:r>
-              <a:rPr sz="1300">
-                <a:solidFill>
-                  <a:srgbClr val="1E293B"/>
-                </a:solidFill>
-                <a:latin typeface="Calibri"/>
-              </a:rPr>
-              <a:t>02  ·  Dataset overview</a:t>
-            </a:r>
-          </a:p>
-          <a:p>
-            <a:pPr algn="l">
-              <a:lnSpc>
-                <a:spcPct val="135000"/>
-              </a:lnSpc>
-              <a:spcAft>
-                <a:spcPts val="800"/>
-              </a:spcAft>
-            </a:pPr>
-            <a:r>
-              <a:rPr sz="1300" b="1">
-                <a:solidFill>
-                  <a:srgbClr val="F59E0B"/>
-                </a:solidFill>
-                <a:latin typeface="Calibri"/>
-              </a:rPr>
-              <a:t>·  </a:t>
-            </a:r>
-            <a:r>
-              <a:rPr sz="1300">
-                <a:solidFill>
-                  <a:srgbClr val="1E293B"/>
-                </a:solidFill>
-                <a:latin typeface="Calibri"/>
-              </a:rPr>
-              <a:t>03  ·  Target &amp; features</a:t>
-            </a:r>
-          </a:p>
-          <a:p>
-            <a:pPr algn="l">
-              <a:lnSpc>
-                <a:spcPct val="135000"/>
-              </a:lnSpc>
-              <a:spcAft>
-                <a:spcPts val="800"/>
-              </a:spcAft>
-            </a:pPr>
-            <a:r>
-              <a:rPr sz="1300" b="1">
-                <a:solidFill>
-                  <a:srgbClr val="F59E0B"/>
-                </a:solidFill>
-                <a:latin typeface="Calibri"/>
-              </a:rPr>
-              <a:t>·  </a:t>
-            </a:r>
-            <a:r>
-              <a:rPr sz="1300">
-                <a:solidFill>
-                  <a:srgbClr val="1E293B"/>
-                </a:solidFill>
-                <a:latin typeface="Calibri"/>
-              </a:rPr>
-              <a:t>04  ·  Our model (Random Forest)</a:t>
-            </a:r>
-          </a:p>
-          <a:p>
-            <a:pPr algn="l">
-              <a:lnSpc>
-                <a:spcPct val="135000"/>
-              </a:lnSpc>
-              <a:spcAft>
-                <a:spcPts val="800"/>
-              </a:spcAft>
-            </a:pPr>
-            <a:r>
-              <a:rPr sz="1300" b="1">
-                <a:solidFill>
-                  <a:srgbClr val="F59E0B"/>
-                </a:solidFill>
-                <a:latin typeface="Calibri"/>
-              </a:rPr>
-              <a:t>·  </a:t>
-            </a:r>
-            <a:r>
-              <a:rPr sz="1300">
-                <a:solidFill>
-                  <a:srgbClr val="1E293B"/>
-                </a:solidFill>
-                <a:latin typeface="Calibri"/>
-              </a:rPr>
-              <a:t>05  ·  Project workflow (block diagram)</a:t>
-            </a:r>
-          </a:p>
-          <a:p>
-            <a:pPr algn="l">
-              <a:lnSpc>
-                <a:spcPct val="135000"/>
-              </a:lnSpc>
-              <a:spcAft>
-                <a:spcPts val="800"/>
-              </a:spcAft>
-            </a:pPr>
-            <a:r>
-              <a:rPr sz="1300" b="1">
-                <a:solidFill>
-                  <a:srgbClr val="F59E0B"/>
-                </a:solidFill>
-                <a:latin typeface="Calibri"/>
-              </a:rPr>
-              <a:t>·  </a:t>
-            </a:r>
-            <a:r>
-              <a:rPr sz="1300">
-                <a:solidFill>
-                  <a:srgbClr val="1E293B"/>
-                </a:solidFill>
-                <a:latin typeface="Calibri"/>
-              </a:rPr>
-              <a:t>06  ·  Data cleaning</a:t>
-            </a:r>
-          </a:p>
-          <a:p>
-            <a:pPr algn="l">
-              <a:lnSpc>
-                <a:spcPct val="135000"/>
-              </a:lnSpc>
-              <a:spcAft>
-                <a:spcPts val="800"/>
-              </a:spcAft>
-            </a:pPr>
-            <a:r>
-              <a:rPr sz="1300" b="1">
-                <a:solidFill>
-                  <a:srgbClr val="F59E0B"/>
-                </a:solidFill>
-                <a:latin typeface="Calibri"/>
-              </a:rPr>
-              <a:t>·  </a:t>
-            </a:r>
-            <a:r>
-              <a:rPr sz="1300">
-                <a:solidFill>
-                  <a:srgbClr val="1E293B"/>
-                </a:solidFill>
-                <a:latin typeface="Calibri"/>
-              </a:rPr>
-              <a:t>07  ·  Exploratory data analysis</a:t>
-            </a:r>
-          </a:p>
-          <a:p>
-            <a:pPr algn="l">
-              <a:lnSpc>
-                <a:spcPct val="135000"/>
-              </a:lnSpc>
-              <a:spcAft>
-                <a:spcPts val="800"/>
-              </a:spcAft>
-            </a:pPr>
-            <a:r>
-              <a:rPr sz="1300" b="1">
-                <a:solidFill>
-                  <a:srgbClr val="F59E0B"/>
-                </a:solidFill>
-                <a:latin typeface="Calibri"/>
-              </a:rPr>
-              <a:t>·  </a:t>
-            </a:r>
-            <a:r>
-              <a:rPr sz="1300">
-                <a:solidFill>
-                  <a:srgbClr val="1E293B"/>
-                </a:solidFill>
-                <a:latin typeface="Calibri"/>
-              </a:rPr>
-              <a:t>08  ·  Correlation analysis</a:t>
-            </a:r>
-          </a:p>
-          <a:p>
-            <a:pPr algn="l">
-              <a:lnSpc>
-                <a:spcPct val="135000"/>
-              </a:lnSpc>
-              <a:spcAft>
-                <a:spcPts val="800"/>
-              </a:spcAft>
-            </a:pPr>
-            <a:r>
-              <a:rPr sz="1300" b="1">
-                <a:solidFill>
-                  <a:srgbClr val="F59E0B"/>
-                </a:solidFill>
-                <a:latin typeface="Calibri"/>
-              </a:rPr>
-              <a:t>·  </a:t>
-            </a:r>
-            <a:r>
-              <a:rPr sz="1300">
-                <a:solidFill>
-                  <a:srgbClr val="1E293B"/>
-                </a:solidFill>
-                <a:latin typeface="Calibri"/>
-              </a:rPr>
-              <a:t>09  ·  Train / test split</a:t>
+              <a:defRPr sz="1800"/>
+            </a:pPr>
+            <a:r>
+              <a:t>What we will cover today (9 sections)</a:t>
+            </a:r>
+          </a:p>
+          <a:p>
+            <a:pPr>
+              <a:defRPr sz="1300"/>
+            </a:pPr>
+            <a:r>
+              <a:t>·  01 · Introduction &amp; Problem</a:t>
+            </a:r>
+          </a:p>
+          <a:p>
+            <a:pPr>
+              <a:defRPr sz="1300"/>
+            </a:pPr>
+            <a:r>
+              <a:t>·  02 · Dataset Overview (with missing values)</a:t>
+            </a:r>
+          </a:p>
+          <a:p>
+            <a:pPr>
+              <a:defRPr sz="1300"/>
+            </a:pPr>
+            <a:r>
+              <a:t>·  03 · Target &amp; Features</a:t>
+            </a:r>
+          </a:p>
+          <a:p>
+            <a:pPr>
+              <a:defRPr sz="1300"/>
+            </a:pPr>
+            <a:r>
+              <a:t>·  04 · Methodology &amp; Workflow</a:t>
+            </a:r>
+          </a:p>
+          <a:p>
+            <a:pPr>
+              <a:defRPr sz="1300"/>
+            </a:pPr>
+            <a:r>
+              <a:t>·  05 · Data Cleaning (duplicates + 350 missing)</a:t>
+            </a:r>
+          </a:p>
+          <a:p>
+            <a:pPr>
+              <a:defRPr sz="1300"/>
+            </a:pPr>
+            <a:r>
+              <a:t>·  06 · EDA &amp; Correlation</a:t>
+            </a:r>
+          </a:p>
+          <a:p>
+            <a:pPr>
+              <a:defRPr sz="1300"/>
+            </a:pPr>
+            <a:r>
+              <a:t>·  07 · Train/Test Split + 4 Classifiers</a:t>
+            </a:r>
+          </a:p>
+          <a:p>
+            <a:pPr>
+              <a:defRPr sz="1300"/>
+            </a:pPr>
+            <a:r>
+              <a:t>·  08 · Random Forest Results</a:t>
+            </a:r>
+          </a:p>
+          <a:p>
+            <a:pPr>
+              <a:defRPr sz="1300"/>
+            </a:pPr>
+            <a:r>
+              <a:t>·  09 · Insights, Deployment &amp; Conclusion</a:t>
             </a:r>
           </a:p>
         </p:txBody>
@@ -19083,6 +19276,41 @@
           </a:p>
         </p:txBody>
       </p:sp>
+      <p:sp>
+        <p:nvSpPr>
+          <p:cNvPr id="24" name="TextBox 23"/>
+          <p:cNvSpPr txBox="1"/>
+          <p:nvPr/>
+        </p:nvSpPr>
+        <p:spPr>
+          <a:xfrm>
+            <a:off x="457200" y="5303520"/>
+            <a:ext cx="10972800" cy="1097280"/>
+          </a:xfrm>
+          <a:prstGeom prst="rect">
+            <a:avLst/>
+          </a:prstGeom>
+          <a:noFill/>
+        </p:spPr>
+        <p:txBody>
+          <a:bodyPr wrap="none">
+            <a:spAutoFit/>
+          </a:bodyPr>
+          <a:lstStyle/>
+          <a:p>
+            <a:pPr>
+              <a:defRPr sz="1400">
+                <a:solidFill>
+                  <a:srgbClr val="0F766E"/>
+                </a:solidFill>
+              </a:defRPr>
+            </a:pPr>
+            <a:r>
+              <a:t>■ Missing values: 350 injected (~0.5%) for realism (as requested) → filled with median</a:t>
+            </a:r>
+          </a:p>
+        </p:txBody>
+      </p:sp>
     </p:spTree>
   </p:cSld>
   <p:clrMapOvr>
@@ -22352,45 +22580,6 @@
       </p:sp>
       <p:sp>
         <p:nvSpPr>
-          <p:cNvPr id="9" name="TextBox 8"/>
-          <p:cNvSpPr txBox="1"/>
-          <p:nvPr/>
-        </p:nvSpPr>
-        <p:spPr>
-          <a:xfrm>
-            <a:off x="640080" y="1920239"/>
-            <a:ext cx="1828800" cy="365760"/>
-          </a:xfrm>
-          <a:prstGeom prst="rect">
-            <a:avLst/>
-          </a:prstGeom>
-          <a:noFill/>
-        </p:spPr>
-        <p:txBody>
-          <a:bodyPr wrap="square" lIns="0" rIns="0" tIns="0" bIns="0" anchor="t">
-            <a:spAutoFit/>
-          </a:bodyPr>
-          <a:lstStyle/>
-          <a:p>
-            <a:pPr algn="ctr">
-              <a:lnSpc>
-                <a:spcPct val="115000"/>
-              </a:lnSpc>
-            </a:pPr>
-            <a:r>
-              <a:rPr sz="1300" b="1">
-                <a:solidFill>
-                  <a:srgbClr val="FFFFFF"/>
-                </a:solidFill>
-                <a:latin typeface="Calibri"/>
-              </a:rPr>
-              <a:t>INPUT</a:t>
-            </a:r>
-          </a:p>
-        </p:txBody>
-      </p:sp>
-      <p:sp>
-        <p:nvSpPr>
           <p:cNvPr id="10" name="Rectangle 9"/>
           <p:cNvSpPr/>
           <p:nvPr/>
@@ -22559,45 +22748,6 @@
       </p:sp>
       <p:sp>
         <p:nvSpPr>
-          <p:cNvPr id="14" name="TextBox 13"/>
-          <p:cNvSpPr txBox="1"/>
-          <p:nvPr/>
-        </p:nvSpPr>
-        <p:spPr>
-          <a:xfrm>
-            <a:off x="640080" y="3429000"/>
-            <a:ext cx="1828800" cy="365760"/>
-          </a:xfrm>
-          <a:prstGeom prst="rect">
-            <a:avLst/>
-          </a:prstGeom>
-          <a:noFill/>
-        </p:spPr>
-        <p:txBody>
-          <a:bodyPr wrap="square" lIns="0" rIns="0" tIns="0" bIns="0" anchor="t">
-            <a:spAutoFit/>
-          </a:bodyPr>
-          <a:lstStyle/>
-          <a:p>
-            <a:pPr algn="ctr">
-              <a:lnSpc>
-                <a:spcPct val="115000"/>
-              </a:lnSpc>
-            </a:pPr>
-            <a:r>
-              <a:rPr sz="1300" b="1">
-                <a:solidFill>
-                  <a:srgbClr val="FFFFFF"/>
-                </a:solidFill>
-                <a:latin typeface="Calibri"/>
-              </a:rPr>
-              <a:t>METHODOLOGY</a:t>
-            </a:r>
-          </a:p>
-        </p:txBody>
-      </p:sp>
-      <p:sp>
-        <p:nvSpPr>
           <p:cNvPr id="15" name="Rounded Rectangle 14"/>
           <p:cNvSpPr/>
           <p:nvPr/>
@@ -22934,61 +23084,6 @@
       </p:sp>
       <p:sp>
         <p:nvSpPr>
-          <p:cNvPr id="22" name="TextBox 21"/>
-          <p:cNvSpPr txBox="1"/>
-          <p:nvPr/>
-        </p:nvSpPr>
-        <p:spPr>
-          <a:xfrm>
-            <a:off x="4160520" y="4023360"/>
-            <a:ext cx="1691640" cy="594360"/>
-          </a:xfrm>
-          <a:prstGeom prst="rect">
-            <a:avLst/>
-          </a:prstGeom>
-          <a:noFill/>
-        </p:spPr>
-        <p:txBody>
-          <a:bodyPr wrap="square" lIns="0" rIns="0" tIns="0" bIns="0" anchor="t">
-            <a:spAutoFit/>
-          </a:bodyPr>
-          <a:lstStyle/>
-          <a:p>
-            <a:pPr algn="l">
-              <a:lnSpc>
-                <a:spcPct val="105000"/>
-              </a:lnSpc>
-            </a:pPr>
-            <a:r>
-              <a:rPr sz="1200" b="1">
-                <a:solidFill>
-                  <a:srgbClr val="1E293B"/>
-                </a:solidFill>
-                <a:latin typeface="Calibri"/>
-              </a:rPr>
-              <a:t>EDA &amp;</a:t>
-            </a:r>
-          </a:p>
-          <a:p>
-            <a:pPr algn="l">
-              <a:lnSpc>
-                <a:spcPct val="105000"/>
-              </a:lnSpc>
-            </a:pPr>
-            <a:r>
-              <a:rPr sz="1200" b="1">
-                <a:solidFill>
-                  <a:srgbClr val="1E293B"/>
-                </a:solidFill>
-                <a:latin typeface="Calibri"/>
-              </a:rPr>
-              <a:t>Correlation</a:t>
-            </a:r>
-          </a:p>
-        </p:txBody>
-      </p:sp>
-      <p:sp>
-        <p:nvSpPr>
           <p:cNvPr id="23" name="TextBox 22"/>
           <p:cNvSpPr txBox="1"/>
           <p:nvPr/>
@@ -23171,61 +23266,6 @@
       </p:sp>
       <p:sp>
         <p:nvSpPr>
-          <p:cNvPr id="27" name="TextBox 26"/>
-          <p:cNvSpPr txBox="1"/>
-          <p:nvPr/>
-        </p:nvSpPr>
-        <p:spPr>
-          <a:xfrm>
-            <a:off x="7040880" y="4023360"/>
-            <a:ext cx="1691640" cy="594360"/>
-          </a:xfrm>
-          <a:prstGeom prst="rect">
-            <a:avLst/>
-          </a:prstGeom>
-          <a:noFill/>
-        </p:spPr>
-        <p:txBody>
-          <a:bodyPr wrap="square" lIns="0" rIns="0" tIns="0" bIns="0" anchor="t">
-            <a:spAutoFit/>
-          </a:bodyPr>
-          <a:lstStyle/>
-          <a:p>
-            <a:pPr algn="l">
-              <a:lnSpc>
-                <a:spcPct val="105000"/>
-              </a:lnSpc>
-            </a:pPr>
-            <a:r>
-              <a:rPr sz="1200" b="1">
-                <a:solidFill>
-                  <a:srgbClr val="1E293B"/>
-                </a:solidFill>
-                <a:latin typeface="Calibri"/>
-              </a:rPr>
-              <a:t>Train / Test</a:t>
-            </a:r>
-          </a:p>
-          <a:p>
-            <a:pPr algn="l">
-              <a:lnSpc>
-                <a:spcPct val="105000"/>
-              </a:lnSpc>
-            </a:pPr>
-            <a:r>
-              <a:rPr sz="1200" b="1">
-                <a:solidFill>
-                  <a:srgbClr val="1E293B"/>
-                </a:solidFill>
-                <a:latin typeface="Calibri"/>
-              </a:rPr>
-              <a:t>Split</a:t>
-            </a:r>
-          </a:p>
-        </p:txBody>
-      </p:sp>
-      <p:sp>
-        <p:nvSpPr>
           <p:cNvPr id="28" name="TextBox 27"/>
           <p:cNvSpPr txBox="1"/>
           <p:nvPr/>
@@ -23546,45 +23586,6 @@
       </p:sp>
       <p:sp>
         <p:nvSpPr>
-          <p:cNvPr id="35" name="TextBox 34"/>
-          <p:cNvSpPr txBox="1"/>
-          <p:nvPr/>
-        </p:nvSpPr>
-        <p:spPr>
-          <a:xfrm>
-            <a:off x="640080" y="5212080"/>
-            <a:ext cx="1828800" cy="365760"/>
-          </a:xfrm>
-          <a:prstGeom prst="rect">
-            <a:avLst/>
-          </a:prstGeom>
-          <a:noFill/>
-        </p:spPr>
-        <p:txBody>
-          <a:bodyPr wrap="square" lIns="0" rIns="0" tIns="0" bIns="0" anchor="t">
-            <a:spAutoFit/>
-          </a:bodyPr>
-          <a:lstStyle/>
-          <a:p>
-            <a:pPr algn="ctr">
-              <a:lnSpc>
-                <a:spcPct val="115000"/>
-              </a:lnSpc>
-            </a:pPr>
-            <a:r>
-              <a:rPr sz="1300" b="1">
-                <a:solidFill>
-                  <a:srgbClr val="FFFFFF"/>
-                </a:solidFill>
-                <a:latin typeface="Calibri"/>
-              </a:rPr>
-              <a:t>OUTPUT</a:t>
-            </a:r>
-          </a:p>
-        </p:txBody>
-      </p:sp>
-      <p:sp>
-        <p:nvSpPr>
           <p:cNvPr id="36" name="Rectangle 35"/>
           <p:cNvSpPr/>
           <p:nvPr/>
@@ -23629,45 +23630,6 @@
       </p:sp>
       <p:sp>
         <p:nvSpPr>
-          <p:cNvPr id="37" name="TextBox 36"/>
-          <p:cNvSpPr txBox="1"/>
-          <p:nvPr/>
-        </p:nvSpPr>
-        <p:spPr>
-          <a:xfrm>
-            <a:off x="640080" y="5715000"/>
-            <a:ext cx="3520440" cy="237744"/>
-          </a:xfrm>
-          <a:prstGeom prst="rect">
-            <a:avLst/>
-          </a:prstGeom>
-          <a:noFill/>
-        </p:spPr>
-        <p:txBody>
-          <a:bodyPr wrap="square" lIns="0" rIns="0" tIns="0" bIns="0" anchor="t">
-            <a:spAutoFit/>
-          </a:bodyPr>
-          <a:lstStyle/>
-          <a:p>
-            <a:pPr algn="ctr">
-              <a:lnSpc>
-                <a:spcPct val="115000"/>
-              </a:lnSpc>
-            </a:pPr>
-            <a:r>
-              <a:rPr sz="1000" b="1">
-                <a:solidFill>
-                  <a:srgbClr val="F59E0B"/>
-                </a:solidFill>
-                <a:latin typeface="Calibri"/>
-              </a:rPr>
-              <a:t>ACCURACY</a:t>
-            </a:r>
-          </a:p>
-        </p:txBody>
-      </p:sp>
-      <p:sp>
-        <p:nvSpPr>
           <p:cNvPr id="38" name="TextBox 37"/>
           <p:cNvSpPr txBox="1"/>
           <p:nvPr/>
@@ -23751,45 +23713,6 @@
       </p:sp>
       <p:sp>
         <p:nvSpPr>
-          <p:cNvPr id="40" name="TextBox 39"/>
-          <p:cNvSpPr txBox="1"/>
-          <p:nvPr/>
-        </p:nvSpPr>
-        <p:spPr>
-          <a:xfrm>
-            <a:off x="4366260" y="5715000"/>
-            <a:ext cx="3520440" cy="237744"/>
-          </a:xfrm>
-          <a:prstGeom prst="rect">
-            <a:avLst/>
-          </a:prstGeom>
-          <a:noFill/>
-        </p:spPr>
-        <p:txBody>
-          <a:bodyPr wrap="square" lIns="0" rIns="0" tIns="0" bIns="0" anchor="t">
-            <a:spAutoFit/>
-          </a:bodyPr>
-          <a:lstStyle/>
-          <a:p>
-            <a:pPr algn="ctr">
-              <a:lnSpc>
-                <a:spcPct val="115000"/>
-              </a:lnSpc>
-            </a:pPr>
-            <a:r>
-              <a:rPr sz="1000" b="1">
-                <a:solidFill>
-                  <a:srgbClr val="F59E0B"/>
-                </a:solidFill>
-                <a:latin typeface="Calibri"/>
-              </a:rPr>
-              <a:t>F1 SCORE</a:t>
-            </a:r>
-          </a:p>
-        </p:txBody>
-      </p:sp>
-      <p:sp>
-        <p:nvSpPr>
           <p:cNvPr id="41" name="TextBox 40"/>
           <p:cNvSpPr txBox="1"/>
           <p:nvPr/>
@@ -23873,45 +23796,6 @@
       </p:sp>
       <p:sp>
         <p:nvSpPr>
-          <p:cNvPr id="43" name="TextBox 42"/>
-          <p:cNvSpPr txBox="1"/>
-          <p:nvPr/>
-        </p:nvSpPr>
-        <p:spPr>
-          <a:xfrm>
-            <a:off x="8092440" y="5715000"/>
-            <a:ext cx="3520440" cy="237744"/>
-          </a:xfrm>
-          <a:prstGeom prst="rect">
-            <a:avLst/>
-          </a:prstGeom>
-          <a:noFill/>
-        </p:spPr>
-        <p:txBody>
-          <a:bodyPr wrap="square" lIns="0" rIns="0" tIns="0" bIns="0" anchor="t">
-            <a:spAutoFit/>
-          </a:bodyPr>
-          <a:lstStyle/>
-          <a:p>
-            <a:pPr algn="ctr">
-              <a:lnSpc>
-                <a:spcPct val="115000"/>
-              </a:lnSpc>
-            </a:pPr>
-            <a:r>
-              <a:rPr sz="1000" b="1">
-                <a:solidFill>
-                  <a:srgbClr val="F59E0B"/>
-                </a:solidFill>
-                <a:latin typeface="Calibri"/>
-              </a:rPr>
-              <a:t>RECALL</a:t>
-            </a:r>
-          </a:p>
-        </p:txBody>
-      </p:sp>
-      <p:sp>
-        <p:nvSpPr>
           <p:cNvPr id="44" name="TextBox 43"/>
           <p:cNvSpPr txBox="1"/>
           <p:nvPr/>
@@ -23945,6 +23829,65 @@
                 <a:latin typeface="Calibri"/>
               </a:rPr>
               <a:t>0.794</a:t>
+            </a:r>
+          </a:p>
+        </p:txBody>
+      </p:sp>
+      <p:pic>
+        <p:nvPicPr>
+          <p:cNvPr id="45" name="Picture 44" descr="block_diagram_ppt_ready.png"/>
+          <p:cNvPicPr>
+            <a:picLocks noChangeAspect="1"/>
+          </p:cNvPicPr>
+          <p:nvPr/>
+        </p:nvPicPr>
+        <p:blipFill>
+          <a:blip r:embed="rId3"/>
+          <a:stretch>
+            <a:fillRect/>
+          </a:stretch>
+        </p:blipFill>
+        <p:spPr>
+          <a:xfrm>
+            <a:off x="137160" y="1005840"/>
+            <a:ext cx="11914632" cy="6317407"/>
+          </a:xfrm>
+          <a:prstGeom prst="rect">
+            <a:avLst/>
+          </a:prstGeom>
+        </p:spPr>
+      </p:pic>
+      <p:sp>
+        <p:nvSpPr>
+          <p:cNvPr id="46" name="TextBox 45"/>
+          <p:cNvSpPr txBox="1"/>
+          <p:nvPr/>
+        </p:nvSpPr>
+        <p:spPr>
+          <a:xfrm>
+            <a:off x="274320" y="6263640"/>
+            <a:ext cx="11612880" cy="502920"/>
+          </a:xfrm>
+          <a:prstGeom prst="rect">
+            <a:avLst/>
+          </a:prstGeom>
+          <a:noFill/>
+        </p:spPr>
+        <p:txBody>
+          <a:bodyPr wrap="none">
+            <a:spAutoFit/>
+          </a:bodyPr>
+          <a:lstStyle/>
+          <a:p>
+            <a:pPr>
+              <a:defRPr sz="1100">
+                <a:solidFill>
+                  <a:srgbClr val="475569"/>
+                </a:solidFill>
+              </a:defRPr>
+            </a:pPr>
+            <a:r>
+              <a:t>Note: Full details in block diagram above. 350 missing values injected for realism (see next slides). Train/test split done before any modeling.</a:t>
             </a:r>
           </a:p>
         </p:txBody>
@@ -24242,22 +24185,7 @@
               </a:spcAft>
             </a:pPr>
             <a:r>
-              <a:rPr sz="1400" b="1">
-                <a:solidFill>
-                  <a:srgbClr val="F59E0B"/>
-                </a:solidFill>
-                <a:latin typeface="Calibri"/>
-              </a:rPr>
-              <a:t>■  </a:t>
-            </a:r>
-            <a:r>
-              <a:rPr sz="1400">
-                <a:solidFill>
-                  <a:srgbClr val="475569"/>
-                </a:solidFill>
-                <a:latin typeface="Calibri"/>
-              </a:rPr>
-              <a:t>Checked for missing values  →  found 0  ✓</a:t>
+              <a:t>■ Checked for missing values → 0 originally, then 350 injected (~0.5%) for realism</a:t>
             </a:r>
           </a:p>
           <a:p>
@@ -24270,22 +24198,7 @@
               </a:spcAft>
             </a:pPr>
             <a:r>
-              <a:rPr sz="1400" b="1">
-                <a:solidFill>
-                  <a:srgbClr val="F59E0B"/>
-                </a:solidFill>
-                <a:latin typeface="Calibri"/>
-              </a:rPr>
-              <a:t>■  </a:t>
-            </a:r>
-            <a:r>
-              <a:rPr sz="1400">
-                <a:solidFill>
-                  <a:srgbClr val="475569"/>
-                </a:solidFill>
-                <a:latin typeface="Calibri"/>
-              </a:rPr>
-              <a:t>Removed duplicate rows  →  1 636 dropped</a:t>
+              <a:t>■ Removed duplicate rows → 1,636 dropped</a:t>
             </a:r>
           </a:p>
           <a:p>
@@ -24298,22 +24211,7 @@
               </a:spcAft>
             </a:pPr>
             <a:r>
-              <a:rPr sz="1400" b="1">
-                <a:solidFill>
-                  <a:srgbClr val="F59E0B"/>
-                </a:solidFill>
-                <a:latin typeface="Calibri"/>
-              </a:rPr>
-              <a:t>■  </a:t>
-            </a:r>
-            <a:r>
-              <a:rPr sz="1400">
-                <a:solidFill>
-                  <a:srgbClr val="475569"/>
-                </a:solidFill>
-                <a:latin typeface="Calibri"/>
-              </a:rPr>
-              <a:t>Final shape: 69 057 rows × 22 columns</a:t>
+              <a:t>■ Final shape: 69,057 rows × 22 columns</a:t>
             </a:r>
           </a:p>
           <a:p>
@@ -24689,6 +24587,41 @@
                 <a:latin typeface="Calibri"/>
               </a:rPr>
               <a:t>0  →  0  ✓ already clean</a:t>
+            </a:r>
+          </a:p>
+        </p:txBody>
+      </p:sp>
+      <p:sp>
+        <p:nvSpPr>
+          <p:cNvPr id="17" name="TextBox 16"/>
+          <p:cNvSpPr txBox="1"/>
+          <p:nvPr/>
+        </p:nvSpPr>
+        <p:spPr>
+          <a:xfrm>
+            <a:off x="457200" y="5760720"/>
+            <a:ext cx="10972800" cy="731520"/>
+          </a:xfrm>
+          <a:prstGeom prst="rect">
+            <a:avLst/>
+          </a:prstGeom>
+          <a:noFill/>
+        </p:spPr>
+        <p:txBody>
+          <a:bodyPr wrap="none">
+            <a:spAutoFit/>
+          </a:bodyPr>
+          <a:lstStyle/>
+          <a:p>
+            <a:pPr>
+              <a:defRPr sz="1200">
+                <a:solidFill>
+                  <a:srgbClr val="0F766E"/>
+                </a:solidFill>
+              </a:defRPr>
+            </a:pPr>
+            <a:r>
+              <a:t>Note: 350 missing values were intentionally added (per supervisor request) then imputed with column median. See Jupyter for exact code.</a:t>
             </a:r>
           </a:p>
         </p:txBody>

--- a/presentation/Diabetes_Final_Presentation.pptx
+++ b/presentation/Diabetes_Final_Presentation.pptx
@@ -4,27 +4,30 @@
   <p:sldMasterIdLst>
     <p:sldMasterId id="2147483648" r:id="rId1"/>
   </p:sldMasterIdLst>
+  <p:notesMasterIdLst>
+    <p:notesMasterId r:id="rId20"/>
+  </p:notesMasterIdLst>
   <p:sldIdLst>
-    <p:sldId id="256" r:id="rId7"/>
-    <p:sldId id="257" r:id="rId9"/>
-    <p:sldId id="258" r:id="rId10"/>
-    <p:sldId id="259" r:id="rId11"/>
-    <p:sldId id="260" r:id="rId12"/>
-    <p:sldId id="261" r:id="rId13"/>
-    <p:sldId id="262" r:id="rId14"/>
-    <p:sldId id="263" r:id="rId15"/>
-    <p:sldId id="264" r:id="rId16"/>
-    <p:sldId id="265" r:id="rId17"/>
-    <p:sldId id="266" r:id="rId18"/>
-    <p:sldId id="267" r:id="rId19"/>
-    <p:sldId id="268" r:id="rId20"/>
-    <p:sldId id="269" r:id="rId21"/>
-    <p:sldId id="270" r:id="rId22"/>
-    <p:sldId id="271" r:id="rId23"/>
-    <p:sldId id="272" r:id="rId24"/>
-    <p:sldId id="273" r:id="rId25"/>
+    <p:sldId id="274" r:id="rId2"/>
+    <p:sldId id="275" r:id="rId3"/>
+    <p:sldId id="258" r:id="rId4"/>
+    <p:sldId id="259" r:id="rId5"/>
+    <p:sldId id="260" r:id="rId6"/>
+    <p:sldId id="261" r:id="rId7"/>
+    <p:sldId id="262" r:id="rId8"/>
+    <p:sldId id="263" r:id="rId9"/>
+    <p:sldId id="264" r:id="rId10"/>
+    <p:sldId id="265" r:id="rId11"/>
+    <p:sldId id="266" r:id="rId12"/>
+    <p:sldId id="267" r:id="rId13"/>
+    <p:sldId id="268" r:id="rId14"/>
+    <p:sldId id="269" r:id="rId15"/>
+    <p:sldId id="270" r:id="rId16"/>
+    <p:sldId id="271" r:id="rId17"/>
+    <p:sldId id="272" r:id="rId18"/>
+    <p:sldId id="273" r:id="rId19"/>
   </p:sldIdLst>
-  <p:sldSz cx="12191695" cy="6858000" type="screen4x3"/>
+  <p:sldSz cx="12192000" cy="6858000"/>
   <p:notesSz cx="6858000" cy="9144000"/>
   <p:defaultTextStyle>
     <a:defPPr>
@@ -121,11 +124,27 @@
       </a:defRPr>
     </a:lvl9pPr>
   </p:defaultTextStyle>
+  <p:extLst>
+    <p:ext uri="{EFAFB233-063F-42B5-8137-9DF3F51BA10A}">
+      <p15:sldGuideLst xmlns:p15="http://schemas.microsoft.com/office/powerpoint/2012/main">
+        <p15:guide id="1" orient="horz" pos="2160">
+          <p15:clr>
+            <a:srgbClr val="A4A3A4"/>
+          </p15:clr>
+        </p15:guide>
+        <p15:guide id="2" pos="2880">
+          <p15:clr>
+            <a:srgbClr val="A4A3A4"/>
+          </p15:clr>
+        </p15:guide>
+      </p15:sldGuideLst>
+    </p:ext>
+  </p:extLst>
 </p:presentation>
 </file>
 
 <file path=ppt/notesMasters/notesMaster1.xml><?xml version="1.0" encoding="utf-8"?>
-<p:notesMaster xmlns:a="http://schemas.openxmlformats.org/drawingml/2006/main" xmlns:p="http://schemas.openxmlformats.org/presentationml/2006/main" xmlns:r="http://schemas.openxmlformats.org/officeDocument/2006/relationships">
+<p:notesMaster xmlns:a="http://schemas.openxmlformats.org/drawingml/2006/main" xmlns:r="http://schemas.openxmlformats.org/officeDocument/2006/relationships" xmlns:p="http://schemas.openxmlformats.org/presentationml/2006/main">
   <p:cSld>
     <p:bg>
       <p:bgRef idx="1001">
@@ -146,241 +165,16 @@
           <a:chExt cx="0" cy="0"/>
         </a:xfrm>
       </p:grpSpPr>
-      <p:sp>
-        <p:nvSpPr>
-          <p:cNvPr id="2" name="Header Placeholder 1"/>
-          <p:cNvSpPr>
-            <a:spLocks noGrp="1"/>
-          </p:cNvSpPr>
-          <p:nvPr>
-            <p:ph type="hdr" sz="quarter"/>
-          </p:nvPr>
-        </p:nvSpPr>
-        <p:spPr>
-          <a:xfrm>
-            <a:off x="0" y="0"/>
-            <a:ext cx="2971800" cy="457200"/>
-          </a:xfrm>
-          <a:prstGeom prst="rect">
-            <a:avLst/>
-          </a:prstGeom>
-        </p:spPr>
-        <p:txBody>
-          <a:bodyPr vert="horz" lIns="91440" tIns="45720" rIns="91440" bIns="45720" rtlCol="0"/>
-          <a:lstStyle>
-            <a:lvl1pPr algn="l">
-              <a:defRPr sz="1200"/>
-            </a:lvl1pPr>
-          </a:lstStyle>
-          <a:p>
-            <a:endParaRPr lang="en-US"/>
-          </a:p>
-        </p:txBody>
-      </p:sp>
-      <p:sp>
-        <p:nvSpPr>
-          <p:cNvPr id="3" name="Date Placeholder 2"/>
-          <p:cNvSpPr>
-            <a:spLocks noGrp="1"/>
-          </p:cNvSpPr>
-          <p:nvPr>
-            <p:ph type="dt" idx="1"/>
-          </p:nvPr>
-        </p:nvSpPr>
-        <p:spPr>
-          <a:xfrm>
-            <a:off x="3884613" y="0"/>
-            <a:ext cx="2971800" cy="457200"/>
-          </a:xfrm>
-          <a:prstGeom prst="rect">
-            <a:avLst/>
-          </a:prstGeom>
-        </p:spPr>
-        <p:txBody>
-          <a:bodyPr vert="horz" lIns="91440" tIns="45720" rIns="91440" bIns="45720" rtlCol="0"/>
-          <a:lstStyle>
-            <a:lvl1pPr algn="r">
-              <a:defRPr sz="1200"/>
-            </a:lvl1pPr>
-          </a:lstStyle>
-          <a:p>
-            <a:fld id="{0F89C1C7-3DCD-1040-A9CF-14679D8B5DDD}" type="datetimeFigureOut">
-              <a:rPr lang="en-US" smtClean="0"/>
-              <a:t>10/17/16</a:t>
-            </a:fld>
-            <a:endParaRPr lang="en-US"/>
-          </a:p>
-        </p:txBody>
-      </p:sp>
-      <p:sp>
-        <p:nvSpPr>
-          <p:cNvPr id="4" name="Slide Image Placeholder 3"/>
-          <p:cNvSpPr>
-            <a:spLocks noGrp="1" noRot="1" noChangeAspect="1"/>
-          </p:cNvSpPr>
-          <p:nvPr>
-            <p:ph type="sldImg" idx="2"/>
-          </p:nvPr>
-        </p:nvSpPr>
-        <p:spPr>
-          <a:xfrm>
-            <a:off x="1143000" y="685800"/>
-            <a:ext cx="4572000" cy="3429000"/>
-          </a:xfrm>
-          <a:prstGeom prst="rect">
-            <a:avLst/>
-          </a:prstGeom>
-          <a:noFill/>
-          <a:ln w="12700">
-            <a:solidFill>
-              <a:prstClr val="black"/>
-            </a:solidFill>
-          </a:ln>
-        </p:spPr>
-        <p:txBody>
-          <a:bodyPr vert="horz" lIns="91440" tIns="45720" rIns="91440" bIns="45720" rtlCol="0" anchor="ctr"/>
-          <a:lstStyle/>
-          <a:p>
-            <a:endParaRPr lang="en-US"/>
-          </a:p>
-        </p:txBody>
-      </p:sp>
-      <p:sp>
-        <p:nvSpPr>
-          <p:cNvPr id="5" name="Notes Placeholder 4"/>
-          <p:cNvSpPr>
-            <a:spLocks noGrp="1"/>
-          </p:cNvSpPr>
-          <p:nvPr>
-            <p:ph type="body" sz="quarter" idx="3"/>
-          </p:nvPr>
-        </p:nvSpPr>
-        <p:spPr>
-          <a:xfrm>
-            <a:off x="685800" y="4343400"/>
-            <a:ext cx="5486400" cy="4114800"/>
-          </a:xfrm>
-          <a:prstGeom prst="rect">
-            <a:avLst/>
-          </a:prstGeom>
-        </p:spPr>
-        <p:txBody>
-          <a:bodyPr vert="horz" lIns="91440" tIns="45720" rIns="91440" bIns="45720" rtlCol="0"/>
-          <a:lstStyle/>
-          <a:p>
-            <a:pPr lvl="0"/>
-            <a:r>
-              <a:rPr lang="en-US" smtClean="0"/>
-              <a:t>Click to edit Master text styles</a:t>
-            </a:r>
-          </a:p>
-          <a:p>
-            <a:pPr lvl="1"/>
-            <a:r>
-              <a:rPr lang="en-US" smtClean="0"/>
-              <a:t>Second level</a:t>
-            </a:r>
-          </a:p>
-          <a:p>
-            <a:pPr lvl="2"/>
-            <a:r>
-              <a:rPr lang="en-US" smtClean="0"/>
-              <a:t>Third level</a:t>
-            </a:r>
-          </a:p>
-          <a:p>
-            <a:pPr lvl="3"/>
-            <a:r>
-              <a:rPr lang="en-US" smtClean="0"/>
-              <a:t>Fourth level</a:t>
-            </a:r>
-          </a:p>
-          <a:p>
-            <a:pPr lvl="4"/>
-            <a:r>
-              <a:rPr lang="en-US" smtClean="0"/>
-              <a:t>Fifth level</a:t>
-            </a:r>
-            <a:endParaRPr lang="en-US"/>
-          </a:p>
-        </p:txBody>
-      </p:sp>
-      <p:sp>
-        <p:nvSpPr>
-          <p:cNvPr id="6" name="Footer Placeholder 5"/>
-          <p:cNvSpPr>
-            <a:spLocks noGrp="1"/>
-          </p:cNvSpPr>
-          <p:nvPr>
-            <p:ph type="ftr" sz="quarter" idx="4"/>
-          </p:nvPr>
-        </p:nvSpPr>
-        <p:spPr>
-          <a:xfrm>
-            <a:off x="0" y="8685213"/>
-            <a:ext cx="2971800" cy="457200"/>
-          </a:xfrm>
-          <a:prstGeom prst="rect">
-            <a:avLst/>
-          </a:prstGeom>
-        </p:spPr>
-        <p:txBody>
-          <a:bodyPr vert="horz" lIns="91440" tIns="45720" rIns="91440" bIns="45720" rtlCol="0" anchor="b"/>
-          <a:lstStyle>
-            <a:lvl1pPr algn="l">
-              <a:defRPr sz="1200"/>
-            </a:lvl1pPr>
-          </a:lstStyle>
-          <a:p>
-            <a:endParaRPr lang="en-US"/>
-          </a:p>
-        </p:txBody>
-      </p:sp>
-      <p:sp>
-        <p:nvSpPr>
-          <p:cNvPr id="7" name="Slide Number Placeholder 6"/>
-          <p:cNvSpPr>
-            <a:spLocks noGrp="1"/>
-          </p:cNvSpPr>
-          <p:nvPr>
-            <p:ph type="sldNum" sz="quarter" idx="5"/>
-          </p:nvPr>
-        </p:nvSpPr>
-        <p:spPr>
-          <a:xfrm>
-            <a:off x="3884613" y="8685213"/>
-            <a:ext cx="2971800" cy="457200"/>
-          </a:xfrm>
-          <a:prstGeom prst="rect">
-            <a:avLst/>
-          </a:prstGeom>
-        </p:spPr>
-        <p:txBody>
-          <a:bodyPr vert="horz" lIns="91440" tIns="45720" rIns="91440" bIns="45720" rtlCol="0" anchor="b"/>
-          <a:lstStyle>
-            <a:lvl1pPr algn="r">
-              <a:defRPr sz="1200"/>
-            </a:lvl1pPr>
-          </a:lstStyle>
-          <a:p>
-            <a:fld id="{BB5E49A5-4136-284D-997B-48E1D791AD67}" type="slidenum">
-              <a:rPr lang="en-US" smtClean="0"/>
-              <a:t>‹#›</a:t>
-            </a:fld>
-            <a:endParaRPr lang="en-US"/>
-          </a:p>
-        </p:txBody>
-      </p:sp>
     </p:spTree>
     <p:extLst>
       <p:ext uri="{BB962C8B-B14F-4D97-AF65-F5344CB8AC3E}">
-        <p14:creationId xmlns:p14="http://schemas.microsoft.com/office/powerpoint/2010/main" val="2623252185"/>
+        <p14:creationId xmlns:p14="http://schemas.microsoft.com/office/powerpoint/2010/main" val="1786301399"/>
       </p:ext>
     </p:extLst>
   </p:cSld>
   <p:clrMap bg1="lt1" tx1="dk1" bg2="lt2" tx2="dk2" accent1="accent1" accent2="accent2" accent3="accent3" accent4="accent4" accent5="accent5" accent6="accent6" hlink="hlink" folHlink="folHlink"/>
   <p:notesStyle>
-    <a:lvl1pPr marL="0" algn="l" defTabSz="457200" rtl="0" eaLnBrk="1" latinLnBrk="0" hangingPunct="1">
+    <a:lvl1pPr marL="0" algn="l" defTabSz="914400" rtl="0" eaLnBrk="1" latinLnBrk="0" hangingPunct="1">
       <a:defRPr sz="1200" kern="1200">
         <a:solidFill>
           <a:schemeClr val="tx1"/>
@@ -390,7 +184,7 @@
         <a:cs typeface="+mn-cs"/>
       </a:defRPr>
     </a:lvl1pPr>
-    <a:lvl2pPr marL="457200" algn="l" defTabSz="457200" rtl="0" eaLnBrk="1" latinLnBrk="0" hangingPunct="1">
+    <a:lvl2pPr marL="457200" algn="l" defTabSz="914400" rtl="0" eaLnBrk="1" latinLnBrk="0" hangingPunct="1">
       <a:defRPr sz="1200" kern="1200">
         <a:solidFill>
           <a:schemeClr val="tx1"/>
@@ -400,7 +194,7 @@
         <a:cs typeface="+mn-cs"/>
       </a:defRPr>
     </a:lvl2pPr>
-    <a:lvl3pPr marL="914400" algn="l" defTabSz="457200" rtl="0" eaLnBrk="1" latinLnBrk="0" hangingPunct="1">
+    <a:lvl3pPr marL="914400" algn="l" defTabSz="914400" rtl="0" eaLnBrk="1" latinLnBrk="0" hangingPunct="1">
       <a:defRPr sz="1200" kern="1200">
         <a:solidFill>
           <a:schemeClr val="tx1"/>
@@ -410,7 +204,7 @@
         <a:cs typeface="+mn-cs"/>
       </a:defRPr>
     </a:lvl3pPr>
-    <a:lvl4pPr marL="1371600" algn="l" defTabSz="457200" rtl="0" eaLnBrk="1" latinLnBrk="0" hangingPunct="1">
+    <a:lvl4pPr marL="1371600" algn="l" defTabSz="914400" rtl="0" eaLnBrk="1" latinLnBrk="0" hangingPunct="1">
       <a:defRPr sz="1200" kern="1200">
         <a:solidFill>
           <a:schemeClr val="tx1"/>
@@ -420,7 +214,7 @@
         <a:cs typeface="+mn-cs"/>
       </a:defRPr>
     </a:lvl4pPr>
-    <a:lvl5pPr marL="1828800" algn="l" defTabSz="457200" rtl="0" eaLnBrk="1" latinLnBrk="0" hangingPunct="1">
+    <a:lvl5pPr marL="1828800" algn="l" defTabSz="914400" rtl="0" eaLnBrk="1" latinLnBrk="0" hangingPunct="1">
       <a:defRPr sz="1200" kern="1200">
         <a:solidFill>
           <a:schemeClr val="tx1"/>
@@ -430,7 +224,7 @@
         <a:cs typeface="+mn-cs"/>
       </a:defRPr>
     </a:lvl5pPr>
-    <a:lvl6pPr marL="2286000" algn="l" defTabSz="457200" rtl="0" eaLnBrk="1" latinLnBrk="0" hangingPunct="1">
+    <a:lvl6pPr marL="2286000" algn="l" defTabSz="914400" rtl="0" eaLnBrk="1" latinLnBrk="0" hangingPunct="1">
       <a:defRPr sz="1200" kern="1200">
         <a:solidFill>
           <a:schemeClr val="tx1"/>
@@ -440,7 +234,7 @@
         <a:cs typeface="+mn-cs"/>
       </a:defRPr>
     </a:lvl6pPr>
-    <a:lvl7pPr marL="2743200" algn="l" defTabSz="457200" rtl="0" eaLnBrk="1" latinLnBrk="0" hangingPunct="1">
+    <a:lvl7pPr marL="2743200" algn="l" defTabSz="914400" rtl="0" eaLnBrk="1" latinLnBrk="0" hangingPunct="1">
       <a:defRPr sz="1200" kern="1200">
         <a:solidFill>
           <a:schemeClr val="tx1"/>
@@ -450,7 +244,7 @@
         <a:cs typeface="+mn-cs"/>
       </a:defRPr>
     </a:lvl7pPr>
-    <a:lvl8pPr marL="3200400" algn="l" defTabSz="457200" rtl="0" eaLnBrk="1" latinLnBrk="0" hangingPunct="1">
+    <a:lvl8pPr marL="3200400" algn="l" defTabSz="914400" rtl="0" eaLnBrk="1" latinLnBrk="0" hangingPunct="1">
       <a:defRPr sz="1200" kern="1200">
         <a:solidFill>
           <a:schemeClr val="tx1"/>
@@ -460,7 +254,7 @@
         <a:cs typeface="+mn-cs"/>
       </a:defRPr>
     </a:lvl8pPr>
-    <a:lvl9pPr marL="3657600" algn="l" defTabSz="457200" rtl="0" eaLnBrk="1" latinLnBrk="0" hangingPunct="1">
+    <a:lvl9pPr marL="3657600" algn="l" defTabSz="914400" rtl="0" eaLnBrk="1" latinLnBrk="0" hangingPunct="1">
       <a:defRPr sz="1200" kern="1200">
         <a:solidFill>
           <a:schemeClr val="tx1"/>
@@ -475,7 +269,7 @@
 </file>
 
 <file path=ppt/notesSlides/notesSlide1.xml><?xml version="1.0" encoding="utf-8"?>
-<p:notes xmlns:a="http://schemas.openxmlformats.org/drawingml/2006/main" xmlns:p="http://schemas.openxmlformats.org/presentationml/2006/main" xmlns:r="http://schemas.openxmlformats.org/officeDocument/2006/relationships">
+<p:notes xmlns:a="http://schemas.openxmlformats.org/drawingml/2006/main" xmlns:r="http://schemas.openxmlformats.org/officeDocument/2006/relationships" xmlns:p="http://schemas.openxmlformats.org/presentationml/2006/main">
   <p:cSld>
     <p:spTree>
       <p:nvGrpSpPr>
@@ -495,13 +289,20 @@
         <p:nvSpPr>
           <p:cNvPr id="2" name="Slide Image Placeholder 1"/>
           <p:cNvSpPr>
-            <a:spLocks noGrp="1"/>
+            <a:spLocks noGrp="1" noRot="1" noChangeAspect="1"/>
           </p:cNvSpPr>
           <p:nvPr>
             <p:ph type="sldImg" idx="2"/>
           </p:nvPr>
         </p:nvSpPr>
         <p:spPr/>
+        <p:txBody>
+          <a:bodyPr/>
+          <a:lstStyle/>
+          <a:p>
+            <a:endParaRPr lang="en-PK"/>
+          </a:p>
+        </p:txBody>
       </p:sp>
       <p:sp>
         <p:nvSpPr>
@@ -510,7 +311,7 @@
             <a:spLocks noGrp="1"/>
           </p:cNvSpPr>
           <p:nvPr>
-            <p:ph type="body" idx="3" sz="quarter"/>
+            <p:ph type="body" sz="quarter" idx="3"/>
           </p:nvPr>
         </p:nvSpPr>
         <p:spPr/>
@@ -519,7 +320,7 @@
           <a:lstStyle/>
           <a:p>
             <a:r>
-              <a:t>Greet the audience. State project title, team and instructor. Keep brief — 30 seconds. Move to the next slide. The two links at the bottom are clickable in slideshow mode.</a:t>
+              <a:t>Greet the audience. State project title, team and instructor. Keep brief — 30 seconds. Move to the next slide.</a:t>
             </a:r>
           </a:p>
         </p:txBody>
@@ -531,10 +332,17 @@
             <a:spLocks noGrp="1"/>
           </p:cNvSpPr>
           <p:nvPr>
-            <p:ph type="sldNum" idx="5" sz="quarter"/>
+            <p:ph type="sldNum" sz="quarter" idx="5"/>
           </p:nvPr>
         </p:nvSpPr>
         <p:spPr/>
+        <p:txBody>
+          <a:bodyPr/>
+          <a:lstStyle/>
+          <a:p>
+            <a:endParaRPr lang="en-PK"/>
+          </a:p>
+        </p:txBody>
       </p:sp>
     </p:spTree>
   </p:cSld>
@@ -545,7 +353,7 @@
 </file>
 
 <file path=ppt/notesSlides/notesSlide10.xml><?xml version="1.0" encoding="utf-8"?>
-<p:notes xmlns:a="http://schemas.openxmlformats.org/drawingml/2006/main" xmlns:p="http://schemas.openxmlformats.org/presentationml/2006/main" xmlns:r="http://schemas.openxmlformats.org/officeDocument/2006/relationships">
+<p:notes xmlns:a="http://schemas.openxmlformats.org/drawingml/2006/main" xmlns:r="http://schemas.openxmlformats.org/officeDocument/2006/relationships" xmlns:p="http://schemas.openxmlformats.org/presentationml/2006/main">
   <p:cSld>
     <p:spTree>
       <p:nvGrpSpPr>
@@ -565,7 +373,7 @@
         <p:nvSpPr>
           <p:cNvPr id="2" name="Slide Image Placeholder 1"/>
           <p:cNvSpPr>
-            <a:spLocks noGrp="1"/>
+            <a:spLocks noGrp="1" noRot="1" noChangeAspect="1"/>
           </p:cNvSpPr>
           <p:nvPr>
             <p:ph type="sldImg" idx="2"/>
@@ -580,7 +388,7 @@
             <a:spLocks noGrp="1"/>
           </p:cNvSpPr>
           <p:nvPr>
-            <p:ph type="body" idx="3" sz="quarter"/>
+            <p:ph type="body" sz="quarter" idx="3"/>
           </p:nvPr>
         </p:nvSpPr>
         <p:spPr/>
@@ -601,7 +409,7 @@
             <a:spLocks noGrp="1"/>
           </p:cNvSpPr>
           <p:nvPr>
-            <p:ph type="sldNum" idx="5" sz="quarter"/>
+            <p:ph type="sldNum" sz="quarter" idx="5"/>
           </p:nvPr>
         </p:nvSpPr>
         <p:spPr/>
@@ -615,7 +423,7 @@
 </file>
 
 <file path=ppt/notesSlides/notesSlide11.xml><?xml version="1.0" encoding="utf-8"?>
-<p:notes xmlns:a="http://schemas.openxmlformats.org/drawingml/2006/main" xmlns:p="http://schemas.openxmlformats.org/presentationml/2006/main" xmlns:r="http://schemas.openxmlformats.org/officeDocument/2006/relationships">
+<p:notes xmlns:a="http://schemas.openxmlformats.org/drawingml/2006/main" xmlns:r="http://schemas.openxmlformats.org/officeDocument/2006/relationships" xmlns:p="http://schemas.openxmlformats.org/presentationml/2006/main">
   <p:cSld>
     <p:spTree>
       <p:nvGrpSpPr>
@@ -635,7 +443,7 @@
         <p:nvSpPr>
           <p:cNvPr id="2" name="Slide Image Placeholder 1"/>
           <p:cNvSpPr>
-            <a:spLocks noGrp="1"/>
+            <a:spLocks noGrp="1" noRot="1" noChangeAspect="1"/>
           </p:cNvSpPr>
           <p:nvPr>
             <p:ph type="sldImg" idx="2"/>
@@ -650,7 +458,7 @@
             <a:spLocks noGrp="1"/>
           </p:cNvSpPr>
           <p:nvPr>
-            <p:ph type="body" idx="3" sz="quarter"/>
+            <p:ph type="body" sz="quarter" idx="3"/>
           </p:nvPr>
         </p:nvSpPr>
         <p:spPr/>
@@ -671,7 +479,7 @@
             <a:spLocks noGrp="1"/>
           </p:cNvSpPr>
           <p:nvPr>
-            <p:ph type="sldNum" idx="5" sz="quarter"/>
+            <p:ph type="sldNum" sz="quarter" idx="5"/>
           </p:nvPr>
         </p:nvSpPr>
         <p:spPr/>
@@ -685,7 +493,7 @@
 </file>
 
 <file path=ppt/notesSlides/notesSlide12.xml><?xml version="1.0" encoding="utf-8"?>
-<p:notes xmlns:a="http://schemas.openxmlformats.org/drawingml/2006/main" xmlns:p="http://schemas.openxmlformats.org/presentationml/2006/main" xmlns:r="http://schemas.openxmlformats.org/officeDocument/2006/relationships">
+<p:notes xmlns:a="http://schemas.openxmlformats.org/drawingml/2006/main" xmlns:r="http://schemas.openxmlformats.org/officeDocument/2006/relationships" xmlns:p="http://schemas.openxmlformats.org/presentationml/2006/main">
   <p:cSld>
     <p:spTree>
       <p:nvGrpSpPr>
@@ -705,7 +513,7 @@
         <p:nvSpPr>
           <p:cNvPr id="2" name="Slide Image Placeholder 1"/>
           <p:cNvSpPr>
-            <a:spLocks noGrp="1"/>
+            <a:spLocks noGrp="1" noRot="1" noChangeAspect="1"/>
           </p:cNvSpPr>
           <p:nvPr>
             <p:ph type="sldImg" idx="2"/>
@@ -720,7 +528,7 @@
             <a:spLocks noGrp="1"/>
           </p:cNvSpPr>
           <p:nvPr>
-            <p:ph type="body" idx="3" sz="quarter"/>
+            <p:ph type="body" sz="quarter" idx="3"/>
           </p:nvPr>
         </p:nvSpPr>
         <p:spPr/>
@@ -741,7 +549,7 @@
             <a:spLocks noGrp="1"/>
           </p:cNvSpPr>
           <p:nvPr>
-            <p:ph type="sldNum" idx="5" sz="quarter"/>
+            <p:ph type="sldNum" sz="quarter" idx="5"/>
           </p:nvPr>
         </p:nvSpPr>
         <p:spPr/>
@@ -755,7 +563,7 @@
 </file>
 
 <file path=ppt/notesSlides/notesSlide13.xml><?xml version="1.0" encoding="utf-8"?>
-<p:notes xmlns:a="http://schemas.openxmlformats.org/drawingml/2006/main" xmlns:p="http://schemas.openxmlformats.org/presentationml/2006/main" xmlns:r="http://schemas.openxmlformats.org/officeDocument/2006/relationships">
+<p:notes xmlns:a="http://schemas.openxmlformats.org/drawingml/2006/main" xmlns:r="http://schemas.openxmlformats.org/officeDocument/2006/relationships" xmlns:p="http://schemas.openxmlformats.org/presentationml/2006/main">
   <p:cSld>
     <p:spTree>
       <p:nvGrpSpPr>
@@ -775,7 +583,7 @@
         <p:nvSpPr>
           <p:cNvPr id="2" name="Slide Image Placeholder 1"/>
           <p:cNvSpPr>
-            <a:spLocks noGrp="1"/>
+            <a:spLocks noGrp="1" noRot="1" noChangeAspect="1"/>
           </p:cNvSpPr>
           <p:nvPr>
             <p:ph type="sldImg" idx="2"/>
@@ -790,7 +598,7 @@
             <a:spLocks noGrp="1"/>
           </p:cNvSpPr>
           <p:nvPr>
-            <p:ph type="body" idx="3" sz="quarter"/>
+            <p:ph type="body" sz="quarter" idx="3"/>
           </p:nvPr>
         </p:nvSpPr>
         <p:spPr/>
@@ -811,7 +619,7 @@
             <a:spLocks noGrp="1"/>
           </p:cNvSpPr>
           <p:nvPr>
-            <p:ph type="sldNum" idx="5" sz="quarter"/>
+            <p:ph type="sldNum" sz="quarter" idx="5"/>
           </p:nvPr>
         </p:nvSpPr>
         <p:spPr/>
@@ -825,7 +633,7 @@
 </file>
 
 <file path=ppt/notesSlides/notesSlide14.xml><?xml version="1.0" encoding="utf-8"?>
-<p:notes xmlns:a="http://schemas.openxmlformats.org/drawingml/2006/main" xmlns:p="http://schemas.openxmlformats.org/presentationml/2006/main" xmlns:r="http://schemas.openxmlformats.org/officeDocument/2006/relationships">
+<p:notes xmlns:a="http://schemas.openxmlformats.org/drawingml/2006/main" xmlns:r="http://schemas.openxmlformats.org/officeDocument/2006/relationships" xmlns:p="http://schemas.openxmlformats.org/presentationml/2006/main">
   <p:cSld>
     <p:spTree>
       <p:nvGrpSpPr>
@@ -845,7 +653,7 @@
         <p:nvSpPr>
           <p:cNvPr id="2" name="Slide Image Placeholder 1"/>
           <p:cNvSpPr>
-            <a:spLocks noGrp="1"/>
+            <a:spLocks noGrp="1" noRot="1" noChangeAspect="1"/>
           </p:cNvSpPr>
           <p:nvPr>
             <p:ph type="sldImg" idx="2"/>
@@ -860,7 +668,7 @@
             <a:spLocks noGrp="1"/>
           </p:cNvSpPr>
           <p:nvPr>
-            <p:ph type="body" idx="3" sz="quarter"/>
+            <p:ph type="body" sz="quarter" idx="3"/>
           </p:nvPr>
         </p:nvSpPr>
         <p:spPr/>
@@ -881,7 +689,7 @@
             <a:spLocks noGrp="1"/>
           </p:cNvSpPr>
           <p:nvPr>
-            <p:ph type="sldNum" idx="5" sz="quarter"/>
+            <p:ph type="sldNum" sz="quarter" idx="5"/>
           </p:nvPr>
         </p:nvSpPr>
         <p:spPr/>
@@ -895,7 +703,7 @@
 </file>
 
 <file path=ppt/notesSlides/notesSlide15.xml><?xml version="1.0" encoding="utf-8"?>
-<p:notes xmlns:a="http://schemas.openxmlformats.org/drawingml/2006/main" xmlns:p="http://schemas.openxmlformats.org/presentationml/2006/main" xmlns:r="http://schemas.openxmlformats.org/officeDocument/2006/relationships">
+<p:notes xmlns:a="http://schemas.openxmlformats.org/drawingml/2006/main" xmlns:r="http://schemas.openxmlformats.org/officeDocument/2006/relationships" xmlns:p="http://schemas.openxmlformats.org/presentationml/2006/main">
   <p:cSld>
     <p:spTree>
       <p:nvGrpSpPr>
@@ -915,7 +723,7 @@
         <p:nvSpPr>
           <p:cNvPr id="2" name="Slide Image Placeholder 1"/>
           <p:cNvSpPr>
-            <a:spLocks noGrp="1"/>
+            <a:spLocks noGrp="1" noRot="1" noChangeAspect="1"/>
           </p:cNvSpPr>
           <p:nvPr>
             <p:ph type="sldImg" idx="2"/>
@@ -930,7 +738,7 @@
             <a:spLocks noGrp="1"/>
           </p:cNvSpPr>
           <p:nvPr>
-            <p:ph type="body" idx="3" sz="quarter"/>
+            <p:ph type="body" sz="quarter" idx="3"/>
           </p:nvPr>
         </p:nvSpPr>
         <p:spPr/>
@@ -951,7 +759,7 @@
             <a:spLocks noGrp="1"/>
           </p:cNvSpPr>
           <p:nvPr>
-            <p:ph type="sldNum" idx="5" sz="quarter"/>
+            <p:ph type="sldNum" sz="quarter" idx="5"/>
           </p:nvPr>
         </p:nvSpPr>
         <p:spPr/>
@@ -965,7 +773,7 @@
 </file>
 
 <file path=ppt/notesSlides/notesSlide16.xml><?xml version="1.0" encoding="utf-8"?>
-<p:notes xmlns:a="http://schemas.openxmlformats.org/drawingml/2006/main" xmlns:p="http://schemas.openxmlformats.org/presentationml/2006/main" xmlns:r="http://schemas.openxmlformats.org/officeDocument/2006/relationships">
+<p:notes xmlns:a="http://schemas.openxmlformats.org/drawingml/2006/main" xmlns:r="http://schemas.openxmlformats.org/officeDocument/2006/relationships" xmlns:p="http://schemas.openxmlformats.org/presentationml/2006/main">
   <p:cSld>
     <p:spTree>
       <p:nvGrpSpPr>
@@ -985,7 +793,7 @@
         <p:nvSpPr>
           <p:cNvPr id="2" name="Slide Image Placeholder 1"/>
           <p:cNvSpPr>
-            <a:spLocks noGrp="1"/>
+            <a:spLocks noGrp="1" noRot="1" noChangeAspect="1"/>
           </p:cNvSpPr>
           <p:nvPr>
             <p:ph type="sldImg" idx="2"/>
@@ -1000,7 +808,7 @@
             <a:spLocks noGrp="1"/>
           </p:cNvSpPr>
           <p:nvPr>
-            <p:ph type="body" idx="3" sz="quarter"/>
+            <p:ph type="body" sz="quarter" idx="3"/>
           </p:nvPr>
         </p:nvSpPr>
         <p:spPr/>
@@ -1021,7 +829,7 @@
             <a:spLocks noGrp="1"/>
           </p:cNvSpPr>
           <p:nvPr>
-            <p:ph type="sldNum" idx="5" sz="quarter"/>
+            <p:ph type="sldNum" sz="quarter" idx="5"/>
           </p:nvPr>
         </p:nvSpPr>
         <p:spPr/>
@@ -1035,7 +843,7 @@
 </file>
 
 <file path=ppt/notesSlides/notesSlide17.xml><?xml version="1.0" encoding="utf-8"?>
-<p:notes xmlns:a="http://schemas.openxmlformats.org/drawingml/2006/main" xmlns:p="http://schemas.openxmlformats.org/presentationml/2006/main" xmlns:r="http://schemas.openxmlformats.org/officeDocument/2006/relationships">
+<p:notes xmlns:a="http://schemas.openxmlformats.org/drawingml/2006/main" xmlns:r="http://schemas.openxmlformats.org/officeDocument/2006/relationships" xmlns:p="http://schemas.openxmlformats.org/presentationml/2006/main">
   <p:cSld>
     <p:spTree>
       <p:nvGrpSpPr>
@@ -1055,7 +863,7 @@
         <p:nvSpPr>
           <p:cNvPr id="2" name="Slide Image Placeholder 1"/>
           <p:cNvSpPr>
-            <a:spLocks noGrp="1"/>
+            <a:spLocks noGrp="1" noRot="1" noChangeAspect="1"/>
           </p:cNvSpPr>
           <p:nvPr>
             <p:ph type="sldImg" idx="2"/>
@@ -1070,7 +878,7 @@
             <a:spLocks noGrp="1"/>
           </p:cNvSpPr>
           <p:nvPr>
-            <p:ph type="body" idx="3" sz="quarter"/>
+            <p:ph type="body" sz="quarter" idx="3"/>
           </p:nvPr>
         </p:nvSpPr>
         <p:spPr/>
@@ -1091,7 +899,7 @@
             <a:spLocks noGrp="1"/>
           </p:cNvSpPr>
           <p:nvPr>
-            <p:ph type="sldNum" idx="5" sz="quarter"/>
+            <p:ph type="sldNum" sz="quarter" idx="5"/>
           </p:nvPr>
         </p:nvSpPr>
         <p:spPr/>
@@ -1105,7 +913,7 @@
 </file>
 
 <file path=ppt/notesSlides/notesSlide18.xml><?xml version="1.0" encoding="utf-8"?>
-<p:notes xmlns:a="http://schemas.openxmlformats.org/drawingml/2006/main" xmlns:p="http://schemas.openxmlformats.org/presentationml/2006/main" xmlns:r="http://schemas.openxmlformats.org/officeDocument/2006/relationships">
+<p:notes xmlns:a="http://schemas.openxmlformats.org/drawingml/2006/main" xmlns:r="http://schemas.openxmlformats.org/officeDocument/2006/relationships" xmlns:p="http://schemas.openxmlformats.org/presentationml/2006/main">
   <p:cSld>
     <p:spTree>
       <p:nvGrpSpPr>
@@ -1125,7 +933,7 @@
         <p:nvSpPr>
           <p:cNvPr id="2" name="Slide Image Placeholder 1"/>
           <p:cNvSpPr>
-            <a:spLocks noGrp="1"/>
+            <a:spLocks noGrp="1" noRot="1" noChangeAspect="1"/>
           </p:cNvSpPr>
           <p:nvPr>
             <p:ph type="sldImg" idx="2"/>
@@ -1140,7 +948,7 @@
             <a:spLocks noGrp="1"/>
           </p:cNvSpPr>
           <p:nvPr>
-            <p:ph type="body" idx="3" sz="quarter"/>
+            <p:ph type="body" sz="quarter" idx="3"/>
           </p:nvPr>
         </p:nvSpPr>
         <p:spPr/>
@@ -1161,7 +969,7 @@
             <a:spLocks noGrp="1"/>
           </p:cNvSpPr>
           <p:nvPr>
-            <p:ph type="sldNum" idx="5" sz="quarter"/>
+            <p:ph type="sldNum" sz="quarter" idx="5"/>
           </p:nvPr>
         </p:nvSpPr>
         <p:spPr/>
@@ -1175,7 +983,7 @@
 </file>
 
 <file path=ppt/notesSlides/notesSlide2.xml><?xml version="1.0" encoding="utf-8"?>
-<p:notes xmlns:a="http://schemas.openxmlformats.org/drawingml/2006/main" xmlns:p="http://schemas.openxmlformats.org/presentationml/2006/main" xmlns:r="http://schemas.openxmlformats.org/officeDocument/2006/relationships">
+<p:notes xmlns:a="http://schemas.openxmlformats.org/drawingml/2006/main" xmlns:r="http://schemas.openxmlformats.org/officeDocument/2006/relationships" xmlns:p="http://schemas.openxmlformats.org/presentationml/2006/main">
   <p:cSld>
     <p:spTree>
       <p:nvGrpSpPr>
@@ -1195,13 +1003,20 @@
         <p:nvSpPr>
           <p:cNvPr id="2" name="Slide Image Placeholder 1"/>
           <p:cNvSpPr>
-            <a:spLocks noGrp="1"/>
+            <a:spLocks noGrp="1" noRot="1" noChangeAspect="1"/>
           </p:cNvSpPr>
           <p:nvPr>
             <p:ph type="sldImg" idx="2"/>
           </p:nvPr>
         </p:nvSpPr>
         <p:spPr/>
+        <p:txBody>
+          <a:bodyPr/>
+          <a:lstStyle/>
+          <a:p>
+            <a:endParaRPr lang="en-PK"/>
+          </a:p>
+        </p:txBody>
       </p:sp>
       <p:sp>
         <p:nvSpPr>
@@ -1210,7 +1025,7 @@
             <a:spLocks noGrp="1"/>
           </p:cNvSpPr>
           <p:nvPr>
-            <p:ph type="body" idx="3" sz="quarter"/>
+            <p:ph type="body" sz="quarter" idx="3"/>
           </p:nvPr>
         </p:nvSpPr>
         <p:spPr/>
@@ -1219,7 +1034,7 @@
           <a:lstStyle/>
           <a:p>
             <a:r>
-              <a:t>Walk through the outline in 30 seconds. We added an 'Our Model' slide early so the audience knows from the start which algorithm we used. The flow is: Problem → Data → Model → Method → Results → Demo → Conclusion.</a:t>
+              <a:t>Walk through the outline in 30 seconds. Tell the audience the talk is structured as Problem → Data → Method → Results → Demo → Conclusion.</a:t>
             </a:r>
           </a:p>
         </p:txBody>
@@ -1231,10 +1046,17 @@
             <a:spLocks noGrp="1"/>
           </p:cNvSpPr>
           <p:nvPr>
-            <p:ph type="sldNum" idx="5" sz="quarter"/>
+            <p:ph type="sldNum" sz="quarter" idx="5"/>
           </p:nvPr>
         </p:nvSpPr>
         <p:spPr/>
+        <p:txBody>
+          <a:bodyPr/>
+          <a:lstStyle/>
+          <a:p>
+            <a:endParaRPr lang="en-PK"/>
+          </a:p>
+        </p:txBody>
       </p:sp>
     </p:spTree>
   </p:cSld>
@@ -1245,7 +1067,7 @@
 </file>
 
 <file path=ppt/notesSlides/notesSlide3.xml><?xml version="1.0" encoding="utf-8"?>
-<p:notes xmlns:a="http://schemas.openxmlformats.org/drawingml/2006/main" xmlns:p="http://schemas.openxmlformats.org/presentationml/2006/main" xmlns:r="http://schemas.openxmlformats.org/officeDocument/2006/relationships">
+<p:notes xmlns:a="http://schemas.openxmlformats.org/drawingml/2006/main" xmlns:r="http://schemas.openxmlformats.org/officeDocument/2006/relationships" xmlns:p="http://schemas.openxmlformats.org/presentationml/2006/main">
   <p:cSld>
     <p:spTree>
       <p:nvGrpSpPr>
@@ -1265,7 +1087,7 @@
         <p:nvSpPr>
           <p:cNvPr id="2" name="Slide Image Placeholder 1"/>
           <p:cNvSpPr>
-            <a:spLocks noGrp="1"/>
+            <a:spLocks noGrp="1" noRot="1" noChangeAspect="1"/>
           </p:cNvSpPr>
           <p:nvPr>
             <p:ph type="sldImg" idx="2"/>
@@ -1280,7 +1102,7 @@
             <a:spLocks noGrp="1"/>
           </p:cNvSpPr>
           <p:nvPr>
-            <p:ph type="body" idx="3" sz="quarter"/>
+            <p:ph type="body" sz="quarter" idx="3"/>
           </p:nvPr>
         </p:nvSpPr>
         <p:spPr/>
@@ -1301,7 +1123,7 @@
             <a:spLocks noGrp="1"/>
           </p:cNvSpPr>
           <p:nvPr>
-            <p:ph type="sldNum" idx="5" sz="quarter"/>
+            <p:ph type="sldNum" sz="quarter" idx="5"/>
           </p:nvPr>
         </p:nvSpPr>
         <p:spPr/>
@@ -1315,7 +1137,7 @@
 </file>
 
 <file path=ppt/notesSlides/notesSlide4.xml><?xml version="1.0" encoding="utf-8"?>
-<p:notes xmlns:a="http://schemas.openxmlformats.org/drawingml/2006/main" xmlns:p="http://schemas.openxmlformats.org/presentationml/2006/main" xmlns:r="http://schemas.openxmlformats.org/officeDocument/2006/relationships">
+<p:notes xmlns:a="http://schemas.openxmlformats.org/drawingml/2006/main" xmlns:r="http://schemas.openxmlformats.org/officeDocument/2006/relationships" xmlns:p="http://schemas.openxmlformats.org/presentationml/2006/main">
   <p:cSld>
     <p:spTree>
       <p:nvGrpSpPr>
@@ -1335,7 +1157,7 @@
         <p:nvSpPr>
           <p:cNvPr id="2" name="Slide Image Placeholder 1"/>
           <p:cNvSpPr>
-            <a:spLocks noGrp="1"/>
+            <a:spLocks noGrp="1" noRot="1" noChangeAspect="1"/>
           </p:cNvSpPr>
           <p:nvPr>
             <p:ph type="sldImg" idx="2"/>
@@ -1350,7 +1172,7 @@
             <a:spLocks noGrp="1"/>
           </p:cNvSpPr>
           <p:nvPr>
-            <p:ph type="body" idx="3" sz="quarter"/>
+            <p:ph type="body" sz="quarter" idx="3"/>
           </p:nvPr>
         </p:nvSpPr>
         <p:spPr/>
@@ -1371,7 +1193,7 @@
             <a:spLocks noGrp="1"/>
           </p:cNvSpPr>
           <p:nvPr>
-            <p:ph type="sldNum" idx="5" sz="quarter"/>
+            <p:ph type="sldNum" sz="quarter" idx="5"/>
           </p:nvPr>
         </p:nvSpPr>
         <p:spPr/>
@@ -1385,7 +1207,7 @@
 </file>
 
 <file path=ppt/notesSlides/notesSlide5.xml><?xml version="1.0" encoding="utf-8"?>
-<p:notes xmlns:a="http://schemas.openxmlformats.org/drawingml/2006/main" xmlns:p="http://schemas.openxmlformats.org/presentationml/2006/main" xmlns:r="http://schemas.openxmlformats.org/officeDocument/2006/relationships">
+<p:notes xmlns:a="http://schemas.openxmlformats.org/drawingml/2006/main" xmlns:r="http://schemas.openxmlformats.org/officeDocument/2006/relationships" xmlns:p="http://schemas.openxmlformats.org/presentationml/2006/main">
   <p:cSld>
     <p:spTree>
       <p:nvGrpSpPr>
@@ -1405,7 +1227,7 @@
         <p:nvSpPr>
           <p:cNvPr id="2" name="Slide Image Placeholder 1"/>
           <p:cNvSpPr>
-            <a:spLocks noGrp="1"/>
+            <a:spLocks noGrp="1" noRot="1" noChangeAspect="1"/>
           </p:cNvSpPr>
           <p:nvPr>
             <p:ph type="sldImg" idx="2"/>
@@ -1420,7 +1242,7 @@
             <a:spLocks noGrp="1"/>
           </p:cNvSpPr>
           <p:nvPr>
-            <p:ph type="body" idx="3" sz="quarter"/>
+            <p:ph type="body" sz="quarter" idx="3"/>
           </p:nvPr>
         </p:nvSpPr>
         <p:spPr/>
@@ -1441,7 +1263,7 @@
             <a:spLocks noGrp="1"/>
           </p:cNvSpPr>
           <p:nvPr>
-            <p:ph type="sldNum" idx="5" sz="quarter"/>
+            <p:ph type="sldNum" sz="quarter" idx="5"/>
           </p:nvPr>
         </p:nvSpPr>
         <p:spPr/>
@@ -1455,7 +1277,7 @@
 </file>
 
 <file path=ppt/notesSlides/notesSlide6.xml><?xml version="1.0" encoding="utf-8"?>
-<p:notes xmlns:a="http://schemas.openxmlformats.org/drawingml/2006/main" xmlns:p="http://schemas.openxmlformats.org/presentationml/2006/main" xmlns:r="http://schemas.openxmlformats.org/officeDocument/2006/relationships">
+<p:notes xmlns:a="http://schemas.openxmlformats.org/drawingml/2006/main" xmlns:r="http://schemas.openxmlformats.org/officeDocument/2006/relationships" xmlns:p="http://schemas.openxmlformats.org/presentationml/2006/main">
   <p:cSld>
     <p:spTree>
       <p:nvGrpSpPr>
@@ -1475,7 +1297,7 @@
         <p:nvSpPr>
           <p:cNvPr id="2" name="Slide Image Placeholder 1"/>
           <p:cNvSpPr>
-            <a:spLocks noGrp="1"/>
+            <a:spLocks noGrp="1" noRot="1" noChangeAspect="1"/>
           </p:cNvSpPr>
           <p:nvPr>
             <p:ph type="sldImg" idx="2"/>
@@ -1490,7 +1312,7 @@
             <a:spLocks noGrp="1"/>
           </p:cNvSpPr>
           <p:nvPr>
-            <p:ph type="body" idx="3" sz="quarter"/>
+            <p:ph type="body" sz="quarter" idx="3"/>
           </p:nvPr>
         </p:nvSpPr>
         <p:spPr/>
@@ -1511,7 +1333,7 @@
             <a:spLocks noGrp="1"/>
           </p:cNvSpPr>
           <p:nvPr>
-            <p:ph type="sldNum" idx="5" sz="quarter"/>
+            <p:ph type="sldNum" sz="quarter" idx="5"/>
           </p:nvPr>
         </p:nvSpPr>
         <p:spPr/>
@@ -1525,7 +1347,7 @@
 </file>
 
 <file path=ppt/notesSlides/notesSlide7.xml><?xml version="1.0" encoding="utf-8"?>
-<p:notes xmlns:a="http://schemas.openxmlformats.org/drawingml/2006/main" xmlns:p="http://schemas.openxmlformats.org/presentationml/2006/main" xmlns:r="http://schemas.openxmlformats.org/officeDocument/2006/relationships">
+<p:notes xmlns:a="http://schemas.openxmlformats.org/drawingml/2006/main" xmlns:r="http://schemas.openxmlformats.org/officeDocument/2006/relationships" xmlns:p="http://schemas.openxmlformats.org/presentationml/2006/main">
   <p:cSld>
     <p:spTree>
       <p:nvGrpSpPr>
@@ -1545,7 +1367,7 @@
         <p:nvSpPr>
           <p:cNvPr id="2" name="Slide Image Placeholder 1"/>
           <p:cNvSpPr>
-            <a:spLocks noGrp="1"/>
+            <a:spLocks noGrp="1" noRot="1" noChangeAspect="1"/>
           </p:cNvSpPr>
           <p:nvPr>
             <p:ph type="sldImg" idx="2"/>
@@ -1560,7 +1382,7 @@
             <a:spLocks noGrp="1"/>
           </p:cNvSpPr>
           <p:nvPr>
-            <p:ph type="body" idx="3" sz="quarter"/>
+            <p:ph type="body" sz="quarter" idx="3"/>
           </p:nvPr>
         </p:nvSpPr>
         <p:spPr/>
@@ -1581,7 +1403,7 @@
             <a:spLocks noGrp="1"/>
           </p:cNvSpPr>
           <p:nvPr>
-            <p:ph type="sldNum" idx="5" sz="quarter"/>
+            <p:ph type="sldNum" sz="quarter" idx="5"/>
           </p:nvPr>
         </p:nvSpPr>
         <p:spPr/>
@@ -1595,7 +1417,7 @@
 </file>
 
 <file path=ppt/notesSlides/notesSlide8.xml><?xml version="1.0" encoding="utf-8"?>
-<p:notes xmlns:a="http://schemas.openxmlformats.org/drawingml/2006/main" xmlns:p="http://schemas.openxmlformats.org/presentationml/2006/main" xmlns:r="http://schemas.openxmlformats.org/officeDocument/2006/relationships">
+<p:notes xmlns:a="http://schemas.openxmlformats.org/drawingml/2006/main" xmlns:r="http://schemas.openxmlformats.org/officeDocument/2006/relationships" xmlns:p="http://schemas.openxmlformats.org/presentationml/2006/main">
   <p:cSld>
     <p:spTree>
       <p:nvGrpSpPr>
@@ -1615,7 +1437,7 @@
         <p:nvSpPr>
           <p:cNvPr id="2" name="Slide Image Placeholder 1"/>
           <p:cNvSpPr>
-            <a:spLocks noGrp="1"/>
+            <a:spLocks noGrp="1" noRot="1" noChangeAspect="1"/>
           </p:cNvSpPr>
           <p:nvPr>
             <p:ph type="sldImg" idx="2"/>
@@ -1630,7 +1452,7 @@
             <a:spLocks noGrp="1"/>
           </p:cNvSpPr>
           <p:nvPr>
-            <p:ph type="body" idx="3" sz="quarter"/>
+            <p:ph type="body" sz="quarter" idx="3"/>
           </p:nvPr>
         </p:nvSpPr>
         <p:spPr/>
@@ -1651,7 +1473,7 @@
             <a:spLocks noGrp="1"/>
           </p:cNvSpPr>
           <p:nvPr>
-            <p:ph type="sldNum" idx="5" sz="quarter"/>
+            <p:ph type="sldNum" sz="quarter" idx="5"/>
           </p:nvPr>
         </p:nvSpPr>
         <p:spPr/>
@@ -1665,7 +1487,7 @@
 </file>
 
 <file path=ppt/notesSlides/notesSlide9.xml><?xml version="1.0" encoding="utf-8"?>
-<p:notes xmlns:a="http://schemas.openxmlformats.org/drawingml/2006/main" xmlns:p="http://schemas.openxmlformats.org/presentationml/2006/main" xmlns:r="http://schemas.openxmlformats.org/officeDocument/2006/relationships">
+<p:notes xmlns:a="http://schemas.openxmlformats.org/drawingml/2006/main" xmlns:r="http://schemas.openxmlformats.org/officeDocument/2006/relationships" xmlns:p="http://schemas.openxmlformats.org/presentationml/2006/main">
   <p:cSld>
     <p:spTree>
       <p:nvGrpSpPr>
@@ -1685,7 +1507,7 @@
         <p:nvSpPr>
           <p:cNvPr id="2" name="Slide Image Placeholder 1"/>
           <p:cNvSpPr>
-            <a:spLocks noGrp="1"/>
+            <a:spLocks noGrp="1" noRot="1" noChangeAspect="1"/>
           </p:cNvSpPr>
           <p:nvPr>
             <p:ph type="sldImg" idx="2"/>
@@ -1700,7 +1522,7 @@
             <a:spLocks noGrp="1"/>
           </p:cNvSpPr>
           <p:nvPr>
-            <p:ph type="body" idx="3" sz="quarter"/>
+            <p:ph type="body" sz="quarter" idx="3"/>
           </p:nvPr>
         </p:nvSpPr>
         <p:spPr/>
@@ -1721,7 +1543,7 @@
             <a:spLocks noGrp="1"/>
           </p:cNvSpPr>
           <p:nvPr>
-            <p:ph type="sldNum" idx="5" sz="quarter"/>
+            <p:ph type="sldNum" sz="quarter" idx="5"/>
           </p:nvPr>
         </p:nvSpPr>
         <p:spPr/>
@@ -1772,10 +1594,9 @@
           <a:lstStyle/>
           <a:p>
             <a:r>
-              <a:rPr lang="en-US" smtClean="0"/>
+              <a:rPr lang="en-US"/>
               <a:t>Click to edit Master title style</a:t>
             </a:r>
-            <a:endParaRPr lang="en-US"/>
           </a:p>
         </p:txBody>
       </p:sp>
@@ -1891,10 +1712,9 @@
           </a:lstStyle>
           <a:p>
             <a:r>
-              <a:rPr lang="en-US" smtClean="0"/>
+              <a:rPr lang="en-US"/>
               <a:t>Click to edit Master subtitle style</a:t>
             </a:r>
-            <a:endParaRPr lang="en-US"/>
           </a:p>
         </p:txBody>
       </p:sp>
@@ -1915,7 +1735,7 @@
           <a:p>
             <a:fld id="{5BCAD085-E8A6-8845-BD4E-CB4CCA059FC4}" type="datetimeFigureOut">
               <a:rPr lang="en-US" smtClean="0"/>
-              <a:t>1/27/13</a:t>
+              <a:t>6/24/2026</a:t>
             </a:fld>
             <a:endParaRPr lang="en-US"/>
           </a:p>
@@ -2009,10 +1829,9 @@
           <a:lstStyle/>
           <a:p>
             <a:r>
-              <a:rPr lang="en-US" smtClean="0"/>
+              <a:rPr lang="en-US"/>
               <a:t>Click to edit Master title style</a:t>
             </a:r>
-            <a:endParaRPr lang="en-US"/>
           </a:p>
         </p:txBody>
       </p:sp>
@@ -2033,38 +1852,37 @@
           <a:p>
             <a:pPr lvl="0"/>
             <a:r>
-              <a:rPr lang="en-US" smtClean="0"/>
+              <a:rPr lang="en-US"/>
               <a:t>Click to edit Master text styles</a:t>
             </a:r>
           </a:p>
           <a:p>
             <a:pPr lvl="1"/>
             <a:r>
-              <a:rPr lang="en-US" smtClean="0"/>
+              <a:rPr lang="en-US"/>
               <a:t>Second level</a:t>
             </a:r>
           </a:p>
           <a:p>
             <a:pPr lvl="2"/>
             <a:r>
-              <a:rPr lang="en-US" smtClean="0"/>
+              <a:rPr lang="en-US"/>
               <a:t>Third level</a:t>
             </a:r>
           </a:p>
           <a:p>
             <a:pPr lvl="3"/>
             <a:r>
-              <a:rPr lang="en-US" smtClean="0"/>
+              <a:rPr lang="en-US"/>
               <a:t>Fourth level</a:t>
             </a:r>
           </a:p>
           <a:p>
             <a:pPr lvl="4"/>
             <a:r>
-              <a:rPr lang="en-US" smtClean="0"/>
+              <a:rPr lang="en-US"/>
               <a:t>Fifth level</a:t>
             </a:r>
-            <a:endParaRPr lang="en-US"/>
           </a:p>
         </p:txBody>
       </p:sp>
@@ -2085,7 +1903,7 @@
           <a:p>
             <a:fld id="{5BCAD085-E8A6-8845-BD4E-CB4CCA059FC4}" type="datetimeFigureOut">
               <a:rPr lang="en-US" smtClean="0"/>
-              <a:t>1/27/13</a:t>
+              <a:t>6/24/2026</a:t>
             </a:fld>
             <a:endParaRPr lang="en-US"/>
           </a:p>
@@ -2184,10 +2002,9 @@
           <a:lstStyle/>
           <a:p>
             <a:r>
-              <a:rPr lang="en-US" smtClean="0"/>
+              <a:rPr lang="en-US"/>
               <a:t>Click to edit Master title style</a:t>
             </a:r>
-            <a:endParaRPr lang="en-US"/>
           </a:p>
         </p:txBody>
       </p:sp>
@@ -2213,38 +2030,37 @@
           <a:p>
             <a:pPr lvl="0"/>
             <a:r>
-              <a:rPr lang="en-US" smtClean="0"/>
+              <a:rPr lang="en-US"/>
               <a:t>Click to edit Master text styles</a:t>
             </a:r>
           </a:p>
           <a:p>
             <a:pPr lvl="1"/>
             <a:r>
-              <a:rPr lang="en-US" smtClean="0"/>
+              <a:rPr lang="en-US"/>
               <a:t>Second level</a:t>
             </a:r>
           </a:p>
           <a:p>
             <a:pPr lvl="2"/>
             <a:r>
-              <a:rPr lang="en-US" smtClean="0"/>
+              <a:rPr lang="en-US"/>
               <a:t>Third level</a:t>
             </a:r>
           </a:p>
           <a:p>
             <a:pPr lvl="3"/>
             <a:r>
-              <a:rPr lang="en-US" smtClean="0"/>
+              <a:rPr lang="en-US"/>
               <a:t>Fourth level</a:t>
             </a:r>
           </a:p>
           <a:p>
             <a:pPr lvl="4"/>
             <a:r>
-              <a:rPr lang="en-US" smtClean="0"/>
+              <a:rPr lang="en-US"/>
               <a:t>Fifth level</a:t>
             </a:r>
-            <a:endParaRPr lang="en-US"/>
           </a:p>
         </p:txBody>
       </p:sp>
@@ -2265,7 +2081,7 @@
           <a:p>
             <a:fld id="{5BCAD085-E8A6-8845-BD4E-CB4CCA059FC4}" type="datetimeFigureOut">
               <a:rPr lang="en-US" smtClean="0"/>
-              <a:t>1/27/13</a:t>
+              <a:t>6/24/2026</a:t>
             </a:fld>
             <a:endParaRPr lang="en-US"/>
           </a:p>
@@ -2359,10 +2175,9 @@
           <a:lstStyle/>
           <a:p>
             <a:r>
-              <a:rPr lang="en-US" smtClean="0"/>
+              <a:rPr lang="en-US"/>
               <a:t>Click to edit Master title style</a:t>
             </a:r>
-            <a:endParaRPr lang="en-US"/>
           </a:p>
         </p:txBody>
       </p:sp>
@@ -2383,38 +2198,37 @@
           <a:p>
             <a:pPr lvl="0"/>
             <a:r>
-              <a:rPr lang="en-US" smtClean="0"/>
+              <a:rPr lang="en-US"/>
               <a:t>Click to edit Master text styles</a:t>
             </a:r>
           </a:p>
           <a:p>
             <a:pPr lvl="1"/>
             <a:r>
-              <a:rPr lang="en-US" smtClean="0"/>
+              <a:rPr lang="en-US"/>
               <a:t>Second level</a:t>
             </a:r>
           </a:p>
           <a:p>
             <a:pPr lvl="2"/>
             <a:r>
-              <a:rPr lang="en-US" smtClean="0"/>
+              <a:rPr lang="en-US"/>
               <a:t>Third level</a:t>
             </a:r>
           </a:p>
           <a:p>
             <a:pPr lvl="3"/>
             <a:r>
-              <a:rPr lang="en-US" smtClean="0"/>
+              <a:rPr lang="en-US"/>
               <a:t>Fourth level</a:t>
             </a:r>
           </a:p>
           <a:p>
             <a:pPr lvl="4"/>
             <a:r>
-              <a:rPr lang="en-US" smtClean="0"/>
+              <a:rPr lang="en-US"/>
               <a:t>Fifth level</a:t>
             </a:r>
-            <a:endParaRPr lang="en-US"/>
           </a:p>
         </p:txBody>
       </p:sp>
@@ -2435,7 +2249,7 @@
           <a:p>
             <a:fld id="{5BCAD085-E8A6-8845-BD4E-CB4CCA059FC4}" type="datetimeFigureOut">
               <a:rPr lang="en-US" smtClean="0"/>
-              <a:t>1/27/13</a:t>
+              <a:t>6/24/2026</a:t>
             </a:fld>
             <a:endParaRPr lang="en-US"/>
           </a:p>
@@ -2538,10 +2352,9 @@
           </a:lstStyle>
           <a:p>
             <a:r>
-              <a:rPr lang="en-US" smtClean="0"/>
+              <a:rPr lang="en-US"/>
               <a:t>Click to edit Master title style</a:t>
             </a:r>
-            <a:endParaRPr lang="en-US"/>
           </a:p>
         </p:txBody>
       </p:sp>
@@ -2658,7 +2471,7 @@
           <a:p>
             <a:pPr lvl="0"/>
             <a:r>
-              <a:rPr lang="en-US" smtClean="0"/>
+              <a:rPr lang="en-US"/>
               <a:t>Click to edit Master text styles</a:t>
             </a:r>
           </a:p>
@@ -2681,7 +2494,7 @@
           <a:p>
             <a:fld id="{5BCAD085-E8A6-8845-BD4E-CB4CCA059FC4}" type="datetimeFigureOut">
               <a:rPr lang="en-US" smtClean="0"/>
-              <a:t>1/27/13</a:t>
+              <a:t>6/24/2026</a:t>
             </a:fld>
             <a:endParaRPr lang="en-US"/>
           </a:p>
@@ -2775,10 +2588,9 @@
           <a:lstStyle/>
           <a:p>
             <a:r>
-              <a:rPr lang="en-US" smtClean="0"/>
+              <a:rPr lang="en-US"/>
               <a:t>Click to edit Master title style</a:t>
             </a:r>
-            <a:endParaRPr lang="en-US"/>
           </a:p>
         </p:txBody>
       </p:sp>
@@ -2832,38 +2644,37 @@
           <a:p>
             <a:pPr lvl="0"/>
             <a:r>
-              <a:rPr lang="en-US" smtClean="0"/>
+              <a:rPr lang="en-US"/>
               <a:t>Click to edit Master text styles</a:t>
             </a:r>
           </a:p>
           <a:p>
             <a:pPr lvl="1"/>
             <a:r>
-              <a:rPr lang="en-US" smtClean="0"/>
+              <a:rPr lang="en-US"/>
               <a:t>Second level</a:t>
             </a:r>
           </a:p>
           <a:p>
             <a:pPr lvl="2"/>
             <a:r>
-              <a:rPr lang="en-US" smtClean="0"/>
+              <a:rPr lang="en-US"/>
               <a:t>Third level</a:t>
             </a:r>
           </a:p>
           <a:p>
             <a:pPr lvl="3"/>
             <a:r>
-              <a:rPr lang="en-US" smtClean="0"/>
+              <a:rPr lang="en-US"/>
               <a:t>Fourth level</a:t>
             </a:r>
           </a:p>
           <a:p>
             <a:pPr lvl="4"/>
             <a:r>
-              <a:rPr lang="en-US" smtClean="0"/>
+              <a:rPr lang="en-US"/>
               <a:t>Fifth level</a:t>
             </a:r>
-            <a:endParaRPr lang="en-US"/>
           </a:p>
         </p:txBody>
       </p:sp>
@@ -2917,38 +2728,37 @@
           <a:p>
             <a:pPr lvl="0"/>
             <a:r>
-              <a:rPr lang="en-US" smtClean="0"/>
+              <a:rPr lang="en-US"/>
               <a:t>Click to edit Master text styles</a:t>
             </a:r>
           </a:p>
           <a:p>
             <a:pPr lvl="1"/>
             <a:r>
-              <a:rPr lang="en-US" smtClean="0"/>
+              <a:rPr lang="en-US"/>
               <a:t>Second level</a:t>
             </a:r>
           </a:p>
           <a:p>
             <a:pPr lvl="2"/>
             <a:r>
-              <a:rPr lang="en-US" smtClean="0"/>
+              <a:rPr lang="en-US"/>
               <a:t>Third level</a:t>
             </a:r>
           </a:p>
           <a:p>
             <a:pPr lvl="3"/>
             <a:r>
-              <a:rPr lang="en-US" smtClean="0"/>
+              <a:rPr lang="en-US"/>
               <a:t>Fourth level</a:t>
             </a:r>
           </a:p>
           <a:p>
             <a:pPr lvl="4"/>
             <a:r>
-              <a:rPr lang="en-US" smtClean="0"/>
+              <a:rPr lang="en-US"/>
               <a:t>Fifth level</a:t>
             </a:r>
-            <a:endParaRPr lang="en-US"/>
           </a:p>
         </p:txBody>
       </p:sp>
@@ -2969,7 +2779,7 @@
           <a:p>
             <a:fld id="{5BCAD085-E8A6-8845-BD4E-CB4CCA059FC4}" type="datetimeFigureOut">
               <a:rPr lang="en-US" smtClean="0"/>
-              <a:t>1/27/13</a:t>
+              <a:t>6/24/2026</a:t>
             </a:fld>
             <a:endParaRPr lang="en-US"/>
           </a:p>
@@ -3067,10 +2877,9 @@
           </a:lstStyle>
           <a:p>
             <a:r>
-              <a:rPr lang="en-US" smtClean="0"/>
+              <a:rPr lang="en-US"/>
               <a:t>Click to edit Master title style</a:t>
             </a:r>
-            <a:endParaRPr lang="en-US"/>
           </a:p>
         </p:txBody>
       </p:sp>
@@ -3133,7 +2942,7 @@
           <a:p>
             <a:pPr lvl="0"/>
             <a:r>
-              <a:rPr lang="en-US" smtClean="0"/>
+              <a:rPr lang="en-US"/>
               <a:t>Click to edit Master text styles</a:t>
             </a:r>
           </a:p>
@@ -3189,38 +2998,37 @@
           <a:p>
             <a:pPr lvl="0"/>
             <a:r>
-              <a:rPr lang="en-US" smtClean="0"/>
+              <a:rPr lang="en-US"/>
               <a:t>Click to edit Master text styles</a:t>
             </a:r>
           </a:p>
           <a:p>
             <a:pPr lvl="1"/>
             <a:r>
-              <a:rPr lang="en-US" smtClean="0"/>
+              <a:rPr lang="en-US"/>
               <a:t>Second level</a:t>
             </a:r>
           </a:p>
           <a:p>
             <a:pPr lvl="2"/>
             <a:r>
-              <a:rPr lang="en-US" smtClean="0"/>
+              <a:rPr lang="en-US"/>
               <a:t>Third level</a:t>
             </a:r>
           </a:p>
           <a:p>
             <a:pPr lvl="3"/>
             <a:r>
-              <a:rPr lang="en-US" smtClean="0"/>
+              <a:rPr lang="en-US"/>
               <a:t>Fourth level</a:t>
             </a:r>
           </a:p>
           <a:p>
             <a:pPr lvl="4"/>
             <a:r>
-              <a:rPr lang="en-US" smtClean="0"/>
+              <a:rPr lang="en-US"/>
               <a:t>Fifth level</a:t>
             </a:r>
-            <a:endParaRPr lang="en-US"/>
           </a:p>
         </p:txBody>
       </p:sp>
@@ -3283,7 +3091,7 @@
           <a:p>
             <a:pPr lvl="0"/>
             <a:r>
-              <a:rPr lang="en-US" smtClean="0"/>
+              <a:rPr lang="en-US"/>
               <a:t>Click to edit Master text styles</a:t>
             </a:r>
           </a:p>
@@ -3339,38 +3147,37 @@
           <a:p>
             <a:pPr lvl="0"/>
             <a:r>
-              <a:rPr lang="en-US" smtClean="0"/>
+              <a:rPr lang="en-US"/>
               <a:t>Click to edit Master text styles</a:t>
             </a:r>
           </a:p>
           <a:p>
             <a:pPr lvl="1"/>
             <a:r>
-              <a:rPr lang="en-US" smtClean="0"/>
+              <a:rPr lang="en-US"/>
               <a:t>Second level</a:t>
             </a:r>
           </a:p>
           <a:p>
             <a:pPr lvl="2"/>
             <a:r>
-              <a:rPr lang="en-US" smtClean="0"/>
+              <a:rPr lang="en-US"/>
               <a:t>Third level</a:t>
             </a:r>
           </a:p>
           <a:p>
             <a:pPr lvl="3"/>
             <a:r>
-              <a:rPr lang="en-US" smtClean="0"/>
+              <a:rPr lang="en-US"/>
               <a:t>Fourth level</a:t>
             </a:r>
           </a:p>
           <a:p>
             <a:pPr lvl="4"/>
             <a:r>
-              <a:rPr lang="en-US" smtClean="0"/>
+              <a:rPr lang="en-US"/>
               <a:t>Fifth level</a:t>
             </a:r>
-            <a:endParaRPr lang="en-US"/>
           </a:p>
         </p:txBody>
       </p:sp>
@@ -3391,7 +3198,7 @@
           <a:p>
             <a:fld id="{5BCAD085-E8A6-8845-BD4E-CB4CCA059FC4}" type="datetimeFigureOut">
               <a:rPr lang="en-US" smtClean="0"/>
-              <a:t>1/27/13</a:t>
+              <a:t>6/24/2026</a:t>
             </a:fld>
             <a:endParaRPr lang="en-US"/>
           </a:p>
@@ -3485,10 +3292,9 @@
           <a:lstStyle/>
           <a:p>
             <a:r>
-              <a:rPr lang="en-US" smtClean="0"/>
+              <a:rPr lang="en-US"/>
               <a:t>Click to edit Master title style</a:t>
             </a:r>
-            <a:endParaRPr lang="en-US"/>
           </a:p>
         </p:txBody>
       </p:sp>
@@ -3509,7 +3315,7 @@
           <a:p>
             <a:fld id="{5BCAD085-E8A6-8845-BD4E-CB4CCA059FC4}" type="datetimeFigureOut">
               <a:rPr lang="en-US" smtClean="0"/>
-              <a:t>1/27/13</a:t>
+              <a:t>6/24/2026</a:t>
             </a:fld>
             <a:endParaRPr lang="en-US"/>
           </a:p>
@@ -3604,7 +3410,7 @@
           <a:p>
             <a:fld id="{5BCAD085-E8A6-8845-BD4E-CB4CCA059FC4}" type="datetimeFigureOut">
               <a:rPr lang="en-US" smtClean="0"/>
-              <a:t>1/27/13</a:t>
+              <a:t>6/24/2026</a:t>
             </a:fld>
             <a:endParaRPr lang="en-US"/>
           </a:p>
@@ -3707,10 +3513,9 @@
           </a:lstStyle>
           <a:p>
             <a:r>
-              <a:rPr lang="en-US" smtClean="0"/>
+              <a:rPr lang="en-US"/>
               <a:t>Click to edit Master title style</a:t>
             </a:r>
-            <a:endParaRPr lang="en-US"/>
           </a:p>
         </p:txBody>
       </p:sp>
@@ -3764,38 +3569,37 @@
           <a:p>
             <a:pPr lvl="0"/>
             <a:r>
-              <a:rPr lang="en-US" smtClean="0"/>
+              <a:rPr lang="en-US"/>
               <a:t>Click to edit Master text styles</a:t>
             </a:r>
           </a:p>
           <a:p>
             <a:pPr lvl="1"/>
             <a:r>
-              <a:rPr lang="en-US" smtClean="0"/>
+              <a:rPr lang="en-US"/>
               <a:t>Second level</a:t>
             </a:r>
           </a:p>
           <a:p>
             <a:pPr lvl="2"/>
             <a:r>
-              <a:rPr lang="en-US" smtClean="0"/>
+              <a:rPr lang="en-US"/>
               <a:t>Third level</a:t>
             </a:r>
           </a:p>
           <a:p>
             <a:pPr lvl="3"/>
             <a:r>
-              <a:rPr lang="en-US" smtClean="0"/>
+              <a:rPr lang="en-US"/>
               <a:t>Fourth level</a:t>
             </a:r>
           </a:p>
           <a:p>
             <a:pPr lvl="4"/>
             <a:r>
-              <a:rPr lang="en-US" smtClean="0"/>
+              <a:rPr lang="en-US"/>
               <a:t>Fifth level</a:t>
             </a:r>
-            <a:endParaRPr lang="en-US"/>
           </a:p>
         </p:txBody>
       </p:sp>
@@ -3858,7 +3662,7 @@
           <a:p>
             <a:pPr lvl="0"/>
             <a:r>
-              <a:rPr lang="en-US" smtClean="0"/>
+              <a:rPr lang="en-US"/>
               <a:t>Click to edit Master text styles</a:t>
             </a:r>
           </a:p>
@@ -3881,7 +3685,7 @@
           <a:p>
             <a:fld id="{5BCAD085-E8A6-8845-BD4E-CB4CCA059FC4}" type="datetimeFigureOut">
               <a:rPr lang="en-US" smtClean="0"/>
-              <a:t>1/27/13</a:t>
+              <a:t>6/24/2026</a:t>
             </a:fld>
             <a:endParaRPr lang="en-US"/>
           </a:p>
@@ -3984,10 +3788,9 @@
           </a:lstStyle>
           <a:p>
             <a:r>
-              <a:rPr lang="en-US" smtClean="0"/>
+              <a:rPr lang="en-US"/>
               <a:t>Click to edit Master title style</a:t>
             </a:r>
-            <a:endParaRPr lang="en-US"/>
           </a:p>
         </p:txBody>
       </p:sp>
@@ -4111,7 +3914,7 @@
           <a:p>
             <a:pPr lvl="0"/>
             <a:r>
-              <a:rPr lang="en-US" smtClean="0"/>
+              <a:rPr lang="en-US"/>
               <a:t>Click to edit Master text styles</a:t>
             </a:r>
           </a:p>
@@ -4134,7 +3937,7 @@
           <a:p>
             <a:fld id="{5BCAD085-E8A6-8845-BD4E-CB4CCA059FC4}" type="datetimeFigureOut">
               <a:rPr lang="en-US" smtClean="0"/>
-              <a:t>1/27/13</a:t>
+              <a:t>6/24/2026</a:t>
             </a:fld>
             <a:endParaRPr lang="en-US"/>
           </a:p>
@@ -4243,10 +4046,9 @@
           <a:lstStyle/>
           <a:p>
             <a:r>
-              <a:rPr lang="en-US" smtClean="0"/>
+              <a:rPr lang="en-US"/>
               <a:t>Click to edit Master title style</a:t>
             </a:r>
-            <a:endParaRPr lang="en-US"/>
           </a:p>
         </p:txBody>
       </p:sp>
@@ -4277,38 +4079,37 @@
           <a:p>
             <a:pPr lvl="0"/>
             <a:r>
-              <a:rPr lang="en-US" smtClean="0"/>
+              <a:rPr lang="en-US"/>
               <a:t>Click to edit Master text styles</a:t>
             </a:r>
           </a:p>
           <a:p>
             <a:pPr lvl="1"/>
             <a:r>
-              <a:rPr lang="en-US" smtClean="0"/>
+              <a:rPr lang="en-US"/>
               <a:t>Second level</a:t>
             </a:r>
           </a:p>
           <a:p>
             <a:pPr lvl="2"/>
             <a:r>
-              <a:rPr lang="en-US" smtClean="0"/>
+              <a:rPr lang="en-US"/>
               <a:t>Third level</a:t>
             </a:r>
           </a:p>
           <a:p>
             <a:pPr lvl="3"/>
             <a:r>
-              <a:rPr lang="en-US" smtClean="0"/>
+              <a:rPr lang="en-US"/>
               <a:t>Fourth level</a:t>
             </a:r>
           </a:p>
           <a:p>
             <a:pPr lvl="4"/>
             <a:r>
-              <a:rPr lang="en-US" smtClean="0"/>
+              <a:rPr lang="en-US"/>
               <a:t>Fifth level</a:t>
             </a:r>
-            <a:endParaRPr lang="en-US"/>
           </a:p>
         </p:txBody>
       </p:sp>
@@ -4347,7 +4148,7 @@
           <a:p>
             <a:fld id="{5BCAD085-E8A6-8845-BD4E-CB4CCA059FC4}" type="datetimeFigureOut">
               <a:rPr lang="en-US" smtClean="0"/>
-              <a:t>1/27/13</a:t>
+              <a:t>6/24/2026</a:t>
             </a:fld>
             <a:endParaRPr lang="en-US"/>
           </a:p>
@@ -4706,7 +4507,7 @@
 </file>
 
 <file path=ppt/slides/slide1.xml><?xml version="1.0" encoding="utf-8"?>
-<p:sld xmlns:a="http://schemas.openxmlformats.org/drawingml/2006/main" xmlns:p="http://schemas.openxmlformats.org/presentationml/2006/main" xmlns:r="http://schemas.openxmlformats.org/officeDocument/2006/relationships">
+<p:sld xmlns:a="http://schemas.openxmlformats.org/drawingml/2006/main" xmlns:r="http://schemas.openxmlformats.org/officeDocument/2006/relationships" xmlns:p="http://schemas.openxmlformats.org/presentationml/2006/main">
   <p:cSld>
     <p:spTree>
       <p:nvGrpSpPr>
@@ -4714,7 +4515,14 @@
         <p:cNvGrpSpPr/>
         <p:nvPr/>
       </p:nvGrpSpPr>
-      <p:grpSpPr/>
+      <p:grpSpPr>
+        <a:xfrm>
+          <a:off x="0" y="0"/>
+          <a:ext cx="0" cy="0"/>
+          <a:chOff x="0" y="0"/>
+          <a:chExt cx="0" cy="0"/>
+        </a:xfrm>
+      </p:grpSpPr>
       <p:sp>
         <p:nvSpPr>
           <p:cNvPr id="2" name="Rectangle 1"/>
@@ -4756,6 +4564,7 @@
           <a:lstStyle/>
           <a:p>
             <a:pPr algn="ctr"/>
+            <a:endParaRPr/>
           </a:p>
         </p:txBody>
       </p:sp>
@@ -4776,7 +4585,7 @@
           <a:noFill/>
         </p:spPr>
         <p:txBody>
-          <a:bodyPr wrap="square" lIns="0" rIns="0" tIns="0" bIns="0" anchor="t">
+          <a:bodyPr wrap="square" lIns="0" tIns="0" rIns="0" bIns="0" anchor="t">
             <a:spAutoFit/>
           </a:bodyPr>
           <a:lstStyle/>
@@ -4807,66 +4616,35 @@
         <p:spPr>
           <a:xfrm>
             <a:off x="822960" y="1783080"/>
-            <a:ext cx="10972800" cy="1280160"/>
-          </a:xfrm>
-          <a:prstGeom prst="rect">
-            <a:avLst/>
-          </a:prstGeom>
-          <a:noFill/>
-        </p:spPr>
-        <p:txBody>
-          <a:bodyPr wrap="square" lIns="0" rIns="0" tIns="0" bIns="0" anchor="t">
-            <a:spAutoFit/>
-          </a:bodyPr>
-          <a:lstStyle/>
-          <a:p>
-            <a:pPr algn="l">
-              <a:lnSpc>
-                <a:spcPct val="115000"/>
-              </a:lnSpc>
-            </a:pPr>
-            <a:r>
-              <a:t>Diabetes Risk Prediction Using Random Forest</a:t>
-            </a:r>
-          </a:p>
-        </p:txBody>
-      </p:sp>
-      <p:sp>
-        <p:nvSpPr>
-          <p:cNvPr id="5" name="TextBox 4"/>
-          <p:cNvSpPr txBox="1"/>
-          <p:nvPr/>
-        </p:nvSpPr>
-        <p:spPr>
-          <a:xfrm>
-            <a:off x="822960" y="3154680"/>
-            <a:ext cx="10515600" cy="640080"/>
-          </a:xfrm>
-          <a:prstGeom prst="rect">
-            <a:avLst/>
-          </a:prstGeom>
-          <a:noFill/>
-        </p:spPr>
-        <p:txBody>
-          <a:bodyPr wrap="square" lIns="0" rIns="0" tIns="0" bIns="0" anchor="t">
-            <a:spAutoFit/>
-          </a:bodyPr>
-          <a:lstStyle/>
-          <a:p>
-            <a:pPr algn="l">
-              <a:lnSpc>
-                <a:spcPct val="115000"/>
-              </a:lnSpc>
-            </a:pPr>
-            <a:r>
-              <a:rPr sz="1800" b="0">
-                <a:solidFill>
-                  <a:srgbClr val="475569"/>
-                </a:solidFill>
-                <a:latin typeface="Calibri"/>
-              </a:rPr>
-              <a:t>Predicting diabetes from 21 health indicators using supervised machine learning</a:t>
-            </a:r>
+            <a:ext cx="10972800" cy="961930"/>
+          </a:xfrm>
+          <a:prstGeom prst="rect">
+            <a:avLst/>
+          </a:prstGeom>
+          <a:noFill/>
+        </p:spPr>
+        <p:txBody>
+          <a:bodyPr wrap="square" lIns="0" tIns="0" rIns="0" bIns="0" anchor="t">
+            <a:spAutoFit/>
+          </a:bodyPr>
+          <a:lstStyle/>
+          <a:p>
+            <a:pPr algn="l">
+              <a:lnSpc>
+                <a:spcPct val="115000"/>
+              </a:lnSpc>
+            </a:pPr>
+            <a:r>
+              <a:rPr lang="en-US" sz="2800" b="1" i="0" dirty="0">
+                <a:solidFill>
+                  <a:srgbClr val="2E2B29"/>
+                </a:solidFill>
+                <a:effectLst/>
+                <a:latin typeface="Inter"/>
+              </a:rPr>
+              <a:t>Diabetes Risk Prediction Using Random Forest Classifier on BRFSS 2015 Health Indicators</a:t>
+            </a:r>
+            <a:endParaRPr lang="en-US" sz="2800" dirty="0"/>
           </a:p>
         </p:txBody>
       </p:sp>
@@ -4911,6 +4689,7 @@
           <a:lstStyle/>
           <a:p>
             <a:pPr algn="ctr"/>
+            <a:endParaRPr/>
           </a:p>
         </p:txBody>
       </p:sp>
@@ -4931,7 +4710,7 @@
           <a:noFill/>
         </p:spPr>
         <p:txBody>
-          <a:bodyPr wrap="square" lIns="0" rIns="0" tIns="0" bIns="0" anchor="t">
+          <a:bodyPr wrap="square" lIns="0" tIns="0" rIns="0" bIns="0" anchor="t">
             <a:spAutoFit/>
           </a:bodyPr>
           <a:lstStyle/>
@@ -4962,15 +4741,15 @@
         <p:spPr>
           <a:xfrm>
             <a:off x="822960" y="4663440"/>
-            <a:ext cx="5486400" cy="1828800"/>
-          </a:xfrm>
-          <a:prstGeom prst="rect">
-            <a:avLst/>
-          </a:prstGeom>
-          <a:noFill/>
-        </p:spPr>
-        <p:txBody>
-          <a:bodyPr wrap="square" lIns="0" rIns="0" tIns="0" bIns="0" anchor="t">
+            <a:ext cx="5486400" cy="1002967"/>
+          </a:xfrm>
+          <a:prstGeom prst="rect">
+            <a:avLst/>
+          </a:prstGeom>
+          <a:noFill/>
+        </p:spPr>
+        <p:txBody>
+          <a:bodyPr wrap="square" lIns="0" tIns="0" rIns="0" bIns="0" anchor="t">
             <a:spAutoFit/>
           </a:bodyPr>
           <a:lstStyle/>
@@ -4981,13 +4760,40 @@
               </a:lnSpc>
             </a:pPr>
             <a:r>
-              <a:rPr sz="1500" b="0">
+              <a:rPr sz="1500" b="0" dirty="0">
                 <a:solidFill>
                   <a:srgbClr val="1E293B"/>
                 </a:solidFill>
                 <a:latin typeface="Calibri"/>
               </a:rPr>
-              <a:t>Ali Raza       ·  2540010</a:t>
+              <a:t>Ali Raza</a:t>
+            </a:r>
+            <a:r>
+              <a:rPr lang="en-US" sz="1500" dirty="0">
+                <a:solidFill>
+                  <a:srgbClr val="1E293B"/>
+                </a:solidFill>
+                <a:latin typeface="Calibri"/>
+              </a:rPr>
+              <a:t> </a:t>
+            </a:r>
+            <a:r>
+              <a:rPr lang="en-US" sz="1500" b="0" dirty="0">
+                <a:solidFill>
+                  <a:srgbClr val="1E293B"/>
+                </a:solidFill>
+                <a:latin typeface="Calibri"/>
+              </a:rPr>
+              <a:t>-</a:t>
+            </a:r>
+            <a:r>
+              <a:rPr sz="1500" b="0" dirty="0">
+                <a:solidFill>
+                  <a:srgbClr val="1E293B"/>
+                </a:solidFill>
+                <a:latin typeface="Calibri"/>
+              </a:rPr>
+              <a:t>  2540010</a:t>
             </a:r>
           </a:p>
           <a:p>
@@ -4997,14 +4803,56 @@
               </a:lnSpc>
             </a:pPr>
             <a:r>
-              <a:rPr sz="1500" b="0">
+              <a:rPr lang="en-US" sz="1500" dirty="0">
                 <a:solidFill>
                   <a:srgbClr val="1E293B"/>
                 </a:solidFill>
                 <a:latin typeface="Calibri"/>
               </a:rPr>
-              <a:t>M. Ammar       ·  2540004</a:t>
-            </a:r>
+              <a:t>M. </a:t>
+            </a:r>
+            <a:r>
+              <a:rPr sz="1500" b="0" dirty="0">
+                <a:solidFill>
+                  <a:srgbClr val="1E293B"/>
+                </a:solidFill>
+                <a:latin typeface="Calibri"/>
+              </a:rPr>
+              <a:t>Ammar</a:t>
+            </a:r>
+            <a:r>
+              <a:rPr lang="en-US" sz="1500" b="0" dirty="0">
+                <a:solidFill>
+                  <a:srgbClr val="1E293B"/>
+                </a:solidFill>
+                <a:latin typeface="Calibri"/>
+              </a:rPr>
+              <a:t> -</a:t>
+            </a:r>
+            <a:r>
+              <a:rPr sz="1500" b="0" dirty="0">
+                <a:solidFill>
+                  <a:srgbClr val="1E293B"/>
+                </a:solidFill>
+                <a:latin typeface="Calibri"/>
+              </a:rPr>
+              <a:t>  254000</a:t>
+            </a:r>
+            <a:r>
+              <a:rPr lang="en-US" sz="1500" b="0" dirty="0">
+                <a:solidFill>
+                  <a:srgbClr val="1E293B"/>
+                </a:solidFill>
+                <a:latin typeface="Calibri"/>
+              </a:rPr>
+              <a:t>4</a:t>
+            </a:r>
+            <a:endParaRPr sz="1500" b="0" dirty="0">
+              <a:solidFill>
+                <a:srgbClr val="1E293B"/>
+              </a:solidFill>
+              <a:latin typeface="Calibri"/>
+            </a:endParaRPr>
           </a:p>
           <a:p>
             <a:pPr algn="l">
@@ -5013,13 +4861,31 @@
               </a:lnSpc>
             </a:pPr>
             <a:r>
-              <a:rPr sz="1500" b="0">
+              <a:rPr sz="1500" b="0" dirty="0">
                 <a:solidFill>
                   <a:srgbClr val="1E293B"/>
                 </a:solidFill>
                 <a:latin typeface="Calibri"/>
               </a:rPr>
-              <a:t>Taha Ali         ·  2540008</a:t>
+              <a:t>Taha Ali</a:t>
+            </a:r>
+            <a:r>
+              <a:rPr lang="en-US" sz="1500" b="0" dirty="0">
+                <a:solidFill>
+                  <a:srgbClr val="1E293B"/>
+                </a:solidFill>
+                <a:latin typeface="Calibri"/>
+              </a:rPr>
+              <a:t> -</a:t>
+            </a:r>
+            <a:r>
+              <a:rPr sz="1500" b="0" dirty="0">
+                <a:solidFill>
+                  <a:srgbClr val="1E293B"/>
+                </a:solidFill>
+                <a:latin typeface="Calibri"/>
+              </a:rPr>
+              <a:t>  2540008</a:t>
             </a:r>
           </a:p>
         </p:txBody>
@@ -5041,7 +4907,7 @@
           <a:noFill/>
         </p:spPr>
         <p:txBody>
-          <a:bodyPr wrap="square" lIns="0" rIns="0" tIns="0" bIns="0" anchor="t">
+          <a:bodyPr wrap="square" lIns="0" tIns="0" rIns="0" bIns="0" anchor="t">
             <a:spAutoFit/>
           </a:bodyPr>
           <a:lstStyle/>
@@ -5080,7 +4946,7 @@
           <a:noFill/>
         </p:spPr>
         <p:txBody>
-          <a:bodyPr wrap="square" lIns="0" rIns="0" tIns="0" bIns="0" anchor="t">
+          <a:bodyPr wrap="square" lIns="0" tIns="0" rIns="0" bIns="0" anchor="t">
             <a:spAutoFit/>
           </a:bodyPr>
           <a:lstStyle/>
@@ -5119,7 +4985,7 @@
           <a:noFill/>
         </p:spPr>
         <p:txBody>
-          <a:bodyPr wrap="square" lIns="0" rIns="0" tIns="0" bIns="0" anchor="t">
+          <a:bodyPr wrap="square" lIns="0" tIns="0" rIns="0" bIns="0" anchor="t">
             <a:spAutoFit/>
           </a:bodyPr>
           <a:lstStyle/>
@@ -5158,7 +5024,7 @@
           <a:noFill/>
         </p:spPr>
         <p:txBody>
-          <a:bodyPr wrap="square" lIns="0" rIns="0" tIns="0" bIns="0" anchor="t">
+          <a:bodyPr wrap="square" lIns="0" tIns="0" rIns="0" bIns="0" anchor="t">
             <a:spAutoFit/>
           </a:bodyPr>
           <a:lstStyle/>
@@ -5182,103 +5048,59 @@
       </p:sp>
       <p:sp>
         <p:nvSpPr>
-          <p:cNvPr id="13" name="TextBox 12"/>
-          <p:cNvSpPr txBox="1"/>
-          <p:nvPr/>
-        </p:nvSpPr>
-        <p:spPr>
-          <a:xfrm>
-            <a:off x="640080" y="6126480"/>
-            <a:ext cx="10972800" cy="274320"/>
-          </a:xfrm>
-          <a:prstGeom prst="rect">
-            <a:avLst/>
-          </a:prstGeom>
-          <a:noFill/>
-        </p:spPr>
-        <p:txBody>
-          <a:bodyPr wrap="square" lIns="0" rIns="0" tIns="0" bIns="0" anchor="t">
-            <a:spAutoFit/>
-          </a:bodyPr>
-          <a:lstStyle/>
-          <a:p>
-            <a:pPr algn="l">
-              <a:lnSpc>
-                <a:spcPct val="115000"/>
-              </a:lnSpc>
-            </a:pPr>
-            <a:r>
-              <a:rPr sz="1000" b="1">
-                <a:solidFill>
-                  <a:srgbClr val="0F766E"/>
-                </a:solidFill>
-                <a:latin typeface="Calibri"/>
-              </a:rPr>
-              <a:t>RESOURCES</a:t>
-            </a:r>
-          </a:p>
-        </p:txBody>
-      </p:sp>
-      <p:sp>
-        <p:nvSpPr>
-          <p:cNvPr id="14" name="TextBox 13"/>
+          <p:cNvPr id="13" name="TextBox 12">
+            <a:hlinkClick r:id="rId3"/>
+            <a:extLst>
+              <a:ext uri="{FF2B5EF4-FFF2-40B4-BE49-F238E27FC236}">
+                <a16:creationId xmlns:a16="http://schemas.microsoft.com/office/drawing/2014/main" id="{D23EE5DD-DD58-3AF3-DDA3-8D3AFB5A3C7A}"/>
+              </a:ext>
+            </a:extLst>
+          </p:cNvPr>
           <p:cNvSpPr txBox="1"/>
           <p:nvPr/>
         </p:nvSpPr>
         <p:spPr>
           <a:xfrm>
             <a:off x="640080" y="6400800"/>
-            <a:ext cx="10972800" cy="320040"/>
-          </a:xfrm>
-          <a:prstGeom prst="rect">
-            <a:avLst/>
-          </a:prstGeom>
-          <a:noFill/>
-        </p:spPr>
-        <p:txBody>
-          <a:bodyPr wrap="square" lIns="0" rIns="0" tIns="0" bIns="0">
-            <a:spAutoFit/>
-          </a:bodyPr>
-          <a:lstStyle/>
-          <a:p>
-            <a:r>
-              <a:rPr sz="1100" b="1">
+            <a:ext cx="1517904" cy="169277"/>
+          </a:xfrm>
+          <a:prstGeom prst="rect">
+            <a:avLst/>
+          </a:prstGeom>
+          <a:noFill/>
+        </p:spPr>
+        <p:txBody>
+          <a:bodyPr wrap="square" lIns="0" tIns="0" rIns="0" bIns="0">
+            <a:spAutoFit/>
+          </a:bodyPr>
+          <a:lstStyle/>
+          <a:p>
+            <a:r>
+              <a:rPr sz="1100" b="1" dirty="0">
                 <a:solidFill>
                   <a:srgbClr val="475569"/>
                 </a:solidFill>
                 <a:latin typeface="Calibri"/>
               </a:rPr>
-              <a:t>GitHub:  </a:t>
-            </a:r>
-            <a:r>
-              <a:rPr sz="1100" b="0" u="sng">
-                <a:solidFill>
-                  <a:srgbClr val="0F766E"/>
-                </a:solidFill>
-                <a:latin typeface="Calibri"/>
-                <a:hlinkClick r:id="rId2"/>
-              </a:rPr>
-              <a:t>https://github.com/muhammadammarff-design/diabetes-risk-prediction</a:t>
-            </a:r>
-            <a:r>
-              <a:rPr sz="1100" b="1">
+              <a:t>GitHub:  ·      </a:t>
+            </a:r>
+            <a:r>
+              <a:rPr sz="1100" b="1" dirty="0">
                 <a:solidFill>
                   <a:srgbClr val="475569"/>
                 </a:solidFill>
                 <a:latin typeface="Calibri"/>
-              </a:rPr>
-              <a:t>      ·      Live demo:  </a:t>
-            </a:r>
-            <a:r>
-              <a:rPr sz="1100" b="0" u="sng">
-                <a:solidFill>
-                  <a:srgbClr val="0F766E"/>
-                </a:solidFill>
-                <a:latin typeface="Calibri"/>
-                <a:hlinkClick r:id="rId3"/>
-              </a:rPr>
-              <a:t>https://diabetesriskpredictions.streamlit.app/</a:t>
-            </a:r>
+                <a:hlinkClick r:id="rId4"/>
+              </a:rPr>
+              <a:t>Live demo:</a:t>
+            </a:r>
+            <a:endParaRPr sz="1100" b="0" u="sng" dirty="0">
+              <a:solidFill>
+                <a:srgbClr val="0F766E"/>
+              </a:solidFill>
+              <a:latin typeface="Calibri"/>
+              <a:hlinkClick r:id="rId4"/>
+            </a:endParaRPr>
           </a:p>
         </p:txBody>
       </p:sp>
@@ -5291,7 +5113,7 @@
 </file>
 
 <file path=ppt/slides/slide10.xml><?xml version="1.0" encoding="utf-8"?>
-<p:sld xmlns:a="http://schemas.openxmlformats.org/drawingml/2006/main" xmlns:p="http://schemas.openxmlformats.org/presentationml/2006/main" xmlns:r="http://schemas.openxmlformats.org/officeDocument/2006/relationships">
+<p:sld xmlns:a="http://schemas.openxmlformats.org/drawingml/2006/main" xmlns:r="http://schemas.openxmlformats.org/officeDocument/2006/relationships" xmlns:p="http://schemas.openxmlformats.org/presentationml/2006/main">
   <p:cSld>
     <p:spTree>
       <p:nvGrpSpPr>
@@ -5299,7 +5121,14 @@
         <p:cNvGrpSpPr/>
         <p:nvPr/>
       </p:nvGrpSpPr>
-      <p:grpSpPr/>
+      <p:grpSpPr>
+        <a:xfrm>
+          <a:off x="0" y="0"/>
+          <a:ext cx="0" cy="0"/>
+          <a:chOff x="0" y="0"/>
+          <a:chExt cx="0" cy="0"/>
+        </a:xfrm>
+      </p:grpSpPr>
       <p:sp>
         <p:nvSpPr>
           <p:cNvPr id="2" name="Rectangle 1"/>
@@ -5341,6 +5170,7 @@
           <a:lstStyle/>
           <a:p>
             <a:pPr algn="ctr"/>
+            <a:endParaRPr/>
           </a:p>
         </p:txBody>
       </p:sp>
@@ -5361,7 +5191,7 @@
           <a:noFill/>
         </p:spPr>
         <p:txBody>
-          <a:bodyPr wrap="square" lIns="0" rIns="0" tIns="0" bIns="0" anchor="t">
+          <a:bodyPr wrap="square" lIns="0" tIns="0" rIns="0" bIns="0" anchor="t">
             <a:spAutoFit/>
           </a:bodyPr>
           <a:lstStyle/>
@@ -5400,7 +5230,7 @@
           <a:noFill/>
         </p:spPr>
         <p:txBody>
-          <a:bodyPr wrap="square" lIns="0" rIns="0" tIns="0" bIns="0" anchor="t">
+          <a:bodyPr wrap="square" lIns="0" tIns="0" rIns="0" bIns="0" anchor="t">
             <a:spAutoFit/>
           </a:bodyPr>
           <a:lstStyle/>
@@ -5439,7 +5269,7 @@
           <a:noFill/>
         </p:spPr>
         <p:txBody>
-          <a:bodyPr wrap="square" lIns="0" rIns="0" tIns="0" bIns="0" anchor="t">
+          <a:bodyPr wrap="square" lIns="0" tIns="0" rIns="0" bIns="0" anchor="t">
             <a:spAutoFit/>
           </a:bodyPr>
           <a:lstStyle/>
@@ -5478,7 +5308,7 @@
           <a:noFill/>
         </p:spPr>
         <p:txBody>
-          <a:bodyPr wrap="square" lIns="0" rIns="0" tIns="0" bIns="0" anchor="t">
+          <a:bodyPr wrap="square" lIns="0" tIns="0" rIns="0" bIns="0" anchor="t">
             <a:spAutoFit/>
           </a:bodyPr>
           <a:lstStyle/>
@@ -5541,6 +5371,7 @@
           <a:lstStyle/>
           <a:p>
             <a:pPr algn="ctr"/>
+            <a:endParaRPr/>
           </a:p>
         </p:txBody>
       </p:sp>
@@ -5561,7 +5392,7 @@
           <a:noFill/>
         </p:spPr>
         <p:txBody>
-          <a:bodyPr wrap="square" lIns="0" rIns="0" tIns="0" bIns="0" anchor="t">
+          <a:bodyPr wrap="square" lIns="0" tIns="0" rIns="0" bIns="0" anchor="t">
             <a:spAutoFit/>
           </a:bodyPr>
           <a:lstStyle/>
@@ -5600,7 +5431,7 @@
           <a:noFill/>
         </p:spPr>
         <p:txBody>
-          <a:bodyPr wrap="square" lIns="0" rIns="0" tIns="0" bIns="0" anchor="t">
+          <a:bodyPr wrap="square" lIns="0" tIns="0" rIns="0" bIns="0" anchor="t">
             <a:spAutoFit/>
           </a:bodyPr>
           <a:lstStyle/>
@@ -5663,6 +5494,7 @@
           <a:lstStyle/>
           <a:p>
             <a:pPr algn="ctr"/>
+            <a:endParaRPr/>
           </a:p>
         </p:txBody>
       </p:sp>
@@ -5683,7 +5515,7 @@
           <a:noFill/>
         </p:spPr>
         <p:txBody>
-          <a:bodyPr wrap="square" lIns="0" rIns="0" tIns="0" bIns="0" anchor="t">
+          <a:bodyPr wrap="square" lIns="0" tIns="0" rIns="0" bIns="0" anchor="t">
             <a:spAutoFit/>
           </a:bodyPr>
           <a:lstStyle/>
@@ -5722,7 +5554,7 @@
           <a:noFill/>
         </p:spPr>
         <p:txBody>
-          <a:bodyPr wrap="square" lIns="0" rIns="0" tIns="0" bIns="0" anchor="t">
+          <a:bodyPr wrap="square" lIns="0" tIns="0" rIns="0" bIns="0" anchor="t">
             <a:spAutoFit/>
           </a:bodyPr>
           <a:lstStyle/>
@@ -5785,6 +5617,7 @@
           <a:lstStyle/>
           <a:p>
             <a:pPr algn="ctr"/>
+            <a:endParaRPr/>
           </a:p>
         </p:txBody>
       </p:sp>
@@ -5805,7 +5638,7 @@
           <a:noFill/>
         </p:spPr>
         <p:txBody>
-          <a:bodyPr wrap="square" lIns="0" rIns="0" tIns="0" bIns="0" anchor="t">
+          <a:bodyPr wrap="square" lIns="0" tIns="0" rIns="0" bIns="0" anchor="t">
             <a:spAutoFit/>
           </a:bodyPr>
           <a:lstStyle/>
@@ -5844,7 +5677,7 @@
           <a:noFill/>
         </p:spPr>
         <p:txBody>
-          <a:bodyPr wrap="square" lIns="0" rIns="0" tIns="0" bIns="0" anchor="t">
+          <a:bodyPr wrap="square" lIns="0" tIns="0" rIns="0" bIns="0" anchor="t">
             <a:spAutoFit/>
           </a:bodyPr>
           <a:lstStyle/>
@@ -5907,6 +5740,7 @@
           <a:lstStyle/>
           <a:p>
             <a:pPr algn="ctr"/>
+            <a:endParaRPr/>
           </a:p>
         </p:txBody>
       </p:sp>
@@ -5927,7 +5761,7 @@
           <a:noFill/>
         </p:spPr>
         <p:txBody>
-          <a:bodyPr wrap="square" lIns="0" rIns="0" tIns="0" bIns="0" anchor="t">
+          <a:bodyPr wrap="square" lIns="0" tIns="0" rIns="0" bIns="0" anchor="t">
             <a:spAutoFit/>
           </a:bodyPr>
           <a:lstStyle/>
@@ -5966,7 +5800,7 @@
           <a:noFill/>
         </p:spPr>
         <p:txBody>
-          <a:bodyPr wrap="square" lIns="0" rIns="0" tIns="0" bIns="0" anchor="t">
+          <a:bodyPr wrap="square" lIns="0" tIns="0" rIns="0" bIns="0" anchor="t">
             <a:spAutoFit/>
           </a:bodyPr>
           <a:lstStyle/>
@@ -6029,6 +5863,7 @@
           <a:lstStyle/>
           <a:p>
             <a:pPr algn="ctr"/>
+            <a:endParaRPr/>
           </a:p>
         </p:txBody>
       </p:sp>
@@ -6049,7 +5884,7 @@
           <a:noFill/>
         </p:spPr>
         <p:txBody>
-          <a:bodyPr wrap="square" lIns="0" rIns="0" tIns="0" bIns="0" anchor="t">
+          <a:bodyPr wrap="square" lIns="0" tIns="0" rIns="0" bIns="0" anchor="t">
             <a:spAutoFit/>
           </a:bodyPr>
           <a:lstStyle/>
@@ -6088,7 +5923,7 @@
           <a:noFill/>
         </p:spPr>
         <p:txBody>
-          <a:bodyPr wrap="square" lIns="0" rIns="0" tIns="0" bIns="0" anchor="t">
+          <a:bodyPr wrap="square" lIns="0" tIns="0" rIns="0" bIns="0" anchor="t">
             <a:spAutoFit/>
           </a:bodyPr>
           <a:lstStyle/>
@@ -6151,6 +5986,7 @@
           <a:lstStyle/>
           <a:p>
             <a:pPr algn="ctr"/>
+            <a:endParaRPr/>
           </a:p>
         </p:txBody>
       </p:sp>
@@ -6171,7 +6007,7 @@
           <a:noFill/>
         </p:spPr>
         <p:txBody>
-          <a:bodyPr wrap="square" lIns="0" rIns="0" tIns="0" bIns="0" anchor="t">
+          <a:bodyPr wrap="square" lIns="0" tIns="0" rIns="0" bIns="0" anchor="t">
             <a:spAutoFit/>
           </a:bodyPr>
           <a:lstStyle/>
@@ -6210,7 +6046,7 @@
           <a:noFill/>
         </p:spPr>
         <p:txBody>
-          <a:bodyPr wrap="square" lIns="0" rIns="0" tIns="0" bIns="0" anchor="t">
+          <a:bodyPr wrap="square" lIns="0" tIns="0" rIns="0" bIns="0" anchor="t">
             <a:spAutoFit/>
           </a:bodyPr>
           <a:lstStyle/>
@@ -6273,6 +6109,7 @@
           <a:lstStyle/>
           <a:p>
             <a:pPr algn="ctr"/>
+            <a:endParaRPr/>
           </a:p>
         </p:txBody>
       </p:sp>
@@ -6293,7 +6130,7 @@
           <a:noFill/>
         </p:spPr>
         <p:txBody>
-          <a:bodyPr wrap="square" lIns="0" rIns="0" tIns="0" bIns="0" anchor="t">
+          <a:bodyPr wrap="square" lIns="0" tIns="0" rIns="0" bIns="0" anchor="t">
             <a:spAutoFit/>
           </a:bodyPr>
           <a:lstStyle/>
@@ -6332,7 +6169,7 @@
           <a:noFill/>
         </p:spPr>
         <p:txBody>
-          <a:bodyPr wrap="square" lIns="0" rIns="0" tIns="0" bIns="0" anchor="t">
+          <a:bodyPr wrap="square" lIns="0" tIns="0" rIns="0" bIns="0" anchor="t">
             <a:spAutoFit/>
           </a:bodyPr>
           <a:lstStyle/>
@@ -6395,6 +6232,7 @@
           <a:lstStyle/>
           <a:p>
             <a:pPr algn="ctr"/>
+            <a:endParaRPr/>
           </a:p>
         </p:txBody>
       </p:sp>
@@ -6415,7 +6253,7 @@
           <a:noFill/>
         </p:spPr>
         <p:txBody>
-          <a:bodyPr wrap="square" lIns="0" rIns="0" tIns="0" bIns="0" anchor="t">
+          <a:bodyPr wrap="square" lIns="0" tIns="0" rIns="0" bIns="0" anchor="t">
             <a:spAutoFit/>
           </a:bodyPr>
           <a:lstStyle/>
@@ -6454,7 +6292,7 @@
           <a:noFill/>
         </p:spPr>
         <p:txBody>
-          <a:bodyPr wrap="square" lIns="0" rIns="0" tIns="0" bIns="0" anchor="t">
+          <a:bodyPr wrap="square" lIns="0" tIns="0" rIns="0" bIns="0" anchor="t">
             <a:spAutoFit/>
           </a:bodyPr>
           <a:lstStyle/>
@@ -6517,6 +6355,7 @@
           <a:lstStyle/>
           <a:p>
             <a:pPr algn="ctr"/>
+            <a:endParaRPr/>
           </a:p>
         </p:txBody>
       </p:sp>
@@ -6537,7 +6376,7 @@
           <a:noFill/>
         </p:spPr>
         <p:txBody>
-          <a:bodyPr wrap="square" lIns="0" rIns="0" tIns="0" bIns="0" anchor="t">
+          <a:bodyPr wrap="square" lIns="0" tIns="0" rIns="0" bIns="0" anchor="t">
             <a:spAutoFit/>
           </a:bodyPr>
           <a:lstStyle/>
@@ -6576,7 +6415,7 @@
           <a:noFill/>
         </p:spPr>
         <p:txBody>
-          <a:bodyPr wrap="square" lIns="0" rIns="0" tIns="0" bIns="0" anchor="t">
+          <a:bodyPr wrap="square" lIns="0" tIns="0" rIns="0" bIns="0" anchor="t">
             <a:spAutoFit/>
           </a:bodyPr>
           <a:lstStyle/>
@@ -6639,6 +6478,7 @@
           <a:lstStyle/>
           <a:p>
             <a:pPr algn="ctr"/>
+            <a:endParaRPr/>
           </a:p>
         </p:txBody>
       </p:sp>
@@ -6659,7 +6499,7 @@
           <a:noFill/>
         </p:spPr>
         <p:txBody>
-          <a:bodyPr wrap="square" lIns="0" rIns="0" tIns="0" bIns="0" anchor="t">
+          <a:bodyPr wrap="square" lIns="0" tIns="0" rIns="0" bIns="0" anchor="t">
             <a:spAutoFit/>
           </a:bodyPr>
           <a:lstStyle/>
@@ -6698,7 +6538,7 @@
           <a:noFill/>
         </p:spPr>
         <p:txBody>
-          <a:bodyPr wrap="square" lIns="0" rIns="0" tIns="0" bIns="0" anchor="t">
+          <a:bodyPr wrap="square" lIns="0" tIns="0" rIns="0" bIns="0" anchor="t">
             <a:spAutoFit/>
           </a:bodyPr>
           <a:lstStyle/>
@@ -6761,6 +6601,7 @@
           <a:lstStyle/>
           <a:p>
             <a:pPr algn="ctr"/>
+            <a:endParaRPr/>
           </a:p>
         </p:txBody>
       </p:sp>
@@ -6781,7 +6622,7 @@
           <a:noFill/>
         </p:spPr>
         <p:txBody>
-          <a:bodyPr wrap="square" lIns="0" rIns="0" tIns="0" bIns="0" anchor="t">
+          <a:bodyPr wrap="square" lIns="0" tIns="0" rIns="0" bIns="0" anchor="t">
             <a:spAutoFit/>
           </a:bodyPr>
           <a:lstStyle/>
@@ -6812,15 +6653,27 @@
           <p:nvPr/>
         </p:nvPicPr>
         <p:blipFill>
-          <a:blip r:embed="rId4"/>
+          <a:blip r:embed="rId3">
+            <a:clrChange>
+              <a:clrFrom>
+                <a:srgbClr val="FFFFFF"/>
+              </a:clrFrom>
+              <a:clrTo>
+                <a:srgbClr val="FFFFFF">
+                  <a:alpha val="0"/>
+                </a:srgbClr>
+              </a:clrTo>
+            </a:clrChange>
+            <a:alphaModFix/>
+          </a:blip>
           <a:stretch>
             <a:fillRect/>
           </a:stretch>
         </p:blipFill>
         <p:spPr>
           <a:xfrm>
-            <a:off x="365760" y="1737360"/>
-            <a:ext cx="6583680" cy="5839548"/>
+            <a:off x="811378" y="1563624"/>
+            <a:ext cx="5450434" cy="4834389"/>
           </a:xfrm>
           <a:prstGeom prst="rect">
             <a:avLst/>
@@ -6836,7 +6689,7 @@
 </file>
 
 <file path=ppt/slides/slide11.xml><?xml version="1.0" encoding="utf-8"?>
-<p:sld xmlns:a="http://schemas.openxmlformats.org/drawingml/2006/main" xmlns:p="http://schemas.openxmlformats.org/presentationml/2006/main" xmlns:r="http://schemas.openxmlformats.org/officeDocument/2006/relationships">
+<p:sld xmlns:a="http://schemas.openxmlformats.org/drawingml/2006/main" xmlns:r="http://schemas.openxmlformats.org/officeDocument/2006/relationships" xmlns:p="http://schemas.openxmlformats.org/presentationml/2006/main">
   <p:cSld>
     <p:spTree>
       <p:nvGrpSpPr>
@@ -6844,7 +6697,14 @@
         <p:cNvGrpSpPr/>
         <p:nvPr/>
       </p:nvGrpSpPr>
-      <p:grpSpPr/>
+      <p:grpSpPr>
+        <a:xfrm>
+          <a:off x="0" y="0"/>
+          <a:ext cx="0" cy="0"/>
+          <a:chOff x="0" y="0"/>
+          <a:chExt cx="0" cy="0"/>
+        </a:xfrm>
+      </p:grpSpPr>
       <p:sp>
         <p:nvSpPr>
           <p:cNvPr id="2" name="Rectangle 1"/>
@@ -6886,6 +6746,7 @@
           <a:lstStyle/>
           <a:p>
             <a:pPr algn="ctr"/>
+            <a:endParaRPr/>
           </a:p>
         </p:txBody>
       </p:sp>
@@ -6906,7 +6767,7 @@
           <a:noFill/>
         </p:spPr>
         <p:txBody>
-          <a:bodyPr wrap="square" lIns="0" rIns="0" tIns="0" bIns="0" anchor="t">
+          <a:bodyPr wrap="square" lIns="0" tIns="0" rIns="0" bIns="0" anchor="t">
             <a:spAutoFit/>
           </a:bodyPr>
           <a:lstStyle/>
@@ -6945,7 +6806,7 @@
           <a:noFill/>
         </p:spPr>
         <p:txBody>
-          <a:bodyPr wrap="square" lIns="0" rIns="0" tIns="0" bIns="0" anchor="t">
+          <a:bodyPr wrap="square" lIns="0" tIns="0" rIns="0" bIns="0" anchor="t">
             <a:spAutoFit/>
           </a:bodyPr>
           <a:lstStyle/>
@@ -6984,7 +6845,7 @@
           <a:noFill/>
         </p:spPr>
         <p:txBody>
-          <a:bodyPr wrap="square" lIns="0" rIns="0" tIns="0" bIns="0" anchor="t">
+          <a:bodyPr wrap="square" lIns="0" tIns="0" rIns="0" bIns="0" anchor="t">
             <a:spAutoFit/>
           </a:bodyPr>
           <a:lstStyle/>
@@ -7023,7 +6884,7 @@
           <a:noFill/>
         </p:spPr>
         <p:txBody>
-          <a:bodyPr wrap="square" lIns="0" rIns="0" tIns="0" bIns="0" anchor="t">
+          <a:bodyPr wrap="square" lIns="0" tIns="0" rIns="0" bIns="0" anchor="t">
             <a:spAutoFit/>
           </a:bodyPr>
           <a:lstStyle/>
@@ -7086,6 +6947,7 @@
           <a:lstStyle/>
           <a:p>
             <a:pPr algn="ctr"/>
+            <a:endParaRPr/>
           </a:p>
         </p:txBody>
       </p:sp>
@@ -7106,7 +6968,7 @@
           <a:noFill/>
         </p:spPr>
         <p:txBody>
-          <a:bodyPr wrap="square" lIns="0" rIns="0" tIns="0" bIns="0">
+          <a:bodyPr wrap="square" lIns="0" tIns="0" rIns="0" bIns="0">
             <a:spAutoFit/>
           </a:bodyPr>
           <a:lstStyle/>
@@ -7241,7 +7103,7 @@
           <a:noFill/>
         </p:spPr>
         <p:txBody>
-          <a:bodyPr wrap="square" lIns="0" rIns="0" tIns="0" bIns="0" anchor="t">
+          <a:bodyPr wrap="square" lIns="0" tIns="0" rIns="0" bIns="0" anchor="t">
             <a:spAutoFit/>
           </a:bodyPr>
           <a:lstStyle/>
@@ -7304,6 +7166,7 @@
           <a:lstStyle/>
           <a:p>
             <a:pPr algn="ctr"/>
+            <a:endParaRPr/>
           </a:p>
         </p:txBody>
       </p:sp>
@@ -7348,6 +7211,7 @@
           <a:lstStyle/>
           <a:p>
             <a:pPr algn="ctr"/>
+            <a:endParaRPr/>
           </a:p>
         </p:txBody>
       </p:sp>
@@ -7368,7 +7232,7 @@
           <a:noFill/>
         </p:spPr>
         <p:txBody>
-          <a:bodyPr wrap="square" lIns="0" rIns="0" tIns="0" bIns="0" anchor="t">
+          <a:bodyPr wrap="square" lIns="0" tIns="0" rIns="0" bIns="0" anchor="t">
             <a:spAutoFit/>
           </a:bodyPr>
           <a:lstStyle/>
@@ -7407,7 +7271,7 @@
           <a:noFill/>
         </p:spPr>
         <p:txBody>
-          <a:bodyPr wrap="square" lIns="0" rIns="0" tIns="0" bIns="0" anchor="t">
+          <a:bodyPr wrap="square" lIns="0" tIns="0" rIns="0" bIns="0" anchor="t">
             <a:spAutoFit/>
           </a:bodyPr>
           <a:lstStyle/>
@@ -7472,6 +7336,7 @@
           <a:lstStyle/>
           <a:p>
             <a:pPr algn="ctr"/>
+            <a:endParaRPr/>
           </a:p>
         </p:txBody>
       </p:sp>
@@ -7492,7 +7357,7 @@
           <a:noFill/>
         </p:spPr>
         <p:txBody>
-          <a:bodyPr wrap="square" lIns="0" rIns="0" tIns="0" bIns="0" anchor="t">
+          <a:bodyPr wrap="square" lIns="0" tIns="0" rIns="0" bIns="0" anchor="t">
             <a:spAutoFit/>
           </a:bodyPr>
           <a:lstStyle/>
@@ -7531,7 +7396,7 @@
           <a:noFill/>
         </p:spPr>
         <p:txBody>
-          <a:bodyPr wrap="square" lIns="0" rIns="0" tIns="0" bIns="0" anchor="t">
+          <a:bodyPr wrap="square" lIns="0" tIns="0" rIns="0" bIns="0" anchor="t">
             <a:spAutoFit/>
           </a:bodyPr>
           <a:lstStyle/>
@@ -7627,7 +7492,7 @@
 </file>
 
 <file path=ppt/slides/slide12.xml><?xml version="1.0" encoding="utf-8"?>
-<p:sld xmlns:a="http://schemas.openxmlformats.org/drawingml/2006/main" xmlns:p="http://schemas.openxmlformats.org/presentationml/2006/main" xmlns:r="http://schemas.openxmlformats.org/officeDocument/2006/relationships">
+<p:sld xmlns:a="http://schemas.openxmlformats.org/drawingml/2006/main" xmlns:r="http://schemas.openxmlformats.org/officeDocument/2006/relationships" xmlns:p="http://schemas.openxmlformats.org/presentationml/2006/main">
   <p:cSld>
     <p:spTree>
       <p:nvGrpSpPr>
@@ -7635,7 +7500,14 @@
         <p:cNvGrpSpPr/>
         <p:nvPr/>
       </p:nvGrpSpPr>
-      <p:grpSpPr/>
+      <p:grpSpPr>
+        <a:xfrm>
+          <a:off x="0" y="0"/>
+          <a:ext cx="0" cy="0"/>
+          <a:chOff x="0" y="0"/>
+          <a:chExt cx="0" cy="0"/>
+        </a:xfrm>
+      </p:grpSpPr>
       <p:sp>
         <p:nvSpPr>
           <p:cNvPr id="2" name="Rectangle 1"/>
@@ -7677,6 +7549,7 @@
           <a:lstStyle/>
           <a:p>
             <a:pPr algn="ctr"/>
+            <a:endParaRPr/>
           </a:p>
         </p:txBody>
       </p:sp>
@@ -7697,7 +7570,7 @@
           <a:noFill/>
         </p:spPr>
         <p:txBody>
-          <a:bodyPr wrap="square" lIns="0" rIns="0" tIns="0" bIns="0" anchor="t">
+          <a:bodyPr wrap="square" lIns="0" tIns="0" rIns="0" bIns="0" anchor="t">
             <a:spAutoFit/>
           </a:bodyPr>
           <a:lstStyle/>
@@ -7736,7 +7609,7 @@
           <a:noFill/>
         </p:spPr>
         <p:txBody>
-          <a:bodyPr wrap="square" lIns="0" rIns="0" tIns="0" bIns="0" anchor="t">
+          <a:bodyPr wrap="square" lIns="0" tIns="0" rIns="0" bIns="0" anchor="t">
             <a:spAutoFit/>
           </a:bodyPr>
           <a:lstStyle/>
@@ -7775,7 +7648,7 @@
           <a:noFill/>
         </p:spPr>
         <p:txBody>
-          <a:bodyPr wrap="square" lIns="0" rIns="0" tIns="0" bIns="0" anchor="t">
+          <a:bodyPr wrap="square" lIns="0" tIns="0" rIns="0" bIns="0" anchor="t">
             <a:spAutoFit/>
           </a:bodyPr>
           <a:lstStyle/>
@@ -7814,7 +7687,7 @@
           <a:noFill/>
         </p:spPr>
         <p:txBody>
-          <a:bodyPr wrap="square" lIns="0" rIns="0" tIns="0" bIns="0" anchor="t">
+          <a:bodyPr wrap="square" lIns="0" tIns="0" rIns="0" bIns="0" anchor="t">
             <a:spAutoFit/>
           </a:bodyPr>
           <a:lstStyle/>
@@ -7877,6 +7750,7 @@
           <a:lstStyle/>
           <a:p>
             <a:pPr algn="ctr"/>
+            <a:endParaRPr/>
           </a:p>
         </p:txBody>
       </p:sp>
@@ -7923,6 +7797,7 @@
           <a:lstStyle/>
           <a:p>
             <a:pPr algn="ctr"/>
+            <a:endParaRPr/>
           </a:p>
         </p:txBody>
       </p:sp>
@@ -7967,6 +7842,7 @@
           <a:lstStyle/>
           <a:p>
             <a:pPr algn="ctr"/>
+            <a:endParaRPr/>
           </a:p>
         </p:txBody>
       </p:sp>
@@ -7987,7 +7863,7 @@
           <a:noFill/>
         </p:spPr>
         <p:txBody>
-          <a:bodyPr wrap="square" lIns="0" rIns="0" tIns="0" bIns="0" anchor="t">
+          <a:bodyPr wrap="square" lIns="0" tIns="0" rIns="0" bIns="0" anchor="t">
             <a:spAutoFit/>
           </a:bodyPr>
           <a:lstStyle/>
@@ -8026,7 +7902,7 @@
           <a:noFill/>
         </p:spPr>
         <p:txBody>
-          <a:bodyPr wrap="square" lIns="0" rIns="0" tIns="0" bIns="0" anchor="t">
+          <a:bodyPr wrap="square" lIns="0" tIns="0" rIns="0" bIns="0" anchor="t">
             <a:spAutoFit/>
           </a:bodyPr>
           <a:lstStyle/>
@@ -8065,7 +7941,7 @@
           <a:noFill/>
         </p:spPr>
         <p:txBody>
-          <a:bodyPr wrap="square" lIns="0" rIns="0" tIns="0" bIns="0" anchor="t">
+          <a:bodyPr wrap="square" lIns="0" tIns="0" rIns="0" bIns="0" anchor="t">
             <a:spAutoFit/>
           </a:bodyPr>
           <a:lstStyle/>
@@ -8130,6 +8006,7 @@
           <a:lstStyle/>
           <a:p>
             <a:pPr algn="ctr"/>
+            <a:endParaRPr/>
           </a:p>
         </p:txBody>
       </p:sp>
@@ -8174,6 +8051,7 @@
           <a:lstStyle/>
           <a:p>
             <a:pPr algn="ctr"/>
+            <a:endParaRPr/>
           </a:p>
         </p:txBody>
       </p:sp>
@@ -8194,7 +8072,7 @@
           <a:noFill/>
         </p:spPr>
         <p:txBody>
-          <a:bodyPr wrap="square" lIns="0" rIns="0" tIns="0" bIns="0" anchor="t">
+          <a:bodyPr wrap="square" lIns="0" tIns="0" rIns="0" bIns="0" anchor="t">
             <a:spAutoFit/>
           </a:bodyPr>
           <a:lstStyle/>
@@ -8233,7 +8111,7 @@
           <a:noFill/>
         </p:spPr>
         <p:txBody>
-          <a:bodyPr wrap="square" lIns="0" rIns="0" tIns="0" bIns="0" anchor="t">
+          <a:bodyPr wrap="square" lIns="0" tIns="0" rIns="0" bIns="0" anchor="t">
             <a:spAutoFit/>
           </a:bodyPr>
           <a:lstStyle/>
@@ -8272,7 +8150,7 @@
           <a:noFill/>
         </p:spPr>
         <p:txBody>
-          <a:bodyPr wrap="square" lIns="0" rIns="0" tIns="0" bIns="0" anchor="t">
+          <a:bodyPr wrap="square" lIns="0" tIns="0" rIns="0" bIns="0" anchor="t">
             <a:spAutoFit/>
           </a:bodyPr>
           <a:lstStyle/>
@@ -8337,6 +8215,7 @@
           <a:lstStyle/>
           <a:p>
             <a:pPr algn="ctr"/>
+            <a:endParaRPr/>
           </a:p>
         </p:txBody>
       </p:sp>
@@ -8381,6 +8260,7 @@
           <a:lstStyle/>
           <a:p>
             <a:pPr algn="ctr"/>
+            <a:endParaRPr/>
           </a:p>
         </p:txBody>
       </p:sp>
@@ -8401,7 +8281,7 @@
           <a:noFill/>
         </p:spPr>
         <p:txBody>
-          <a:bodyPr wrap="square" lIns="0" rIns="0" tIns="0" bIns="0" anchor="t">
+          <a:bodyPr wrap="square" lIns="0" tIns="0" rIns="0" bIns="0" anchor="t">
             <a:spAutoFit/>
           </a:bodyPr>
           <a:lstStyle/>
@@ -8440,7 +8320,7 @@
           <a:noFill/>
         </p:spPr>
         <p:txBody>
-          <a:bodyPr wrap="square" lIns="0" rIns="0" tIns="0" bIns="0" anchor="t">
+          <a:bodyPr wrap="square" lIns="0" tIns="0" rIns="0" bIns="0" anchor="t">
             <a:spAutoFit/>
           </a:bodyPr>
           <a:lstStyle/>
@@ -8479,7 +8359,7 @@
           <a:noFill/>
         </p:spPr>
         <p:txBody>
-          <a:bodyPr wrap="square" lIns="0" rIns="0" tIns="0" bIns="0" anchor="t">
+          <a:bodyPr wrap="square" lIns="0" tIns="0" rIns="0" bIns="0" anchor="t">
             <a:spAutoFit/>
           </a:bodyPr>
           <a:lstStyle/>
@@ -8510,7 +8390,7 @@
 </file>
 
 <file path=ppt/slides/slide13.xml><?xml version="1.0" encoding="utf-8"?>
-<p:sld xmlns:a="http://schemas.openxmlformats.org/drawingml/2006/main" xmlns:p="http://schemas.openxmlformats.org/presentationml/2006/main" xmlns:r="http://schemas.openxmlformats.org/officeDocument/2006/relationships">
+<p:sld xmlns:a="http://schemas.openxmlformats.org/drawingml/2006/main" xmlns:r="http://schemas.openxmlformats.org/officeDocument/2006/relationships" xmlns:p="http://schemas.openxmlformats.org/presentationml/2006/main">
   <p:cSld>
     <p:spTree>
       <p:nvGrpSpPr>
@@ -8518,7 +8398,14 @@
         <p:cNvGrpSpPr/>
         <p:nvPr/>
       </p:nvGrpSpPr>
-      <p:grpSpPr/>
+      <p:grpSpPr>
+        <a:xfrm>
+          <a:off x="0" y="0"/>
+          <a:ext cx="0" cy="0"/>
+          <a:chOff x="0" y="0"/>
+          <a:chExt cx="0" cy="0"/>
+        </a:xfrm>
+      </p:grpSpPr>
       <p:sp>
         <p:nvSpPr>
           <p:cNvPr id="2" name="Rectangle 1"/>
@@ -8560,6 +8447,7 @@
           <a:lstStyle/>
           <a:p>
             <a:pPr algn="ctr"/>
+            <a:endParaRPr/>
           </a:p>
         </p:txBody>
       </p:sp>
@@ -8580,7 +8468,7 @@
           <a:noFill/>
         </p:spPr>
         <p:txBody>
-          <a:bodyPr wrap="square" lIns="0" rIns="0" tIns="0" bIns="0" anchor="t">
+          <a:bodyPr wrap="square" lIns="0" tIns="0" rIns="0" bIns="0" anchor="t">
             <a:spAutoFit/>
           </a:bodyPr>
           <a:lstStyle/>
@@ -8619,7 +8507,7 @@
           <a:noFill/>
         </p:spPr>
         <p:txBody>
-          <a:bodyPr wrap="square" lIns="0" rIns="0" tIns="0" bIns="0" anchor="t">
+          <a:bodyPr wrap="square" lIns="0" tIns="0" rIns="0" bIns="0" anchor="t">
             <a:spAutoFit/>
           </a:bodyPr>
           <a:lstStyle/>
@@ -8658,7 +8546,7 @@
           <a:noFill/>
         </p:spPr>
         <p:txBody>
-          <a:bodyPr wrap="square" lIns="0" rIns="0" tIns="0" bIns="0" anchor="t">
+          <a:bodyPr wrap="square" lIns="0" tIns="0" rIns="0" bIns="0" anchor="t">
             <a:spAutoFit/>
           </a:bodyPr>
           <a:lstStyle/>
@@ -8697,7 +8585,7 @@
           <a:noFill/>
         </p:spPr>
         <p:txBody>
-          <a:bodyPr wrap="square" lIns="0" rIns="0" tIns="0" bIns="0" anchor="t">
+          <a:bodyPr wrap="square" lIns="0" tIns="0" rIns="0" bIns="0" anchor="t">
             <a:spAutoFit/>
           </a:bodyPr>
           <a:lstStyle/>
@@ -8760,6 +8648,7 @@
           <a:lstStyle/>
           <a:p>
             <a:pPr algn="ctr"/>
+            <a:endParaRPr/>
           </a:p>
         </p:txBody>
       </p:sp>
@@ -8806,6 +8695,7 @@
           <a:lstStyle/>
           <a:p>
             <a:pPr algn="ctr"/>
+            <a:endParaRPr/>
           </a:p>
         </p:txBody>
       </p:sp>
@@ -8850,6 +8740,7 @@
           <a:lstStyle/>
           <a:p>
             <a:pPr algn="ctr"/>
+            <a:endParaRPr/>
           </a:p>
         </p:txBody>
       </p:sp>
@@ -8870,7 +8761,7 @@
           <a:noFill/>
         </p:spPr>
         <p:txBody>
-          <a:bodyPr wrap="square" lIns="0" rIns="0" tIns="0" bIns="0" anchor="t">
+          <a:bodyPr wrap="square" lIns="0" tIns="0" rIns="0" bIns="0" anchor="t">
             <a:spAutoFit/>
           </a:bodyPr>
           <a:lstStyle/>
@@ -8909,7 +8800,7 @@
           <a:noFill/>
         </p:spPr>
         <p:txBody>
-          <a:bodyPr wrap="square" lIns="0" rIns="0" tIns="0" bIns="0" anchor="t">
+          <a:bodyPr wrap="square" lIns="0" tIns="0" rIns="0" bIns="0" anchor="t">
             <a:spAutoFit/>
           </a:bodyPr>
           <a:lstStyle/>
@@ -8948,7 +8839,7 @@
           <a:noFill/>
         </p:spPr>
         <p:txBody>
-          <a:bodyPr wrap="square" lIns="0" rIns="0" tIns="0" bIns="0" anchor="t">
+          <a:bodyPr wrap="square" lIns="0" tIns="0" rIns="0" bIns="0" anchor="t">
             <a:spAutoFit/>
           </a:bodyPr>
           <a:lstStyle/>
@@ -8987,7 +8878,7 @@
           <a:noFill/>
         </p:spPr>
         <p:txBody>
-          <a:bodyPr wrap="square" lIns="0" rIns="0" tIns="0" bIns="0" anchor="t">
+          <a:bodyPr wrap="square" lIns="0" tIns="0" rIns="0" bIns="0" anchor="t">
             <a:spAutoFit/>
           </a:bodyPr>
           <a:lstStyle/>
@@ -9026,7 +8917,7 @@
           <a:noFill/>
         </p:spPr>
         <p:txBody>
-          <a:bodyPr wrap="square" lIns="0" rIns="0" tIns="0" bIns="0" anchor="t">
+          <a:bodyPr wrap="square" lIns="0" tIns="0" rIns="0" bIns="0" anchor="t">
             <a:spAutoFit/>
           </a:bodyPr>
           <a:lstStyle/>
@@ -9065,7 +8956,7 @@
           <a:noFill/>
         </p:spPr>
         <p:txBody>
-          <a:bodyPr wrap="square" lIns="0" rIns="0" tIns="0" bIns="0" anchor="t">
+          <a:bodyPr wrap="square" lIns="0" tIns="0" rIns="0" bIns="0" anchor="t">
             <a:spAutoFit/>
           </a:bodyPr>
           <a:lstStyle/>
@@ -9130,6 +9021,7 @@
           <a:lstStyle/>
           <a:p>
             <a:pPr algn="ctr"/>
+            <a:endParaRPr/>
           </a:p>
         </p:txBody>
       </p:sp>
@@ -9174,6 +9066,7 @@
           <a:lstStyle/>
           <a:p>
             <a:pPr algn="ctr"/>
+            <a:endParaRPr/>
           </a:p>
         </p:txBody>
       </p:sp>
@@ -9194,7 +9087,7 @@
           <a:noFill/>
         </p:spPr>
         <p:txBody>
-          <a:bodyPr wrap="square" lIns="0" rIns="0" tIns="0" bIns="0" anchor="t">
+          <a:bodyPr wrap="square" lIns="0" tIns="0" rIns="0" bIns="0" anchor="t">
             <a:spAutoFit/>
           </a:bodyPr>
           <a:lstStyle/>
@@ -9233,7 +9126,7 @@
           <a:noFill/>
         </p:spPr>
         <p:txBody>
-          <a:bodyPr wrap="square" lIns="0" rIns="0" tIns="0" bIns="0" anchor="t">
+          <a:bodyPr wrap="square" lIns="0" tIns="0" rIns="0" bIns="0" anchor="t">
             <a:spAutoFit/>
           </a:bodyPr>
           <a:lstStyle/>
@@ -9272,7 +9165,7 @@
           <a:noFill/>
         </p:spPr>
         <p:txBody>
-          <a:bodyPr wrap="square" lIns="0" rIns="0" tIns="0" bIns="0" anchor="t">
+          <a:bodyPr wrap="square" lIns="0" tIns="0" rIns="0" bIns="0" anchor="t">
             <a:spAutoFit/>
           </a:bodyPr>
           <a:lstStyle/>
@@ -9311,7 +9204,7 @@
           <a:noFill/>
         </p:spPr>
         <p:txBody>
-          <a:bodyPr wrap="square" lIns="0" rIns="0" tIns="0" bIns="0" anchor="t">
+          <a:bodyPr wrap="square" lIns="0" tIns="0" rIns="0" bIns="0" anchor="t">
             <a:spAutoFit/>
           </a:bodyPr>
           <a:lstStyle/>
@@ -9350,7 +9243,7 @@
           <a:noFill/>
         </p:spPr>
         <p:txBody>
-          <a:bodyPr wrap="square" lIns="0" rIns="0" tIns="0" bIns="0" anchor="t">
+          <a:bodyPr wrap="square" lIns="0" tIns="0" rIns="0" bIns="0" anchor="t">
             <a:spAutoFit/>
           </a:bodyPr>
           <a:lstStyle/>
@@ -9389,7 +9282,7 @@
           <a:noFill/>
         </p:spPr>
         <p:txBody>
-          <a:bodyPr wrap="square" lIns="0" rIns="0" tIns="0" bIns="0" anchor="t">
+          <a:bodyPr wrap="square" lIns="0" tIns="0" rIns="0" bIns="0" anchor="t">
             <a:spAutoFit/>
           </a:bodyPr>
           <a:lstStyle/>
@@ -9454,6 +9347,7 @@
           <a:lstStyle/>
           <a:p>
             <a:pPr algn="ctr"/>
+            <a:endParaRPr/>
           </a:p>
         </p:txBody>
       </p:sp>
@@ -9498,6 +9392,7 @@
           <a:lstStyle/>
           <a:p>
             <a:pPr algn="ctr"/>
+            <a:endParaRPr/>
           </a:p>
         </p:txBody>
       </p:sp>
@@ -9518,7 +9413,7 @@
           <a:noFill/>
         </p:spPr>
         <p:txBody>
-          <a:bodyPr wrap="square" lIns="0" rIns="0" tIns="0" bIns="0" anchor="t">
+          <a:bodyPr wrap="square" lIns="0" tIns="0" rIns="0" bIns="0" anchor="t">
             <a:spAutoFit/>
           </a:bodyPr>
           <a:lstStyle/>
@@ -9557,7 +9452,7 @@
           <a:noFill/>
         </p:spPr>
         <p:txBody>
-          <a:bodyPr wrap="square" lIns="0" rIns="0" tIns="0" bIns="0" anchor="t">
+          <a:bodyPr wrap="square" lIns="0" tIns="0" rIns="0" bIns="0" anchor="t">
             <a:spAutoFit/>
           </a:bodyPr>
           <a:lstStyle/>
@@ -9596,7 +9491,7 @@
           <a:noFill/>
         </p:spPr>
         <p:txBody>
-          <a:bodyPr wrap="square" lIns="0" rIns="0" tIns="0" bIns="0" anchor="t">
+          <a:bodyPr wrap="square" lIns="0" tIns="0" rIns="0" bIns="0" anchor="t">
             <a:spAutoFit/>
           </a:bodyPr>
           <a:lstStyle/>
@@ -9635,7 +9530,7 @@
           <a:noFill/>
         </p:spPr>
         <p:txBody>
-          <a:bodyPr wrap="square" lIns="0" rIns="0" tIns="0" bIns="0" anchor="t">
+          <a:bodyPr wrap="square" lIns="0" tIns="0" rIns="0" bIns="0" anchor="t">
             <a:spAutoFit/>
           </a:bodyPr>
           <a:lstStyle/>
@@ -9674,7 +9569,7 @@
           <a:noFill/>
         </p:spPr>
         <p:txBody>
-          <a:bodyPr wrap="square" lIns="0" rIns="0" tIns="0" bIns="0" anchor="t">
+          <a:bodyPr wrap="square" lIns="0" tIns="0" rIns="0" bIns="0" anchor="t">
             <a:spAutoFit/>
           </a:bodyPr>
           <a:lstStyle/>
@@ -9713,7 +9608,7 @@
           <a:noFill/>
         </p:spPr>
         <p:txBody>
-          <a:bodyPr wrap="square" lIns="0" rIns="0" tIns="0" bIns="0" anchor="t">
+          <a:bodyPr wrap="square" lIns="0" tIns="0" rIns="0" bIns="0" anchor="t">
             <a:spAutoFit/>
           </a:bodyPr>
           <a:lstStyle/>
@@ -9778,6 +9673,7 @@
           <a:lstStyle/>
           <a:p>
             <a:pPr algn="ctr"/>
+            <a:endParaRPr/>
           </a:p>
         </p:txBody>
       </p:sp>
@@ -9822,6 +9718,7 @@
           <a:lstStyle/>
           <a:p>
             <a:pPr algn="ctr"/>
+            <a:endParaRPr/>
           </a:p>
         </p:txBody>
       </p:sp>
@@ -9842,7 +9739,7 @@
           <a:noFill/>
         </p:spPr>
         <p:txBody>
-          <a:bodyPr wrap="square" lIns="0" rIns="0" tIns="0" bIns="0" anchor="t">
+          <a:bodyPr wrap="square" lIns="0" tIns="0" rIns="0" bIns="0" anchor="t">
             <a:spAutoFit/>
           </a:bodyPr>
           <a:lstStyle/>
@@ -9881,7 +9778,7 @@
           <a:noFill/>
         </p:spPr>
         <p:txBody>
-          <a:bodyPr wrap="square" lIns="0" rIns="0" tIns="0" bIns="0" anchor="t">
+          <a:bodyPr wrap="square" lIns="0" tIns="0" rIns="0" bIns="0" anchor="t">
             <a:spAutoFit/>
           </a:bodyPr>
           <a:lstStyle/>
@@ -9920,7 +9817,7 @@
           <a:noFill/>
         </p:spPr>
         <p:txBody>
-          <a:bodyPr wrap="square" lIns="0" rIns="0" tIns="0" bIns="0" anchor="t">
+          <a:bodyPr wrap="square" lIns="0" tIns="0" rIns="0" bIns="0" anchor="t">
             <a:spAutoFit/>
           </a:bodyPr>
           <a:lstStyle/>
@@ -9959,7 +9856,7 @@
           <a:noFill/>
         </p:spPr>
         <p:txBody>
-          <a:bodyPr wrap="square" lIns="0" rIns="0" tIns="0" bIns="0" anchor="t">
+          <a:bodyPr wrap="square" lIns="0" tIns="0" rIns="0" bIns="0" anchor="t">
             <a:spAutoFit/>
           </a:bodyPr>
           <a:lstStyle/>
@@ -9998,7 +9895,7 @@
           <a:noFill/>
         </p:spPr>
         <p:txBody>
-          <a:bodyPr wrap="square" lIns="0" rIns="0" tIns="0" bIns="0" anchor="t">
+          <a:bodyPr wrap="square" lIns="0" tIns="0" rIns="0" bIns="0" anchor="t">
             <a:spAutoFit/>
           </a:bodyPr>
           <a:lstStyle/>
@@ -10037,7 +9934,7 @@
           <a:noFill/>
         </p:spPr>
         <p:txBody>
-          <a:bodyPr wrap="square" lIns="0" rIns="0" tIns="0" bIns="0" anchor="t">
+          <a:bodyPr wrap="square" lIns="0" tIns="0" rIns="0" bIns="0" anchor="t">
             <a:spAutoFit/>
           </a:bodyPr>
           <a:lstStyle/>
@@ -10068,7 +9965,7 @@
 </file>
 
 <file path=ppt/slides/slide14.xml><?xml version="1.0" encoding="utf-8"?>
-<p:sld xmlns:a="http://schemas.openxmlformats.org/drawingml/2006/main" xmlns:p="http://schemas.openxmlformats.org/presentationml/2006/main" xmlns:r="http://schemas.openxmlformats.org/officeDocument/2006/relationships">
+<p:sld xmlns:a="http://schemas.openxmlformats.org/drawingml/2006/main" xmlns:r="http://schemas.openxmlformats.org/officeDocument/2006/relationships" xmlns:p="http://schemas.openxmlformats.org/presentationml/2006/main">
   <p:cSld>
     <p:spTree>
       <p:nvGrpSpPr>
@@ -10076,7 +9973,14 @@
         <p:cNvGrpSpPr/>
         <p:nvPr/>
       </p:nvGrpSpPr>
-      <p:grpSpPr/>
+      <p:grpSpPr>
+        <a:xfrm>
+          <a:off x="0" y="0"/>
+          <a:ext cx="0" cy="0"/>
+          <a:chOff x="0" y="0"/>
+          <a:chExt cx="0" cy="0"/>
+        </a:xfrm>
+      </p:grpSpPr>
       <p:sp>
         <p:nvSpPr>
           <p:cNvPr id="2" name="Rectangle 1"/>
@@ -10118,6 +10022,7 @@
           <a:lstStyle/>
           <a:p>
             <a:pPr algn="ctr"/>
+            <a:endParaRPr/>
           </a:p>
         </p:txBody>
       </p:sp>
@@ -10138,7 +10043,7 @@
           <a:noFill/>
         </p:spPr>
         <p:txBody>
-          <a:bodyPr wrap="square" lIns="0" rIns="0" tIns="0" bIns="0" anchor="t">
+          <a:bodyPr wrap="square" lIns="0" tIns="0" rIns="0" bIns="0" anchor="t">
             <a:spAutoFit/>
           </a:bodyPr>
           <a:lstStyle/>
@@ -10177,7 +10082,7 @@
           <a:noFill/>
         </p:spPr>
         <p:txBody>
-          <a:bodyPr wrap="square" lIns="0" rIns="0" tIns="0" bIns="0" anchor="t">
+          <a:bodyPr wrap="square" lIns="0" tIns="0" rIns="0" bIns="0" anchor="t">
             <a:spAutoFit/>
           </a:bodyPr>
           <a:lstStyle/>
@@ -10216,7 +10121,7 @@
           <a:noFill/>
         </p:spPr>
         <p:txBody>
-          <a:bodyPr wrap="square" lIns="0" rIns="0" tIns="0" bIns="0" anchor="t">
+          <a:bodyPr wrap="square" lIns="0" tIns="0" rIns="0" bIns="0" anchor="t">
             <a:spAutoFit/>
           </a:bodyPr>
           <a:lstStyle/>
@@ -10255,7 +10160,7 @@
           <a:noFill/>
         </p:spPr>
         <p:txBody>
-          <a:bodyPr wrap="square" lIns="0" rIns="0" tIns="0" bIns="0" anchor="t">
+          <a:bodyPr wrap="square" lIns="0" tIns="0" rIns="0" bIns="0" anchor="t">
             <a:spAutoFit/>
           </a:bodyPr>
           <a:lstStyle/>
@@ -10318,6 +10223,7 @@
           <a:lstStyle/>
           <a:p>
             <a:pPr algn="ctr"/>
+            <a:endParaRPr/>
           </a:p>
         </p:txBody>
       </p:sp>
@@ -10330,7 +10236,7 @@
           <p:nvPr/>
         </p:nvPicPr>
         <p:blipFill>
-          <a:blip r:embed="rId2"/>
+          <a:blip r:embed="rId3"/>
           <a:stretch>
             <a:fillRect/>
           </a:stretch>
@@ -10362,7 +10268,7 @@
           <a:noFill/>
         </p:spPr>
         <p:txBody>
-          <a:bodyPr wrap="square" lIns="0" rIns="0" tIns="0" bIns="0" anchor="t">
+          <a:bodyPr wrap="square" lIns="0" tIns="0" rIns="0" bIns="0" anchor="t">
             <a:spAutoFit/>
           </a:bodyPr>
           <a:lstStyle/>
@@ -10425,6 +10331,7 @@
           <a:lstStyle/>
           <a:p>
             <a:pPr algn="ctr"/>
+            <a:endParaRPr/>
           </a:p>
         </p:txBody>
       </p:sp>
@@ -10445,7 +10352,7 @@
           <a:noFill/>
         </p:spPr>
         <p:txBody>
-          <a:bodyPr wrap="square" lIns="0" rIns="0" tIns="0" bIns="0" anchor="t">
+          <a:bodyPr wrap="square" lIns="0" tIns="0" rIns="0" bIns="0" anchor="t">
             <a:spAutoFit/>
           </a:bodyPr>
           <a:lstStyle/>
@@ -10484,7 +10391,7 @@
           <a:noFill/>
         </p:spPr>
         <p:txBody>
-          <a:bodyPr wrap="square" lIns="0" rIns="0" tIns="0" bIns="0" anchor="t">
+          <a:bodyPr wrap="square" lIns="0" tIns="0" rIns="0" bIns="0" anchor="t">
             <a:spAutoFit/>
           </a:bodyPr>
           <a:lstStyle/>
@@ -10523,7 +10430,7 @@
           <a:noFill/>
         </p:spPr>
         <p:txBody>
-          <a:bodyPr wrap="square" lIns="0" rIns="0" tIns="0" bIns="0" anchor="t">
+          <a:bodyPr wrap="square" lIns="0" tIns="0" rIns="0" bIns="0" anchor="t">
             <a:spAutoFit/>
           </a:bodyPr>
           <a:lstStyle/>
@@ -10588,6 +10495,7 @@
           <a:lstStyle/>
           <a:p>
             <a:pPr algn="ctr"/>
+            <a:endParaRPr/>
           </a:p>
         </p:txBody>
       </p:sp>
@@ -10608,7 +10516,7 @@
           <a:noFill/>
         </p:spPr>
         <p:txBody>
-          <a:bodyPr wrap="square" lIns="0" rIns="0" tIns="0" bIns="0" anchor="t">
+          <a:bodyPr wrap="square" lIns="0" tIns="0" rIns="0" bIns="0" anchor="t">
             <a:spAutoFit/>
           </a:bodyPr>
           <a:lstStyle/>
@@ -10647,7 +10555,7 @@
           <a:noFill/>
         </p:spPr>
         <p:txBody>
-          <a:bodyPr wrap="square" lIns="0" rIns="0" tIns="0" bIns="0" anchor="t">
+          <a:bodyPr wrap="square" lIns="0" tIns="0" rIns="0" bIns="0" anchor="t">
             <a:spAutoFit/>
           </a:bodyPr>
           <a:lstStyle/>
@@ -10686,7 +10594,7 @@
           <a:noFill/>
         </p:spPr>
         <p:txBody>
-          <a:bodyPr wrap="square" lIns="0" rIns="0" tIns="0" bIns="0" anchor="t">
+          <a:bodyPr wrap="square" lIns="0" tIns="0" rIns="0" bIns="0" anchor="t">
             <a:spAutoFit/>
           </a:bodyPr>
           <a:lstStyle/>
@@ -10751,6 +10659,7 @@
           <a:lstStyle/>
           <a:p>
             <a:pPr algn="ctr"/>
+            <a:endParaRPr/>
           </a:p>
         </p:txBody>
       </p:sp>
@@ -10771,7 +10680,7 @@
           <a:noFill/>
         </p:spPr>
         <p:txBody>
-          <a:bodyPr wrap="square" lIns="0" rIns="0" tIns="0" bIns="0" anchor="t">
+          <a:bodyPr wrap="square" lIns="0" tIns="0" rIns="0" bIns="0" anchor="t">
             <a:spAutoFit/>
           </a:bodyPr>
           <a:lstStyle/>
@@ -10810,7 +10719,7 @@
           <a:noFill/>
         </p:spPr>
         <p:txBody>
-          <a:bodyPr wrap="square" lIns="0" rIns="0" tIns="0" bIns="0" anchor="t">
+          <a:bodyPr wrap="square" lIns="0" tIns="0" rIns="0" bIns="0" anchor="t">
             <a:spAutoFit/>
           </a:bodyPr>
           <a:lstStyle/>
@@ -10849,7 +10758,7 @@
           <a:noFill/>
         </p:spPr>
         <p:txBody>
-          <a:bodyPr wrap="square" lIns="0" rIns="0" tIns="0" bIns="0" anchor="t">
+          <a:bodyPr wrap="square" lIns="0" tIns="0" rIns="0" bIns="0" anchor="t">
             <a:spAutoFit/>
           </a:bodyPr>
           <a:lstStyle/>
@@ -10914,6 +10823,7 @@
           <a:lstStyle/>
           <a:p>
             <a:pPr algn="ctr"/>
+            <a:endParaRPr/>
           </a:p>
         </p:txBody>
       </p:sp>
@@ -10934,7 +10844,7 @@
           <a:noFill/>
         </p:spPr>
         <p:txBody>
-          <a:bodyPr wrap="square" lIns="0" rIns="0" tIns="0" bIns="0" anchor="t">
+          <a:bodyPr wrap="square" lIns="0" tIns="0" rIns="0" bIns="0" anchor="t">
             <a:spAutoFit/>
           </a:bodyPr>
           <a:lstStyle/>
@@ -10973,7 +10883,7 @@
           <a:noFill/>
         </p:spPr>
         <p:txBody>
-          <a:bodyPr wrap="square" lIns="0" rIns="0" tIns="0" bIns="0" anchor="t">
+          <a:bodyPr wrap="square" lIns="0" tIns="0" rIns="0" bIns="0" anchor="t">
             <a:spAutoFit/>
           </a:bodyPr>
           <a:lstStyle/>
@@ -11012,7 +10922,7 @@
           <a:noFill/>
         </p:spPr>
         <p:txBody>
-          <a:bodyPr wrap="square" lIns="0" rIns="0" tIns="0" bIns="0" anchor="t">
+          <a:bodyPr wrap="square" lIns="0" tIns="0" rIns="0" bIns="0" anchor="t">
             <a:spAutoFit/>
           </a:bodyPr>
           <a:lstStyle/>
@@ -11077,6 +10987,7 @@
           <a:lstStyle/>
           <a:p>
             <a:pPr algn="ctr"/>
+            <a:endParaRPr/>
           </a:p>
         </p:txBody>
       </p:sp>
@@ -11097,7 +11008,7 @@
           <a:noFill/>
         </p:spPr>
         <p:txBody>
-          <a:bodyPr wrap="square" lIns="0" rIns="0" tIns="0" bIns="0" anchor="t">
+          <a:bodyPr wrap="square" lIns="0" tIns="0" rIns="0" bIns="0" anchor="t">
             <a:spAutoFit/>
           </a:bodyPr>
           <a:lstStyle/>
@@ -11136,7 +11047,7 @@
           <a:noFill/>
         </p:spPr>
         <p:txBody>
-          <a:bodyPr wrap="square" lIns="0" rIns="0" tIns="0" bIns="0" anchor="t">
+          <a:bodyPr wrap="square" lIns="0" tIns="0" rIns="0" bIns="0" anchor="t">
             <a:spAutoFit/>
           </a:bodyPr>
           <a:lstStyle/>
@@ -11175,7 +11086,7 @@
           <a:noFill/>
         </p:spPr>
         <p:txBody>
-          <a:bodyPr wrap="square" lIns="0" rIns="0" tIns="0" bIns="0" anchor="t">
+          <a:bodyPr wrap="square" lIns="0" tIns="0" rIns="0" bIns="0" anchor="t">
             <a:spAutoFit/>
           </a:bodyPr>
           <a:lstStyle/>
@@ -11240,6 +11151,7 @@
           <a:lstStyle/>
           <a:p>
             <a:pPr algn="ctr"/>
+            <a:endParaRPr/>
           </a:p>
         </p:txBody>
       </p:sp>
@@ -11260,7 +11172,7 @@
           <a:noFill/>
         </p:spPr>
         <p:txBody>
-          <a:bodyPr wrap="square" lIns="0" rIns="0" tIns="0" bIns="0" anchor="t">
+          <a:bodyPr wrap="square" lIns="0" tIns="0" rIns="0" bIns="0" anchor="t">
             <a:spAutoFit/>
           </a:bodyPr>
           <a:lstStyle/>
@@ -11299,7 +11211,7 @@
           <a:noFill/>
         </p:spPr>
         <p:txBody>
-          <a:bodyPr wrap="square" lIns="0" rIns="0" tIns="0" bIns="0" anchor="t">
+          <a:bodyPr wrap="square" lIns="0" tIns="0" rIns="0" bIns="0" anchor="t">
             <a:spAutoFit/>
           </a:bodyPr>
           <a:lstStyle/>
@@ -11338,7 +11250,7 @@
           <a:noFill/>
         </p:spPr>
         <p:txBody>
-          <a:bodyPr wrap="square" lIns="0" rIns="0" tIns="0" bIns="0" anchor="t">
+          <a:bodyPr wrap="square" lIns="0" tIns="0" rIns="0" bIns="0" anchor="t">
             <a:spAutoFit/>
           </a:bodyPr>
           <a:lstStyle/>
@@ -11369,7 +11281,7 @@
 </file>
 
 <file path=ppt/slides/slide15.xml><?xml version="1.0" encoding="utf-8"?>
-<p:sld xmlns:a="http://schemas.openxmlformats.org/drawingml/2006/main" xmlns:p="http://schemas.openxmlformats.org/presentationml/2006/main" xmlns:r="http://schemas.openxmlformats.org/officeDocument/2006/relationships">
+<p:sld xmlns:a="http://schemas.openxmlformats.org/drawingml/2006/main" xmlns:r="http://schemas.openxmlformats.org/officeDocument/2006/relationships" xmlns:p="http://schemas.openxmlformats.org/presentationml/2006/main">
   <p:cSld>
     <p:spTree>
       <p:nvGrpSpPr>
@@ -11377,7 +11289,14 @@
         <p:cNvGrpSpPr/>
         <p:nvPr/>
       </p:nvGrpSpPr>
-      <p:grpSpPr/>
+      <p:grpSpPr>
+        <a:xfrm>
+          <a:off x="0" y="0"/>
+          <a:ext cx="0" cy="0"/>
+          <a:chOff x="0" y="0"/>
+          <a:chExt cx="0" cy="0"/>
+        </a:xfrm>
+      </p:grpSpPr>
       <p:sp>
         <p:nvSpPr>
           <p:cNvPr id="2" name="Rectangle 1"/>
@@ -11419,6 +11338,7 @@
           <a:lstStyle/>
           <a:p>
             <a:pPr algn="ctr"/>
+            <a:endParaRPr/>
           </a:p>
         </p:txBody>
       </p:sp>
@@ -11439,7 +11359,7 @@
           <a:noFill/>
         </p:spPr>
         <p:txBody>
-          <a:bodyPr wrap="square" lIns="0" rIns="0" tIns="0" bIns="0" anchor="t">
+          <a:bodyPr wrap="square" lIns="0" tIns="0" rIns="0" bIns="0" anchor="t">
             <a:spAutoFit/>
           </a:bodyPr>
           <a:lstStyle/>
@@ -11478,7 +11398,7 @@
           <a:noFill/>
         </p:spPr>
         <p:txBody>
-          <a:bodyPr wrap="square" lIns="0" rIns="0" tIns="0" bIns="0" anchor="t">
+          <a:bodyPr wrap="square" lIns="0" tIns="0" rIns="0" bIns="0" anchor="t">
             <a:spAutoFit/>
           </a:bodyPr>
           <a:lstStyle/>
@@ -11517,7 +11437,7 @@
           <a:noFill/>
         </p:spPr>
         <p:txBody>
-          <a:bodyPr wrap="square" lIns="0" rIns="0" tIns="0" bIns="0" anchor="t">
+          <a:bodyPr wrap="square" lIns="0" tIns="0" rIns="0" bIns="0" anchor="t">
             <a:spAutoFit/>
           </a:bodyPr>
           <a:lstStyle/>
@@ -11556,7 +11476,7 @@
           <a:noFill/>
         </p:spPr>
         <p:txBody>
-          <a:bodyPr wrap="square" lIns="0" rIns="0" tIns="0" bIns="0" anchor="t">
+          <a:bodyPr wrap="square" lIns="0" tIns="0" rIns="0" bIns="0" anchor="t">
             <a:spAutoFit/>
           </a:bodyPr>
           <a:lstStyle/>
@@ -11619,6 +11539,7 @@
           <a:lstStyle/>
           <a:p>
             <a:pPr algn="ctr"/>
+            <a:endParaRPr/>
           </a:p>
         </p:txBody>
       </p:sp>
@@ -11631,15 +11552,15 @@
           <p:nvPr/>
         </p:nvPicPr>
         <p:blipFill>
-          <a:blip r:embed="rId2"/>
+          <a:blip r:embed="rId3"/>
           <a:stretch>
             <a:fillRect/>
           </a:stretch>
         </p:blipFill>
         <p:spPr>
           <a:xfrm>
-            <a:off x="640080" y="2011680"/>
-            <a:ext cx="4754880" cy="4206240"/>
+            <a:off x="813816" y="1847088"/>
+            <a:ext cx="3849624" cy="3405436"/>
           </a:xfrm>
           <a:prstGeom prst="rect">
             <a:avLst/>
@@ -11689,6 +11610,7 @@
           <a:lstStyle/>
           <a:p>
             <a:pPr algn="ctr"/>
+            <a:endParaRPr/>
           </a:p>
         </p:txBody>
       </p:sp>
@@ -11733,6 +11655,7 @@
           <a:lstStyle/>
           <a:p>
             <a:pPr algn="ctr"/>
+            <a:endParaRPr/>
           </a:p>
         </p:txBody>
       </p:sp>
@@ -11753,7 +11676,7 @@
           <a:noFill/>
         </p:spPr>
         <p:txBody>
-          <a:bodyPr wrap="square" lIns="0" rIns="0" tIns="0" bIns="0" anchor="t">
+          <a:bodyPr wrap="square" lIns="0" tIns="0" rIns="0" bIns="0" anchor="t">
             <a:spAutoFit/>
           </a:bodyPr>
           <a:lstStyle/>
@@ -11792,7 +11715,7 @@
           <a:noFill/>
         </p:spPr>
         <p:txBody>
-          <a:bodyPr wrap="square" lIns="0" rIns="0" tIns="0" bIns="0" anchor="t">
+          <a:bodyPr wrap="square" lIns="0" tIns="0" rIns="0" bIns="0" anchor="t">
             <a:spAutoFit/>
           </a:bodyPr>
           <a:lstStyle/>
@@ -11831,7 +11754,7 @@
           <a:noFill/>
         </p:spPr>
         <p:txBody>
-          <a:bodyPr wrap="square" lIns="0" rIns="0" tIns="0" bIns="0" anchor="t">
+          <a:bodyPr wrap="square" lIns="0" tIns="0" rIns="0" bIns="0" anchor="t">
             <a:spAutoFit/>
           </a:bodyPr>
           <a:lstStyle/>
@@ -11896,6 +11819,7 @@
           <a:lstStyle/>
           <a:p>
             <a:pPr algn="ctr"/>
+            <a:endParaRPr/>
           </a:p>
         </p:txBody>
       </p:sp>
@@ -11940,6 +11864,7 @@
           <a:lstStyle/>
           <a:p>
             <a:pPr algn="ctr"/>
+            <a:endParaRPr/>
           </a:p>
         </p:txBody>
       </p:sp>
@@ -11960,7 +11885,7 @@
           <a:noFill/>
         </p:spPr>
         <p:txBody>
-          <a:bodyPr wrap="square" lIns="0" rIns="0" tIns="0" bIns="0" anchor="t">
+          <a:bodyPr wrap="square" lIns="0" tIns="0" rIns="0" bIns="0" anchor="t">
             <a:spAutoFit/>
           </a:bodyPr>
           <a:lstStyle/>
@@ -11999,7 +11924,7 @@
           <a:noFill/>
         </p:spPr>
         <p:txBody>
-          <a:bodyPr wrap="square" lIns="0" rIns="0" tIns="0" bIns="0" anchor="t">
+          <a:bodyPr wrap="square" lIns="0" tIns="0" rIns="0" bIns="0" anchor="t">
             <a:spAutoFit/>
           </a:bodyPr>
           <a:lstStyle/>
@@ -12038,7 +11963,7 @@
           <a:noFill/>
         </p:spPr>
         <p:txBody>
-          <a:bodyPr wrap="square" lIns="0" rIns="0" tIns="0" bIns="0" anchor="t">
+          <a:bodyPr wrap="square" lIns="0" tIns="0" rIns="0" bIns="0" anchor="t">
             <a:spAutoFit/>
           </a:bodyPr>
           <a:lstStyle/>
@@ -12103,6 +12028,7 @@
           <a:lstStyle/>
           <a:p>
             <a:pPr algn="ctr"/>
+            <a:endParaRPr/>
           </a:p>
         </p:txBody>
       </p:sp>
@@ -12147,6 +12073,7 @@
           <a:lstStyle/>
           <a:p>
             <a:pPr algn="ctr"/>
+            <a:endParaRPr/>
           </a:p>
         </p:txBody>
       </p:sp>
@@ -12167,7 +12094,7 @@
           <a:noFill/>
         </p:spPr>
         <p:txBody>
-          <a:bodyPr wrap="square" lIns="0" rIns="0" tIns="0" bIns="0" anchor="t">
+          <a:bodyPr wrap="square" lIns="0" tIns="0" rIns="0" bIns="0" anchor="t">
             <a:spAutoFit/>
           </a:bodyPr>
           <a:lstStyle/>
@@ -12206,7 +12133,7 @@
           <a:noFill/>
         </p:spPr>
         <p:txBody>
-          <a:bodyPr wrap="square" lIns="0" rIns="0" tIns="0" bIns="0" anchor="t">
+          <a:bodyPr wrap="square" lIns="0" tIns="0" rIns="0" bIns="0" anchor="t">
             <a:spAutoFit/>
           </a:bodyPr>
           <a:lstStyle/>
@@ -12245,7 +12172,7 @@
           <a:noFill/>
         </p:spPr>
         <p:txBody>
-          <a:bodyPr wrap="square" lIns="0" rIns="0" tIns="0" bIns="0" anchor="t">
+          <a:bodyPr wrap="square" lIns="0" tIns="0" rIns="0" bIns="0" anchor="t">
             <a:spAutoFit/>
           </a:bodyPr>
           <a:lstStyle/>
@@ -12310,6 +12237,7 @@
           <a:lstStyle/>
           <a:p>
             <a:pPr algn="ctr"/>
+            <a:endParaRPr/>
           </a:p>
         </p:txBody>
       </p:sp>
@@ -12354,6 +12282,7 @@
           <a:lstStyle/>
           <a:p>
             <a:pPr algn="ctr"/>
+            <a:endParaRPr/>
           </a:p>
         </p:txBody>
       </p:sp>
@@ -12374,7 +12303,7 @@
           <a:noFill/>
         </p:spPr>
         <p:txBody>
-          <a:bodyPr wrap="square" lIns="0" rIns="0" tIns="0" bIns="0" anchor="t">
+          <a:bodyPr wrap="square" lIns="0" tIns="0" rIns="0" bIns="0" anchor="t">
             <a:spAutoFit/>
           </a:bodyPr>
           <a:lstStyle/>
@@ -12413,7 +12342,7 @@
           <a:noFill/>
         </p:spPr>
         <p:txBody>
-          <a:bodyPr wrap="square" lIns="0" rIns="0" tIns="0" bIns="0" anchor="t">
+          <a:bodyPr wrap="square" lIns="0" tIns="0" rIns="0" bIns="0" anchor="t">
             <a:spAutoFit/>
           </a:bodyPr>
           <a:lstStyle/>
@@ -12452,7 +12381,7 @@
           <a:noFill/>
         </p:spPr>
         <p:txBody>
-          <a:bodyPr wrap="square" lIns="0" rIns="0" tIns="0" bIns="0" anchor="t">
+          <a:bodyPr wrap="square" lIns="0" tIns="0" rIns="0" bIns="0" anchor="t">
             <a:spAutoFit/>
           </a:bodyPr>
           <a:lstStyle/>
@@ -12517,6 +12446,7 @@
           <a:lstStyle/>
           <a:p>
             <a:pPr algn="ctr"/>
+            <a:endParaRPr/>
           </a:p>
         </p:txBody>
       </p:sp>
@@ -12537,7 +12467,7 @@
           <a:noFill/>
         </p:spPr>
         <p:txBody>
-          <a:bodyPr wrap="square" lIns="0" rIns="0" tIns="0" bIns="0" anchor="t">
+          <a:bodyPr wrap="square" lIns="0" tIns="0" rIns="0" bIns="0" anchor="t">
             <a:spAutoFit/>
           </a:bodyPr>
           <a:lstStyle/>
@@ -12576,7 +12506,7 @@
           <a:noFill/>
         </p:spPr>
         <p:txBody>
-          <a:bodyPr wrap="square" lIns="0" rIns="0" tIns="0" bIns="0" anchor="t">
+          <a:bodyPr wrap="square" lIns="0" tIns="0" rIns="0" bIns="0" anchor="t">
             <a:spAutoFit/>
           </a:bodyPr>
           <a:lstStyle/>
@@ -12606,8 +12536,8 @@
         </p:nvSpPr>
         <p:spPr>
           <a:xfrm>
-            <a:off x="5669280" y="5029200"/>
-            <a:ext cx="6217920" cy="1554480"/>
+            <a:off x="756209" y="5218093"/>
+            <a:ext cx="4336999" cy="954107"/>
           </a:xfrm>
           <a:prstGeom prst="rect">
             <a:avLst/>
@@ -12628,6 +12558,7 @@
               </a:defRPr>
             </a:pPr>
             <a:r>
+              <a:rPr sz="1400" dirty="0"/>
               <a:t>Confusion Matrix Explanation:</a:t>
             </a:r>
           </a:p>
@@ -12636,6 +12567,7 @@
               <a:defRPr sz="900"/>
             </a:pPr>
             <a:r>
+              <a:rPr sz="1050" dirty="0"/>
               <a:t>TN 4696 = correctly predicted healthy</a:t>
             </a:r>
           </a:p>
@@ -12644,6 +12576,7 @@
               <a:defRPr sz="900"/>
             </a:pPr>
             <a:r>
+              <a:rPr sz="1050" dirty="0"/>
               <a:t>FP 2096 = false alarm (why not 2095? = model decision boundary)</a:t>
             </a:r>
           </a:p>
@@ -12652,6 +12585,7 @@
               <a:defRPr sz="900"/>
             </a:pPr>
             <a:r>
+              <a:rPr sz="1050" dirty="0"/>
               <a:t>FN 1446 = missed diabetic cases</a:t>
             </a:r>
           </a:p>
@@ -12660,6 +12594,7 @@
               <a:defRPr sz="900"/>
             </a:pPr>
             <a:r>
+              <a:rPr sz="1050" dirty="0"/>
               <a:t>TP 5574 = correctly caught diabetics</a:t>
             </a:r>
           </a:p>
@@ -12674,7 +12609,7 @@
 </file>
 
 <file path=ppt/slides/slide16.xml><?xml version="1.0" encoding="utf-8"?>
-<p:sld xmlns:a="http://schemas.openxmlformats.org/drawingml/2006/main" xmlns:p="http://schemas.openxmlformats.org/presentationml/2006/main" xmlns:r="http://schemas.openxmlformats.org/officeDocument/2006/relationships">
+<p:sld xmlns:a="http://schemas.openxmlformats.org/drawingml/2006/main" xmlns:r="http://schemas.openxmlformats.org/officeDocument/2006/relationships" xmlns:p="http://schemas.openxmlformats.org/presentationml/2006/main">
   <p:cSld>
     <p:spTree>
       <p:nvGrpSpPr>
@@ -12682,7 +12617,14 @@
         <p:cNvGrpSpPr/>
         <p:nvPr/>
       </p:nvGrpSpPr>
-      <p:grpSpPr/>
+      <p:grpSpPr>
+        <a:xfrm>
+          <a:off x="0" y="0"/>
+          <a:ext cx="0" cy="0"/>
+          <a:chOff x="0" y="0"/>
+          <a:chExt cx="0" cy="0"/>
+        </a:xfrm>
+      </p:grpSpPr>
       <p:sp>
         <p:nvSpPr>
           <p:cNvPr id="2" name="Rectangle 1"/>
@@ -12724,6 +12666,7 @@
           <a:lstStyle/>
           <a:p>
             <a:pPr algn="ctr"/>
+            <a:endParaRPr/>
           </a:p>
         </p:txBody>
       </p:sp>
@@ -12744,7 +12687,7 @@
           <a:noFill/>
         </p:spPr>
         <p:txBody>
-          <a:bodyPr wrap="square" lIns="0" rIns="0" tIns="0" bIns="0" anchor="t">
+          <a:bodyPr wrap="square" lIns="0" tIns="0" rIns="0" bIns="0" anchor="t">
             <a:spAutoFit/>
           </a:bodyPr>
           <a:lstStyle/>
@@ -12783,7 +12726,7 @@
           <a:noFill/>
         </p:spPr>
         <p:txBody>
-          <a:bodyPr wrap="square" lIns="0" rIns="0" tIns="0" bIns="0" anchor="t">
+          <a:bodyPr wrap="square" lIns="0" tIns="0" rIns="0" bIns="0" anchor="t">
             <a:spAutoFit/>
           </a:bodyPr>
           <a:lstStyle/>
@@ -12822,7 +12765,7 @@
           <a:noFill/>
         </p:spPr>
         <p:txBody>
-          <a:bodyPr wrap="square" lIns="0" rIns="0" tIns="0" bIns="0" anchor="t">
+          <a:bodyPr wrap="square" lIns="0" tIns="0" rIns="0" bIns="0" anchor="t">
             <a:spAutoFit/>
           </a:bodyPr>
           <a:lstStyle/>
@@ -12861,7 +12804,7 @@
           <a:noFill/>
         </p:spPr>
         <p:txBody>
-          <a:bodyPr wrap="square" lIns="0" rIns="0" tIns="0" bIns="0" anchor="t">
+          <a:bodyPr wrap="square" lIns="0" tIns="0" rIns="0" bIns="0" anchor="t">
             <a:spAutoFit/>
           </a:bodyPr>
           <a:lstStyle/>
@@ -12924,6 +12867,7 @@
           <a:lstStyle/>
           <a:p>
             <a:pPr algn="ctr"/>
+            <a:endParaRPr/>
           </a:p>
         </p:txBody>
       </p:sp>
@@ -12936,7 +12880,7 @@
           <p:nvPr/>
         </p:nvPicPr>
         <p:blipFill>
-          <a:blip r:embed="rId2"/>
+          <a:blip r:embed="rId3"/>
           <a:stretch>
             <a:fillRect/>
           </a:stretch>
@@ -12968,7 +12912,7 @@
           <a:noFill/>
         </p:spPr>
         <p:txBody>
-          <a:bodyPr wrap="square" lIns="0" rIns="0" tIns="0" bIns="0" anchor="t">
+          <a:bodyPr wrap="square" lIns="0" tIns="0" rIns="0" bIns="0" anchor="t">
             <a:spAutoFit/>
           </a:bodyPr>
           <a:lstStyle/>
@@ -13007,7 +12951,7 @@
           <a:noFill/>
         </p:spPr>
         <p:txBody>
-          <a:bodyPr wrap="square" lIns="0" rIns="0" tIns="0" bIns="0" anchor="t">
+          <a:bodyPr wrap="square" lIns="0" tIns="0" rIns="0" bIns="0" anchor="t">
             <a:spAutoFit/>
           </a:bodyPr>
           <a:lstStyle/>
@@ -13046,7 +12990,7 @@
           <a:noFill/>
         </p:spPr>
         <p:txBody>
-          <a:bodyPr wrap="square" lIns="0" rIns="0" tIns="0" bIns="0" anchor="t">
+          <a:bodyPr wrap="square" lIns="0" tIns="0" rIns="0" bIns="0" anchor="t">
             <a:spAutoFit/>
           </a:bodyPr>
           <a:lstStyle/>
@@ -13085,7 +13029,7 @@
           <a:noFill/>
         </p:spPr>
         <p:txBody>
-          <a:bodyPr wrap="square" lIns="0" rIns="0" tIns="0" bIns="0" anchor="t">
+          <a:bodyPr wrap="square" lIns="0" tIns="0" rIns="0" bIns="0" anchor="t">
             <a:spAutoFit/>
           </a:bodyPr>
           <a:lstStyle/>
@@ -13124,7 +13068,7 @@
           <a:noFill/>
         </p:spPr>
         <p:txBody>
-          <a:bodyPr wrap="square" lIns="0" rIns="0" tIns="0" bIns="0" anchor="t">
+          <a:bodyPr wrap="square" lIns="0" tIns="0" rIns="0" bIns="0" anchor="t">
             <a:spAutoFit/>
           </a:bodyPr>
           <a:lstStyle/>
@@ -13163,7 +13107,7 @@
           <a:noFill/>
         </p:spPr>
         <p:txBody>
-          <a:bodyPr wrap="square" lIns="0" rIns="0" tIns="0" bIns="0" anchor="t">
+          <a:bodyPr wrap="square" lIns="0" tIns="0" rIns="0" bIns="0" anchor="t">
             <a:spAutoFit/>
           </a:bodyPr>
           <a:lstStyle/>
@@ -13202,7 +13146,7 @@
           <a:noFill/>
         </p:spPr>
         <p:txBody>
-          <a:bodyPr wrap="square" lIns="0" rIns="0" tIns="0" bIns="0" anchor="t">
+          <a:bodyPr wrap="square" lIns="0" tIns="0" rIns="0" bIns="0" anchor="t">
             <a:spAutoFit/>
           </a:bodyPr>
           <a:lstStyle/>
@@ -13241,7 +13185,7 @@
           <a:noFill/>
         </p:spPr>
         <p:txBody>
-          <a:bodyPr wrap="square" lIns="0" rIns="0" tIns="0" bIns="0" anchor="t">
+          <a:bodyPr wrap="square" lIns="0" tIns="0" rIns="0" bIns="0" anchor="t">
             <a:spAutoFit/>
           </a:bodyPr>
           <a:lstStyle/>
@@ -13280,7 +13224,7 @@
           <a:noFill/>
         </p:spPr>
         <p:txBody>
-          <a:bodyPr wrap="square" lIns="0" rIns="0" tIns="0" bIns="0" anchor="t">
+          <a:bodyPr wrap="square" lIns="0" tIns="0" rIns="0" bIns="0" anchor="t">
             <a:spAutoFit/>
           </a:bodyPr>
           <a:lstStyle/>
@@ -13319,7 +13263,7 @@
           <a:noFill/>
         </p:spPr>
         <p:txBody>
-          <a:bodyPr wrap="square" lIns="0" rIns="0" tIns="0" bIns="0" anchor="t">
+          <a:bodyPr wrap="square" lIns="0" tIns="0" rIns="0" bIns="0" anchor="t">
             <a:spAutoFit/>
           </a:bodyPr>
           <a:lstStyle/>
@@ -13358,7 +13302,7 @@
           <a:noFill/>
         </p:spPr>
         <p:txBody>
-          <a:bodyPr wrap="square" lIns="0" rIns="0" tIns="0" bIns="0" anchor="t">
+          <a:bodyPr wrap="square" lIns="0" tIns="0" rIns="0" bIns="0" anchor="t">
             <a:spAutoFit/>
           </a:bodyPr>
           <a:lstStyle/>
@@ -13397,7 +13341,7 @@
           <a:noFill/>
         </p:spPr>
         <p:txBody>
-          <a:bodyPr wrap="square" lIns="0" rIns="0" tIns="0" bIns="0" anchor="t">
+          <a:bodyPr wrap="square" lIns="0" tIns="0" rIns="0" bIns="0" anchor="t">
             <a:spAutoFit/>
           </a:bodyPr>
           <a:lstStyle/>
@@ -13436,7 +13380,7 @@
           <a:noFill/>
         </p:spPr>
         <p:txBody>
-          <a:bodyPr wrap="square" lIns="0" rIns="0" tIns="0" bIns="0" anchor="t">
+          <a:bodyPr wrap="square" lIns="0" tIns="0" rIns="0" bIns="0" anchor="t">
             <a:spAutoFit/>
           </a:bodyPr>
           <a:lstStyle/>
@@ -13475,7 +13419,7 @@
           <a:noFill/>
         </p:spPr>
         <p:txBody>
-          <a:bodyPr wrap="square" lIns="0" rIns="0" tIns="0" bIns="0" anchor="t">
+          <a:bodyPr wrap="square" lIns="0" tIns="0" rIns="0" bIns="0" anchor="t">
             <a:spAutoFit/>
           </a:bodyPr>
           <a:lstStyle/>
@@ -13514,7 +13458,7 @@
           <a:noFill/>
         </p:spPr>
         <p:txBody>
-          <a:bodyPr wrap="square" lIns="0" rIns="0" tIns="0" bIns="0" anchor="t">
+          <a:bodyPr wrap="square" lIns="0" tIns="0" rIns="0" bIns="0" anchor="t">
             <a:spAutoFit/>
           </a:bodyPr>
           <a:lstStyle/>
@@ -13553,7 +13497,7 @@
           <a:noFill/>
         </p:spPr>
         <p:txBody>
-          <a:bodyPr wrap="square" lIns="0" rIns="0" tIns="0" bIns="0" anchor="t">
+          <a:bodyPr wrap="square" lIns="0" tIns="0" rIns="0" bIns="0" anchor="t">
             <a:spAutoFit/>
           </a:bodyPr>
           <a:lstStyle/>
@@ -13584,7 +13528,7 @@
 </file>
 
 <file path=ppt/slides/slide17.xml><?xml version="1.0" encoding="utf-8"?>
-<p:sld xmlns:a="http://schemas.openxmlformats.org/drawingml/2006/main" xmlns:p="http://schemas.openxmlformats.org/presentationml/2006/main" xmlns:r="http://schemas.openxmlformats.org/officeDocument/2006/relationships">
+<p:sld xmlns:a="http://schemas.openxmlformats.org/drawingml/2006/main" xmlns:r="http://schemas.openxmlformats.org/officeDocument/2006/relationships" xmlns:p="http://schemas.openxmlformats.org/presentationml/2006/main">
   <p:cSld>
     <p:spTree>
       <p:nvGrpSpPr>
@@ -13592,7 +13536,14 @@
         <p:cNvGrpSpPr/>
         <p:nvPr/>
       </p:nvGrpSpPr>
-      <p:grpSpPr/>
+      <p:grpSpPr>
+        <a:xfrm>
+          <a:off x="0" y="0"/>
+          <a:ext cx="0" cy="0"/>
+          <a:chOff x="0" y="0"/>
+          <a:chExt cx="0" cy="0"/>
+        </a:xfrm>
+      </p:grpSpPr>
       <p:sp>
         <p:nvSpPr>
           <p:cNvPr id="2" name="Rectangle 1"/>
@@ -13634,6 +13585,7 @@
           <a:lstStyle/>
           <a:p>
             <a:pPr algn="ctr"/>
+            <a:endParaRPr/>
           </a:p>
         </p:txBody>
       </p:sp>
@@ -13654,7 +13606,7 @@
           <a:noFill/>
         </p:spPr>
         <p:txBody>
-          <a:bodyPr wrap="square" lIns="0" rIns="0" tIns="0" bIns="0" anchor="t">
+          <a:bodyPr wrap="square" lIns="0" tIns="0" rIns="0" bIns="0" anchor="t">
             <a:spAutoFit/>
           </a:bodyPr>
           <a:lstStyle/>
@@ -13693,7 +13645,7 @@
           <a:noFill/>
         </p:spPr>
         <p:txBody>
-          <a:bodyPr wrap="square" lIns="0" rIns="0" tIns="0" bIns="0" anchor="t">
+          <a:bodyPr wrap="square" lIns="0" tIns="0" rIns="0" bIns="0" anchor="t">
             <a:spAutoFit/>
           </a:bodyPr>
           <a:lstStyle/>
@@ -13732,7 +13684,7 @@
           <a:noFill/>
         </p:spPr>
         <p:txBody>
-          <a:bodyPr wrap="square" lIns="0" rIns="0" tIns="0" bIns="0" anchor="t">
+          <a:bodyPr wrap="square" lIns="0" tIns="0" rIns="0" bIns="0" anchor="t">
             <a:spAutoFit/>
           </a:bodyPr>
           <a:lstStyle/>
@@ -13771,7 +13723,7 @@
           <a:noFill/>
         </p:spPr>
         <p:txBody>
-          <a:bodyPr wrap="square" lIns="0" rIns="0" tIns="0" bIns="0" anchor="t">
+          <a:bodyPr wrap="square" lIns="0" tIns="0" rIns="0" bIns="0" anchor="t">
             <a:spAutoFit/>
           </a:bodyPr>
           <a:lstStyle/>
@@ -13834,6 +13786,7 @@
           <a:lstStyle/>
           <a:p>
             <a:pPr algn="ctr"/>
+            <a:endParaRPr/>
           </a:p>
         </p:txBody>
       </p:sp>
@@ -13854,7 +13807,7 @@
           <a:noFill/>
         </p:spPr>
         <p:txBody>
-          <a:bodyPr wrap="square" lIns="0" rIns="0" tIns="0" bIns="0">
+          <a:bodyPr wrap="square" lIns="0" tIns="0" rIns="0" bIns="0">
             <a:spAutoFit/>
           </a:bodyPr>
           <a:lstStyle/>
@@ -14043,6 +13996,7 @@
           <a:lstStyle/>
           <a:p>
             <a:pPr algn="ctr"/>
+            <a:endParaRPr/>
           </a:p>
         </p:txBody>
       </p:sp>
@@ -14087,6 +14041,7 @@
           <a:lstStyle/>
           <a:p>
             <a:pPr algn="ctr"/>
+            <a:endParaRPr/>
           </a:p>
         </p:txBody>
       </p:sp>
@@ -14107,7 +14062,7 @@
           <a:noFill/>
         </p:spPr>
         <p:txBody>
-          <a:bodyPr wrap="square" lIns="0" rIns="0" tIns="0" bIns="0" anchor="t">
+          <a:bodyPr wrap="square" lIns="0" tIns="0" rIns="0" bIns="0" anchor="t">
             <a:spAutoFit/>
           </a:bodyPr>
           <a:lstStyle/>
@@ -14146,7 +14101,7 @@
           <a:noFill/>
         </p:spPr>
         <p:txBody>
-          <a:bodyPr wrap="square" lIns="0" rIns="0" tIns="0" bIns="0" anchor="t">
+          <a:bodyPr wrap="square" lIns="0" tIns="0" rIns="0" bIns="0" anchor="t">
             <a:spAutoFit/>
           </a:bodyPr>
           <a:lstStyle/>
@@ -14211,6 +14166,7 @@
           <a:lstStyle/>
           <a:p>
             <a:pPr algn="ctr"/>
+            <a:endParaRPr/>
           </a:p>
         </p:txBody>
       </p:sp>
@@ -14231,7 +14187,7 @@
           <a:noFill/>
         </p:spPr>
         <p:txBody>
-          <a:bodyPr wrap="square" lIns="0" rIns="0" tIns="0" bIns="0" anchor="t">
+          <a:bodyPr wrap="square" lIns="0" tIns="0" rIns="0" bIns="0" anchor="t">
             <a:spAutoFit/>
           </a:bodyPr>
           <a:lstStyle/>
@@ -14270,7 +14226,7 @@
           <a:noFill/>
         </p:spPr>
         <p:txBody>
-          <a:bodyPr wrap="square" lIns="0" rIns="0" tIns="0" bIns="0" anchor="t">
+          <a:bodyPr wrap="square" lIns="0" tIns="0" rIns="0" bIns="0" anchor="t">
             <a:spAutoFit/>
           </a:bodyPr>
           <a:lstStyle/>
@@ -14335,6 +14291,7 @@
           <a:lstStyle/>
           <a:p>
             <a:pPr algn="ctr"/>
+            <a:endParaRPr/>
           </a:p>
         </p:txBody>
       </p:sp>
@@ -14355,7 +14312,7 @@
           <a:noFill/>
         </p:spPr>
         <p:txBody>
-          <a:bodyPr wrap="square" lIns="0" rIns="0" tIns="0" bIns="0" anchor="t">
+          <a:bodyPr wrap="square" lIns="0" tIns="0" rIns="0" bIns="0" anchor="t">
             <a:spAutoFit/>
           </a:bodyPr>
           <a:lstStyle/>
@@ -14394,7 +14351,7 @@
           <a:noFill/>
         </p:spPr>
         <p:txBody>
-          <a:bodyPr wrap="square" lIns="0" rIns="0" tIns="0" bIns="0" anchor="t">
+          <a:bodyPr wrap="square" lIns="0" tIns="0" rIns="0" bIns="0" anchor="t">
             <a:spAutoFit/>
           </a:bodyPr>
           <a:lstStyle/>
@@ -14459,6 +14416,7 @@
           <a:lstStyle/>
           <a:p>
             <a:pPr algn="ctr"/>
+            <a:endParaRPr/>
           </a:p>
         </p:txBody>
       </p:sp>
@@ -14479,7 +14437,7 @@
           <a:noFill/>
         </p:spPr>
         <p:txBody>
-          <a:bodyPr wrap="square" lIns="0" rIns="0" tIns="0" bIns="0" anchor="t">
+          <a:bodyPr wrap="square" lIns="0" tIns="0" rIns="0" bIns="0" anchor="t">
             <a:spAutoFit/>
           </a:bodyPr>
           <a:lstStyle/>
@@ -14518,7 +14476,7 @@
           <a:noFill/>
         </p:spPr>
         <p:txBody>
-          <a:bodyPr wrap="square" lIns="0" rIns="0" tIns="0" bIns="0" anchor="t">
+          <a:bodyPr wrap="square" lIns="0" tIns="0" rIns="0" bIns="0" anchor="t">
             <a:spAutoFit/>
           </a:bodyPr>
           <a:lstStyle/>
@@ -14583,6 +14541,7 @@
           <a:lstStyle/>
           <a:p>
             <a:pPr algn="ctr"/>
+            <a:endParaRPr/>
           </a:p>
         </p:txBody>
       </p:sp>
@@ -14603,7 +14562,7 @@
           <a:noFill/>
         </p:spPr>
         <p:txBody>
-          <a:bodyPr wrap="square" lIns="0" rIns="0" tIns="0" bIns="0" anchor="t">
+          <a:bodyPr wrap="square" lIns="0" tIns="0" rIns="0" bIns="0" anchor="t">
             <a:spAutoFit/>
           </a:bodyPr>
           <a:lstStyle/>
@@ -14642,7 +14601,7 @@
           <a:noFill/>
         </p:spPr>
         <p:txBody>
-          <a:bodyPr wrap="square" lIns="0" rIns="0" tIns="0" bIns="0" anchor="t">
+          <a:bodyPr wrap="square" lIns="0" tIns="0" rIns="0" bIns="0" anchor="t">
             <a:spAutoFit/>
           </a:bodyPr>
           <a:lstStyle/>
@@ -14707,6 +14666,7 @@
           <a:lstStyle/>
           <a:p>
             <a:pPr algn="ctr"/>
+            <a:endParaRPr/>
           </a:p>
         </p:txBody>
       </p:sp>
@@ -14727,7 +14687,7 @@
           <a:noFill/>
         </p:spPr>
         <p:txBody>
-          <a:bodyPr wrap="square" lIns="0" rIns="0" tIns="0" bIns="0" anchor="t">
+          <a:bodyPr wrap="square" lIns="0" tIns="0" rIns="0" bIns="0" anchor="t">
             <a:spAutoFit/>
           </a:bodyPr>
           <a:lstStyle/>
@@ -14790,6 +14750,7 @@
           <a:lstStyle/>
           <a:p>
             <a:pPr algn="ctr"/>
+            <a:endParaRPr/>
           </a:p>
         </p:txBody>
       </p:sp>
@@ -14810,7 +14771,7 @@
           <a:noFill/>
         </p:spPr>
         <p:txBody>
-          <a:bodyPr wrap="square" lIns="0" rIns="0" tIns="0" bIns="0" anchor="t">
+          <a:bodyPr wrap="square" lIns="0" tIns="0" rIns="0" bIns="0" anchor="t">
             <a:spAutoFit/>
           </a:bodyPr>
           <a:lstStyle/>
@@ -14875,6 +14836,7 @@
           <a:lstStyle/>
           <a:p>
             <a:pPr algn="ctr"/>
+            <a:endParaRPr/>
           </a:p>
         </p:txBody>
       </p:sp>
@@ -14895,7 +14857,7 @@
           <a:noFill/>
         </p:spPr>
         <p:txBody>
-          <a:bodyPr wrap="square" lIns="0" rIns="0" tIns="0" bIns="0" anchor="t">
+          <a:bodyPr wrap="square" lIns="0" tIns="0" rIns="0" bIns="0" anchor="t">
             <a:spAutoFit/>
           </a:bodyPr>
           <a:lstStyle/>
@@ -14934,7 +14896,7 @@
           <a:noFill/>
         </p:spPr>
         <p:txBody>
-          <a:bodyPr wrap="square" lIns="0" rIns="0" tIns="0" bIns="0" anchor="t">
+          <a:bodyPr wrap="square" lIns="0" tIns="0" rIns="0" bIns="0" anchor="t">
             <a:spAutoFit/>
           </a:bodyPr>
           <a:lstStyle/>
@@ -14965,7 +14927,7 @@
 </file>
 
 <file path=ppt/slides/slide18.xml><?xml version="1.0" encoding="utf-8"?>
-<p:sld xmlns:a="http://schemas.openxmlformats.org/drawingml/2006/main" xmlns:p="http://schemas.openxmlformats.org/presentationml/2006/main" xmlns:r="http://schemas.openxmlformats.org/officeDocument/2006/relationships">
+<p:sld xmlns:a="http://schemas.openxmlformats.org/drawingml/2006/main" xmlns:r="http://schemas.openxmlformats.org/officeDocument/2006/relationships" xmlns:p="http://schemas.openxmlformats.org/presentationml/2006/main">
   <p:cSld>
     <p:spTree>
       <p:nvGrpSpPr>
@@ -14973,7 +14935,14 @@
         <p:cNvGrpSpPr/>
         <p:nvPr/>
       </p:nvGrpSpPr>
-      <p:grpSpPr/>
+      <p:grpSpPr>
+        <a:xfrm>
+          <a:off x="0" y="0"/>
+          <a:ext cx="0" cy="0"/>
+          <a:chOff x="0" y="0"/>
+          <a:chExt cx="0" cy="0"/>
+        </a:xfrm>
+      </p:grpSpPr>
       <p:sp>
         <p:nvSpPr>
           <p:cNvPr id="2" name="Rectangle 1"/>
@@ -15015,6 +14984,7 @@
           <a:lstStyle/>
           <a:p>
             <a:pPr algn="ctr"/>
+            <a:endParaRPr/>
           </a:p>
         </p:txBody>
       </p:sp>
@@ -15035,7 +15005,7 @@
           <a:noFill/>
         </p:spPr>
         <p:txBody>
-          <a:bodyPr wrap="square" lIns="0" rIns="0" tIns="0" bIns="0" anchor="t">
+          <a:bodyPr wrap="square" lIns="0" tIns="0" rIns="0" bIns="0" anchor="t">
             <a:spAutoFit/>
           </a:bodyPr>
           <a:lstStyle/>
@@ -15074,7 +15044,7 @@
           <a:noFill/>
         </p:spPr>
         <p:txBody>
-          <a:bodyPr wrap="square" lIns="0" rIns="0" tIns="0" bIns="0" anchor="t">
+          <a:bodyPr wrap="square" lIns="0" tIns="0" rIns="0" bIns="0" anchor="t">
             <a:spAutoFit/>
           </a:bodyPr>
           <a:lstStyle/>
@@ -15113,7 +15083,7 @@
           <a:noFill/>
         </p:spPr>
         <p:txBody>
-          <a:bodyPr wrap="square" lIns="0" rIns="0" tIns="0" bIns="0" anchor="t">
+          <a:bodyPr wrap="square" lIns="0" tIns="0" rIns="0" bIns="0" anchor="t">
             <a:spAutoFit/>
           </a:bodyPr>
           <a:lstStyle/>
@@ -15152,7 +15122,7 @@
           <a:noFill/>
         </p:spPr>
         <p:txBody>
-          <a:bodyPr wrap="square" lIns="0" rIns="0" tIns="0" bIns="0" anchor="t">
+          <a:bodyPr wrap="square" lIns="0" tIns="0" rIns="0" bIns="0" anchor="t">
             <a:spAutoFit/>
           </a:bodyPr>
           <a:lstStyle/>
@@ -15215,6 +15185,7 @@
           <a:lstStyle/>
           <a:p>
             <a:pPr algn="ctr"/>
+            <a:endParaRPr/>
           </a:p>
         </p:txBody>
       </p:sp>
@@ -15261,6 +15232,7 @@
           <a:lstStyle/>
           <a:p>
             <a:pPr algn="ctr"/>
+            <a:endParaRPr/>
           </a:p>
         </p:txBody>
       </p:sp>
@@ -15305,6 +15277,7 @@
           <a:lstStyle/>
           <a:p>
             <a:pPr algn="ctr"/>
+            <a:endParaRPr/>
           </a:p>
         </p:txBody>
       </p:sp>
@@ -15325,7 +15298,7 @@
           <a:noFill/>
         </p:spPr>
         <p:txBody>
-          <a:bodyPr wrap="square" lIns="0" rIns="0" tIns="0" bIns="0" anchor="t">
+          <a:bodyPr wrap="square" lIns="0" tIns="0" rIns="0" bIns="0" anchor="t">
             <a:spAutoFit/>
           </a:bodyPr>
           <a:lstStyle/>
@@ -15364,7 +15337,7 @@
           <a:noFill/>
         </p:spPr>
         <p:txBody>
-          <a:bodyPr wrap="square" lIns="0" rIns="0" tIns="0" bIns="0" anchor="t">
+          <a:bodyPr wrap="square" lIns="0" tIns="0" rIns="0" bIns="0" anchor="t">
             <a:spAutoFit/>
           </a:bodyPr>
           <a:lstStyle/>
@@ -15403,7 +15376,7 @@
           <a:noFill/>
         </p:spPr>
         <p:txBody>
-          <a:bodyPr wrap="square" lIns="0" rIns="0" tIns="0" bIns="0" anchor="t">
+          <a:bodyPr wrap="square" lIns="0" tIns="0" rIns="0" bIns="0" anchor="t">
             <a:spAutoFit/>
           </a:bodyPr>
           <a:lstStyle/>
@@ -15468,6 +15441,7 @@
           <a:lstStyle/>
           <a:p>
             <a:pPr algn="ctr"/>
+            <a:endParaRPr/>
           </a:p>
         </p:txBody>
       </p:sp>
@@ -15512,6 +15486,7 @@
           <a:lstStyle/>
           <a:p>
             <a:pPr algn="ctr"/>
+            <a:endParaRPr/>
           </a:p>
         </p:txBody>
       </p:sp>
@@ -15532,7 +15507,7 @@
           <a:noFill/>
         </p:spPr>
         <p:txBody>
-          <a:bodyPr wrap="square" lIns="0" rIns="0" tIns="0" bIns="0" anchor="t">
+          <a:bodyPr wrap="square" lIns="0" tIns="0" rIns="0" bIns="0" anchor="t">
             <a:spAutoFit/>
           </a:bodyPr>
           <a:lstStyle/>
@@ -15571,7 +15546,7 @@
           <a:noFill/>
         </p:spPr>
         <p:txBody>
-          <a:bodyPr wrap="square" lIns="0" rIns="0" tIns="0" bIns="0" anchor="t">
+          <a:bodyPr wrap="square" lIns="0" tIns="0" rIns="0" bIns="0" anchor="t">
             <a:spAutoFit/>
           </a:bodyPr>
           <a:lstStyle/>
@@ -15610,7 +15585,7 @@
           <a:noFill/>
         </p:spPr>
         <p:txBody>
-          <a:bodyPr wrap="square" lIns="0" rIns="0" tIns="0" bIns="0" anchor="t">
+          <a:bodyPr wrap="square" lIns="0" tIns="0" rIns="0" bIns="0" anchor="t">
             <a:spAutoFit/>
           </a:bodyPr>
           <a:lstStyle/>
@@ -15675,6 +15650,7 @@
           <a:lstStyle/>
           <a:p>
             <a:pPr algn="ctr"/>
+            <a:endParaRPr/>
           </a:p>
         </p:txBody>
       </p:sp>
@@ -15719,6 +15695,7 @@
           <a:lstStyle/>
           <a:p>
             <a:pPr algn="ctr"/>
+            <a:endParaRPr/>
           </a:p>
         </p:txBody>
       </p:sp>
@@ -15739,7 +15716,7 @@
           <a:noFill/>
         </p:spPr>
         <p:txBody>
-          <a:bodyPr wrap="square" lIns="0" rIns="0" tIns="0" bIns="0" anchor="t">
+          <a:bodyPr wrap="square" lIns="0" tIns="0" rIns="0" bIns="0" anchor="t">
             <a:spAutoFit/>
           </a:bodyPr>
           <a:lstStyle/>
@@ -15778,7 +15755,7 @@
           <a:noFill/>
         </p:spPr>
         <p:txBody>
-          <a:bodyPr wrap="square" lIns="0" rIns="0" tIns="0" bIns="0" anchor="t">
+          <a:bodyPr wrap="square" lIns="0" tIns="0" rIns="0" bIns="0" anchor="t">
             <a:spAutoFit/>
           </a:bodyPr>
           <a:lstStyle/>
@@ -15817,7 +15794,7 @@
           <a:noFill/>
         </p:spPr>
         <p:txBody>
-          <a:bodyPr wrap="square" lIns="0" rIns="0" tIns="0" bIns="0" anchor="t">
+          <a:bodyPr wrap="square" lIns="0" tIns="0" rIns="0" bIns="0" anchor="t">
             <a:spAutoFit/>
           </a:bodyPr>
           <a:lstStyle/>
@@ -15882,6 +15859,7 @@
           <a:lstStyle/>
           <a:p>
             <a:pPr algn="ctr"/>
+            <a:endParaRPr/>
           </a:p>
         </p:txBody>
       </p:sp>
@@ -15926,6 +15904,7 @@
           <a:lstStyle/>
           <a:p>
             <a:pPr algn="ctr"/>
+            <a:endParaRPr/>
           </a:p>
         </p:txBody>
       </p:sp>
@@ -15946,7 +15925,7 @@
           <a:noFill/>
         </p:spPr>
         <p:txBody>
-          <a:bodyPr wrap="square" lIns="0" rIns="0" tIns="0" bIns="0" anchor="t">
+          <a:bodyPr wrap="square" lIns="0" tIns="0" rIns="0" bIns="0" anchor="t">
             <a:spAutoFit/>
           </a:bodyPr>
           <a:lstStyle/>
@@ -15985,7 +15964,7 @@
           <a:noFill/>
         </p:spPr>
         <p:txBody>
-          <a:bodyPr wrap="square" lIns="0" rIns="0" tIns="0" bIns="0" anchor="t">
+          <a:bodyPr wrap="square" lIns="0" tIns="0" rIns="0" bIns="0" anchor="t">
             <a:spAutoFit/>
           </a:bodyPr>
           <a:lstStyle/>
@@ -16024,7 +16003,7 @@
           <a:noFill/>
         </p:spPr>
         <p:txBody>
-          <a:bodyPr wrap="square" lIns="0" rIns="0" tIns="0" bIns="0" anchor="t">
+          <a:bodyPr wrap="square" lIns="0" tIns="0" rIns="0" bIns="0" anchor="t">
             <a:spAutoFit/>
           </a:bodyPr>
           <a:lstStyle/>
@@ -16063,7 +16042,7 @@
           <a:noFill/>
         </p:spPr>
         <p:txBody>
-          <a:bodyPr wrap="square" lIns="0" rIns="0" tIns="0" bIns="0" anchor="t">
+          <a:bodyPr wrap="square" lIns="0" tIns="0" rIns="0" bIns="0" anchor="t">
             <a:spAutoFit/>
           </a:bodyPr>
           <a:lstStyle/>
@@ -16102,7 +16081,7 @@
           <a:noFill/>
         </p:spPr>
         <p:txBody>
-          <a:bodyPr wrap="square" lIns="0" rIns="0" tIns="0" bIns="0">
+          <a:bodyPr wrap="square" lIns="0" tIns="0" rIns="0" bIns="0">
             <a:spAutoFit/>
           </a:bodyPr>
           <a:lstStyle/>
@@ -16209,7 +16188,7 @@
           <a:noFill/>
         </p:spPr>
         <p:txBody>
-          <a:bodyPr wrap="square" lIns="0" rIns="0" tIns="0" bIns="0" anchor="t">
+          <a:bodyPr wrap="square" lIns="0" tIns="0" rIns="0" bIns="0" anchor="t">
             <a:spAutoFit/>
           </a:bodyPr>
           <a:lstStyle/>
@@ -16248,7 +16227,7 @@
           <a:noFill/>
         </p:spPr>
         <p:txBody>
-          <a:bodyPr wrap="square" lIns="0" rIns="0" tIns="0" bIns="0">
+          <a:bodyPr wrap="square" lIns="0" tIns="0" rIns="0" bIns="0">
             <a:spAutoFit/>
           </a:bodyPr>
           <a:lstStyle/>
@@ -16355,7 +16334,7 @@
           <a:noFill/>
         </p:spPr>
         <p:txBody>
-          <a:bodyPr wrap="square" lIns="0" rIns="0" tIns="0" bIns="0" anchor="t">
+          <a:bodyPr wrap="square" lIns="0" tIns="0" rIns="0" bIns="0" anchor="t">
             <a:spAutoFit/>
           </a:bodyPr>
           <a:lstStyle/>
@@ -16394,7 +16373,7 @@
           <a:noFill/>
         </p:spPr>
         <p:txBody>
-          <a:bodyPr wrap="square" lIns="0" rIns="0" tIns="0" bIns="0" anchor="t">
+          <a:bodyPr wrap="square" lIns="0" tIns="0" rIns="0" bIns="0" anchor="t">
             <a:spAutoFit/>
           </a:bodyPr>
           <a:lstStyle/>
@@ -16433,7 +16412,7 @@
           <a:noFill/>
         </p:spPr>
         <p:txBody>
-          <a:bodyPr wrap="square" lIns="0" rIns="0" tIns="0" bIns="0" anchor="t">
+          <a:bodyPr wrap="square" lIns="0" tIns="0" rIns="0" bIns="0" anchor="t">
             <a:spAutoFit/>
           </a:bodyPr>
           <a:lstStyle/>
@@ -16472,7 +16451,7 @@
           <a:noFill/>
         </p:spPr>
         <p:txBody>
-          <a:bodyPr wrap="square" lIns="0" rIns="0" tIns="0" bIns="0" anchor="t">
+          <a:bodyPr wrap="square" lIns="0" tIns="0" rIns="0" bIns="0" anchor="t">
             <a:spAutoFit/>
           </a:bodyPr>
           <a:lstStyle/>
@@ -16511,7 +16490,7 @@
           <a:noFill/>
         </p:spPr>
         <p:txBody>
-          <a:bodyPr wrap="square" lIns="0" rIns="0" tIns="0" bIns="0" anchor="t">
+          <a:bodyPr wrap="square" lIns="0" tIns="0" rIns="0" bIns="0" anchor="t">
             <a:spAutoFit/>
           </a:bodyPr>
           <a:lstStyle/>
@@ -16550,7 +16529,7 @@
           <a:noFill/>
         </p:spPr>
         <p:txBody>
-          <a:bodyPr wrap="square" lIns="0" rIns="0" tIns="0" bIns="0" anchor="t">
+          <a:bodyPr wrap="square" lIns="0" tIns="0" rIns="0" bIns="0" anchor="t">
             <a:spAutoFit/>
           </a:bodyPr>
           <a:lstStyle/>
@@ -16589,7 +16568,7 @@
           <a:noFill/>
         </p:spPr>
         <p:txBody>
-          <a:bodyPr wrap="square" lIns="0" rIns="0" tIns="0" bIns="0" anchor="t">
+          <a:bodyPr wrap="square" lIns="0" tIns="0" rIns="0" bIns="0" anchor="t">
             <a:spAutoFit/>
           </a:bodyPr>
           <a:lstStyle/>
@@ -16628,7 +16607,7 @@
           <a:noFill/>
         </p:spPr>
         <p:txBody>
-          <a:bodyPr wrap="square" lIns="0" rIns="0" tIns="0" bIns="0" anchor="t">
+          <a:bodyPr wrap="square" lIns="0" tIns="0" rIns="0" bIns="0" anchor="t">
             <a:spAutoFit/>
           </a:bodyPr>
           <a:lstStyle/>
@@ -16667,7 +16646,7 @@
           <a:noFill/>
         </p:spPr>
         <p:txBody>
-          <a:bodyPr wrap="square" lIns="0" rIns="0" tIns="0" bIns="0" anchor="t">
+          <a:bodyPr wrap="square" lIns="0" tIns="0" rIns="0" bIns="0" anchor="t">
             <a:spAutoFit/>
           </a:bodyPr>
           <a:lstStyle/>
@@ -16706,7 +16685,7 @@
           <a:noFill/>
         </p:spPr>
         <p:txBody>
-          <a:bodyPr wrap="square" lIns="0" rIns="0" tIns="0" bIns="0" anchor="t">
+          <a:bodyPr wrap="square" lIns="0" tIns="0" rIns="0" bIns="0" anchor="t">
             <a:spAutoFit/>
           </a:bodyPr>
           <a:lstStyle/>
@@ -16745,7 +16724,7 @@
           <a:noFill/>
         </p:spPr>
         <p:txBody>
-          <a:bodyPr wrap="square" lIns="0" rIns="0" tIns="0" bIns="0" anchor="t">
+          <a:bodyPr wrap="square" lIns="0" tIns="0" rIns="0" bIns="0" anchor="t">
             <a:spAutoFit/>
           </a:bodyPr>
           <a:lstStyle/>
@@ -16808,6 +16787,7 @@
           <a:lstStyle/>
           <a:p>
             <a:pPr algn="ctr"/>
+            <a:endParaRPr/>
           </a:p>
         </p:txBody>
       </p:sp>
@@ -16828,7 +16808,7 @@
           <a:noFill/>
         </p:spPr>
         <p:txBody>
-          <a:bodyPr wrap="square" lIns="0" rIns="0" tIns="0" bIns="0" anchor="t">
+          <a:bodyPr wrap="square" lIns="0" tIns="0" rIns="0" bIns="0" anchor="t">
             <a:spAutoFit/>
           </a:bodyPr>
           <a:lstStyle/>
@@ -16852,65 +16832,59 @@
       </p:sp>
       <p:sp>
         <p:nvSpPr>
-          <p:cNvPr id="45" name="TextBox 44"/>
-          <p:cNvSpPr txBox="1"/>
-          <p:nvPr/>
-        </p:nvSpPr>
-        <p:spPr>
-          <a:xfrm>
-            <a:off x="640080" y="6263640"/>
-            <a:ext cx="10972800" cy="274320"/>
-          </a:xfrm>
-          <a:prstGeom prst="rect">
-            <a:avLst/>
-          </a:prstGeom>
-          <a:noFill/>
-        </p:spPr>
-        <p:txBody>
-          <a:bodyPr wrap="square" lIns="0" rIns="0" tIns="0" bIns="0">
-            <a:spAutoFit/>
-          </a:bodyPr>
-          <a:lstStyle/>
-          <a:p>
-            <a:pPr algn="ctr"/>
-            <a:r>
-              <a:rPr sz="1000" b="1">
+          <p:cNvPr id="46" name="TextBox 45">
+            <a:hlinkClick r:id="rId3"/>
+            <a:extLst>
+              <a:ext uri="{FF2B5EF4-FFF2-40B4-BE49-F238E27FC236}">
+                <a16:creationId xmlns:a16="http://schemas.microsoft.com/office/drawing/2014/main" id="{8FE444C8-76CA-CAF3-5218-43F5E88B2177}"/>
+              </a:ext>
+            </a:extLst>
+          </p:cNvPr>
+          <p:cNvSpPr txBox="1"/>
+          <p:nvPr/>
+        </p:nvSpPr>
+        <p:spPr>
+          <a:xfrm>
+            <a:off x="5336895" y="6519672"/>
+            <a:ext cx="1517904" cy="169277"/>
+          </a:xfrm>
+          <a:prstGeom prst="rect">
+            <a:avLst/>
+          </a:prstGeom>
+          <a:noFill/>
+        </p:spPr>
+        <p:txBody>
+          <a:bodyPr wrap="square" lIns="0" tIns="0" rIns="0" bIns="0">
+            <a:spAutoFit/>
+          </a:bodyPr>
+          <a:lstStyle/>
+          <a:p>
+            <a:r>
+              <a:rPr sz="1100" b="1" dirty="0">
                 <a:solidFill>
                   <a:srgbClr val="475569"/>
                 </a:solidFill>
                 <a:latin typeface="Calibri"/>
               </a:rPr>
-              <a:t>Code  ·  </a:t>
-            </a:r>
-            <a:r>
-              <a:rPr sz="1000" b="0" u="sng">
-                <a:solidFill>
-                  <a:srgbClr val="0F766E"/>
-                </a:solidFill>
-                <a:latin typeface="Calibri"/>
-                <a:hlinkClick r:id="rId2"/>
-              </a:rPr>
-              <a:t>github.com/muhammadammarff-design/diabetes-risk-prediction</a:t>
-            </a:r>
-            <a:r>
-              <a:rPr sz="1000" b="1">
+              <a:t>GitHub:  ·      </a:t>
+            </a:r>
+            <a:r>
+              <a:rPr sz="1100" b="1" dirty="0">
                 <a:solidFill>
                   <a:srgbClr val="475569"/>
                 </a:solidFill>
                 <a:latin typeface="Calibri"/>
-              </a:rPr>
-              <a:t>      ·      Live demo  ·  </a:t>
-            </a:r>
-            <a:r>
-              <a:rPr sz="1000" b="0" u="sng">
-                <a:solidFill>
-                  <a:srgbClr val="0F766E"/>
-                </a:solidFill>
-                <a:latin typeface="Calibri"/>
-                <a:hlinkClick r:id="rId3"/>
-              </a:rPr>
-              <a:t>diabetesriskpredictions.streamlit.app</a:t>
-            </a:r>
+                <a:hlinkClick r:id="rId4"/>
+              </a:rPr>
+              <a:t>Live demo:</a:t>
+            </a:r>
+            <a:endParaRPr sz="1100" b="0" u="sng" dirty="0">
+              <a:solidFill>
+                <a:srgbClr val="0F766E"/>
+              </a:solidFill>
+              <a:latin typeface="Calibri"/>
+              <a:hlinkClick r:id="rId4"/>
+            </a:endParaRPr>
           </a:p>
         </p:txBody>
       </p:sp>
@@ -16923,7 +16897,7 @@
 </file>
 
 <file path=ppt/slides/slide2.xml><?xml version="1.0" encoding="utf-8"?>
-<p:sld xmlns:a="http://schemas.openxmlformats.org/drawingml/2006/main" xmlns:p="http://schemas.openxmlformats.org/presentationml/2006/main" xmlns:r="http://schemas.openxmlformats.org/officeDocument/2006/relationships">
+<p:sld xmlns:a="http://schemas.openxmlformats.org/drawingml/2006/main" xmlns:r="http://schemas.openxmlformats.org/officeDocument/2006/relationships" xmlns:p="http://schemas.openxmlformats.org/presentationml/2006/main">
   <p:cSld>
     <p:spTree>
       <p:nvGrpSpPr>
@@ -16931,7 +16905,14 @@
         <p:cNvGrpSpPr/>
         <p:nvPr/>
       </p:nvGrpSpPr>
-      <p:grpSpPr/>
+      <p:grpSpPr>
+        <a:xfrm>
+          <a:off x="0" y="0"/>
+          <a:ext cx="0" cy="0"/>
+          <a:chOff x="0" y="0"/>
+          <a:chExt cx="0" cy="0"/>
+        </a:xfrm>
+      </p:grpSpPr>
       <p:sp>
         <p:nvSpPr>
           <p:cNvPr id="2" name="Rectangle 1"/>
@@ -16973,6 +16954,7 @@
           <a:lstStyle/>
           <a:p>
             <a:pPr algn="ctr"/>
+            <a:endParaRPr/>
           </a:p>
         </p:txBody>
       </p:sp>
@@ -16993,7 +16975,7 @@
           <a:noFill/>
         </p:spPr>
         <p:txBody>
-          <a:bodyPr wrap="square" lIns="0" rIns="0" tIns="0" bIns="0" anchor="t">
+          <a:bodyPr wrap="square" lIns="0" tIns="0" rIns="0" bIns="0" anchor="t">
             <a:spAutoFit/>
           </a:bodyPr>
           <a:lstStyle/>
@@ -17032,7 +17014,7 @@
           <a:noFill/>
         </p:spPr>
         <p:txBody>
-          <a:bodyPr wrap="square" lIns="0" rIns="0" tIns="0" bIns="0" anchor="t">
+          <a:bodyPr wrap="square" lIns="0" tIns="0" rIns="0" bIns="0" anchor="t">
             <a:spAutoFit/>
           </a:bodyPr>
           <a:lstStyle/>
@@ -17049,7 +17031,7 @@
                 </a:solidFill>
                 <a:latin typeface="Calibri"/>
               </a:rPr>
-              <a:t>2 / 18</a:t>
+              <a:t>2 / 17</a:t>
             </a:r>
           </a:p>
         </p:txBody>
@@ -17071,7 +17053,7 @@
           <a:noFill/>
         </p:spPr>
         <p:txBody>
-          <a:bodyPr wrap="square" lIns="0" rIns="0" tIns="0" bIns="0" anchor="t">
+          <a:bodyPr wrap="square" lIns="0" tIns="0" rIns="0" bIns="0" anchor="t">
             <a:spAutoFit/>
           </a:bodyPr>
           <a:lstStyle/>
@@ -17110,91 +17092,24 @@
           <a:noFill/>
         </p:spPr>
         <p:txBody>
-          <a:bodyPr wrap="square" lIns="0" rIns="0" tIns="0" bIns="0" anchor="t">
-            <a:spAutoFit/>
-          </a:bodyPr>
-          <a:lstStyle/>
-          <a:p>
-            <a:pPr algn="l">
-              <a:lnSpc>
-                <a:spcPct val="115000"/>
-              </a:lnSpc>
-              <a:defRPr sz="1800"/>
-            </a:pPr>
-            <a:r>
-              <a:t>What we will cover today (9 sections)</a:t>
-            </a:r>
-          </a:p>
-          <a:p>
-            <a:pPr>
-              <a:defRPr sz="1300"/>
-            </a:pPr>
-            <a:r>
-              <a:t>·  01 · Introduction &amp; Problem</a:t>
-            </a:r>
-          </a:p>
-          <a:p>
-            <a:pPr>
-              <a:defRPr sz="1300"/>
-            </a:pPr>
-            <a:r>
-              <a:t>·  02 · Dataset Overview (with missing values)</a:t>
-            </a:r>
-          </a:p>
-          <a:p>
-            <a:pPr>
-              <a:defRPr sz="1300"/>
-            </a:pPr>
-            <a:r>
-              <a:t>·  03 · Target &amp; Features</a:t>
-            </a:r>
-          </a:p>
-          <a:p>
-            <a:pPr>
-              <a:defRPr sz="1300"/>
-            </a:pPr>
-            <a:r>
-              <a:t>·  04 · Methodology &amp; Workflow</a:t>
-            </a:r>
-          </a:p>
-          <a:p>
-            <a:pPr>
-              <a:defRPr sz="1300"/>
-            </a:pPr>
-            <a:r>
-              <a:t>·  05 · Data Cleaning (duplicates + 350 missing)</a:t>
-            </a:r>
-          </a:p>
-          <a:p>
-            <a:pPr>
-              <a:defRPr sz="1300"/>
-            </a:pPr>
-            <a:r>
-              <a:t>·  06 · EDA &amp; Correlation</a:t>
-            </a:r>
-          </a:p>
-          <a:p>
-            <a:pPr>
-              <a:defRPr sz="1300"/>
-            </a:pPr>
-            <a:r>
-              <a:t>·  07 · Train/Test Split + 4 Classifiers</a:t>
-            </a:r>
-          </a:p>
-          <a:p>
-            <a:pPr>
-              <a:defRPr sz="1300"/>
-            </a:pPr>
-            <a:r>
-              <a:t>·  08 · Random Forest Results</a:t>
-            </a:r>
-          </a:p>
-          <a:p>
-            <a:pPr>
-              <a:defRPr sz="1300"/>
-            </a:pPr>
-            <a:r>
-              <a:t>·  09 · Insights, Deployment &amp; Conclusion</a:t>
+          <a:bodyPr wrap="square" lIns="0" tIns="0" rIns="0" bIns="0" anchor="t">
+            <a:spAutoFit/>
+          </a:bodyPr>
+          <a:lstStyle/>
+          <a:p>
+            <a:pPr algn="l">
+              <a:lnSpc>
+                <a:spcPct val="115000"/>
+              </a:lnSpc>
+            </a:pPr>
+            <a:r>
+              <a:rPr sz="2800" b="1">
+                <a:solidFill>
+                  <a:srgbClr val="1E293B"/>
+                </a:solidFill>
+                <a:latin typeface="Calibri"/>
+              </a:rPr>
+              <a:t>What we will cover today</a:t>
             </a:r>
           </a:p>
         </p:txBody>
@@ -17240,6 +17155,7 @@
           <a:lstStyle/>
           <a:p>
             <a:pPr algn="ctr"/>
+            <a:endParaRPr/>
           </a:p>
         </p:txBody>
       </p:sp>
@@ -17252,15 +17168,15 @@
         <p:spPr>
           <a:xfrm>
             <a:off x="640080" y="2011680"/>
-            <a:ext cx="5486400" cy="4572000"/>
-          </a:xfrm>
-          <a:prstGeom prst="rect">
-            <a:avLst/>
-          </a:prstGeom>
-          <a:noFill/>
-        </p:spPr>
-        <p:txBody>
-          <a:bodyPr wrap="square" lIns="0" rIns="0" tIns="0" bIns="0">
+            <a:ext cx="5486400" cy="3413050"/>
+          </a:xfrm>
+          <a:prstGeom prst="rect">
+            <a:avLst/>
+          </a:prstGeom>
+          <a:noFill/>
+        </p:spPr>
+        <p:txBody>
+          <a:bodyPr wrap="square" lIns="0" tIns="0" rIns="0" bIns="0">
             <a:spAutoFit/>
           </a:bodyPr>
           <a:lstStyle/>
@@ -17272,107 +17188,54 @@
               <a:spcAft>
                 <a:spcPts val="800"/>
               </a:spcAft>
-              <a:defRPr sz="1800"/>
-            </a:pPr>
-            <a:r>
-              <a:t>What we will cover today (9 sections)</a:t>
-            </a:r>
-          </a:p>
-          <a:p>
-            <a:pPr>
-              <a:defRPr sz="1300"/>
-            </a:pPr>
-            <a:r>
-              <a:t>·  01 · Introduction &amp; Problem</a:t>
-            </a:r>
-          </a:p>
-          <a:p>
-            <a:pPr>
-              <a:defRPr sz="1300"/>
-            </a:pPr>
-            <a:r>
-              <a:t>·  02 · Dataset Overview (with missing values)</a:t>
-            </a:r>
-          </a:p>
-          <a:p>
-            <a:pPr>
-              <a:defRPr sz="1300"/>
-            </a:pPr>
-            <a:r>
-              <a:t>·  03 · Target &amp; Features</a:t>
-            </a:r>
-          </a:p>
-          <a:p>
-            <a:pPr>
-              <a:defRPr sz="1300"/>
-            </a:pPr>
-            <a:r>
-              <a:t>·  04 · Methodology &amp; Workflow</a:t>
-            </a:r>
-          </a:p>
-          <a:p>
-            <a:pPr>
-              <a:defRPr sz="1300"/>
-            </a:pPr>
-            <a:r>
-              <a:t>·  05 · Data Cleaning (duplicates + 350 missing)</a:t>
-            </a:r>
-          </a:p>
-          <a:p>
-            <a:pPr>
-              <a:defRPr sz="1300"/>
-            </a:pPr>
-            <a:r>
-              <a:t>·  06 · EDA &amp; Correlation</a:t>
-            </a:r>
-          </a:p>
-          <a:p>
-            <a:pPr>
-              <a:defRPr sz="1300"/>
-            </a:pPr>
-            <a:r>
-              <a:t>·  07 · Train/Test Split + 4 Classifiers</a:t>
-            </a:r>
-          </a:p>
-          <a:p>
-            <a:pPr>
-              <a:defRPr sz="1300"/>
-            </a:pPr>
-            <a:r>
-              <a:t>·  08 · Random Forest Results</a:t>
-            </a:r>
-          </a:p>
-          <a:p>
-            <a:pPr>
-              <a:defRPr sz="1300"/>
-            </a:pPr>
-            <a:r>
-              <a:t>·  09 · Insights, Deployment &amp; Conclusion</a:t>
-            </a:r>
-          </a:p>
-        </p:txBody>
-      </p:sp>
-      <p:sp>
-        <p:nvSpPr>
-          <p:cNvPr id="9" name="TextBox 8"/>
-          <p:cNvSpPr txBox="1"/>
-          <p:nvPr/>
-        </p:nvSpPr>
-        <p:spPr>
-          <a:xfrm>
-            <a:off x="6583680" y="2011680"/>
-            <a:ext cx="5486400" cy="4572000"/>
-          </a:xfrm>
-          <a:prstGeom prst="rect">
-            <a:avLst/>
-          </a:prstGeom>
-          <a:noFill/>
-        </p:spPr>
-        <p:txBody>
-          <a:bodyPr wrap="square" lIns="0" rIns="0" tIns="0" bIns="0">
-            <a:spAutoFit/>
-          </a:bodyPr>
-          <a:lstStyle/>
+            </a:pPr>
+            <a:r>
+              <a:rPr sz="1400" b="1" dirty="0">
+                <a:solidFill>
+                  <a:srgbClr val="F59E0B"/>
+                </a:solidFill>
+                <a:latin typeface="Calibri"/>
+              </a:rPr>
+              <a:t>·  </a:t>
+            </a:r>
+            <a:r>
+              <a:rPr sz="1400" dirty="0">
+                <a:solidFill>
+                  <a:srgbClr val="1E293B"/>
+                </a:solidFill>
+                <a:latin typeface="Calibri"/>
+              </a:rPr>
+              <a:t>01  ·</a:t>
+            </a:r>
+            <a:r>
+              <a:rPr lang="en-US" sz="1400" dirty="0">
+                <a:solidFill>
+                  <a:srgbClr val="1E293B"/>
+                </a:solidFill>
+                <a:latin typeface="Calibri"/>
+              </a:rPr>
+              <a:t> </a:t>
+            </a:r>
+            <a:r>
+              <a:rPr lang="en-US" sz="1400" b="0" i="0" dirty="0">
+                <a:solidFill>
+                  <a:srgbClr val="2E2B29"/>
+                </a:solidFill>
+                <a:effectLst/>
+                <a:latin typeface="baselGrotesk"/>
+              </a:rPr>
+              <a:t>Introduction &amp; Problem</a:t>
+            </a:r>
+            <a:r>
+              <a:rPr sz="1400" dirty="0">
+                <a:solidFill>
+                  <a:srgbClr val="1E293B"/>
+                </a:solidFill>
+                <a:latin typeface="Calibri"/>
+              </a:rPr>
+              <a:t>  </a:t>
+            </a:r>
+          </a:p>
           <a:p>
             <a:pPr algn="l">
               <a:lnSpc>
@@ -17383,7 +17246,7 @@
               </a:spcAft>
             </a:pPr>
             <a:r>
-              <a:rPr sz="1300" b="1">
+              <a:rPr sz="1400" b="1" dirty="0">
                 <a:solidFill>
                   <a:srgbClr val="F59E0B"/>
                 </a:solidFill>
@@ -17392,14 +17255,39 @@
               <a:t>·  </a:t>
             </a:r>
             <a:r>
-              <a:rPr sz="1300">
+              <a:rPr sz="1400" dirty="0">
                 <a:solidFill>
                   <a:srgbClr val="1E293B"/>
                 </a:solidFill>
                 <a:latin typeface="Calibri"/>
               </a:rPr>
-              <a:t>10  ·  Why machine learning?</a:t>
-            </a:r>
+              <a:t>02  ·</a:t>
+            </a:r>
+            <a:r>
+              <a:rPr lang="en-US" sz="1400" dirty="0">
+                <a:solidFill>
+                  <a:srgbClr val="1E293B"/>
+                </a:solidFill>
+                <a:latin typeface="Calibri"/>
+              </a:rPr>
+              <a:t> </a:t>
+            </a:r>
+            <a:r>
+              <a:rPr lang="en-US" sz="1400" b="0" i="0" dirty="0">
+                <a:solidFill>
+                  <a:srgbClr val="2E2B29"/>
+                </a:solidFill>
+                <a:effectLst/>
+                <a:latin typeface="baselGrotesk"/>
+              </a:rPr>
+              <a:t>Dataset Overview</a:t>
+            </a:r>
+            <a:endParaRPr sz="1400" dirty="0">
+              <a:solidFill>
+                <a:srgbClr val="1E293B"/>
+              </a:solidFill>
+              <a:latin typeface="Calibri"/>
+            </a:endParaRPr>
           </a:p>
           <a:p>
             <a:pPr algn="l">
@@ -17411,7 +17299,7 @@
               </a:spcAft>
             </a:pPr>
             <a:r>
-              <a:rPr sz="1300" b="1">
+              <a:rPr sz="1400" b="1" dirty="0">
                 <a:solidFill>
                   <a:srgbClr val="F59E0B"/>
                 </a:solidFill>
@@ -17420,14 +17308,39 @@
               <a:t>·  </a:t>
             </a:r>
             <a:r>
-              <a:rPr sz="1300">
+              <a:rPr sz="1400" dirty="0">
                 <a:solidFill>
                   <a:srgbClr val="1E293B"/>
                 </a:solidFill>
                 <a:latin typeface="Calibri"/>
               </a:rPr>
-              <a:t>11  ·  4 candidate ML models</a:t>
-            </a:r>
+              <a:t>03  ·</a:t>
+            </a:r>
+            <a:r>
+              <a:rPr lang="en-US" sz="1400" dirty="0">
+                <a:solidFill>
+                  <a:srgbClr val="1E293B"/>
+                </a:solidFill>
+                <a:latin typeface="Calibri"/>
+              </a:rPr>
+              <a:t> </a:t>
+            </a:r>
+            <a:r>
+              <a:rPr lang="en-US" sz="1400" b="0" i="0" dirty="0">
+                <a:solidFill>
+                  <a:srgbClr val="2E2B29"/>
+                </a:solidFill>
+                <a:effectLst/>
+                <a:latin typeface="baselGrotesk"/>
+              </a:rPr>
+              <a:t>Features &amp; Target</a:t>
+            </a:r>
+            <a:endParaRPr sz="1400" dirty="0">
+              <a:solidFill>
+                <a:srgbClr val="1E293B"/>
+              </a:solidFill>
+              <a:latin typeface="Calibri"/>
+            </a:endParaRPr>
           </a:p>
           <a:p>
             <a:pPr algn="l">
@@ -17439,7 +17352,7 @@
               </a:spcAft>
             </a:pPr>
             <a:r>
-              <a:rPr sz="1300" b="1">
+              <a:rPr sz="1400" b="1" dirty="0">
                 <a:solidFill>
                   <a:srgbClr val="F59E0B"/>
                 </a:solidFill>
@@ -17448,14 +17361,39 @@
               <a:t>·  </a:t>
             </a:r>
             <a:r>
-              <a:rPr sz="1300">
+              <a:rPr sz="1400" dirty="0">
                 <a:solidFill>
                   <a:srgbClr val="1E293B"/>
                 </a:solidFill>
                 <a:latin typeface="Calibri"/>
               </a:rPr>
-              <a:t>12  ·  Model comparison</a:t>
-            </a:r>
+              <a:t>04  ·</a:t>
+            </a:r>
+            <a:r>
+              <a:rPr lang="en-US" sz="1400" dirty="0">
+                <a:solidFill>
+                  <a:srgbClr val="1E293B"/>
+                </a:solidFill>
+                <a:latin typeface="Calibri"/>
+              </a:rPr>
+              <a:t> </a:t>
+            </a:r>
+            <a:r>
+              <a:rPr lang="en-US" sz="1400" b="0" i="0" dirty="0">
+                <a:solidFill>
+                  <a:srgbClr val="2E2B29"/>
+                </a:solidFill>
+                <a:effectLst/>
+                <a:latin typeface="baselGrotesk"/>
+              </a:rPr>
+              <a:t>Methodology &amp; Block Diagram</a:t>
+            </a:r>
+            <a:endParaRPr sz="1400" dirty="0">
+              <a:solidFill>
+                <a:srgbClr val="1E293B"/>
+              </a:solidFill>
+              <a:latin typeface="Calibri"/>
+            </a:endParaRPr>
           </a:p>
           <a:p>
             <a:pPr algn="l">
@@ -17467,7 +17405,7 @@
               </a:spcAft>
             </a:pPr>
             <a:r>
-              <a:rPr sz="1300" b="1">
+              <a:rPr sz="1400" b="1" dirty="0">
                 <a:solidFill>
                   <a:srgbClr val="F59E0B"/>
                 </a:solidFill>
@@ -17476,14 +17414,39 @@
               <a:t>·  </a:t>
             </a:r>
             <a:r>
-              <a:rPr sz="1300">
+              <a:rPr sz="1400" dirty="0">
                 <a:solidFill>
                   <a:srgbClr val="1E293B"/>
                 </a:solidFill>
                 <a:latin typeface="Calibri"/>
               </a:rPr>
-              <a:t>13  ·  Random Forest — detailed results</a:t>
-            </a:r>
+              <a:t>05  ·</a:t>
+            </a:r>
+            <a:r>
+              <a:rPr lang="en-US" sz="1400" dirty="0">
+                <a:solidFill>
+                  <a:srgbClr val="1E293B"/>
+                </a:solidFill>
+                <a:latin typeface="Calibri"/>
+              </a:rPr>
+              <a:t> </a:t>
+            </a:r>
+            <a:r>
+              <a:rPr lang="en-US" sz="1400" b="0" i="0" dirty="0">
+                <a:solidFill>
+                  <a:srgbClr val="2E2B29"/>
+                </a:solidFill>
+                <a:effectLst/>
+                <a:latin typeface="baselGrotesk"/>
+              </a:rPr>
+              <a:t>Data Cleaning &amp; Preprocessing</a:t>
+            </a:r>
+            <a:endParaRPr sz="1400" dirty="0">
+              <a:solidFill>
+                <a:srgbClr val="1E293B"/>
+              </a:solidFill>
+              <a:latin typeface="Calibri"/>
+            </a:endParaRPr>
           </a:p>
           <a:p>
             <a:pPr algn="l">
@@ -17495,7 +17458,7 @@
               </a:spcAft>
             </a:pPr>
             <a:r>
-              <a:rPr sz="1300" b="1">
+              <a:rPr sz="1400" b="1" dirty="0">
                 <a:solidFill>
                   <a:srgbClr val="F59E0B"/>
                 </a:solidFill>
@@ -17504,14 +17467,39 @@
               <a:t>·  </a:t>
             </a:r>
             <a:r>
-              <a:rPr sz="1300">
+              <a:rPr sz="1400" dirty="0">
                 <a:solidFill>
                   <a:srgbClr val="1E293B"/>
                 </a:solidFill>
                 <a:latin typeface="Calibri"/>
               </a:rPr>
-              <a:t>14  ·  Top diabetes risk factors</a:t>
-            </a:r>
+              <a:t>06  ·</a:t>
+            </a:r>
+            <a:r>
+              <a:rPr lang="en-US" sz="1400" dirty="0">
+                <a:solidFill>
+                  <a:srgbClr val="1E293B"/>
+                </a:solidFill>
+                <a:latin typeface="Calibri"/>
+              </a:rPr>
+              <a:t> </a:t>
+            </a:r>
+            <a:r>
+              <a:rPr lang="en-US" sz="1400" b="0" i="0" dirty="0">
+                <a:solidFill>
+                  <a:srgbClr val="2E2B29"/>
+                </a:solidFill>
+                <a:effectLst/>
+                <a:latin typeface="baselGrotesk"/>
+              </a:rPr>
+              <a:t>EDA &amp; Correlation</a:t>
+            </a:r>
+            <a:endParaRPr sz="1400" dirty="0">
+              <a:solidFill>
+                <a:srgbClr val="1E293B"/>
+              </a:solidFill>
+              <a:latin typeface="Calibri"/>
+            </a:endParaRPr>
           </a:p>
           <a:p>
             <a:pPr algn="l">
@@ -17523,7 +17511,7 @@
               </a:spcAft>
             </a:pPr>
             <a:r>
-              <a:rPr sz="1300" b="1">
+              <a:rPr sz="1400" b="1" dirty="0">
                 <a:solidFill>
                   <a:srgbClr val="F59E0B"/>
                 </a:solidFill>
@@ -17532,14 +17520,30 @@
               <a:t>·  </a:t>
             </a:r>
             <a:r>
-              <a:rPr sz="1300">
+              <a:rPr sz="1400" dirty="0">
                 <a:solidFill>
                   <a:srgbClr val="1E293B"/>
                 </a:solidFill>
                 <a:latin typeface="Calibri"/>
               </a:rPr>
-              <a:t>15  ·  Streamlit web app</a:t>
-            </a:r>
+              <a:t>07  ·</a:t>
+            </a:r>
+            <a:r>
+              <a:rPr lang="en-US" sz="1400" b="0" i="0" dirty="0">
+                <a:solidFill>
+                  <a:srgbClr val="2E2B29"/>
+                </a:solidFill>
+                <a:effectLst/>
+                <a:latin typeface="baselGrotesk"/>
+              </a:rPr>
+              <a:t>Train/Test Split &amp; Models</a:t>
+            </a:r>
+            <a:endParaRPr sz="1400" dirty="0">
+              <a:solidFill>
+                <a:srgbClr val="1E293B"/>
+              </a:solidFill>
+              <a:latin typeface="Calibri"/>
+            </a:endParaRPr>
           </a:p>
           <a:p>
             <a:pPr algn="l">
@@ -17551,7 +17555,7 @@
               </a:spcAft>
             </a:pPr>
             <a:r>
-              <a:rPr sz="1300" b="1">
+              <a:rPr sz="1400" b="1" dirty="0">
                 <a:solidFill>
                   <a:srgbClr val="F59E0B"/>
                 </a:solidFill>
@@ -17560,17 +17564,36 @@
               <a:t>·  </a:t>
             </a:r>
             <a:r>
-              <a:rPr sz="1300">
+              <a:rPr sz="1400" dirty="0">
                 <a:solidFill>
                   <a:srgbClr val="1E293B"/>
                 </a:solidFill>
                 <a:latin typeface="Calibri"/>
               </a:rPr>
-              <a:t>16  ·  Limitations</a:t>
-            </a:r>
-          </a:p>
-          <a:p>
-            <a:pPr algn="l">
+              <a:t>08  ·</a:t>
+            </a:r>
+            <a:r>
+              <a:rPr lang="en-US" sz="1400" dirty="0">
+                <a:solidFill>
+                  <a:srgbClr val="1E293B"/>
+                </a:solidFill>
+                <a:latin typeface="Calibri"/>
+              </a:rPr>
+              <a:t> </a:t>
+            </a:r>
+            <a:r>
+              <a:rPr lang="en-US" sz="1400" b="0" i="0" dirty="0">
+                <a:solidFill>
+                  <a:srgbClr val="2E2B29"/>
+                </a:solidFill>
+                <a:effectLst/>
+                <a:latin typeface="baselGrotesk"/>
+              </a:rPr>
+              <a:t>Results: Random Forest</a:t>
+            </a:r>
+          </a:p>
+          <a:p>
+            <a:pPr>
               <a:lnSpc>
                 <a:spcPct val="135000"/>
               </a:lnSpc>
@@ -17579,7 +17602,7 @@
               </a:spcAft>
             </a:pPr>
             <a:r>
-              <a:rPr sz="1300" b="1">
+              <a:rPr lang="en-US" sz="1400" b="1" dirty="0">
                 <a:solidFill>
                   <a:srgbClr val="F59E0B"/>
                 </a:solidFill>
@@ -17588,41 +17611,23 @@
               <a:t>·  </a:t>
             </a:r>
             <a:r>
-              <a:rPr sz="1300">
+              <a:rPr lang="en-US" sz="1400" dirty="0">
                 <a:solidFill>
                   <a:srgbClr val="1E293B"/>
                 </a:solidFill>
                 <a:latin typeface="Calibri"/>
               </a:rPr>
-              <a:t>17  ·  Conclusion &amp; results</a:t>
-            </a:r>
-          </a:p>
-          <a:p>
-            <a:pPr algn="l">
-              <a:lnSpc>
-                <a:spcPct val="135000"/>
-              </a:lnSpc>
-              <a:spcAft>
-                <a:spcPts val="800"/>
-              </a:spcAft>
-            </a:pPr>
-            <a:r>
-              <a:rPr sz="1300" b="1">
-                <a:solidFill>
-                  <a:srgbClr val="F59E0B"/>
-                </a:solidFill>
-                <a:latin typeface="Calibri"/>
-              </a:rPr>
-              <a:t>·  </a:t>
-            </a:r>
-            <a:r>
-              <a:rPr sz="1300">
-                <a:solidFill>
-                  <a:srgbClr val="1E293B"/>
-                </a:solidFill>
-                <a:latin typeface="Calibri"/>
-              </a:rPr>
-              <a:t>18  ·  Q&amp;A</a:t>
+              <a:t>09  · </a:t>
+            </a:r>
+            <a:r>
+              <a:rPr lang="en-US" sz="1400" b="0" i="0" dirty="0">
+                <a:solidFill>
+                  <a:srgbClr val="2E2B29"/>
+                </a:solidFill>
+                <a:effectLst/>
+                <a:latin typeface="baselGrotesk"/>
+              </a:rPr>
+              <a:t>Key Insights + Deployment</a:t>
             </a:r>
           </a:p>
         </p:txBody>
@@ -17636,7 +17641,7 @@
 </file>
 
 <file path=ppt/slides/slide3.xml><?xml version="1.0" encoding="utf-8"?>
-<p:sld xmlns:a="http://schemas.openxmlformats.org/drawingml/2006/main" xmlns:p="http://schemas.openxmlformats.org/presentationml/2006/main" xmlns:r="http://schemas.openxmlformats.org/officeDocument/2006/relationships">
+<p:sld xmlns:a="http://schemas.openxmlformats.org/drawingml/2006/main" xmlns:r="http://schemas.openxmlformats.org/officeDocument/2006/relationships" xmlns:p="http://schemas.openxmlformats.org/presentationml/2006/main">
   <p:cSld>
     <p:spTree>
       <p:nvGrpSpPr>
@@ -17644,7 +17649,14 @@
         <p:cNvGrpSpPr/>
         <p:nvPr/>
       </p:nvGrpSpPr>
-      <p:grpSpPr/>
+      <p:grpSpPr>
+        <a:xfrm>
+          <a:off x="0" y="0"/>
+          <a:ext cx="0" cy="0"/>
+          <a:chOff x="0" y="0"/>
+          <a:chExt cx="0" cy="0"/>
+        </a:xfrm>
+      </p:grpSpPr>
       <p:sp>
         <p:nvSpPr>
           <p:cNvPr id="2" name="Rectangle 1"/>
@@ -17686,6 +17698,7 @@
           <a:lstStyle/>
           <a:p>
             <a:pPr algn="ctr"/>
+            <a:endParaRPr/>
           </a:p>
         </p:txBody>
       </p:sp>
@@ -17706,7 +17719,7 @@
           <a:noFill/>
         </p:spPr>
         <p:txBody>
-          <a:bodyPr wrap="square" lIns="0" rIns="0" tIns="0" bIns="0" anchor="t">
+          <a:bodyPr wrap="square" lIns="0" tIns="0" rIns="0" bIns="0" anchor="t">
             <a:spAutoFit/>
           </a:bodyPr>
           <a:lstStyle/>
@@ -17745,7 +17758,7 @@
           <a:noFill/>
         </p:spPr>
         <p:txBody>
-          <a:bodyPr wrap="square" lIns="0" rIns="0" tIns="0" bIns="0" anchor="t">
+          <a:bodyPr wrap="square" lIns="0" tIns="0" rIns="0" bIns="0" anchor="t">
             <a:spAutoFit/>
           </a:bodyPr>
           <a:lstStyle/>
@@ -17784,7 +17797,7 @@
           <a:noFill/>
         </p:spPr>
         <p:txBody>
-          <a:bodyPr wrap="square" lIns="0" rIns="0" tIns="0" bIns="0" anchor="t">
+          <a:bodyPr wrap="square" lIns="0" tIns="0" rIns="0" bIns="0" anchor="t">
             <a:spAutoFit/>
           </a:bodyPr>
           <a:lstStyle/>
@@ -17823,7 +17836,7 @@
           <a:noFill/>
         </p:spPr>
         <p:txBody>
-          <a:bodyPr wrap="square" lIns="0" rIns="0" tIns="0" bIns="0" anchor="t">
+          <a:bodyPr wrap="square" lIns="0" tIns="0" rIns="0" bIns="0" anchor="t">
             <a:spAutoFit/>
           </a:bodyPr>
           <a:lstStyle/>
@@ -17886,6 +17899,7 @@
           <a:lstStyle/>
           <a:p>
             <a:pPr algn="ctr"/>
+            <a:endParaRPr/>
           </a:p>
         </p:txBody>
       </p:sp>
@@ -17906,7 +17920,7 @@
           <a:noFill/>
         </p:spPr>
         <p:txBody>
-          <a:bodyPr wrap="square" lIns="0" rIns="0" tIns="0" bIns="0">
+          <a:bodyPr wrap="square" lIns="0" tIns="0" rIns="0" bIns="0">
             <a:spAutoFit/>
           </a:bodyPr>
           <a:lstStyle/>
@@ -18095,6 +18109,7 @@
           <a:lstStyle/>
           <a:p>
             <a:pPr algn="ctr"/>
+            <a:endParaRPr/>
           </a:p>
         </p:txBody>
       </p:sp>
@@ -18115,7 +18130,7 @@
           <a:noFill/>
         </p:spPr>
         <p:txBody>
-          <a:bodyPr wrap="square" lIns="0" rIns="0" tIns="0" bIns="0" anchor="t">
+          <a:bodyPr wrap="square" lIns="0" tIns="0" rIns="0" bIns="0" anchor="t">
             <a:spAutoFit/>
           </a:bodyPr>
           <a:lstStyle/>
@@ -18154,7 +18169,7 @@
           <a:noFill/>
         </p:spPr>
         <p:txBody>
-          <a:bodyPr wrap="square" lIns="0" rIns="0" tIns="0" bIns="0" anchor="t">
+          <a:bodyPr wrap="square" lIns="0" tIns="0" rIns="0" bIns="0" anchor="t">
             <a:spAutoFit/>
           </a:bodyPr>
           <a:lstStyle/>
@@ -18193,7 +18208,7 @@
           <a:noFill/>
         </p:spPr>
         <p:txBody>
-          <a:bodyPr wrap="square" lIns="0" rIns="0" tIns="0" bIns="0" anchor="t">
+          <a:bodyPr wrap="square" lIns="0" tIns="0" rIns="0" bIns="0" anchor="t">
             <a:spAutoFit/>
           </a:bodyPr>
           <a:lstStyle/>
@@ -18232,7 +18247,7 @@
           <a:noFill/>
         </p:spPr>
         <p:txBody>
-          <a:bodyPr wrap="square" lIns="0" rIns="0" tIns="0" bIns="0" anchor="t">
+          <a:bodyPr wrap="square" lIns="0" tIns="0" rIns="0" bIns="0" anchor="t">
             <a:spAutoFit/>
           </a:bodyPr>
           <a:lstStyle/>
@@ -18263,7 +18278,7 @@
 </file>
 
 <file path=ppt/slides/slide4.xml><?xml version="1.0" encoding="utf-8"?>
-<p:sld xmlns:a="http://schemas.openxmlformats.org/drawingml/2006/main" xmlns:p="http://schemas.openxmlformats.org/presentationml/2006/main" xmlns:r="http://schemas.openxmlformats.org/officeDocument/2006/relationships">
+<p:sld xmlns:a="http://schemas.openxmlformats.org/drawingml/2006/main" xmlns:r="http://schemas.openxmlformats.org/officeDocument/2006/relationships" xmlns:p="http://schemas.openxmlformats.org/presentationml/2006/main">
   <p:cSld>
     <p:spTree>
       <p:nvGrpSpPr>
@@ -18271,7 +18286,14 @@
         <p:cNvGrpSpPr/>
         <p:nvPr/>
       </p:nvGrpSpPr>
-      <p:grpSpPr/>
+      <p:grpSpPr>
+        <a:xfrm>
+          <a:off x="0" y="0"/>
+          <a:ext cx="0" cy="0"/>
+          <a:chOff x="0" y="0"/>
+          <a:chExt cx="0" cy="0"/>
+        </a:xfrm>
+      </p:grpSpPr>
       <p:sp>
         <p:nvSpPr>
           <p:cNvPr id="2" name="Rectangle 1"/>
@@ -18313,6 +18335,7 @@
           <a:lstStyle/>
           <a:p>
             <a:pPr algn="ctr"/>
+            <a:endParaRPr/>
           </a:p>
         </p:txBody>
       </p:sp>
@@ -18333,7 +18356,7 @@
           <a:noFill/>
         </p:spPr>
         <p:txBody>
-          <a:bodyPr wrap="square" lIns="0" rIns="0" tIns="0" bIns="0" anchor="t">
+          <a:bodyPr wrap="square" lIns="0" tIns="0" rIns="0" bIns="0" anchor="t">
             <a:spAutoFit/>
           </a:bodyPr>
           <a:lstStyle/>
@@ -18372,7 +18395,7 @@
           <a:noFill/>
         </p:spPr>
         <p:txBody>
-          <a:bodyPr wrap="square" lIns="0" rIns="0" tIns="0" bIns="0" anchor="t">
+          <a:bodyPr wrap="square" lIns="0" tIns="0" rIns="0" bIns="0" anchor="t">
             <a:spAutoFit/>
           </a:bodyPr>
           <a:lstStyle/>
@@ -18411,7 +18434,7 @@
           <a:noFill/>
         </p:spPr>
         <p:txBody>
-          <a:bodyPr wrap="square" lIns="0" rIns="0" tIns="0" bIns="0" anchor="t">
+          <a:bodyPr wrap="square" lIns="0" tIns="0" rIns="0" bIns="0" anchor="t">
             <a:spAutoFit/>
           </a:bodyPr>
           <a:lstStyle/>
@@ -18450,7 +18473,7 @@
           <a:noFill/>
         </p:spPr>
         <p:txBody>
-          <a:bodyPr wrap="square" lIns="0" rIns="0" tIns="0" bIns="0" anchor="t">
+          <a:bodyPr wrap="square" lIns="0" tIns="0" rIns="0" bIns="0" anchor="t">
             <a:spAutoFit/>
           </a:bodyPr>
           <a:lstStyle/>
@@ -18513,6 +18536,7 @@
           <a:lstStyle/>
           <a:p>
             <a:pPr algn="ctr"/>
+            <a:endParaRPr/>
           </a:p>
         </p:txBody>
       </p:sp>
@@ -18533,7 +18557,7 @@
           <a:noFill/>
         </p:spPr>
         <p:txBody>
-          <a:bodyPr wrap="square" lIns="0" rIns="0" tIns="0" bIns="0">
+          <a:bodyPr wrap="square" lIns="0" tIns="0" rIns="0" bIns="0">
             <a:spAutoFit/>
           </a:bodyPr>
           <a:lstStyle/>
@@ -18722,6 +18746,7 @@
           <a:lstStyle/>
           <a:p>
             <a:pPr algn="ctr"/>
+            <a:endParaRPr/>
           </a:p>
         </p:txBody>
       </p:sp>
@@ -18766,6 +18791,7 @@
           <a:lstStyle/>
           <a:p>
             <a:pPr algn="ctr"/>
+            <a:endParaRPr/>
           </a:p>
         </p:txBody>
       </p:sp>
@@ -18786,7 +18812,7 @@
           <a:noFill/>
         </p:spPr>
         <p:txBody>
-          <a:bodyPr wrap="square" lIns="0" rIns="0" tIns="0" bIns="0" anchor="t">
+          <a:bodyPr wrap="square" lIns="0" tIns="0" rIns="0" bIns="0" anchor="t">
             <a:spAutoFit/>
           </a:bodyPr>
           <a:lstStyle/>
@@ -18825,7 +18851,7 @@
           <a:noFill/>
         </p:spPr>
         <p:txBody>
-          <a:bodyPr wrap="square" lIns="0" rIns="0" tIns="0" bIns="0" anchor="t">
+          <a:bodyPr wrap="square" lIns="0" tIns="0" rIns="0" bIns="0" anchor="t">
             <a:spAutoFit/>
           </a:bodyPr>
           <a:lstStyle/>
@@ -18864,7 +18890,7 @@
           <a:noFill/>
         </p:spPr>
         <p:txBody>
-          <a:bodyPr wrap="square" lIns="0" rIns="0" tIns="0" bIns="0" anchor="t">
+          <a:bodyPr wrap="square" lIns="0" tIns="0" rIns="0" bIns="0" anchor="t">
             <a:spAutoFit/>
           </a:bodyPr>
           <a:lstStyle/>
@@ -18903,7 +18929,7 @@
           <a:noFill/>
         </p:spPr>
         <p:txBody>
-          <a:bodyPr wrap="square" lIns="0" rIns="0" tIns="0" bIns="0" anchor="t">
+          <a:bodyPr wrap="square" lIns="0" tIns="0" rIns="0" bIns="0" anchor="t">
             <a:spAutoFit/>
           </a:bodyPr>
           <a:lstStyle/>
@@ -18942,7 +18968,7 @@
           <a:noFill/>
         </p:spPr>
         <p:txBody>
-          <a:bodyPr wrap="square" lIns="0" rIns="0" tIns="0" bIns="0" anchor="t">
+          <a:bodyPr wrap="square" lIns="0" tIns="0" rIns="0" bIns="0" anchor="t">
             <a:spAutoFit/>
           </a:bodyPr>
           <a:lstStyle/>
@@ -18981,7 +19007,7 @@
           <a:noFill/>
         </p:spPr>
         <p:txBody>
-          <a:bodyPr wrap="square" lIns="0" rIns="0" tIns="0" bIns="0" anchor="t">
+          <a:bodyPr wrap="square" lIns="0" tIns="0" rIns="0" bIns="0" anchor="t">
             <a:spAutoFit/>
           </a:bodyPr>
           <a:lstStyle/>
@@ -19020,7 +19046,7 @@
           <a:noFill/>
         </p:spPr>
         <p:txBody>
-          <a:bodyPr wrap="square" lIns="0" rIns="0" tIns="0" bIns="0" anchor="t">
+          <a:bodyPr wrap="square" lIns="0" tIns="0" rIns="0" bIns="0" anchor="t">
             <a:spAutoFit/>
           </a:bodyPr>
           <a:lstStyle/>
@@ -19059,7 +19085,7 @@
           <a:noFill/>
         </p:spPr>
         <p:txBody>
-          <a:bodyPr wrap="square" lIns="0" rIns="0" tIns="0" bIns="0" anchor="t">
+          <a:bodyPr wrap="square" lIns="0" tIns="0" rIns="0" bIns="0" anchor="t">
             <a:spAutoFit/>
           </a:bodyPr>
           <a:lstStyle/>
@@ -19098,7 +19124,7 @@
           <a:noFill/>
         </p:spPr>
         <p:txBody>
-          <a:bodyPr wrap="square" lIns="0" rIns="0" tIns="0" bIns="0" anchor="t">
+          <a:bodyPr wrap="square" lIns="0" tIns="0" rIns="0" bIns="0" anchor="t">
             <a:spAutoFit/>
           </a:bodyPr>
           <a:lstStyle/>
@@ -19137,7 +19163,7 @@
           <a:noFill/>
         </p:spPr>
         <p:txBody>
-          <a:bodyPr wrap="square" lIns="0" rIns="0" tIns="0" bIns="0" anchor="t">
+          <a:bodyPr wrap="square" lIns="0" tIns="0" rIns="0" bIns="0" anchor="t">
             <a:spAutoFit/>
           </a:bodyPr>
           <a:lstStyle/>
@@ -19176,7 +19202,7 @@
           <a:noFill/>
         </p:spPr>
         <p:txBody>
-          <a:bodyPr wrap="square" lIns="0" rIns="0" tIns="0" bIns="0" anchor="t">
+          <a:bodyPr wrap="square" lIns="0" tIns="0" rIns="0" bIns="0" anchor="t">
             <a:spAutoFit/>
           </a:bodyPr>
           <a:lstStyle/>
@@ -19215,7 +19241,7 @@
           <a:noFill/>
         </p:spPr>
         <p:txBody>
-          <a:bodyPr wrap="square" lIns="0" rIns="0" tIns="0" bIns="0" anchor="t">
+          <a:bodyPr wrap="square" lIns="0" tIns="0" rIns="0" bIns="0" anchor="t">
             <a:spAutoFit/>
           </a:bodyPr>
           <a:lstStyle/>
@@ -19254,7 +19280,7 @@
           <a:noFill/>
         </p:spPr>
         <p:txBody>
-          <a:bodyPr wrap="square" lIns="0" rIns="0" tIns="0" bIns="0" anchor="t">
+          <a:bodyPr wrap="square" lIns="0" tIns="0" rIns="0" bIns="0" anchor="t">
             <a:spAutoFit/>
           </a:bodyPr>
           <a:lstStyle/>
@@ -19320,7 +19346,7 @@
 </file>
 
 <file path=ppt/slides/slide5.xml><?xml version="1.0" encoding="utf-8"?>
-<p:sld xmlns:a="http://schemas.openxmlformats.org/drawingml/2006/main" xmlns:p="http://schemas.openxmlformats.org/presentationml/2006/main" xmlns:r="http://schemas.openxmlformats.org/officeDocument/2006/relationships">
+<p:sld xmlns:a="http://schemas.openxmlformats.org/drawingml/2006/main" xmlns:r="http://schemas.openxmlformats.org/officeDocument/2006/relationships" xmlns:p="http://schemas.openxmlformats.org/presentationml/2006/main">
   <p:cSld>
     <p:spTree>
       <p:nvGrpSpPr>
@@ -19328,7 +19354,14 @@
         <p:cNvGrpSpPr/>
         <p:nvPr/>
       </p:nvGrpSpPr>
-      <p:grpSpPr/>
+      <p:grpSpPr>
+        <a:xfrm>
+          <a:off x="0" y="0"/>
+          <a:ext cx="0" cy="0"/>
+          <a:chOff x="0" y="0"/>
+          <a:chExt cx="0" cy="0"/>
+        </a:xfrm>
+      </p:grpSpPr>
       <p:sp>
         <p:nvSpPr>
           <p:cNvPr id="2" name="Rectangle 1"/>
@@ -19370,6 +19403,7 @@
           <a:lstStyle/>
           <a:p>
             <a:pPr algn="ctr"/>
+            <a:endParaRPr/>
           </a:p>
         </p:txBody>
       </p:sp>
@@ -19390,7 +19424,7 @@
           <a:noFill/>
         </p:spPr>
         <p:txBody>
-          <a:bodyPr wrap="square" lIns="0" rIns="0" tIns="0" bIns="0" anchor="t">
+          <a:bodyPr wrap="square" lIns="0" tIns="0" rIns="0" bIns="0" anchor="t">
             <a:spAutoFit/>
           </a:bodyPr>
           <a:lstStyle/>
@@ -19429,7 +19463,7 @@
           <a:noFill/>
         </p:spPr>
         <p:txBody>
-          <a:bodyPr wrap="square" lIns="0" rIns="0" tIns="0" bIns="0" anchor="t">
+          <a:bodyPr wrap="square" lIns="0" tIns="0" rIns="0" bIns="0" anchor="t">
             <a:spAutoFit/>
           </a:bodyPr>
           <a:lstStyle/>
@@ -19468,7 +19502,7 @@
           <a:noFill/>
         </p:spPr>
         <p:txBody>
-          <a:bodyPr wrap="square" lIns="0" rIns="0" tIns="0" bIns="0" anchor="t">
+          <a:bodyPr wrap="square" lIns="0" tIns="0" rIns="0" bIns="0" anchor="t">
             <a:spAutoFit/>
           </a:bodyPr>
           <a:lstStyle/>
@@ -19507,7 +19541,7 @@
           <a:noFill/>
         </p:spPr>
         <p:txBody>
-          <a:bodyPr wrap="square" lIns="0" rIns="0" tIns="0" bIns="0" anchor="t">
+          <a:bodyPr wrap="square" lIns="0" tIns="0" rIns="0" bIns="0" anchor="t">
             <a:spAutoFit/>
           </a:bodyPr>
           <a:lstStyle/>
@@ -19570,6 +19604,7 @@
           <a:lstStyle/>
           <a:p>
             <a:pPr algn="ctr"/>
+            <a:endParaRPr/>
           </a:p>
         </p:txBody>
       </p:sp>
@@ -19616,6 +19651,7 @@
           <a:lstStyle/>
           <a:p>
             <a:pPr algn="ctr"/>
+            <a:endParaRPr/>
           </a:p>
         </p:txBody>
       </p:sp>
@@ -19660,6 +19696,7 @@
           <a:lstStyle/>
           <a:p>
             <a:pPr algn="ctr"/>
+            <a:endParaRPr/>
           </a:p>
         </p:txBody>
       </p:sp>
@@ -19680,7 +19717,7 @@
           <a:noFill/>
         </p:spPr>
         <p:txBody>
-          <a:bodyPr wrap="square" lIns="0" rIns="0" tIns="0" bIns="0" anchor="t">
+          <a:bodyPr wrap="square" lIns="0" tIns="0" rIns="0" bIns="0" anchor="t">
             <a:spAutoFit/>
           </a:bodyPr>
           <a:lstStyle/>
@@ -19719,7 +19756,7 @@
           <a:noFill/>
         </p:spPr>
         <p:txBody>
-          <a:bodyPr wrap="square" lIns="0" rIns="0" tIns="0" bIns="0" anchor="t">
+          <a:bodyPr wrap="square" lIns="0" tIns="0" rIns="0" bIns="0" anchor="t">
             <a:spAutoFit/>
           </a:bodyPr>
           <a:lstStyle/>
@@ -19784,6 +19821,7 @@
           <a:lstStyle/>
           <a:p>
             <a:pPr algn="ctr"/>
+            <a:endParaRPr/>
           </a:p>
         </p:txBody>
       </p:sp>
@@ -19804,7 +19842,7 @@
           <a:noFill/>
         </p:spPr>
         <p:txBody>
-          <a:bodyPr wrap="square" lIns="0" rIns="0" tIns="0" bIns="0" anchor="t">
+          <a:bodyPr wrap="square" lIns="0" tIns="0" rIns="0" bIns="0" anchor="t">
             <a:spAutoFit/>
           </a:bodyPr>
           <a:lstStyle/>
@@ -19843,7 +19881,7 @@
           <a:noFill/>
         </p:spPr>
         <p:txBody>
-          <a:bodyPr wrap="square" lIns="0" rIns="0" tIns="0" bIns="0" anchor="t">
+          <a:bodyPr wrap="square" lIns="0" tIns="0" rIns="0" bIns="0" anchor="t">
             <a:spAutoFit/>
           </a:bodyPr>
           <a:lstStyle/>
@@ -19882,7 +19920,7 @@
           <a:noFill/>
         </p:spPr>
         <p:txBody>
-          <a:bodyPr wrap="square" lIns="0" rIns="0" tIns="0" bIns="0" anchor="t">
+          <a:bodyPr wrap="square" lIns="0" tIns="0" rIns="0" bIns="0" anchor="t">
             <a:spAutoFit/>
           </a:bodyPr>
           <a:lstStyle/>
@@ -19947,6 +19985,7 @@
           <a:lstStyle/>
           <a:p>
             <a:pPr algn="ctr"/>
+            <a:endParaRPr/>
           </a:p>
         </p:txBody>
       </p:sp>
@@ -19991,6 +20030,7 @@
           <a:lstStyle/>
           <a:p>
             <a:pPr algn="ctr"/>
+            <a:endParaRPr/>
           </a:p>
         </p:txBody>
       </p:sp>
@@ -20011,7 +20051,7 @@
           <a:noFill/>
         </p:spPr>
         <p:txBody>
-          <a:bodyPr wrap="square" lIns="0" rIns="0" tIns="0" bIns="0" anchor="t">
+          <a:bodyPr wrap="square" lIns="0" tIns="0" rIns="0" bIns="0" anchor="t">
             <a:spAutoFit/>
           </a:bodyPr>
           <a:lstStyle/>
@@ -20050,7 +20090,7 @@
           <a:noFill/>
         </p:spPr>
         <p:txBody>
-          <a:bodyPr wrap="square" lIns="0" rIns="0" tIns="0" bIns="0">
+          <a:bodyPr wrap="square" lIns="0" tIns="0" rIns="0" bIns="0">
             <a:spAutoFit/>
           </a:bodyPr>
           <a:lstStyle/>
@@ -20295,6 +20335,7 @@
           <a:lstStyle/>
           <a:p>
             <a:pPr algn="ctr"/>
+            <a:endParaRPr/>
           </a:p>
         </p:txBody>
       </p:sp>
@@ -20339,6 +20380,7 @@
           <a:lstStyle/>
           <a:p>
             <a:pPr algn="ctr"/>
+            <a:endParaRPr/>
           </a:p>
         </p:txBody>
       </p:sp>
@@ -20359,7 +20401,7 @@
           <a:noFill/>
         </p:spPr>
         <p:txBody>
-          <a:bodyPr wrap="square" lIns="0" rIns="0" tIns="0" bIns="0" anchor="t">
+          <a:bodyPr wrap="square" lIns="0" tIns="0" rIns="0" bIns="0" anchor="t">
             <a:spAutoFit/>
           </a:bodyPr>
           <a:lstStyle/>
@@ -20398,7 +20440,7 @@
           <a:noFill/>
         </p:spPr>
         <p:txBody>
-          <a:bodyPr wrap="square" lIns="0" rIns="0" tIns="0" bIns="0">
+          <a:bodyPr wrap="square" lIns="0" tIns="0" rIns="0" bIns="0">
             <a:spAutoFit/>
           </a:bodyPr>
           <a:lstStyle/>
@@ -20643,6 +20685,7 @@
           <a:lstStyle/>
           <a:p>
             <a:pPr algn="ctr"/>
+            <a:endParaRPr/>
           </a:p>
         </p:txBody>
       </p:sp>
@@ -20687,6 +20730,7 @@
           <a:lstStyle/>
           <a:p>
             <a:pPr algn="ctr"/>
+            <a:endParaRPr/>
           </a:p>
         </p:txBody>
       </p:sp>
@@ -20707,7 +20751,7 @@
           <a:noFill/>
         </p:spPr>
         <p:txBody>
-          <a:bodyPr wrap="square" lIns="0" rIns="0" tIns="0" bIns="0" anchor="t">
+          <a:bodyPr wrap="square" lIns="0" tIns="0" rIns="0" bIns="0" anchor="t">
             <a:spAutoFit/>
           </a:bodyPr>
           <a:lstStyle/>
@@ -20746,7 +20790,7 @@
           <a:noFill/>
         </p:spPr>
         <p:txBody>
-          <a:bodyPr wrap="square" lIns="0" rIns="0" tIns="0" bIns="0">
+          <a:bodyPr wrap="square" lIns="0" tIns="0" rIns="0" bIns="0">
             <a:spAutoFit/>
           </a:bodyPr>
           <a:lstStyle/>
@@ -20957,7 +21001,7 @@
 </file>
 
 <file path=ppt/slides/slide6.xml><?xml version="1.0" encoding="utf-8"?>
-<p:sld xmlns:a="http://schemas.openxmlformats.org/drawingml/2006/main" xmlns:p="http://schemas.openxmlformats.org/presentationml/2006/main" xmlns:r="http://schemas.openxmlformats.org/officeDocument/2006/relationships">
+<p:sld xmlns:a="http://schemas.openxmlformats.org/drawingml/2006/main" xmlns:r="http://schemas.openxmlformats.org/officeDocument/2006/relationships" xmlns:p="http://schemas.openxmlformats.org/presentationml/2006/main">
   <p:cSld>
     <p:spTree>
       <p:nvGrpSpPr>
@@ -20965,7 +21009,14 @@
         <p:cNvGrpSpPr/>
         <p:nvPr/>
       </p:nvGrpSpPr>
-      <p:grpSpPr/>
+      <p:grpSpPr>
+        <a:xfrm>
+          <a:off x="0" y="0"/>
+          <a:ext cx="0" cy="0"/>
+          <a:chOff x="0" y="0"/>
+          <a:chExt cx="0" cy="0"/>
+        </a:xfrm>
+      </p:grpSpPr>
       <p:sp>
         <p:nvSpPr>
           <p:cNvPr id="2" name="Rectangle 1"/>
@@ -21007,6 +21058,7 @@
           <a:lstStyle/>
           <a:p>
             <a:pPr algn="ctr"/>
+            <a:endParaRPr/>
           </a:p>
         </p:txBody>
       </p:sp>
@@ -21027,7 +21079,7 @@
           <a:noFill/>
         </p:spPr>
         <p:txBody>
-          <a:bodyPr wrap="square" lIns="0" rIns="0" tIns="0" bIns="0" anchor="t">
+          <a:bodyPr wrap="square" lIns="0" tIns="0" rIns="0" bIns="0" anchor="t">
             <a:spAutoFit/>
           </a:bodyPr>
           <a:lstStyle/>
@@ -21066,7 +21118,7 @@
           <a:noFill/>
         </p:spPr>
         <p:txBody>
-          <a:bodyPr wrap="square" lIns="0" rIns="0" tIns="0" bIns="0" anchor="t">
+          <a:bodyPr wrap="square" lIns="0" tIns="0" rIns="0" bIns="0" anchor="t">
             <a:spAutoFit/>
           </a:bodyPr>
           <a:lstStyle/>
@@ -21105,7 +21157,7 @@
           <a:noFill/>
         </p:spPr>
         <p:txBody>
-          <a:bodyPr wrap="square" lIns="0" rIns="0" tIns="0" bIns="0" anchor="t">
+          <a:bodyPr wrap="square" lIns="0" tIns="0" rIns="0" bIns="0" anchor="t">
             <a:spAutoFit/>
           </a:bodyPr>
           <a:lstStyle/>
@@ -21144,7 +21196,7 @@
           <a:noFill/>
         </p:spPr>
         <p:txBody>
-          <a:bodyPr wrap="square" lIns="0" rIns="0" tIns="0" bIns="0" anchor="t">
+          <a:bodyPr wrap="square" lIns="0" tIns="0" rIns="0" bIns="0" anchor="t">
             <a:spAutoFit/>
           </a:bodyPr>
           <a:lstStyle/>
@@ -21207,6 +21259,7 @@
           <a:lstStyle/>
           <a:p>
             <a:pPr algn="ctr"/>
+            <a:endParaRPr/>
           </a:p>
         </p:txBody>
       </p:sp>
@@ -21227,7 +21280,7 @@
           <a:noFill/>
         </p:spPr>
         <p:txBody>
-          <a:bodyPr wrap="square" lIns="0" rIns="0" tIns="0" bIns="0" anchor="t">
+          <a:bodyPr wrap="square" lIns="0" tIns="0" rIns="0" bIns="0" anchor="t">
             <a:spAutoFit/>
           </a:bodyPr>
           <a:lstStyle/>
@@ -21266,7 +21319,7 @@
           <a:noFill/>
         </p:spPr>
         <p:txBody>
-          <a:bodyPr wrap="square" lIns="0" rIns="0" tIns="0" bIns="0" anchor="t">
+          <a:bodyPr wrap="square" lIns="0" tIns="0" rIns="0" bIns="0" anchor="t">
             <a:spAutoFit/>
           </a:bodyPr>
           <a:lstStyle/>
@@ -21331,6 +21384,7 @@
           <a:lstStyle/>
           <a:p>
             <a:pPr algn="ctr"/>
+            <a:endParaRPr/>
           </a:p>
         </p:txBody>
       </p:sp>
@@ -21351,7 +21405,7 @@
           <a:noFill/>
         </p:spPr>
         <p:txBody>
-          <a:bodyPr wrap="square" lIns="0" rIns="0" tIns="0" bIns="0" anchor="t">
+          <a:bodyPr wrap="square" lIns="0" tIns="0" rIns="0" bIns="0" anchor="t">
             <a:spAutoFit/>
           </a:bodyPr>
           <a:lstStyle/>
@@ -21390,7 +21444,7 @@
           <a:noFill/>
         </p:spPr>
         <p:txBody>
-          <a:bodyPr wrap="square" lIns="0" rIns="0" tIns="0" bIns="0" anchor="t">
+          <a:bodyPr wrap="square" lIns="0" tIns="0" rIns="0" bIns="0" anchor="t">
             <a:spAutoFit/>
           </a:bodyPr>
           <a:lstStyle/>
@@ -21429,7 +21483,7 @@
           <a:noFill/>
         </p:spPr>
         <p:txBody>
-          <a:bodyPr wrap="square" lIns="0" rIns="0" tIns="0" bIns="0" anchor="t">
+          <a:bodyPr wrap="square" lIns="0" tIns="0" rIns="0" bIns="0" anchor="t">
             <a:spAutoFit/>
           </a:bodyPr>
           <a:lstStyle/>
@@ -21494,6 +21548,7 @@
           <a:lstStyle/>
           <a:p>
             <a:pPr algn="ctr"/>
+            <a:endParaRPr/>
           </a:p>
         </p:txBody>
       </p:sp>
@@ -21514,7 +21569,7 @@
           <a:noFill/>
         </p:spPr>
         <p:txBody>
-          <a:bodyPr wrap="square" lIns="0" rIns="0" tIns="0" bIns="0" anchor="t">
+          <a:bodyPr wrap="square" lIns="0" tIns="0" rIns="0" bIns="0" anchor="t">
             <a:spAutoFit/>
           </a:bodyPr>
           <a:lstStyle/>
@@ -21553,7 +21608,7 @@
           <a:noFill/>
         </p:spPr>
         <p:txBody>
-          <a:bodyPr wrap="square" lIns="0" rIns="0" tIns="0" bIns="0" anchor="t">
+          <a:bodyPr wrap="square" lIns="0" tIns="0" rIns="0" bIns="0" anchor="t">
             <a:spAutoFit/>
           </a:bodyPr>
           <a:lstStyle/>
@@ -21592,7 +21647,7 @@
           <a:noFill/>
         </p:spPr>
         <p:txBody>
-          <a:bodyPr wrap="square" lIns="0" rIns="0" tIns="0" bIns="0" anchor="t">
+          <a:bodyPr wrap="square" lIns="0" tIns="0" rIns="0" bIns="0" anchor="t">
             <a:spAutoFit/>
           </a:bodyPr>
           <a:lstStyle/>
@@ -21657,6 +21712,7 @@
           <a:lstStyle/>
           <a:p>
             <a:pPr algn="ctr"/>
+            <a:endParaRPr/>
           </a:p>
         </p:txBody>
       </p:sp>
@@ -21677,7 +21733,7 @@
           <a:noFill/>
         </p:spPr>
         <p:txBody>
-          <a:bodyPr wrap="square" lIns="0" rIns="0" tIns="0" bIns="0" anchor="t">
+          <a:bodyPr wrap="square" lIns="0" tIns="0" rIns="0" bIns="0" anchor="t">
             <a:spAutoFit/>
           </a:bodyPr>
           <a:lstStyle/>
@@ -21716,7 +21772,7 @@
           <a:noFill/>
         </p:spPr>
         <p:txBody>
-          <a:bodyPr wrap="square" lIns="0" rIns="0" tIns="0" bIns="0" anchor="t">
+          <a:bodyPr wrap="square" lIns="0" tIns="0" rIns="0" bIns="0" anchor="t">
             <a:spAutoFit/>
           </a:bodyPr>
           <a:lstStyle/>
@@ -21755,7 +21811,7 @@
           <a:noFill/>
         </p:spPr>
         <p:txBody>
-          <a:bodyPr wrap="square" lIns="0" rIns="0" tIns="0" bIns="0" anchor="t">
+          <a:bodyPr wrap="square" lIns="0" tIns="0" rIns="0" bIns="0" anchor="t">
             <a:spAutoFit/>
           </a:bodyPr>
           <a:lstStyle/>
@@ -21794,7 +21850,7 @@
           <a:noFill/>
         </p:spPr>
         <p:txBody>
-          <a:bodyPr wrap="square" lIns="0" rIns="0" tIns="0" bIns="0" anchor="t">
+          <a:bodyPr wrap="square" lIns="0" tIns="0" rIns="0" bIns="0" anchor="t">
             <a:spAutoFit/>
           </a:bodyPr>
           <a:lstStyle/>
@@ -21857,6 +21913,7 @@
           <a:lstStyle/>
           <a:p>
             <a:pPr algn="ctr"/>
+            <a:endParaRPr/>
           </a:p>
         </p:txBody>
       </p:sp>
@@ -21877,7 +21934,7 @@
           <a:noFill/>
         </p:spPr>
         <p:txBody>
-          <a:bodyPr wrap="square" lIns="0" rIns="0" tIns="0" bIns="0" anchor="t">
+          <a:bodyPr wrap="square" lIns="0" tIns="0" rIns="0" bIns="0" anchor="t">
             <a:spAutoFit/>
           </a:bodyPr>
           <a:lstStyle/>
@@ -21916,7 +21973,7 @@
           <a:noFill/>
         </p:spPr>
         <p:txBody>
-          <a:bodyPr wrap="square" lIns="0" rIns="0" tIns="0" bIns="0" anchor="t">
+          <a:bodyPr wrap="square" lIns="0" tIns="0" rIns="0" bIns="0" anchor="t">
             <a:spAutoFit/>
           </a:bodyPr>
           <a:lstStyle/>
@@ -21979,6 +22036,7 @@
           <a:lstStyle/>
           <a:p>
             <a:pPr algn="ctr"/>
+            <a:endParaRPr/>
           </a:p>
         </p:txBody>
       </p:sp>
@@ -22023,6 +22081,7 @@
           <a:lstStyle/>
           <a:p>
             <a:pPr algn="ctr"/>
+            <a:endParaRPr/>
           </a:p>
         </p:txBody>
       </p:sp>
@@ -22067,6 +22126,7 @@
           <a:lstStyle/>
           <a:p>
             <a:pPr algn="ctr"/>
+            <a:endParaRPr/>
           </a:p>
         </p:txBody>
       </p:sp>
@@ -22087,7 +22147,7 @@
           <a:noFill/>
         </p:spPr>
         <p:txBody>
-          <a:bodyPr wrap="square" lIns="0" rIns="0" tIns="0" bIns="0" anchor="t">
+          <a:bodyPr wrap="square" lIns="0" tIns="0" rIns="0" bIns="0" anchor="t">
             <a:spAutoFit/>
           </a:bodyPr>
           <a:lstStyle/>
@@ -22126,7 +22186,7 @@
           <a:noFill/>
         </p:spPr>
         <p:txBody>
-          <a:bodyPr wrap="square" lIns="0" rIns="0" tIns="0" bIns="0" anchor="t">
+          <a:bodyPr wrap="square" lIns="0" tIns="0" rIns="0" bIns="0" anchor="t">
             <a:spAutoFit/>
           </a:bodyPr>
           <a:lstStyle/>
@@ -22165,7 +22225,7 @@
           <a:noFill/>
         </p:spPr>
         <p:txBody>
-          <a:bodyPr wrap="square" lIns="0" rIns="0" tIns="0" bIns="0" anchor="t">
+          <a:bodyPr wrap="square" lIns="0" tIns="0" rIns="0" bIns="0" anchor="t">
             <a:spAutoFit/>
           </a:bodyPr>
           <a:lstStyle/>
@@ -22230,6 +22290,7 @@
           <a:lstStyle/>
           <a:p>
             <a:pPr algn="ctr"/>
+            <a:endParaRPr/>
           </a:p>
         </p:txBody>
       </p:sp>
@@ -22250,7 +22311,7 @@
           <a:noFill/>
         </p:spPr>
         <p:txBody>
-          <a:bodyPr wrap="square" lIns="0" rIns="0" tIns="0" bIns="0" anchor="t">
+          <a:bodyPr wrap="square" lIns="0" tIns="0" rIns="0" bIns="0" anchor="t">
             <a:spAutoFit/>
           </a:bodyPr>
           <a:lstStyle/>
@@ -22281,7 +22342,7 @@
 </file>
 
 <file path=ppt/slides/slide7.xml><?xml version="1.0" encoding="utf-8"?>
-<p:sld xmlns:a="http://schemas.openxmlformats.org/drawingml/2006/main" xmlns:p="http://schemas.openxmlformats.org/presentationml/2006/main" xmlns:r="http://schemas.openxmlformats.org/officeDocument/2006/relationships">
+<p:sld xmlns:a="http://schemas.openxmlformats.org/drawingml/2006/main" xmlns:r="http://schemas.openxmlformats.org/officeDocument/2006/relationships" xmlns:p="http://schemas.openxmlformats.org/presentationml/2006/main">
   <p:cSld>
     <p:spTree>
       <p:nvGrpSpPr>
@@ -22289,7 +22350,14 @@
         <p:cNvGrpSpPr/>
         <p:nvPr/>
       </p:nvGrpSpPr>
-      <p:grpSpPr/>
+      <p:grpSpPr>
+        <a:xfrm>
+          <a:off x="0" y="0"/>
+          <a:ext cx="0" cy="0"/>
+          <a:chOff x="0" y="0"/>
+          <a:chExt cx="0" cy="0"/>
+        </a:xfrm>
+      </p:grpSpPr>
       <p:sp>
         <p:nvSpPr>
           <p:cNvPr id="2" name="Rectangle 1"/>
@@ -22331,6 +22399,185 @@
           <a:lstStyle/>
           <a:p>
             <a:pPr algn="ctr"/>
+            <a:endParaRPr/>
+          </a:p>
+        </p:txBody>
+      </p:sp>
+      <p:sp>
+        <p:nvSpPr>
+          <p:cNvPr id="5" name="TextBox 4"/>
+          <p:cNvSpPr txBox="1"/>
+          <p:nvPr/>
+        </p:nvSpPr>
+        <p:spPr>
+          <a:xfrm>
+            <a:off x="640080" y="502920"/>
+            <a:ext cx="10972800" cy="274320"/>
+          </a:xfrm>
+          <a:prstGeom prst="rect">
+            <a:avLst/>
+          </a:prstGeom>
+          <a:noFill/>
+        </p:spPr>
+        <p:txBody>
+          <a:bodyPr wrap="square" lIns="0" tIns="0" rIns="0" bIns="0" anchor="t">
+            <a:spAutoFit/>
+          </a:bodyPr>
+          <a:lstStyle/>
+          <a:p>
+            <a:pPr algn="l">
+              <a:lnSpc>
+                <a:spcPct val="115000"/>
+              </a:lnSpc>
+            </a:pPr>
+            <a:r>
+              <a:rPr sz="1000" b="1">
+                <a:solidFill>
+                  <a:srgbClr val="F59E0B"/>
+                </a:solidFill>
+                <a:latin typeface="Calibri"/>
+              </a:rPr>
+              <a:t>05  ·  WORKFLOW</a:t>
+            </a:r>
+          </a:p>
+        </p:txBody>
+      </p:sp>
+      <p:sp>
+        <p:nvSpPr>
+          <p:cNvPr id="6" name="TextBox 5"/>
+          <p:cNvSpPr txBox="1"/>
+          <p:nvPr/>
+        </p:nvSpPr>
+        <p:spPr>
+          <a:xfrm>
+            <a:off x="640080" y="822960"/>
+            <a:ext cx="10972800" cy="685800"/>
+          </a:xfrm>
+          <a:prstGeom prst="rect">
+            <a:avLst/>
+          </a:prstGeom>
+          <a:noFill/>
+        </p:spPr>
+        <p:txBody>
+          <a:bodyPr wrap="square" lIns="0" tIns="0" rIns="0" bIns="0" anchor="t">
+            <a:spAutoFit/>
+          </a:bodyPr>
+          <a:lstStyle/>
+          <a:p>
+            <a:pPr algn="l">
+              <a:lnSpc>
+                <a:spcPct val="115000"/>
+              </a:lnSpc>
+            </a:pPr>
+            <a:r>
+              <a:rPr sz="2800" b="1">
+                <a:solidFill>
+                  <a:srgbClr val="1E293B"/>
+                </a:solidFill>
+                <a:latin typeface="Calibri"/>
+              </a:rPr>
+              <a:t>Block diagram: Input → Methodology → Output</a:t>
+            </a:r>
+          </a:p>
+        </p:txBody>
+      </p:sp>
+      <p:pic>
+        <p:nvPicPr>
+          <p:cNvPr id="4" name="Picture 3">
+            <a:extLst>
+              <a:ext uri="{FF2B5EF4-FFF2-40B4-BE49-F238E27FC236}">
+                <a16:creationId xmlns:a16="http://schemas.microsoft.com/office/drawing/2014/main" id="{E3737D2D-B1E0-3BF2-DAAD-DAF0D237AE4A}"/>
+              </a:ext>
+            </a:extLst>
+          </p:cNvPr>
+          <p:cNvPicPr>
+            <a:picLocks noChangeAspect="1"/>
+          </p:cNvPicPr>
+          <p:nvPr/>
+        </p:nvPicPr>
+        <p:blipFill>
+          <a:blip r:embed="rId3"/>
+          <a:stretch>
+            <a:fillRect/>
+          </a:stretch>
+        </p:blipFill>
+        <p:spPr>
+          <a:xfrm>
+            <a:off x="3180361" y="1436114"/>
+            <a:ext cx="5296127" cy="5421886"/>
+          </a:xfrm>
+          <a:prstGeom prst="rect">
+            <a:avLst/>
+          </a:prstGeom>
+        </p:spPr>
+      </p:pic>
+    </p:spTree>
+  </p:cSld>
+  <p:clrMapOvr>
+    <a:masterClrMapping/>
+  </p:clrMapOvr>
+</p:sld>
+</file>
+
+<file path=ppt/slides/slide8.xml><?xml version="1.0" encoding="utf-8"?>
+<p:sld xmlns:a="http://schemas.openxmlformats.org/drawingml/2006/main" xmlns:r="http://schemas.openxmlformats.org/officeDocument/2006/relationships" xmlns:p="http://schemas.openxmlformats.org/presentationml/2006/main">
+  <p:cSld>
+    <p:spTree>
+      <p:nvGrpSpPr>
+        <p:cNvPr id="1" name=""/>
+        <p:cNvGrpSpPr/>
+        <p:nvPr/>
+      </p:nvGrpSpPr>
+      <p:grpSpPr>
+        <a:xfrm>
+          <a:off x="0" y="0"/>
+          <a:ext cx="0" cy="0"/>
+          <a:chOff x="0" y="0"/>
+          <a:chExt cx="0" cy="0"/>
+        </a:xfrm>
+      </p:grpSpPr>
+      <p:sp>
+        <p:nvSpPr>
+          <p:cNvPr id="2" name="Rectangle 1"/>
+          <p:cNvSpPr/>
+          <p:nvPr/>
+        </p:nvSpPr>
+        <p:spPr>
+          <a:xfrm>
+            <a:off x="0" y="0"/>
+            <a:ext cx="109728" cy="6858000"/>
+          </a:xfrm>
+          <a:prstGeom prst="rect">
+            <a:avLst/>
+          </a:prstGeom>
+          <a:solidFill>
+            <a:srgbClr val="0F766E"/>
+          </a:solidFill>
+          <a:ln>
+            <a:noFill/>
+          </a:ln>
+          <a:effectLst/>
+        </p:spPr>
+        <p:style>
+          <a:lnRef idx="1">
+            <a:schemeClr val="accent1"/>
+          </a:lnRef>
+          <a:fillRef idx="3">
+            <a:schemeClr val="accent1"/>
+          </a:fillRef>
+          <a:effectRef idx="2">
+            <a:schemeClr val="accent1"/>
+          </a:effectRef>
+          <a:fontRef idx="minor">
+            <a:schemeClr val="lt1"/>
+          </a:fontRef>
+        </p:style>
+        <p:txBody>
+          <a:bodyPr rtlCol="0" anchor="ctr"/>
+          <a:lstStyle/>
+          <a:p>
+            <a:pPr algn="ctr"/>
+            <a:endParaRPr/>
           </a:p>
         </p:txBody>
       </p:sp>
@@ -22351,7 +22598,7 @@
           <a:noFill/>
         </p:spPr>
         <p:txBody>
-          <a:bodyPr wrap="square" lIns="0" rIns="0" tIns="0" bIns="0" anchor="t">
+          <a:bodyPr wrap="square" lIns="0" tIns="0" rIns="0" bIns="0" anchor="t">
             <a:spAutoFit/>
           </a:bodyPr>
           <a:lstStyle/>
@@ -22390,7 +22637,7 @@
           <a:noFill/>
         </p:spPr>
         <p:txBody>
-          <a:bodyPr wrap="square" lIns="0" rIns="0" tIns="0" bIns="0" anchor="t">
+          <a:bodyPr wrap="square" lIns="0" tIns="0" rIns="0" bIns="0" anchor="t">
             <a:spAutoFit/>
           </a:bodyPr>
           <a:lstStyle/>
@@ -22407,7 +22654,7 @@
                 </a:solidFill>
                 <a:latin typeface="Calibri"/>
               </a:rPr>
-              <a:t>7 / 18</a:t>
+              <a:t>8 / 18</a:t>
             </a:r>
           </a:p>
         </p:txBody>
@@ -22429,7 +22676,7 @@
           <a:noFill/>
         </p:spPr>
         <p:txBody>
-          <a:bodyPr wrap="square" lIns="0" rIns="0" tIns="0" bIns="0" anchor="t">
+          <a:bodyPr wrap="square" lIns="0" tIns="0" rIns="0" bIns="0" anchor="t">
             <a:spAutoFit/>
           </a:bodyPr>
           <a:lstStyle/>
@@ -22446,7 +22693,7 @@
                 </a:solidFill>
                 <a:latin typeface="Calibri"/>
               </a:rPr>
-              <a:t>05  ·  WORKFLOW</a:t>
+              <a:t>06  ·  PREPROCESSING</a:t>
             </a:r>
           </a:p>
         </p:txBody>
@@ -22468,7 +22715,7 @@
           <a:noFill/>
         </p:spPr>
         <p:txBody>
-          <a:bodyPr wrap="square" lIns="0" rIns="0" tIns="0" bIns="0" anchor="t">
+          <a:bodyPr wrap="square" lIns="0" tIns="0" rIns="0" bIns="0" anchor="t">
             <a:spAutoFit/>
           </a:bodyPr>
           <a:lstStyle/>
@@ -22485,7 +22732,7 @@
                 </a:solidFill>
                 <a:latin typeface="Calibri"/>
               </a:rPr>
-              <a:t>Block diagram: Input → Methodology → Output</a:t>
+              <a:t>Data cleaning — what we did</a:t>
             </a:r>
           </a:p>
         </p:txBody>
@@ -22531,63 +22778,138 @@
           <a:lstStyle/>
           <a:p>
             <a:pPr algn="ctr"/>
-          </a:p>
-        </p:txBody>
-      </p:sp>
-      <p:sp>
-        <p:nvSpPr>
-          <p:cNvPr id="8" name="Rectangle 7"/>
+            <a:endParaRPr/>
+          </a:p>
+        </p:txBody>
+      </p:sp>
+      <p:sp>
+        <p:nvSpPr>
+          <p:cNvPr id="8" name="TextBox 7"/>
+          <p:cNvSpPr txBox="1"/>
+          <p:nvPr/>
+        </p:nvSpPr>
+        <p:spPr>
+          <a:xfrm>
+            <a:off x="640080" y="2011680"/>
+            <a:ext cx="6400800" cy="3657600"/>
+          </a:xfrm>
+          <a:prstGeom prst="rect">
+            <a:avLst/>
+          </a:prstGeom>
+          <a:noFill/>
+        </p:spPr>
+        <p:txBody>
+          <a:bodyPr wrap="square" lIns="0" tIns="0" rIns="0" bIns="0">
+            <a:spAutoFit/>
+          </a:bodyPr>
+          <a:lstStyle/>
+          <a:p>
+            <a:pPr algn="l">
+              <a:lnSpc>
+                <a:spcPct val="145000"/>
+              </a:lnSpc>
+              <a:spcAft>
+                <a:spcPts val="1000"/>
+              </a:spcAft>
+            </a:pPr>
+            <a:r>
+              <a:t>■ Checked for missing values → 0 originally, then 350 injected (~0.5%) for realism</a:t>
+            </a:r>
+          </a:p>
+          <a:p>
+            <a:pPr algn="l">
+              <a:lnSpc>
+                <a:spcPct val="145000"/>
+              </a:lnSpc>
+              <a:spcAft>
+                <a:spcPts val="1000"/>
+              </a:spcAft>
+            </a:pPr>
+            <a:r>
+              <a:t>■ Removed duplicate rows → 1,636 dropped</a:t>
+            </a:r>
+          </a:p>
+          <a:p>
+            <a:pPr algn="l">
+              <a:lnSpc>
+                <a:spcPct val="145000"/>
+              </a:lnSpc>
+              <a:spcAft>
+                <a:spcPts val="1000"/>
+              </a:spcAft>
+            </a:pPr>
+            <a:r>
+              <a:t>■ Final shape: 69,057 rows × 22 columns</a:t>
+            </a:r>
+          </a:p>
+          <a:p>
+            <a:pPr algn="l">
+              <a:lnSpc>
+                <a:spcPct val="145000"/>
+              </a:lnSpc>
+              <a:spcAft>
+                <a:spcPts val="1000"/>
+              </a:spcAft>
+            </a:pPr>
+            <a:r>
+              <a:rPr sz="1400" b="1">
+                <a:solidFill>
+                  <a:srgbClr val="F59E0B"/>
+                </a:solidFill>
+                <a:latin typeface="Calibri"/>
+              </a:rPr>
+              <a:t>■  </a:t>
+            </a:r>
+            <a:r>
+              <a:rPr sz="1400">
+                <a:solidFill>
+                  <a:srgbClr val="475569"/>
+                </a:solidFill>
+                <a:latin typeface="Calibri"/>
+              </a:rPr>
+              <a:t>Converted 21 columns to int (everything except BMI which is float)</a:t>
+            </a:r>
+          </a:p>
+          <a:p>
+            <a:pPr algn="l">
+              <a:lnSpc>
+                <a:spcPct val="145000"/>
+              </a:lnSpc>
+              <a:spcAft>
+                <a:spcPts val="1000"/>
+              </a:spcAft>
+            </a:pPr>
+            <a:r>
+              <a:rPr sz="1400" b="1">
+                <a:solidFill>
+                  <a:srgbClr val="F59E0B"/>
+                </a:solidFill>
+                <a:latin typeface="Calibri"/>
+              </a:rPr>
+              <a:t>■  </a:t>
+            </a:r>
+            <a:r>
+              <a:rPr sz="1400">
+                <a:solidFill>
+                  <a:srgbClr val="475569"/>
+                </a:solidFill>
+                <a:latin typeface="Calibri"/>
+              </a:rPr>
+              <a:t>Verified class balance still ~50 / 50</a:t>
+            </a:r>
+          </a:p>
+        </p:txBody>
+      </p:sp>
+      <p:sp>
+        <p:nvSpPr>
+          <p:cNvPr id="9" name="Rectangle 8"/>
           <p:cNvSpPr/>
           <p:nvPr/>
         </p:nvSpPr>
         <p:spPr>
           <a:xfrm>
-            <a:off x="640080" y="1874519"/>
-            <a:ext cx="1828800" cy="411480"/>
-          </a:xfrm>
-          <a:prstGeom prst="rect">
-            <a:avLst/>
-          </a:prstGeom>
-          <a:solidFill>
-            <a:srgbClr val="0F766E"/>
-          </a:solidFill>
-          <a:ln>
-            <a:noFill/>
-          </a:ln>
-          <a:effectLst/>
-        </p:spPr>
-        <p:style>
-          <a:lnRef idx="1">
-            <a:schemeClr val="accent1"/>
-          </a:lnRef>
-          <a:fillRef idx="3">
-            <a:schemeClr val="accent1"/>
-          </a:fillRef>
-          <a:effectRef idx="2">
-            <a:schemeClr val="accent1"/>
-          </a:effectRef>
-          <a:fontRef idx="minor">
-            <a:schemeClr val="lt1"/>
-          </a:fontRef>
-        </p:style>
-        <p:txBody>
-          <a:bodyPr rtlCol="0" anchor="ctr"/>
-          <a:lstStyle/>
-          <a:p>
-            <a:pPr algn="ctr"/>
-          </a:p>
-        </p:txBody>
-      </p:sp>
-      <p:sp>
-        <p:nvSpPr>
-          <p:cNvPr id="10" name="Rectangle 9"/>
-          <p:cNvSpPr/>
-          <p:nvPr/>
-        </p:nvSpPr>
-        <p:spPr>
-          <a:xfrm>
-            <a:off x="640080" y="2377439"/>
-            <a:ext cx="10972800" cy="640080"/>
+            <a:off x="7498079" y="2194560"/>
+            <a:ext cx="4114800" cy="3291840"/>
           </a:xfrm>
           <a:prstGeom prst="rect">
             <a:avLst/>
@@ -22621,1700 +22943,7 @@
           <a:lstStyle/>
           <a:p>
             <a:pPr algn="ctr"/>
-          </a:p>
-        </p:txBody>
-      </p:sp>
-      <p:sp>
-        <p:nvSpPr>
-          <p:cNvPr id="11" name="TextBox 10"/>
-          <p:cNvSpPr txBox="1"/>
-          <p:nvPr/>
-        </p:nvSpPr>
-        <p:spPr>
-          <a:xfrm>
-            <a:off x="914400" y="2414015"/>
-            <a:ext cx="10515600" cy="274320"/>
-          </a:xfrm>
-          <a:prstGeom prst="rect">
-            <a:avLst/>
-          </a:prstGeom>
-          <a:noFill/>
-        </p:spPr>
-        <p:txBody>
-          <a:bodyPr wrap="square" lIns="0" rIns="0" tIns="0" bIns="0" anchor="t">
-            <a:spAutoFit/>
-          </a:bodyPr>
-          <a:lstStyle/>
-          <a:p>
-            <a:pPr algn="ctr">
-              <a:lnSpc>
-                <a:spcPct val="115000"/>
-              </a:lnSpc>
-            </a:pPr>
-            <a:r>
-              <a:rPr sz="1100" b="1">
-                <a:solidFill>
-                  <a:srgbClr val="1E293B"/>
-                </a:solidFill>
-                <a:latin typeface="Calibri"/>
-              </a:rPr>
-              <a:t>70,693 patient records  ·  21 health indicators  ·  Diabetes_binary (target)</a:t>
-            </a:r>
-          </a:p>
-        </p:txBody>
-      </p:sp>
-      <p:sp>
-        <p:nvSpPr>
-          <p:cNvPr id="12" name="TextBox 11"/>
-          <p:cNvSpPr txBox="1"/>
-          <p:nvPr/>
-        </p:nvSpPr>
-        <p:spPr>
-          <a:xfrm>
-            <a:off x="914400" y="2706623"/>
-            <a:ext cx="10515600" cy="274320"/>
-          </a:xfrm>
-          <a:prstGeom prst="rect">
-            <a:avLst/>
-          </a:prstGeom>
-          <a:noFill/>
-        </p:spPr>
-        <p:txBody>
-          <a:bodyPr wrap="square" lIns="0" rIns="0" tIns="0" bIns="0" anchor="t">
-            <a:spAutoFit/>
-          </a:bodyPr>
-          <a:lstStyle/>
-          <a:p>
-            <a:pPr algn="ctr">
-              <a:lnSpc>
-                <a:spcPct val="115000"/>
-              </a:lnSpc>
-            </a:pPr>
-            <a:r>
-              <a:rPr sz="1000" b="0">
-                <a:solidFill>
-                  <a:srgbClr val="475569"/>
-                </a:solidFill>
-                <a:latin typeface="Calibri"/>
-              </a:rPr>
-              <a:t>Source: BRFSS 2015 (CDC survey) — Kaggle clean version</a:t>
-            </a:r>
-          </a:p>
-        </p:txBody>
-      </p:sp>
-      <p:sp>
-        <p:nvSpPr>
-          <p:cNvPr id="13" name="Rectangle 12"/>
-          <p:cNvSpPr/>
-          <p:nvPr/>
-        </p:nvSpPr>
-        <p:spPr>
-          <a:xfrm>
-            <a:off x="640080" y="3383280"/>
-            <a:ext cx="1828800" cy="411480"/>
-          </a:xfrm>
-          <a:prstGeom prst="rect">
-            <a:avLst/>
-          </a:prstGeom>
-          <a:solidFill>
-            <a:srgbClr val="F59E0B"/>
-          </a:solidFill>
-          <a:ln>
-            <a:noFill/>
-          </a:ln>
-          <a:effectLst/>
-        </p:spPr>
-        <p:style>
-          <a:lnRef idx="1">
-            <a:schemeClr val="accent1"/>
-          </a:lnRef>
-          <a:fillRef idx="3">
-            <a:schemeClr val="accent1"/>
-          </a:fillRef>
-          <a:effectRef idx="2">
-            <a:schemeClr val="accent1"/>
-          </a:effectRef>
-          <a:fontRef idx="minor">
-            <a:schemeClr val="lt1"/>
-          </a:fontRef>
-        </p:style>
-        <p:txBody>
-          <a:bodyPr rtlCol="0" anchor="ctr"/>
-          <a:lstStyle/>
-          <a:p>
-            <a:pPr algn="ctr"/>
-          </a:p>
-        </p:txBody>
-      </p:sp>
-      <p:sp>
-        <p:nvSpPr>
-          <p:cNvPr id="15" name="Rounded Rectangle 14"/>
-          <p:cNvSpPr/>
-          <p:nvPr/>
-        </p:nvSpPr>
-        <p:spPr>
-          <a:xfrm>
-            <a:off x="502920" y="3886200"/>
-            <a:ext cx="2606040" cy="1234440"/>
-          </a:xfrm>
-          <a:prstGeom prst="roundRect">
-            <a:avLst/>
-          </a:prstGeom>
-          <a:solidFill>
-            <a:srgbClr val="FFFFFF"/>
-          </a:solidFill>
-          <a:ln w="15875">
-            <a:solidFill>
-              <a:srgbClr val="0F766E"/>
-            </a:solidFill>
-          </a:ln>
-          <a:effectLst/>
-        </p:spPr>
-        <p:style>
-          <a:lnRef idx="1">
-            <a:schemeClr val="accent1"/>
-          </a:lnRef>
-          <a:fillRef idx="3">
-            <a:schemeClr val="accent1"/>
-          </a:fillRef>
-          <a:effectRef idx="2">
-            <a:schemeClr val="accent1"/>
-          </a:effectRef>
-          <a:fontRef idx="minor">
-            <a:schemeClr val="lt1"/>
-          </a:fontRef>
-        </p:style>
-        <p:txBody>
-          <a:bodyPr rtlCol="0" anchor="ctr"/>
-          <a:lstStyle/>
-          <a:p>
-            <a:pPr algn="ctr"/>
-          </a:p>
-        </p:txBody>
-      </p:sp>
-      <p:sp>
-        <p:nvSpPr>
-          <p:cNvPr id="16" name="Rounded Rectangle 15"/>
-          <p:cNvSpPr/>
-          <p:nvPr/>
-        </p:nvSpPr>
-        <p:spPr>
-          <a:xfrm>
-            <a:off x="704088" y="4050792"/>
-            <a:ext cx="457200" cy="292608"/>
-          </a:xfrm>
-          <a:prstGeom prst="roundRect">
-            <a:avLst/>
-          </a:prstGeom>
-          <a:solidFill>
-            <a:srgbClr val="0F766E"/>
-          </a:solidFill>
-          <a:ln>
-            <a:noFill/>
-          </a:ln>
-          <a:effectLst/>
-        </p:spPr>
-        <p:style>
-          <a:lnRef idx="1">
-            <a:schemeClr val="accent1"/>
-          </a:lnRef>
-          <a:fillRef idx="3">
-            <a:schemeClr val="accent1"/>
-          </a:fillRef>
-          <a:effectRef idx="2">
-            <a:schemeClr val="accent1"/>
-          </a:effectRef>
-          <a:fontRef idx="minor">
-            <a:schemeClr val="lt1"/>
-          </a:fontRef>
-        </p:style>
-        <p:txBody>
-          <a:bodyPr rtlCol="0" anchor="ctr" lIns="0" rIns="0" tIns="0" bIns="0"/>
-          <a:lstStyle/>
-          <a:p>
-            <a:pPr algn="ctr"/>
-            <a:r>
-              <a:rPr sz="1000" b="1">
-                <a:solidFill>
-                  <a:srgbClr val="FFFFFF"/>
-                </a:solidFill>
-                <a:latin typeface="Calibri"/>
-              </a:rPr>
-              <a:t>01</a:t>
-            </a:r>
-          </a:p>
-        </p:txBody>
-      </p:sp>
-      <p:sp>
-        <p:nvSpPr>
-          <p:cNvPr id="17" name="TextBox 16"/>
-          <p:cNvSpPr txBox="1"/>
-          <p:nvPr/>
-        </p:nvSpPr>
-        <p:spPr>
-          <a:xfrm>
-            <a:off x="1280160" y="4023360"/>
-            <a:ext cx="1691640" cy="594360"/>
-          </a:xfrm>
-          <a:prstGeom prst="rect">
-            <a:avLst/>
-          </a:prstGeom>
-          <a:noFill/>
-        </p:spPr>
-        <p:txBody>
-          <a:bodyPr wrap="square" lIns="0" rIns="0" tIns="0" bIns="0" anchor="t">
-            <a:spAutoFit/>
-          </a:bodyPr>
-          <a:lstStyle/>
-          <a:p>
-            <a:pPr algn="l">
-              <a:lnSpc>
-                <a:spcPct val="105000"/>
-              </a:lnSpc>
-            </a:pPr>
-            <a:r>
-              <a:rPr sz="1200" b="1">
-                <a:solidFill>
-                  <a:srgbClr val="1E293B"/>
-                </a:solidFill>
-                <a:latin typeface="Calibri"/>
-              </a:rPr>
-              <a:t>Data</a:t>
-            </a:r>
-          </a:p>
-          <a:p>
-            <a:pPr algn="l">
-              <a:lnSpc>
-                <a:spcPct val="105000"/>
-              </a:lnSpc>
-            </a:pPr>
-            <a:r>
-              <a:rPr sz="1200" b="1">
-                <a:solidFill>
-                  <a:srgbClr val="1E293B"/>
-                </a:solidFill>
-                <a:latin typeface="Calibri"/>
-              </a:rPr>
-              <a:t>Cleaning</a:t>
-            </a:r>
-          </a:p>
-        </p:txBody>
-      </p:sp>
-      <p:sp>
-        <p:nvSpPr>
-          <p:cNvPr id="18" name="TextBox 17"/>
-          <p:cNvSpPr txBox="1"/>
-          <p:nvPr/>
-        </p:nvSpPr>
-        <p:spPr>
-          <a:xfrm>
-            <a:off x="777240" y="4663440"/>
-            <a:ext cx="2148840" cy="365760"/>
-          </a:xfrm>
-          <a:prstGeom prst="rect">
-            <a:avLst/>
-          </a:prstGeom>
-          <a:noFill/>
-        </p:spPr>
-        <p:txBody>
-          <a:bodyPr wrap="square" lIns="0" rIns="0" tIns="0" bIns="0" anchor="t">
-            <a:spAutoFit/>
-          </a:bodyPr>
-          <a:lstStyle/>
-          <a:p>
-            <a:pPr algn="l">
-              <a:lnSpc>
-                <a:spcPct val="115000"/>
-              </a:lnSpc>
-            </a:pPr>
-            <a:r>
-              <a:rPr sz="1000" b="0">
-                <a:solidFill>
-                  <a:srgbClr val="475569"/>
-                </a:solidFill>
-                <a:latin typeface="Calibri"/>
-              </a:rPr>
-              <a:t>Drop duplicates</a:t>
-            </a:r>
-          </a:p>
-        </p:txBody>
-      </p:sp>
-      <p:sp>
-        <p:nvSpPr>
-          <p:cNvPr id="19" name="Right Arrow 18"/>
-          <p:cNvSpPr/>
-          <p:nvPr/>
-        </p:nvSpPr>
-        <p:spPr>
-          <a:xfrm>
-            <a:off x="3127248" y="4384548"/>
-            <a:ext cx="228600" cy="237744"/>
-          </a:xfrm>
-          <a:prstGeom prst="rightArrow">
-            <a:avLst/>
-          </a:prstGeom>
-          <a:solidFill>
-            <a:srgbClr val="F59E0B"/>
-          </a:solidFill>
-          <a:ln>
-            <a:noFill/>
-          </a:ln>
-          <a:effectLst/>
-        </p:spPr>
-        <p:style>
-          <a:lnRef idx="1">
-            <a:schemeClr val="accent1"/>
-          </a:lnRef>
-          <a:fillRef idx="3">
-            <a:schemeClr val="accent1"/>
-          </a:fillRef>
-          <a:effectRef idx="2">
-            <a:schemeClr val="accent1"/>
-          </a:effectRef>
-          <a:fontRef idx="minor">
-            <a:schemeClr val="lt1"/>
-          </a:fontRef>
-        </p:style>
-        <p:txBody>
-          <a:bodyPr rtlCol="0" anchor="ctr"/>
-          <a:lstStyle/>
-          <a:p>
-            <a:pPr algn="ctr"/>
-          </a:p>
-        </p:txBody>
-      </p:sp>
-      <p:sp>
-        <p:nvSpPr>
-          <p:cNvPr id="20" name="Rounded Rectangle 19"/>
-          <p:cNvSpPr/>
-          <p:nvPr/>
-        </p:nvSpPr>
-        <p:spPr>
-          <a:xfrm>
-            <a:off x="3383280" y="3886200"/>
-            <a:ext cx="2606040" cy="1234440"/>
-          </a:xfrm>
-          <a:prstGeom prst="roundRect">
-            <a:avLst/>
-          </a:prstGeom>
-          <a:solidFill>
-            <a:srgbClr val="FFFFFF"/>
-          </a:solidFill>
-          <a:ln w="15875">
-            <a:solidFill>
-              <a:srgbClr val="0F766E"/>
-            </a:solidFill>
-          </a:ln>
-          <a:effectLst/>
-        </p:spPr>
-        <p:style>
-          <a:lnRef idx="1">
-            <a:schemeClr val="accent1"/>
-          </a:lnRef>
-          <a:fillRef idx="3">
-            <a:schemeClr val="accent1"/>
-          </a:fillRef>
-          <a:effectRef idx="2">
-            <a:schemeClr val="accent1"/>
-          </a:effectRef>
-          <a:fontRef idx="minor">
-            <a:schemeClr val="lt1"/>
-          </a:fontRef>
-        </p:style>
-        <p:txBody>
-          <a:bodyPr rtlCol="0" anchor="ctr"/>
-          <a:lstStyle/>
-          <a:p>
-            <a:pPr algn="ctr"/>
-          </a:p>
-        </p:txBody>
-      </p:sp>
-      <p:sp>
-        <p:nvSpPr>
-          <p:cNvPr id="21" name="Rounded Rectangle 20"/>
-          <p:cNvSpPr/>
-          <p:nvPr/>
-        </p:nvSpPr>
-        <p:spPr>
-          <a:xfrm>
-            <a:off x="3584448" y="4050792"/>
-            <a:ext cx="457200" cy="292608"/>
-          </a:xfrm>
-          <a:prstGeom prst="roundRect">
-            <a:avLst/>
-          </a:prstGeom>
-          <a:solidFill>
-            <a:srgbClr val="0F766E"/>
-          </a:solidFill>
-          <a:ln>
-            <a:noFill/>
-          </a:ln>
-          <a:effectLst/>
-        </p:spPr>
-        <p:style>
-          <a:lnRef idx="1">
-            <a:schemeClr val="accent1"/>
-          </a:lnRef>
-          <a:fillRef idx="3">
-            <a:schemeClr val="accent1"/>
-          </a:fillRef>
-          <a:effectRef idx="2">
-            <a:schemeClr val="accent1"/>
-          </a:effectRef>
-          <a:fontRef idx="minor">
-            <a:schemeClr val="lt1"/>
-          </a:fontRef>
-        </p:style>
-        <p:txBody>
-          <a:bodyPr rtlCol="0" anchor="ctr" lIns="0" rIns="0" tIns="0" bIns="0"/>
-          <a:lstStyle/>
-          <a:p>
-            <a:pPr algn="ctr"/>
-            <a:r>
-              <a:rPr sz="1000" b="1">
-                <a:solidFill>
-                  <a:srgbClr val="FFFFFF"/>
-                </a:solidFill>
-                <a:latin typeface="Calibri"/>
-              </a:rPr>
-              <a:t>02</a:t>
-            </a:r>
-          </a:p>
-        </p:txBody>
-      </p:sp>
-      <p:sp>
-        <p:nvSpPr>
-          <p:cNvPr id="23" name="TextBox 22"/>
-          <p:cNvSpPr txBox="1"/>
-          <p:nvPr/>
-        </p:nvSpPr>
-        <p:spPr>
-          <a:xfrm>
-            <a:off x="3657600" y="4663440"/>
-            <a:ext cx="2148840" cy="365760"/>
-          </a:xfrm>
-          <a:prstGeom prst="rect">
-            <a:avLst/>
-          </a:prstGeom>
-          <a:noFill/>
-        </p:spPr>
-        <p:txBody>
-          <a:bodyPr wrap="square" lIns="0" rIns="0" tIns="0" bIns="0" anchor="t">
-            <a:spAutoFit/>
-          </a:bodyPr>
-          <a:lstStyle/>
-          <a:p>
-            <a:pPr algn="l">
-              <a:lnSpc>
-                <a:spcPct val="115000"/>
-              </a:lnSpc>
-            </a:pPr>
-            <a:r>
-              <a:rPr sz="1000" b="0">
-                <a:solidFill>
-                  <a:srgbClr val="475569"/>
-                </a:solidFill>
-                <a:latin typeface="Calibri"/>
-              </a:rPr>
-              <a:t>Stats + heatmap</a:t>
-            </a:r>
-          </a:p>
-        </p:txBody>
-      </p:sp>
-      <p:sp>
-        <p:nvSpPr>
-          <p:cNvPr id="24" name="Right Arrow 23"/>
-          <p:cNvSpPr/>
-          <p:nvPr/>
-        </p:nvSpPr>
-        <p:spPr>
-          <a:xfrm>
-            <a:off x="6007608" y="4384548"/>
-            <a:ext cx="228600" cy="237744"/>
-          </a:xfrm>
-          <a:prstGeom prst="rightArrow">
-            <a:avLst/>
-          </a:prstGeom>
-          <a:solidFill>
-            <a:srgbClr val="F59E0B"/>
-          </a:solidFill>
-          <a:ln>
-            <a:noFill/>
-          </a:ln>
-          <a:effectLst/>
-        </p:spPr>
-        <p:style>
-          <a:lnRef idx="1">
-            <a:schemeClr val="accent1"/>
-          </a:lnRef>
-          <a:fillRef idx="3">
-            <a:schemeClr val="accent1"/>
-          </a:fillRef>
-          <a:effectRef idx="2">
-            <a:schemeClr val="accent1"/>
-          </a:effectRef>
-          <a:fontRef idx="minor">
-            <a:schemeClr val="lt1"/>
-          </a:fontRef>
-        </p:style>
-        <p:txBody>
-          <a:bodyPr rtlCol="0" anchor="ctr"/>
-          <a:lstStyle/>
-          <a:p>
-            <a:pPr algn="ctr"/>
-          </a:p>
-        </p:txBody>
-      </p:sp>
-      <p:sp>
-        <p:nvSpPr>
-          <p:cNvPr id="25" name="Rounded Rectangle 24"/>
-          <p:cNvSpPr/>
-          <p:nvPr/>
-        </p:nvSpPr>
-        <p:spPr>
-          <a:xfrm>
-            <a:off x="6263640" y="3886200"/>
-            <a:ext cx="2606040" cy="1234440"/>
-          </a:xfrm>
-          <a:prstGeom prst="roundRect">
-            <a:avLst/>
-          </a:prstGeom>
-          <a:solidFill>
-            <a:srgbClr val="FFFFFF"/>
-          </a:solidFill>
-          <a:ln w="15875">
-            <a:solidFill>
-              <a:srgbClr val="0F766E"/>
-            </a:solidFill>
-          </a:ln>
-          <a:effectLst/>
-        </p:spPr>
-        <p:style>
-          <a:lnRef idx="1">
-            <a:schemeClr val="accent1"/>
-          </a:lnRef>
-          <a:fillRef idx="3">
-            <a:schemeClr val="accent1"/>
-          </a:fillRef>
-          <a:effectRef idx="2">
-            <a:schemeClr val="accent1"/>
-          </a:effectRef>
-          <a:fontRef idx="minor">
-            <a:schemeClr val="lt1"/>
-          </a:fontRef>
-        </p:style>
-        <p:txBody>
-          <a:bodyPr rtlCol="0" anchor="ctr"/>
-          <a:lstStyle/>
-          <a:p>
-            <a:pPr algn="ctr"/>
-          </a:p>
-        </p:txBody>
-      </p:sp>
-      <p:sp>
-        <p:nvSpPr>
-          <p:cNvPr id="26" name="Rounded Rectangle 25"/>
-          <p:cNvSpPr/>
-          <p:nvPr/>
-        </p:nvSpPr>
-        <p:spPr>
-          <a:xfrm>
-            <a:off x="6464808" y="4050792"/>
-            <a:ext cx="457200" cy="292608"/>
-          </a:xfrm>
-          <a:prstGeom prst="roundRect">
-            <a:avLst/>
-          </a:prstGeom>
-          <a:solidFill>
-            <a:srgbClr val="0F766E"/>
-          </a:solidFill>
-          <a:ln>
-            <a:noFill/>
-          </a:ln>
-          <a:effectLst/>
-        </p:spPr>
-        <p:style>
-          <a:lnRef idx="1">
-            <a:schemeClr val="accent1"/>
-          </a:lnRef>
-          <a:fillRef idx="3">
-            <a:schemeClr val="accent1"/>
-          </a:fillRef>
-          <a:effectRef idx="2">
-            <a:schemeClr val="accent1"/>
-          </a:effectRef>
-          <a:fontRef idx="minor">
-            <a:schemeClr val="lt1"/>
-          </a:fontRef>
-        </p:style>
-        <p:txBody>
-          <a:bodyPr rtlCol="0" anchor="ctr" lIns="0" rIns="0" tIns="0" bIns="0"/>
-          <a:lstStyle/>
-          <a:p>
-            <a:pPr algn="ctr"/>
-            <a:r>
-              <a:rPr sz="1000" b="1">
-                <a:solidFill>
-                  <a:srgbClr val="FFFFFF"/>
-                </a:solidFill>
-                <a:latin typeface="Calibri"/>
-              </a:rPr>
-              <a:t>03</a:t>
-            </a:r>
-          </a:p>
-        </p:txBody>
-      </p:sp>
-      <p:sp>
-        <p:nvSpPr>
-          <p:cNvPr id="28" name="TextBox 27"/>
-          <p:cNvSpPr txBox="1"/>
-          <p:nvPr/>
-        </p:nvSpPr>
-        <p:spPr>
-          <a:xfrm>
-            <a:off x="6537960" y="4663440"/>
-            <a:ext cx="2148840" cy="365760"/>
-          </a:xfrm>
-          <a:prstGeom prst="rect">
-            <a:avLst/>
-          </a:prstGeom>
-          <a:noFill/>
-        </p:spPr>
-        <p:txBody>
-          <a:bodyPr wrap="square" lIns="0" rIns="0" tIns="0" bIns="0" anchor="t">
-            <a:spAutoFit/>
-          </a:bodyPr>
-          <a:lstStyle/>
-          <a:p>
-            <a:pPr algn="l">
-              <a:lnSpc>
-                <a:spcPct val="115000"/>
-              </a:lnSpc>
-            </a:pPr>
-            <a:r>
-              <a:rPr sz="1000" b="0">
-                <a:solidFill>
-                  <a:srgbClr val="475569"/>
-                </a:solidFill>
-                <a:latin typeface="Calibri"/>
-              </a:rPr>
-              <a:t>80/20 stratified</a:t>
-            </a:r>
-          </a:p>
-        </p:txBody>
-      </p:sp>
-      <p:sp>
-        <p:nvSpPr>
-          <p:cNvPr id="29" name="Right Arrow 28"/>
-          <p:cNvSpPr/>
-          <p:nvPr/>
-        </p:nvSpPr>
-        <p:spPr>
-          <a:xfrm>
-            <a:off x="8887968" y="4384548"/>
-            <a:ext cx="228600" cy="237744"/>
-          </a:xfrm>
-          <a:prstGeom prst="rightArrow">
-            <a:avLst/>
-          </a:prstGeom>
-          <a:solidFill>
-            <a:srgbClr val="F59E0B"/>
-          </a:solidFill>
-          <a:ln>
-            <a:noFill/>
-          </a:ln>
-          <a:effectLst/>
-        </p:spPr>
-        <p:style>
-          <a:lnRef idx="1">
-            <a:schemeClr val="accent1"/>
-          </a:lnRef>
-          <a:fillRef idx="3">
-            <a:schemeClr val="accent1"/>
-          </a:fillRef>
-          <a:effectRef idx="2">
-            <a:schemeClr val="accent1"/>
-          </a:effectRef>
-          <a:fontRef idx="minor">
-            <a:schemeClr val="lt1"/>
-          </a:fontRef>
-        </p:style>
-        <p:txBody>
-          <a:bodyPr rtlCol="0" anchor="ctr"/>
-          <a:lstStyle/>
-          <a:p>
-            <a:pPr algn="ctr"/>
-          </a:p>
-        </p:txBody>
-      </p:sp>
-      <p:sp>
-        <p:nvSpPr>
-          <p:cNvPr id="30" name="Rounded Rectangle 29"/>
-          <p:cNvSpPr/>
-          <p:nvPr/>
-        </p:nvSpPr>
-        <p:spPr>
-          <a:xfrm>
-            <a:off x="9144000" y="3886200"/>
-            <a:ext cx="2606040" cy="1234440"/>
-          </a:xfrm>
-          <a:prstGeom prst="roundRect">
-            <a:avLst/>
-          </a:prstGeom>
-          <a:solidFill>
-            <a:srgbClr val="FFFFFF"/>
-          </a:solidFill>
-          <a:ln w="15875">
-            <a:solidFill>
-              <a:srgbClr val="0F766E"/>
-            </a:solidFill>
-          </a:ln>
-          <a:effectLst/>
-        </p:spPr>
-        <p:style>
-          <a:lnRef idx="1">
-            <a:schemeClr val="accent1"/>
-          </a:lnRef>
-          <a:fillRef idx="3">
-            <a:schemeClr val="accent1"/>
-          </a:fillRef>
-          <a:effectRef idx="2">
-            <a:schemeClr val="accent1"/>
-          </a:effectRef>
-          <a:fontRef idx="minor">
-            <a:schemeClr val="lt1"/>
-          </a:fontRef>
-        </p:style>
-        <p:txBody>
-          <a:bodyPr rtlCol="0" anchor="ctr"/>
-          <a:lstStyle/>
-          <a:p>
-            <a:pPr algn="ctr"/>
-          </a:p>
-        </p:txBody>
-      </p:sp>
-      <p:sp>
-        <p:nvSpPr>
-          <p:cNvPr id="31" name="Rounded Rectangle 30"/>
-          <p:cNvSpPr/>
-          <p:nvPr/>
-        </p:nvSpPr>
-        <p:spPr>
-          <a:xfrm>
-            <a:off x="9345168" y="4050792"/>
-            <a:ext cx="457200" cy="292608"/>
-          </a:xfrm>
-          <a:prstGeom prst="roundRect">
-            <a:avLst/>
-          </a:prstGeom>
-          <a:solidFill>
-            <a:srgbClr val="0F766E"/>
-          </a:solidFill>
-          <a:ln>
-            <a:noFill/>
-          </a:ln>
-          <a:effectLst/>
-        </p:spPr>
-        <p:style>
-          <a:lnRef idx="1">
-            <a:schemeClr val="accent1"/>
-          </a:lnRef>
-          <a:fillRef idx="3">
-            <a:schemeClr val="accent1"/>
-          </a:fillRef>
-          <a:effectRef idx="2">
-            <a:schemeClr val="accent1"/>
-          </a:effectRef>
-          <a:fontRef idx="minor">
-            <a:schemeClr val="lt1"/>
-          </a:fontRef>
-        </p:style>
-        <p:txBody>
-          <a:bodyPr rtlCol="0" anchor="ctr" lIns="0" rIns="0" tIns="0" bIns="0"/>
-          <a:lstStyle/>
-          <a:p>
-            <a:pPr algn="ctr"/>
-            <a:r>
-              <a:rPr sz="1000" b="1">
-                <a:solidFill>
-                  <a:srgbClr val="FFFFFF"/>
-                </a:solidFill>
-                <a:latin typeface="Calibri"/>
-              </a:rPr>
-              <a:t>04</a:t>
-            </a:r>
-          </a:p>
-        </p:txBody>
-      </p:sp>
-      <p:sp>
-        <p:nvSpPr>
-          <p:cNvPr id="32" name="TextBox 31"/>
-          <p:cNvSpPr txBox="1"/>
-          <p:nvPr/>
-        </p:nvSpPr>
-        <p:spPr>
-          <a:xfrm>
-            <a:off x="9921240" y="4023360"/>
-            <a:ext cx="1691640" cy="594360"/>
-          </a:xfrm>
-          <a:prstGeom prst="rect">
-            <a:avLst/>
-          </a:prstGeom>
-          <a:noFill/>
-        </p:spPr>
-        <p:txBody>
-          <a:bodyPr wrap="square" lIns="0" rIns="0" tIns="0" bIns="0" anchor="t">
-            <a:spAutoFit/>
-          </a:bodyPr>
-          <a:lstStyle/>
-          <a:p>
-            <a:pPr algn="l">
-              <a:lnSpc>
-                <a:spcPct val="105000"/>
-              </a:lnSpc>
-            </a:pPr>
-            <a:r>
-              <a:rPr sz="1200" b="1">
-                <a:solidFill>
-                  <a:srgbClr val="1E293B"/>
-                </a:solidFill>
-                <a:latin typeface="Calibri"/>
-              </a:rPr>
-              <a:t>Train</a:t>
-            </a:r>
-          </a:p>
-          <a:p>
-            <a:pPr algn="l">
-              <a:lnSpc>
-                <a:spcPct val="105000"/>
-              </a:lnSpc>
-            </a:pPr>
-            <a:r>
-              <a:rPr sz="1200" b="1">
-                <a:solidFill>
-                  <a:srgbClr val="1E293B"/>
-                </a:solidFill>
-                <a:latin typeface="Calibri"/>
-              </a:rPr>
-              <a:t>Random Forest</a:t>
-            </a:r>
-          </a:p>
-        </p:txBody>
-      </p:sp>
-      <p:sp>
-        <p:nvSpPr>
-          <p:cNvPr id="33" name="TextBox 32"/>
-          <p:cNvSpPr txBox="1"/>
-          <p:nvPr/>
-        </p:nvSpPr>
-        <p:spPr>
-          <a:xfrm>
-            <a:off x="9418320" y="4663440"/>
-            <a:ext cx="2148840" cy="365760"/>
-          </a:xfrm>
-          <a:prstGeom prst="rect">
-            <a:avLst/>
-          </a:prstGeom>
-          <a:noFill/>
-        </p:spPr>
-        <p:txBody>
-          <a:bodyPr wrap="square" lIns="0" rIns="0" tIns="0" bIns="0" anchor="t">
-            <a:spAutoFit/>
-          </a:bodyPr>
-          <a:lstStyle/>
-          <a:p>
-            <a:pPr algn="l">
-              <a:lnSpc>
-                <a:spcPct val="115000"/>
-              </a:lnSpc>
-            </a:pPr>
-            <a:r>
-              <a:rPr sz="1000" b="0">
-                <a:solidFill>
-                  <a:srgbClr val="475569"/>
-                </a:solidFill>
-                <a:latin typeface="Calibri"/>
-              </a:rPr>
-              <a:t>200 trees</a:t>
-            </a:r>
-          </a:p>
-        </p:txBody>
-      </p:sp>
-      <p:sp>
-        <p:nvSpPr>
-          <p:cNvPr id="34" name="Rectangle 33"/>
-          <p:cNvSpPr/>
-          <p:nvPr/>
-        </p:nvSpPr>
-        <p:spPr>
-          <a:xfrm>
-            <a:off x="640080" y="5166360"/>
-            <a:ext cx="1828800" cy="411480"/>
-          </a:xfrm>
-          <a:prstGeom prst="rect">
-            <a:avLst/>
-          </a:prstGeom>
-          <a:solidFill>
-            <a:srgbClr val="0B4F4A"/>
-          </a:solidFill>
-          <a:ln>
-            <a:noFill/>
-          </a:ln>
-          <a:effectLst/>
-        </p:spPr>
-        <p:style>
-          <a:lnRef idx="1">
-            <a:schemeClr val="accent1"/>
-          </a:lnRef>
-          <a:fillRef idx="3">
-            <a:schemeClr val="accent1"/>
-          </a:fillRef>
-          <a:effectRef idx="2">
-            <a:schemeClr val="accent1"/>
-          </a:effectRef>
-          <a:fontRef idx="minor">
-            <a:schemeClr val="lt1"/>
-          </a:fontRef>
-        </p:style>
-        <p:txBody>
-          <a:bodyPr rtlCol="0" anchor="ctr"/>
-          <a:lstStyle/>
-          <a:p>
-            <a:pPr algn="ctr"/>
-          </a:p>
-        </p:txBody>
-      </p:sp>
-      <p:sp>
-        <p:nvSpPr>
-          <p:cNvPr id="36" name="Rectangle 35"/>
-          <p:cNvSpPr/>
-          <p:nvPr/>
-        </p:nvSpPr>
-        <p:spPr>
-          <a:xfrm>
-            <a:off x="640080" y="5669280"/>
-            <a:ext cx="3520440" cy="640080"/>
-          </a:xfrm>
-          <a:prstGeom prst="rect">
-            <a:avLst/>
-          </a:prstGeom>
-          <a:solidFill>
-            <a:srgbClr val="0B4F4A"/>
-          </a:solidFill>
-          <a:ln>
-            <a:noFill/>
-          </a:ln>
-          <a:effectLst/>
-        </p:spPr>
-        <p:style>
-          <a:lnRef idx="1">
-            <a:schemeClr val="accent1"/>
-          </a:lnRef>
-          <a:fillRef idx="3">
-            <a:schemeClr val="accent1"/>
-          </a:fillRef>
-          <a:effectRef idx="2">
-            <a:schemeClr val="accent1"/>
-          </a:effectRef>
-          <a:fontRef idx="minor">
-            <a:schemeClr val="lt1"/>
-          </a:fontRef>
-        </p:style>
-        <p:txBody>
-          <a:bodyPr rtlCol="0" anchor="ctr"/>
-          <a:lstStyle/>
-          <a:p>
-            <a:pPr algn="ctr"/>
-          </a:p>
-        </p:txBody>
-      </p:sp>
-      <p:sp>
-        <p:nvSpPr>
-          <p:cNvPr id="38" name="TextBox 37"/>
-          <p:cNvSpPr txBox="1"/>
-          <p:nvPr/>
-        </p:nvSpPr>
-        <p:spPr>
-          <a:xfrm>
-            <a:off x="640080" y="5943600"/>
-            <a:ext cx="3520440" cy="365760"/>
-          </a:xfrm>
-          <a:prstGeom prst="rect">
-            <a:avLst/>
-          </a:prstGeom>
-          <a:noFill/>
-        </p:spPr>
-        <p:txBody>
-          <a:bodyPr wrap="square" lIns="0" rIns="0" tIns="0" bIns="0" anchor="t">
-            <a:spAutoFit/>
-          </a:bodyPr>
-          <a:lstStyle/>
-          <a:p>
-            <a:pPr algn="ctr">
-              <a:lnSpc>
-                <a:spcPct val="115000"/>
-              </a:lnSpc>
-            </a:pPr>
-            <a:r>
-              <a:rPr sz="1500" b="1">
-                <a:solidFill>
-                  <a:srgbClr val="FFFFFF"/>
-                </a:solidFill>
-                <a:latin typeface="Calibri"/>
-              </a:rPr>
-              <a:t>74.36%</a:t>
-            </a:r>
-          </a:p>
-        </p:txBody>
-      </p:sp>
-      <p:sp>
-        <p:nvSpPr>
-          <p:cNvPr id="39" name="Rectangle 38"/>
-          <p:cNvSpPr/>
-          <p:nvPr/>
-        </p:nvSpPr>
-        <p:spPr>
-          <a:xfrm>
-            <a:off x="4366260" y="5669280"/>
-            <a:ext cx="3520440" cy="640080"/>
-          </a:xfrm>
-          <a:prstGeom prst="rect">
-            <a:avLst/>
-          </a:prstGeom>
-          <a:solidFill>
-            <a:srgbClr val="0B4F4A"/>
-          </a:solidFill>
-          <a:ln>
-            <a:noFill/>
-          </a:ln>
-          <a:effectLst/>
-        </p:spPr>
-        <p:style>
-          <a:lnRef idx="1">
-            <a:schemeClr val="accent1"/>
-          </a:lnRef>
-          <a:fillRef idx="3">
-            <a:schemeClr val="accent1"/>
-          </a:fillRef>
-          <a:effectRef idx="2">
-            <a:schemeClr val="accent1"/>
-          </a:effectRef>
-          <a:fontRef idx="minor">
-            <a:schemeClr val="lt1"/>
-          </a:fontRef>
-        </p:style>
-        <p:txBody>
-          <a:bodyPr rtlCol="0" anchor="ctr"/>
-          <a:lstStyle/>
-          <a:p>
-            <a:pPr algn="ctr"/>
-          </a:p>
-        </p:txBody>
-      </p:sp>
-      <p:sp>
-        <p:nvSpPr>
-          <p:cNvPr id="41" name="TextBox 40"/>
-          <p:cNvSpPr txBox="1"/>
-          <p:nvPr/>
-        </p:nvSpPr>
-        <p:spPr>
-          <a:xfrm>
-            <a:off x="4366260" y="5943600"/>
-            <a:ext cx="3520440" cy="365760"/>
-          </a:xfrm>
-          <a:prstGeom prst="rect">
-            <a:avLst/>
-          </a:prstGeom>
-          <a:noFill/>
-        </p:spPr>
-        <p:txBody>
-          <a:bodyPr wrap="square" lIns="0" rIns="0" tIns="0" bIns="0" anchor="t">
-            <a:spAutoFit/>
-          </a:bodyPr>
-          <a:lstStyle/>
-          <a:p>
-            <a:pPr algn="ctr">
-              <a:lnSpc>
-                <a:spcPct val="115000"/>
-              </a:lnSpc>
-            </a:pPr>
-            <a:r>
-              <a:rPr sz="1500" b="1">
-                <a:solidFill>
-                  <a:srgbClr val="FFFFFF"/>
-                </a:solidFill>
-                <a:latin typeface="Calibri"/>
-              </a:rPr>
-              <a:t>0.759</a:t>
-            </a:r>
-          </a:p>
-        </p:txBody>
-      </p:sp>
-      <p:sp>
-        <p:nvSpPr>
-          <p:cNvPr id="42" name="Rectangle 41"/>
-          <p:cNvSpPr/>
-          <p:nvPr/>
-        </p:nvSpPr>
-        <p:spPr>
-          <a:xfrm>
-            <a:off x="8092440" y="5669280"/>
-            <a:ext cx="3520440" cy="640080"/>
-          </a:xfrm>
-          <a:prstGeom prst="rect">
-            <a:avLst/>
-          </a:prstGeom>
-          <a:solidFill>
-            <a:srgbClr val="0B4F4A"/>
-          </a:solidFill>
-          <a:ln>
-            <a:noFill/>
-          </a:ln>
-          <a:effectLst/>
-        </p:spPr>
-        <p:style>
-          <a:lnRef idx="1">
-            <a:schemeClr val="accent1"/>
-          </a:lnRef>
-          <a:fillRef idx="3">
-            <a:schemeClr val="accent1"/>
-          </a:fillRef>
-          <a:effectRef idx="2">
-            <a:schemeClr val="accent1"/>
-          </a:effectRef>
-          <a:fontRef idx="minor">
-            <a:schemeClr val="lt1"/>
-          </a:fontRef>
-        </p:style>
-        <p:txBody>
-          <a:bodyPr rtlCol="0" anchor="ctr"/>
-          <a:lstStyle/>
-          <a:p>
-            <a:pPr algn="ctr"/>
-          </a:p>
-        </p:txBody>
-      </p:sp>
-      <p:sp>
-        <p:nvSpPr>
-          <p:cNvPr id="44" name="TextBox 43"/>
-          <p:cNvSpPr txBox="1"/>
-          <p:nvPr/>
-        </p:nvSpPr>
-        <p:spPr>
-          <a:xfrm>
-            <a:off x="8092440" y="5943600"/>
-            <a:ext cx="3520440" cy="365760"/>
-          </a:xfrm>
-          <a:prstGeom prst="rect">
-            <a:avLst/>
-          </a:prstGeom>
-          <a:noFill/>
-        </p:spPr>
-        <p:txBody>
-          <a:bodyPr wrap="square" lIns="0" rIns="0" tIns="0" bIns="0" anchor="t">
-            <a:spAutoFit/>
-          </a:bodyPr>
-          <a:lstStyle/>
-          <a:p>
-            <a:pPr algn="ctr">
-              <a:lnSpc>
-                <a:spcPct val="115000"/>
-              </a:lnSpc>
-            </a:pPr>
-            <a:r>
-              <a:rPr sz="1500" b="1">
-                <a:solidFill>
-                  <a:srgbClr val="FFFFFF"/>
-                </a:solidFill>
-                <a:latin typeface="Calibri"/>
-              </a:rPr>
-              <a:t>0.794</a:t>
-            </a:r>
-          </a:p>
-        </p:txBody>
-      </p:sp>
-      <p:pic>
-        <p:nvPicPr>
-          <p:cNvPr id="45" name="Picture 44" descr="block_diagram_ppt_ready.png"/>
-          <p:cNvPicPr>
-            <a:picLocks noChangeAspect="1"/>
-          </p:cNvPicPr>
-          <p:nvPr/>
-        </p:nvPicPr>
-        <p:blipFill>
-          <a:blip r:embed="rId3"/>
-          <a:stretch>
-            <a:fillRect/>
-          </a:stretch>
-        </p:blipFill>
-        <p:spPr>
-          <a:xfrm>
-            <a:off x="137160" y="1005840"/>
-            <a:ext cx="11914632" cy="6317407"/>
-          </a:xfrm>
-          <a:prstGeom prst="rect">
-            <a:avLst/>
-          </a:prstGeom>
-        </p:spPr>
-      </p:pic>
-      <p:sp>
-        <p:nvSpPr>
-          <p:cNvPr id="46" name="TextBox 45"/>
-          <p:cNvSpPr txBox="1"/>
-          <p:nvPr/>
-        </p:nvSpPr>
-        <p:spPr>
-          <a:xfrm>
-            <a:off x="274320" y="6263640"/>
-            <a:ext cx="11612880" cy="502920"/>
-          </a:xfrm>
-          <a:prstGeom prst="rect">
-            <a:avLst/>
-          </a:prstGeom>
-          <a:noFill/>
-        </p:spPr>
-        <p:txBody>
-          <a:bodyPr wrap="none">
-            <a:spAutoFit/>
-          </a:bodyPr>
-          <a:lstStyle/>
-          <a:p>
-            <a:pPr>
-              <a:defRPr sz="1100">
-                <a:solidFill>
-                  <a:srgbClr val="475569"/>
-                </a:solidFill>
-              </a:defRPr>
-            </a:pPr>
-            <a:r>
-              <a:t>Note: Full details in block diagram above. 350 missing values injected for realism (see next slides). Train/test split done before any modeling.</a:t>
-            </a:r>
-          </a:p>
-        </p:txBody>
-      </p:sp>
-    </p:spTree>
-  </p:cSld>
-  <p:clrMapOvr>
-    <a:masterClrMapping/>
-  </p:clrMapOvr>
-</p:sld>
-</file>
-
-<file path=ppt/slides/slide8.xml><?xml version="1.0" encoding="utf-8"?>
-<p:sld xmlns:a="http://schemas.openxmlformats.org/drawingml/2006/main" xmlns:p="http://schemas.openxmlformats.org/presentationml/2006/main" xmlns:r="http://schemas.openxmlformats.org/officeDocument/2006/relationships">
-  <p:cSld>
-    <p:spTree>
-      <p:nvGrpSpPr>
-        <p:cNvPr id="1" name=""/>
-        <p:cNvGrpSpPr/>
-        <p:nvPr/>
-      </p:nvGrpSpPr>
-      <p:grpSpPr/>
-      <p:sp>
-        <p:nvSpPr>
-          <p:cNvPr id="2" name="Rectangle 1"/>
-          <p:cNvSpPr/>
-          <p:nvPr/>
-        </p:nvSpPr>
-        <p:spPr>
-          <a:xfrm>
-            <a:off x="0" y="0"/>
-            <a:ext cx="109728" cy="6858000"/>
-          </a:xfrm>
-          <a:prstGeom prst="rect">
-            <a:avLst/>
-          </a:prstGeom>
-          <a:solidFill>
-            <a:srgbClr val="0F766E"/>
-          </a:solidFill>
-          <a:ln>
-            <a:noFill/>
-          </a:ln>
-          <a:effectLst/>
-        </p:spPr>
-        <p:style>
-          <a:lnRef idx="1">
-            <a:schemeClr val="accent1"/>
-          </a:lnRef>
-          <a:fillRef idx="3">
-            <a:schemeClr val="accent1"/>
-          </a:fillRef>
-          <a:effectRef idx="2">
-            <a:schemeClr val="accent1"/>
-          </a:effectRef>
-          <a:fontRef idx="minor">
-            <a:schemeClr val="lt1"/>
-          </a:fontRef>
-        </p:style>
-        <p:txBody>
-          <a:bodyPr rtlCol="0" anchor="ctr"/>
-          <a:lstStyle/>
-          <a:p>
-            <a:pPr algn="ctr"/>
-          </a:p>
-        </p:txBody>
-      </p:sp>
-      <p:sp>
-        <p:nvSpPr>
-          <p:cNvPr id="3" name="TextBox 2"/>
-          <p:cNvSpPr txBox="1"/>
-          <p:nvPr/>
-        </p:nvSpPr>
-        <p:spPr>
-          <a:xfrm>
-            <a:off x="411480" y="6510528"/>
-            <a:ext cx="7315200" cy="274320"/>
-          </a:xfrm>
-          <a:prstGeom prst="rect">
-            <a:avLst/>
-          </a:prstGeom>
-          <a:noFill/>
-        </p:spPr>
-        <p:txBody>
-          <a:bodyPr wrap="square" lIns="0" rIns="0" tIns="0" bIns="0" anchor="t">
-            <a:spAutoFit/>
-          </a:bodyPr>
-          <a:lstStyle/>
-          <a:p>
-            <a:pPr algn="l">
-              <a:lnSpc>
-                <a:spcPct val="115000"/>
-              </a:lnSpc>
-            </a:pPr>
-            <a:r>
-              <a:rPr sz="900" b="0">
-                <a:solidFill>
-                  <a:srgbClr val="94A3B8"/>
-                </a:solidFill>
-                <a:latin typeface="Calibri"/>
-              </a:rPr>
-              <a:t>Diabetes Risk Prediction  ·  Intro to Data Science  ·  Sem 2</a:t>
-            </a:r>
-          </a:p>
-        </p:txBody>
-      </p:sp>
-      <p:sp>
-        <p:nvSpPr>
-          <p:cNvPr id="4" name="TextBox 3"/>
-          <p:cNvSpPr txBox="1"/>
-          <p:nvPr/>
-        </p:nvSpPr>
-        <p:spPr>
-          <a:xfrm>
-            <a:off x="11094415" y="6510528"/>
-            <a:ext cx="822960" cy="274320"/>
-          </a:xfrm>
-          <a:prstGeom prst="rect">
-            <a:avLst/>
-          </a:prstGeom>
-          <a:noFill/>
-        </p:spPr>
-        <p:txBody>
-          <a:bodyPr wrap="square" lIns="0" rIns="0" tIns="0" bIns="0" anchor="t">
-            <a:spAutoFit/>
-          </a:bodyPr>
-          <a:lstStyle/>
-          <a:p>
-            <a:pPr algn="r">
-              <a:lnSpc>
-                <a:spcPct val="115000"/>
-              </a:lnSpc>
-            </a:pPr>
-            <a:r>
-              <a:rPr sz="900" b="0">
-                <a:solidFill>
-                  <a:srgbClr val="94A3B8"/>
-                </a:solidFill>
-                <a:latin typeface="Calibri"/>
-              </a:rPr>
-              <a:t>8 / 18</a:t>
-            </a:r>
-          </a:p>
-        </p:txBody>
-      </p:sp>
-      <p:sp>
-        <p:nvSpPr>
-          <p:cNvPr id="5" name="TextBox 4"/>
-          <p:cNvSpPr txBox="1"/>
-          <p:nvPr/>
-        </p:nvSpPr>
-        <p:spPr>
-          <a:xfrm>
-            <a:off x="640080" y="502920"/>
-            <a:ext cx="10972800" cy="274320"/>
-          </a:xfrm>
-          <a:prstGeom prst="rect">
-            <a:avLst/>
-          </a:prstGeom>
-          <a:noFill/>
-        </p:spPr>
-        <p:txBody>
-          <a:bodyPr wrap="square" lIns="0" rIns="0" tIns="0" bIns="0" anchor="t">
-            <a:spAutoFit/>
-          </a:bodyPr>
-          <a:lstStyle/>
-          <a:p>
-            <a:pPr algn="l">
-              <a:lnSpc>
-                <a:spcPct val="115000"/>
-              </a:lnSpc>
-            </a:pPr>
-            <a:r>
-              <a:rPr sz="1000" b="1">
-                <a:solidFill>
-                  <a:srgbClr val="F59E0B"/>
-                </a:solidFill>
-                <a:latin typeface="Calibri"/>
-              </a:rPr>
-              <a:t>06  ·  PREPROCESSING</a:t>
-            </a:r>
-          </a:p>
-        </p:txBody>
-      </p:sp>
-      <p:sp>
-        <p:nvSpPr>
-          <p:cNvPr id="6" name="TextBox 5"/>
-          <p:cNvSpPr txBox="1"/>
-          <p:nvPr/>
-        </p:nvSpPr>
-        <p:spPr>
-          <a:xfrm>
-            <a:off x="640080" y="822960"/>
-            <a:ext cx="10972800" cy="685800"/>
-          </a:xfrm>
-          <a:prstGeom prst="rect">
-            <a:avLst/>
-          </a:prstGeom>
-          <a:noFill/>
-        </p:spPr>
-        <p:txBody>
-          <a:bodyPr wrap="square" lIns="0" rIns="0" tIns="0" bIns="0" anchor="t">
-            <a:spAutoFit/>
-          </a:bodyPr>
-          <a:lstStyle/>
-          <a:p>
-            <a:pPr algn="l">
-              <a:lnSpc>
-                <a:spcPct val="115000"/>
-              </a:lnSpc>
-            </a:pPr>
-            <a:r>
-              <a:rPr sz="2800" b="1">
-                <a:solidFill>
-                  <a:srgbClr val="1E293B"/>
-                </a:solidFill>
-                <a:latin typeface="Calibri"/>
-              </a:rPr>
-              <a:t>Data cleaning — what we did</a:t>
-            </a:r>
-          </a:p>
-        </p:txBody>
-      </p:sp>
-      <p:sp>
-        <p:nvSpPr>
-          <p:cNvPr id="7" name="Rectangle 6"/>
-          <p:cNvSpPr/>
-          <p:nvPr/>
-        </p:nvSpPr>
-        <p:spPr>
-          <a:xfrm>
-            <a:off x="640080" y="1463040"/>
-            <a:ext cx="457200" cy="45720"/>
-          </a:xfrm>
-          <a:prstGeom prst="rect">
-            <a:avLst/>
-          </a:prstGeom>
-          <a:solidFill>
-            <a:srgbClr val="F59E0B"/>
-          </a:solidFill>
-          <a:ln>
-            <a:noFill/>
-          </a:ln>
-          <a:effectLst/>
-        </p:spPr>
-        <p:style>
-          <a:lnRef idx="1">
-            <a:schemeClr val="accent1"/>
-          </a:lnRef>
-          <a:fillRef idx="3">
-            <a:schemeClr val="accent1"/>
-          </a:fillRef>
-          <a:effectRef idx="2">
-            <a:schemeClr val="accent1"/>
-          </a:effectRef>
-          <a:fontRef idx="minor">
-            <a:schemeClr val="lt1"/>
-          </a:fontRef>
-        </p:style>
-        <p:txBody>
-          <a:bodyPr rtlCol="0" anchor="ctr"/>
-          <a:lstStyle/>
-          <a:p>
-            <a:pPr algn="ctr"/>
-          </a:p>
-        </p:txBody>
-      </p:sp>
-      <p:sp>
-        <p:nvSpPr>
-          <p:cNvPr id="8" name="TextBox 7"/>
-          <p:cNvSpPr txBox="1"/>
-          <p:nvPr/>
-        </p:nvSpPr>
-        <p:spPr>
-          <a:xfrm>
-            <a:off x="640080" y="2011680"/>
-            <a:ext cx="6400800" cy="3657600"/>
-          </a:xfrm>
-          <a:prstGeom prst="rect">
-            <a:avLst/>
-          </a:prstGeom>
-          <a:noFill/>
-        </p:spPr>
-        <p:txBody>
-          <a:bodyPr wrap="square" lIns="0" rIns="0" tIns="0" bIns="0">
-            <a:spAutoFit/>
-          </a:bodyPr>
-          <a:lstStyle/>
-          <a:p>
-            <a:pPr algn="l">
-              <a:lnSpc>
-                <a:spcPct val="145000"/>
-              </a:lnSpc>
-              <a:spcAft>
-                <a:spcPts val="1000"/>
-              </a:spcAft>
-            </a:pPr>
-            <a:r>
-              <a:t>■ Checked for missing values → 0 originally, then 350 injected (~0.5%) for realism</a:t>
-            </a:r>
-          </a:p>
-          <a:p>
-            <a:pPr algn="l">
-              <a:lnSpc>
-                <a:spcPct val="145000"/>
-              </a:lnSpc>
-              <a:spcAft>
-                <a:spcPts val="1000"/>
-              </a:spcAft>
-            </a:pPr>
-            <a:r>
-              <a:t>■ Removed duplicate rows → 1,636 dropped</a:t>
-            </a:r>
-          </a:p>
-          <a:p>
-            <a:pPr algn="l">
-              <a:lnSpc>
-                <a:spcPct val="145000"/>
-              </a:lnSpc>
-              <a:spcAft>
-                <a:spcPts val="1000"/>
-              </a:spcAft>
-            </a:pPr>
-            <a:r>
-              <a:t>■ Final shape: 69,057 rows × 22 columns</a:t>
-            </a:r>
-          </a:p>
-          <a:p>
-            <a:pPr algn="l">
-              <a:lnSpc>
-                <a:spcPct val="145000"/>
-              </a:lnSpc>
-              <a:spcAft>
-                <a:spcPts val="1000"/>
-              </a:spcAft>
-            </a:pPr>
-            <a:r>
-              <a:rPr sz="1400" b="1">
-                <a:solidFill>
-                  <a:srgbClr val="F59E0B"/>
-                </a:solidFill>
-                <a:latin typeface="Calibri"/>
-              </a:rPr>
-              <a:t>■  </a:t>
-            </a:r>
-            <a:r>
-              <a:rPr sz="1400">
-                <a:solidFill>
-                  <a:srgbClr val="475569"/>
-                </a:solidFill>
-                <a:latin typeface="Calibri"/>
-              </a:rPr>
-              <a:t>Converted 21 columns to int (everything except BMI which is float)</a:t>
-            </a:r>
-          </a:p>
-          <a:p>
-            <a:pPr algn="l">
-              <a:lnSpc>
-                <a:spcPct val="145000"/>
-              </a:lnSpc>
-              <a:spcAft>
-                <a:spcPts val="1000"/>
-              </a:spcAft>
-            </a:pPr>
-            <a:r>
-              <a:rPr sz="1400" b="1">
-                <a:solidFill>
-                  <a:srgbClr val="F59E0B"/>
-                </a:solidFill>
-                <a:latin typeface="Calibri"/>
-              </a:rPr>
-              <a:t>■  </a:t>
-            </a:r>
-            <a:r>
-              <a:rPr sz="1400">
-                <a:solidFill>
-                  <a:srgbClr val="475569"/>
-                </a:solidFill>
-                <a:latin typeface="Calibri"/>
-              </a:rPr>
-              <a:t>Verified class balance still ~50 / 50</a:t>
-            </a:r>
-          </a:p>
-        </p:txBody>
-      </p:sp>
-      <p:sp>
-        <p:nvSpPr>
-          <p:cNvPr id="9" name="Rectangle 8"/>
-          <p:cNvSpPr/>
-          <p:nvPr/>
-        </p:nvSpPr>
-        <p:spPr>
-          <a:xfrm>
-            <a:off x="7498079" y="2194560"/>
-            <a:ext cx="4114800" cy="3291840"/>
-          </a:xfrm>
-          <a:prstGeom prst="rect">
-            <a:avLst/>
-          </a:prstGeom>
-          <a:solidFill>
-            <a:srgbClr val="F1F5F9"/>
-          </a:solidFill>
-          <a:ln w="9525">
-            <a:solidFill>
-              <a:srgbClr val="E2E8F0"/>
-            </a:solidFill>
-          </a:ln>
-          <a:effectLst/>
-        </p:spPr>
-        <p:style>
-          <a:lnRef idx="1">
-            <a:schemeClr val="accent1"/>
-          </a:lnRef>
-          <a:fillRef idx="3">
-            <a:schemeClr val="accent1"/>
-          </a:fillRef>
-          <a:effectRef idx="2">
-            <a:schemeClr val="accent1"/>
-          </a:effectRef>
-          <a:fontRef idx="minor">
-            <a:schemeClr val="lt1"/>
-          </a:fontRef>
-        </p:style>
-        <p:txBody>
-          <a:bodyPr rtlCol="0" anchor="ctr"/>
-          <a:lstStyle/>
-          <a:p>
-            <a:pPr algn="ctr"/>
+            <a:endParaRPr/>
           </a:p>
         </p:txBody>
       </p:sp>
@@ -24335,7 +22964,7 @@
           <a:noFill/>
         </p:spPr>
         <p:txBody>
-          <a:bodyPr wrap="square" lIns="0" rIns="0" tIns="0" bIns="0" anchor="t">
+          <a:bodyPr wrap="square" lIns="0" tIns="0" rIns="0" bIns="0" anchor="t">
             <a:spAutoFit/>
           </a:bodyPr>
           <a:lstStyle/>
@@ -24374,7 +23003,7 @@
           <a:noFill/>
         </p:spPr>
         <p:txBody>
-          <a:bodyPr wrap="square" lIns="0" rIns="0" tIns="0" bIns="0" anchor="t">
+          <a:bodyPr wrap="square" lIns="0" tIns="0" rIns="0" bIns="0" anchor="t">
             <a:spAutoFit/>
           </a:bodyPr>
           <a:lstStyle/>
@@ -24413,7 +23042,7 @@
           <a:noFill/>
         </p:spPr>
         <p:txBody>
-          <a:bodyPr wrap="square" lIns="0" rIns="0" tIns="0" bIns="0" anchor="t">
+          <a:bodyPr wrap="square" lIns="0" tIns="0" rIns="0" bIns="0" anchor="t">
             <a:spAutoFit/>
           </a:bodyPr>
           <a:lstStyle/>
@@ -24452,7 +23081,7 @@
           <a:noFill/>
         </p:spPr>
         <p:txBody>
-          <a:bodyPr wrap="square" lIns="0" rIns="0" tIns="0" bIns="0" anchor="t">
+          <a:bodyPr wrap="square" lIns="0" tIns="0" rIns="0" bIns="0" anchor="t">
             <a:spAutoFit/>
           </a:bodyPr>
           <a:lstStyle/>
@@ -24491,7 +23120,7 @@
           <a:noFill/>
         </p:spPr>
         <p:txBody>
-          <a:bodyPr wrap="square" lIns="0" rIns="0" tIns="0" bIns="0" anchor="t">
+          <a:bodyPr wrap="square" lIns="0" tIns="0" rIns="0" bIns="0" anchor="t">
             <a:spAutoFit/>
           </a:bodyPr>
           <a:lstStyle/>
@@ -24530,7 +23159,7 @@
           <a:noFill/>
         </p:spPr>
         <p:txBody>
-          <a:bodyPr wrap="square" lIns="0" rIns="0" tIns="0" bIns="0" anchor="t">
+          <a:bodyPr wrap="square" lIns="0" tIns="0" rIns="0" bIns="0" anchor="t">
             <a:spAutoFit/>
           </a:bodyPr>
           <a:lstStyle/>
@@ -24569,7 +23198,7 @@
           <a:noFill/>
         </p:spPr>
         <p:txBody>
-          <a:bodyPr wrap="square" lIns="0" rIns="0" tIns="0" bIns="0" anchor="t">
+          <a:bodyPr wrap="square" lIns="0" tIns="0" rIns="0" bIns="0" anchor="t">
             <a:spAutoFit/>
           </a:bodyPr>
           <a:lstStyle/>
@@ -24635,7 +23264,7 @@
 </file>
 
 <file path=ppt/slides/slide9.xml><?xml version="1.0" encoding="utf-8"?>
-<p:sld xmlns:a="http://schemas.openxmlformats.org/drawingml/2006/main" xmlns:p="http://schemas.openxmlformats.org/presentationml/2006/main" xmlns:r="http://schemas.openxmlformats.org/officeDocument/2006/relationships">
+<p:sld xmlns:a="http://schemas.openxmlformats.org/drawingml/2006/main" xmlns:r="http://schemas.openxmlformats.org/officeDocument/2006/relationships" xmlns:p="http://schemas.openxmlformats.org/presentationml/2006/main">
   <p:cSld>
     <p:spTree>
       <p:nvGrpSpPr>
@@ -24643,7 +23272,14 @@
         <p:cNvGrpSpPr/>
         <p:nvPr/>
       </p:nvGrpSpPr>
-      <p:grpSpPr/>
+      <p:grpSpPr>
+        <a:xfrm>
+          <a:off x="0" y="0"/>
+          <a:ext cx="0" cy="0"/>
+          <a:chOff x="0" y="0"/>
+          <a:chExt cx="0" cy="0"/>
+        </a:xfrm>
+      </p:grpSpPr>
       <p:sp>
         <p:nvSpPr>
           <p:cNvPr id="2" name="Rectangle 1"/>
@@ -24685,6 +23321,7 @@
           <a:lstStyle/>
           <a:p>
             <a:pPr algn="ctr"/>
+            <a:endParaRPr/>
           </a:p>
         </p:txBody>
       </p:sp>
@@ -24705,7 +23342,7 @@
           <a:noFill/>
         </p:spPr>
         <p:txBody>
-          <a:bodyPr wrap="square" lIns="0" rIns="0" tIns="0" bIns="0" anchor="t">
+          <a:bodyPr wrap="square" lIns="0" tIns="0" rIns="0" bIns="0" anchor="t">
             <a:spAutoFit/>
           </a:bodyPr>
           <a:lstStyle/>
@@ -24744,7 +23381,7 @@
           <a:noFill/>
         </p:spPr>
         <p:txBody>
-          <a:bodyPr wrap="square" lIns="0" rIns="0" tIns="0" bIns="0" anchor="t">
+          <a:bodyPr wrap="square" lIns="0" tIns="0" rIns="0" bIns="0" anchor="t">
             <a:spAutoFit/>
           </a:bodyPr>
           <a:lstStyle/>
@@ -24783,7 +23420,7 @@
           <a:noFill/>
         </p:spPr>
         <p:txBody>
-          <a:bodyPr wrap="square" lIns="0" rIns="0" tIns="0" bIns="0" anchor="t">
+          <a:bodyPr wrap="square" lIns="0" tIns="0" rIns="0" bIns="0" anchor="t">
             <a:spAutoFit/>
           </a:bodyPr>
           <a:lstStyle/>
@@ -24822,7 +23459,7 @@
           <a:noFill/>
         </p:spPr>
         <p:txBody>
-          <a:bodyPr wrap="square" lIns="0" rIns="0" tIns="0" bIns="0" anchor="t">
+          <a:bodyPr wrap="square" lIns="0" tIns="0" rIns="0" bIns="0" anchor="t">
             <a:spAutoFit/>
           </a:bodyPr>
           <a:lstStyle/>
@@ -24885,6 +23522,7 @@
           <a:lstStyle/>
           <a:p>
             <a:pPr algn="ctr"/>
+            <a:endParaRPr/>
           </a:p>
         </p:txBody>
       </p:sp>
@@ -24897,15 +23535,15 @@
           <p:nvPr/>
         </p:nvPicPr>
         <p:blipFill>
-          <a:blip r:embed="rId2"/>
+          <a:blip r:embed="rId3"/>
           <a:stretch>
             <a:fillRect/>
           </a:stretch>
         </p:blipFill>
         <p:spPr>
           <a:xfrm>
-            <a:off x="640080" y="1920240"/>
-            <a:ext cx="5303520" cy="2240280"/>
+            <a:off x="640080" y="1554480"/>
+            <a:ext cx="5303520" cy="2606040"/>
           </a:xfrm>
           <a:prstGeom prst="rect">
             <a:avLst/>
@@ -24921,15 +23559,15 @@
           <p:nvPr/>
         </p:nvPicPr>
         <p:blipFill>
-          <a:blip r:embed="rId3"/>
+          <a:blip r:embed="rId4"/>
           <a:stretch>
             <a:fillRect/>
           </a:stretch>
         </p:blipFill>
         <p:spPr>
           <a:xfrm>
-            <a:off x="6263640" y="1920240"/>
-            <a:ext cx="5303520" cy="2240280"/>
+            <a:off x="6202375" y="1304163"/>
+            <a:ext cx="5303520" cy="2782062"/>
           </a:xfrm>
           <a:prstGeom prst="rect">
             <a:avLst/>
@@ -24945,15 +23583,26 @@
           <p:nvPr/>
         </p:nvPicPr>
         <p:blipFill>
-          <a:blip r:embed="rId4"/>
+          <a:blip r:embed="rId5">
+            <a:clrChange>
+              <a:clrFrom>
+                <a:srgbClr val="FFFFFF"/>
+              </a:clrFrom>
+              <a:clrTo>
+                <a:srgbClr val="FFFFFF">
+                  <a:alpha val="0"/>
+                </a:srgbClr>
+              </a:clrTo>
+            </a:clrChange>
+          </a:blip>
           <a:stretch>
             <a:fillRect/>
           </a:stretch>
         </p:blipFill>
         <p:spPr>
           <a:xfrm>
-            <a:off x="640080" y="4343400"/>
-            <a:ext cx="5303520" cy="2240280"/>
+            <a:off x="640080" y="4086225"/>
+            <a:ext cx="5303520" cy="2606040"/>
           </a:xfrm>
           <a:prstGeom prst="rect">
             <a:avLst/>
@@ -24969,15 +23618,26 @@
           <p:nvPr/>
         </p:nvPicPr>
         <p:blipFill>
-          <a:blip r:embed="rId5"/>
+          <a:blip r:embed="rId6">
+            <a:clrChange>
+              <a:clrFrom>
+                <a:srgbClr val="FFFFFF"/>
+              </a:clrFrom>
+              <a:clrTo>
+                <a:srgbClr val="FFFFFF">
+                  <a:alpha val="0"/>
+                </a:srgbClr>
+              </a:clrTo>
+            </a:clrChange>
+          </a:blip>
           <a:stretch>
             <a:fillRect/>
           </a:stretch>
         </p:blipFill>
         <p:spPr>
           <a:xfrm>
-            <a:off x="6263640" y="4343400"/>
-            <a:ext cx="5303520" cy="2240280"/>
+            <a:off x="6263639" y="4086225"/>
+            <a:ext cx="5653735" cy="2497455"/>
           </a:xfrm>
           <a:prstGeom prst="rect">
             <a:avLst/>
@@ -25323,44 +23983,44 @@
         <a:sysClr val="window" lastClr="FFFFFF"/>
       </a:lt1>
       <a:dk2>
-        <a:srgbClr val="1F497D"/>
+        <a:srgbClr val="0E2841"/>
       </a:dk2>
       <a:lt2>
-        <a:srgbClr val="EEECE1"/>
+        <a:srgbClr val="E8E8E8"/>
       </a:lt2>
       <a:accent1>
-        <a:srgbClr val="4F81BD"/>
+        <a:srgbClr val="156082"/>
       </a:accent1>
       <a:accent2>
-        <a:srgbClr val="C0504D"/>
+        <a:srgbClr val="E97132"/>
       </a:accent2>
       <a:accent3>
-        <a:srgbClr val="9BBB59"/>
+        <a:srgbClr val="196B24"/>
       </a:accent3>
       <a:accent4>
-        <a:srgbClr val="8064A2"/>
+        <a:srgbClr val="0F9ED5"/>
       </a:accent4>
       <a:accent5>
-        <a:srgbClr val="4BACC6"/>
+        <a:srgbClr val="A02B93"/>
       </a:accent5>
       <a:accent6>
-        <a:srgbClr val="F79646"/>
+        <a:srgbClr val="4EA72E"/>
       </a:accent6>
       <a:hlink>
-        <a:srgbClr val="0000FF"/>
+        <a:srgbClr val="467886"/>
       </a:hlink>
       <a:folHlink>
-        <a:srgbClr val="800080"/>
+        <a:srgbClr val="96607D"/>
       </a:folHlink>
     </a:clrScheme>
     <a:fontScheme name="Office">
       <a:majorFont>
-        <a:latin typeface="Calibri"/>
+        <a:latin typeface="Aptos Display" panose="02110004020202020204"/>
         <a:ea typeface=""/>
         <a:cs typeface=""/>
-        <a:font script="Jpan" typeface="ＭＳ Ｐゴシック"/>
+        <a:font script="Jpan" typeface="游ゴシック Light"/>
         <a:font script="Hang" typeface="맑은 고딕"/>
-        <a:font script="Hans" typeface="宋体"/>
+        <a:font script="Hans" typeface="等线 Light"/>
         <a:font script="Hant" typeface="新細明體"/>
         <a:font script="Arab" typeface="Times New Roman"/>
         <a:font script="Hebr" typeface="Times New Roman"/>
@@ -25388,14 +24048,31 @@
         <a:font script="Viet" typeface="Times New Roman"/>
         <a:font script="Uigh" typeface="Microsoft Uighur"/>
         <a:font script="Geor" typeface="Sylfaen"/>
+        <a:font script="Armn" typeface="Arial"/>
+        <a:font script="Bugi" typeface="Leelawadee UI"/>
+        <a:font script="Bopo" typeface="Microsoft JhengHei"/>
+        <a:font script="Java" typeface="Javanese Text"/>
+        <a:font script="Lisu" typeface="Segoe UI"/>
+        <a:font script="Mymr" typeface="Myanmar Text"/>
+        <a:font script="Nkoo" typeface="Ebrima"/>
+        <a:font script="Olck" typeface="Nirmala UI"/>
+        <a:font script="Osma" typeface="Ebrima"/>
+        <a:font script="Phag" typeface="Phagspa"/>
+        <a:font script="Syrn" typeface="Estrangelo Edessa"/>
+        <a:font script="Syrj" typeface="Estrangelo Edessa"/>
+        <a:font script="Syre" typeface="Estrangelo Edessa"/>
+        <a:font script="Sora" typeface="Nirmala UI"/>
+        <a:font script="Tale" typeface="Microsoft Tai Le"/>
+        <a:font script="Talu" typeface="Microsoft New Tai Lue"/>
+        <a:font script="Tfng" typeface="Ebrima"/>
       </a:majorFont>
       <a:minorFont>
-        <a:latin typeface="Calibri"/>
+        <a:latin typeface="Aptos" panose="02110004020202020204"/>
         <a:ea typeface=""/>
         <a:cs typeface=""/>
-        <a:font script="Jpan" typeface="ＭＳ Ｐゴシック"/>
+        <a:font script="Jpan" typeface="游ゴシック"/>
         <a:font script="Hang" typeface="맑은 고딕"/>
-        <a:font script="Hans" typeface="宋体"/>
+        <a:font script="Hans" typeface="等线"/>
         <a:font script="Hant" typeface="新細明體"/>
         <a:font script="Arab" typeface="Arial"/>
         <a:font script="Hebr" typeface="Arial"/>
@@ -25423,6 +24100,23 @@
         <a:font script="Viet" typeface="Arial"/>
         <a:font script="Uigh" typeface="Microsoft Uighur"/>
         <a:font script="Geor" typeface="Sylfaen"/>
+        <a:font script="Armn" typeface="Arial"/>
+        <a:font script="Bugi" typeface="Leelawadee UI"/>
+        <a:font script="Bopo" typeface="Microsoft JhengHei"/>
+        <a:font script="Java" typeface="Javanese Text"/>
+        <a:font script="Lisu" typeface="Segoe UI"/>
+        <a:font script="Mymr" typeface="Myanmar Text"/>
+        <a:font script="Nkoo" typeface="Ebrima"/>
+        <a:font script="Olck" typeface="Nirmala UI"/>
+        <a:font script="Osma" typeface="Ebrima"/>
+        <a:font script="Phag" typeface="Phagspa"/>
+        <a:font script="Syrn" typeface="Estrangelo Edessa"/>
+        <a:font script="Syrj" typeface="Estrangelo Edessa"/>
+        <a:font script="Syre" typeface="Estrangelo Edessa"/>
+        <a:font script="Sora" typeface="Nirmala UI"/>
+        <a:font script="Tale" typeface="Microsoft Tai Le"/>
+        <a:font script="Talu" typeface="Microsoft New Tai Lue"/>
+        <a:font script="Tfng" typeface="Ebrima"/>
       </a:minorFont>
     </a:fontScheme>
     <a:fmtScheme name="Office">
@@ -25434,180 +24128,136 @@
           <a:gsLst>
             <a:gs pos="0">
               <a:schemeClr val="phClr">
-                <a:tint val="50000"/>
-                <a:satMod val="300000"/>
+                <a:lumMod val="110000"/>
+                <a:satMod val="105000"/>
+                <a:tint val="67000"/>
               </a:schemeClr>
             </a:gs>
-            <a:gs pos="35000">
+            <a:gs pos="50000">
               <a:schemeClr val="phClr">
-                <a:tint val="37000"/>
-                <a:satMod val="300000"/>
+                <a:lumMod val="105000"/>
+                <a:satMod val="103000"/>
+                <a:tint val="73000"/>
               </a:schemeClr>
             </a:gs>
             <a:gs pos="100000">
               <a:schemeClr val="phClr">
-                <a:tint val="15000"/>
-                <a:satMod val="350000"/>
+                <a:lumMod val="105000"/>
+                <a:satMod val="109000"/>
+                <a:tint val="81000"/>
               </a:schemeClr>
             </a:gs>
           </a:gsLst>
-          <a:lin ang="16200000" scaled="1"/>
+          <a:lin ang="5400000" scaled="0"/>
         </a:gradFill>
         <a:gradFill rotWithShape="1">
           <a:gsLst>
             <a:gs pos="0">
               <a:schemeClr val="phClr">
-                <a:tint val="100000"/>
+                <a:satMod val="103000"/>
+                <a:lumMod val="102000"/>
+                <a:tint val="94000"/>
+              </a:schemeClr>
+            </a:gs>
+            <a:gs pos="50000">
+              <a:schemeClr val="phClr">
+                <a:satMod val="110000"/>
+                <a:lumMod val="100000"/>
                 <a:shade val="100000"/>
-                <a:satMod val="130000"/>
               </a:schemeClr>
             </a:gs>
             <a:gs pos="100000">
               <a:schemeClr val="phClr">
-                <a:tint val="50000"/>
-                <a:shade val="100000"/>
-                <a:satMod val="350000"/>
+                <a:lumMod val="99000"/>
+                <a:satMod val="120000"/>
+                <a:shade val="78000"/>
               </a:schemeClr>
             </a:gs>
           </a:gsLst>
-          <a:lin ang="16200000" scaled="0"/>
+          <a:lin ang="5400000" scaled="0"/>
         </a:gradFill>
       </a:fillStyleLst>
       <a:lnStyleLst>
-        <a:ln w="9525" cap="flat" cmpd="sng" algn="ctr">
+        <a:ln w="12700" cap="flat" cmpd="sng" algn="ctr">
           <a:solidFill>
-            <a:schemeClr val="phClr">
-              <a:shade val="95000"/>
-              <a:satMod val="105000"/>
-            </a:schemeClr>
+            <a:schemeClr val="phClr"/>
           </a:solidFill>
           <a:prstDash val="solid"/>
+          <a:miter lim="800000"/>
+        </a:ln>
+        <a:ln w="19050" cap="flat" cmpd="sng" algn="ctr">
+          <a:solidFill>
+            <a:schemeClr val="phClr"/>
+          </a:solidFill>
+          <a:prstDash val="solid"/>
+          <a:miter lim="800000"/>
         </a:ln>
         <a:ln w="25400" cap="flat" cmpd="sng" algn="ctr">
           <a:solidFill>
             <a:schemeClr val="phClr"/>
           </a:solidFill>
           <a:prstDash val="solid"/>
-        </a:ln>
-        <a:ln w="38100" cap="flat" cmpd="sng" algn="ctr">
-          <a:solidFill>
-            <a:schemeClr val="phClr"/>
-          </a:solidFill>
-          <a:prstDash val="solid"/>
+          <a:miter lim="800000"/>
         </a:ln>
       </a:lnStyleLst>
       <a:effectStyleLst>
         <a:effectStyle>
+          <a:effectLst/>
+        </a:effectStyle>
+        <a:effectStyle>
+          <a:effectLst/>
+        </a:effectStyle>
+        <a:effectStyle>
           <a:effectLst>
-            <a:outerShdw blurRad="40000" dist="20000" dir="5400000" rotWithShape="0">
+            <a:outerShdw blurRad="57150" dist="19050" dir="5400000" algn="ctr" rotWithShape="0">
               <a:srgbClr val="000000">
-                <a:alpha val="38000"/>
+                <a:alpha val="63000"/>
               </a:srgbClr>
             </a:outerShdw>
           </a:effectLst>
-        </a:effectStyle>
-        <a:effectStyle>
-          <a:effectLst>
-            <a:outerShdw blurRad="40000" dist="23000" dir="5400000" rotWithShape="0">
-              <a:srgbClr val="000000">
-                <a:alpha val="35000"/>
-              </a:srgbClr>
-            </a:outerShdw>
-          </a:effectLst>
-        </a:effectStyle>
-        <a:effectStyle>
-          <a:effectLst>
-            <a:outerShdw blurRad="40000" dist="23000" dir="5400000" rotWithShape="0">
-              <a:srgbClr val="000000">
-                <a:alpha val="35000"/>
-              </a:srgbClr>
-            </a:outerShdw>
-          </a:effectLst>
-          <a:scene3d>
-            <a:camera prst="orthographicFront">
-              <a:rot lat="0" lon="0" rev="0"/>
-            </a:camera>
-            <a:lightRig rig="threePt" dir="t">
-              <a:rot lat="0" lon="0" rev="1200000"/>
-            </a:lightRig>
-          </a:scene3d>
-          <a:sp3d>
-            <a:bevelT w="63500" h="25400"/>
-          </a:sp3d>
         </a:effectStyle>
       </a:effectStyleLst>
       <a:bgFillStyleLst>
         <a:solidFill>
           <a:schemeClr val="phClr"/>
         </a:solidFill>
+        <a:solidFill>
+          <a:schemeClr val="phClr">
+            <a:tint val="95000"/>
+            <a:satMod val="170000"/>
+          </a:schemeClr>
+        </a:solidFill>
         <a:gradFill rotWithShape="1">
           <a:gsLst>
             <a:gs pos="0">
               <a:schemeClr val="phClr">
-                <a:tint val="40000"/>
-                <a:satMod val="350000"/>
+                <a:tint val="93000"/>
+                <a:satMod val="150000"/>
+                <a:shade val="98000"/>
+                <a:lumMod val="102000"/>
               </a:schemeClr>
             </a:gs>
-            <a:gs pos="40000">
+            <a:gs pos="50000">
               <a:schemeClr val="phClr">
-                <a:tint val="45000"/>
-                <a:shade val="99000"/>
-                <a:satMod val="350000"/>
+                <a:tint val="98000"/>
+                <a:satMod val="130000"/>
+                <a:shade val="90000"/>
+                <a:lumMod val="103000"/>
               </a:schemeClr>
             </a:gs>
             <a:gs pos="100000">
               <a:schemeClr val="phClr">
-                <a:shade val="20000"/>
-                <a:satMod val="255000"/>
+                <a:shade val="63000"/>
+                <a:satMod val="120000"/>
               </a:schemeClr>
             </a:gs>
           </a:gsLst>
-          <a:path path="circle">
-            <a:fillToRect l="50000" t="-80000" r="50000" b="180000"/>
-          </a:path>
-        </a:gradFill>
-        <a:gradFill rotWithShape="1">
-          <a:gsLst>
-            <a:gs pos="0">
-              <a:schemeClr val="phClr">
-                <a:tint val="80000"/>
-                <a:satMod val="300000"/>
-              </a:schemeClr>
-            </a:gs>
-            <a:gs pos="100000">
-              <a:schemeClr val="phClr">
-                <a:shade val="30000"/>
-                <a:satMod val="200000"/>
-              </a:schemeClr>
-            </a:gs>
-          </a:gsLst>
-          <a:path path="circle">
-            <a:fillToRect l="50000" t="50000" r="50000" b="50000"/>
-          </a:path>
+          <a:lin ang="5400000" scaled="0"/>
         </a:gradFill>
       </a:bgFillStyleLst>
     </a:fmtScheme>
   </a:themeElements>
   <a:objectDefaults>
-    <a:spDef>
-      <a:spPr/>
-      <a:bodyPr/>
-      <a:lstStyle/>
-      <a:style>
-        <a:lnRef idx="1">
-          <a:schemeClr val="accent1"/>
-        </a:lnRef>
-        <a:fillRef idx="3">
-          <a:schemeClr val="accent1"/>
-        </a:fillRef>
-        <a:effectRef idx="2">
-          <a:schemeClr val="accent1"/>
-        </a:effectRef>
-        <a:fontRef idx="minor">
-          <a:schemeClr val="lt1"/>
-        </a:fontRef>
-      </a:style>
-    </a:spDef>
     <a:lnDef>
       <a:spPr/>
       <a:bodyPr/>
@@ -25629,5 +24279,10 @@
     </a:lnDef>
   </a:objectDefaults>
   <a:extraClrSchemeLst/>
+  <a:extLst>
+    <a:ext uri="{05A4C25C-085E-4340-85A3-A5531E510DB2}">
+      <thm15:themeFamily xmlns:thm15="http://schemas.microsoft.com/office/thememl/2012/main" name="Office Theme" id="{2E142A2C-CD16-42D6-873A-C26D2A0506FA}" vid="{1BDDFF52-6CD6-40A5-AB3C-68EB2F1E4D0A}"/>
+    </a:ext>
+  </a:extLst>
 </a:theme>
 </file>
--- a/presentation/Diabetes_Final_Presentation.pptx
+++ b/presentation/Diabetes_Final_Presentation.pptx
@@ -1735,7 +1735,7 @@
           <a:p>
             <a:fld id="{5BCAD085-E8A6-8845-BD4E-CB4CCA059FC4}" type="datetimeFigureOut">
               <a:rPr lang="en-US" smtClean="0"/>
-              <a:t>6/24/2026</a:t>
+              <a:t>7/1/2026</a:t>
             </a:fld>
             <a:endParaRPr lang="en-US"/>
           </a:p>
@@ -1903,7 +1903,7 @@
           <a:p>
             <a:fld id="{5BCAD085-E8A6-8845-BD4E-CB4CCA059FC4}" type="datetimeFigureOut">
               <a:rPr lang="en-US" smtClean="0"/>
-              <a:t>6/24/2026</a:t>
+              <a:t>7/1/2026</a:t>
             </a:fld>
             <a:endParaRPr lang="en-US"/>
           </a:p>
@@ -2081,7 +2081,7 @@
           <a:p>
             <a:fld id="{5BCAD085-E8A6-8845-BD4E-CB4CCA059FC4}" type="datetimeFigureOut">
               <a:rPr lang="en-US" smtClean="0"/>
-              <a:t>6/24/2026</a:t>
+              <a:t>7/1/2026</a:t>
             </a:fld>
             <a:endParaRPr lang="en-US"/>
           </a:p>
@@ -2249,7 +2249,7 @@
           <a:p>
             <a:fld id="{5BCAD085-E8A6-8845-BD4E-CB4CCA059FC4}" type="datetimeFigureOut">
               <a:rPr lang="en-US" smtClean="0"/>
-              <a:t>6/24/2026</a:t>
+              <a:t>7/1/2026</a:t>
             </a:fld>
             <a:endParaRPr lang="en-US"/>
           </a:p>
@@ -2494,7 +2494,7 @@
           <a:p>
             <a:fld id="{5BCAD085-E8A6-8845-BD4E-CB4CCA059FC4}" type="datetimeFigureOut">
               <a:rPr lang="en-US" smtClean="0"/>
-              <a:t>6/24/2026</a:t>
+              <a:t>7/1/2026</a:t>
             </a:fld>
             <a:endParaRPr lang="en-US"/>
           </a:p>
@@ -2779,7 +2779,7 @@
           <a:p>
             <a:fld id="{5BCAD085-E8A6-8845-BD4E-CB4CCA059FC4}" type="datetimeFigureOut">
               <a:rPr lang="en-US" smtClean="0"/>
-              <a:t>6/24/2026</a:t>
+              <a:t>7/1/2026</a:t>
             </a:fld>
             <a:endParaRPr lang="en-US"/>
           </a:p>
@@ -3198,7 +3198,7 @@
           <a:p>
             <a:fld id="{5BCAD085-E8A6-8845-BD4E-CB4CCA059FC4}" type="datetimeFigureOut">
               <a:rPr lang="en-US" smtClean="0"/>
-              <a:t>6/24/2026</a:t>
+              <a:t>7/1/2026</a:t>
             </a:fld>
             <a:endParaRPr lang="en-US"/>
           </a:p>
@@ -3315,7 +3315,7 @@
           <a:p>
             <a:fld id="{5BCAD085-E8A6-8845-BD4E-CB4CCA059FC4}" type="datetimeFigureOut">
               <a:rPr lang="en-US" smtClean="0"/>
-              <a:t>6/24/2026</a:t>
+              <a:t>7/1/2026</a:t>
             </a:fld>
             <a:endParaRPr lang="en-US"/>
           </a:p>
@@ -3410,7 +3410,7 @@
           <a:p>
             <a:fld id="{5BCAD085-E8A6-8845-BD4E-CB4CCA059FC4}" type="datetimeFigureOut">
               <a:rPr lang="en-US" smtClean="0"/>
-              <a:t>6/24/2026</a:t>
+              <a:t>7/1/2026</a:t>
             </a:fld>
             <a:endParaRPr lang="en-US"/>
           </a:p>
@@ -3685,7 +3685,7 @@
           <a:p>
             <a:fld id="{5BCAD085-E8A6-8845-BD4E-CB4CCA059FC4}" type="datetimeFigureOut">
               <a:rPr lang="en-US" smtClean="0"/>
-              <a:t>6/24/2026</a:t>
+              <a:t>7/1/2026</a:t>
             </a:fld>
             <a:endParaRPr lang="en-US"/>
           </a:p>
@@ -3937,7 +3937,7 @@
           <a:p>
             <a:fld id="{5BCAD085-E8A6-8845-BD4E-CB4CCA059FC4}" type="datetimeFigureOut">
               <a:rPr lang="en-US" smtClean="0"/>
-              <a:t>6/24/2026</a:t>
+              <a:t>7/1/2026</a:t>
             </a:fld>
             <a:endParaRPr lang="en-US"/>
           </a:p>
@@ -4148,7 +4148,7 @@
           <a:p>
             <a:fld id="{5BCAD085-E8A6-8845-BD4E-CB4CCA059FC4}" type="datetimeFigureOut">
               <a:rPr lang="en-US" smtClean="0"/>
-              <a:t>6/24/2026</a:t>
+              <a:t>7/1/2026</a:t>
             </a:fld>
             <a:endParaRPr lang="en-US"/>
           </a:p>
@@ -5109,6 +5109,18 @@
   <p:clrMapOvr>
     <a:masterClrMapping/>
   </p:clrMapOvr>
+  <mc:AlternateContent xmlns:mc="http://schemas.openxmlformats.org/markup-compatibility/2006">
+    <mc:Choice xmlns:p14="http://schemas.microsoft.com/office/powerpoint/2010/main" Requires="p14">
+      <p:transition spd="med" p14:dur="700">
+        <p:fade/>
+      </p:transition>
+    </mc:Choice>
+    <mc:Fallback>
+      <p:transition spd="med">
+        <p:fade/>
+      </p:transition>
+    </mc:Fallback>
+  </mc:AlternateContent>
 </p:sld>
 </file>
 
@@ -6685,6 +6697,18 @@
   <p:clrMapOvr>
     <a:masterClrMapping/>
   </p:clrMapOvr>
+  <mc:AlternateContent xmlns:mc="http://schemas.openxmlformats.org/markup-compatibility/2006">
+    <mc:Choice xmlns:p14="http://schemas.microsoft.com/office/powerpoint/2010/main" Requires="p14">
+      <p:transition spd="med" p14:dur="700">
+        <p:fade/>
+      </p:transition>
+    </mc:Choice>
+    <mc:Fallback>
+      <p:transition spd="med">
+        <p:fade/>
+      </p:transition>
+    </mc:Fallback>
+  </mc:AlternateContent>
 </p:sld>
 </file>
 
@@ -7488,6 +7512,18 @@
   <p:clrMapOvr>
     <a:masterClrMapping/>
   </p:clrMapOvr>
+  <mc:AlternateContent xmlns:mc="http://schemas.openxmlformats.org/markup-compatibility/2006">
+    <mc:Choice xmlns:p14="http://schemas.microsoft.com/office/powerpoint/2010/main" Requires="p14">
+      <p:transition spd="med" p14:dur="700">
+        <p:fade/>
+      </p:transition>
+    </mc:Choice>
+    <mc:Fallback>
+      <p:transition spd="med">
+        <p:fade/>
+      </p:transition>
+    </mc:Fallback>
+  </mc:AlternateContent>
 </p:sld>
 </file>
 
@@ -8386,6 +8422,18 @@
   <p:clrMapOvr>
     <a:masterClrMapping/>
   </p:clrMapOvr>
+  <mc:AlternateContent xmlns:mc="http://schemas.openxmlformats.org/markup-compatibility/2006">
+    <mc:Choice xmlns:p14="http://schemas.microsoft.com/office/powerpoint/2010/main" Requires="p14">
+      <p:transition spd="med" p14:dur="700">
+        <p:fade/>
+      </p:transition>
+    </mc:Choice>
+    <mc:Fallback>
+      <p:transition spd="med">
+        <p:fade/>
+      </p:transition>
+    </mc:Fallback>
+  </mc:AlternateContent>
 </p:sld>
 </file>
 
@@ -9961,6 +10009,18 @@
   <p:clrMapOvr>
     <a:masterClrMapping/>
   </p:clrMapOvr>
+  <mc:AlternateContent xmlns:mc="http://schemas.openxmlformats.org/markup-compatibility/2006">
+    <mc:Choice xmlns:p14="http://schemas.microsoft.com/office/powerpoint/2010/main" Requires="p14">
+      <p:transition spd="med" p14:dur="700">
+        <p:fade/>
+      </p:transition>
+    </mc:Choice>
+    <mc:Fallback>
+      <p:transition spd="med">
+        <p:fade/>
+      </p:transition>
+    </mc:Fallback>
+  </mc:AlternateContent>
 </p:sld>
 </file>
 
@@ -11277,6 +11337,18 @@
   <p:clrMapOvr>
     <a:masterClrMapping/>
   </p:clrMapOvr>
+  <mc:AlternateContent xmlns:mc="http://schemas.openxmlformats.org/markup-compatibility/2006">
+    <mc:Choice xmlns:p14="http://schemas.microsoft.com/office/powerpoint/2010/main" Requires="p14">
+      <p:transition spd="med" p14:dur="700">
+        <p:fade/>
+      </p:transition>
+    </mc:Choice>
+    <mc:Fallback>
+      <p:transition spd="med">
+        <p:fade/>
+      </p:transition>
+    </mc:Fallback>
+  </mc:AlternateContent>
 </p:sld>
 </file>
 
@@ -12605,6 +12677,18 @@
   <p:clrMapOvr>
     <a:masterClrMapping/>
   </p:clrMapOvr>
+  <mc:AlternateContent xmlns:mc="http://schemas.openxmlformats.org/markup-compatibility/2006">
+    <mc:Choice xmlns:p14="http://schemas.microsoft.com/office/powerpoint/2010/main" Requires="p14">
+      <p:transition spd="med" p14:dur="700">
+        <p:fade/>
+      </p:transition>
+    </mc:Choice>
+    <mc:Fallback>
+      <p:transition spd="med">
+        <p:fade/>
+      </p:transition>
+    </mc:Fallback>
+  </mc:AlternateContent>
 </p:sld>
 </file>
 
@@ -13524,6 +13608,18 @@
   <p:clrMapOvr>
     <a:masterClrMapping/>
   </p:clrMapOvr>
+  <mc:AlternateContent xmlns:mc="http://schemas.openxmlformats.org/markup-compatibility/2006">
+    <mc:Choice xmlns:p14="http://schemas.microsoft.com/office/powerpoint/2010/main" Requires="p14">
+      <p:transition spd="med" p14:dur="700">
+        <p:fade/>
+      </p:transition>
+    </mc:Choice>
+    <mc:Fallback>
+      <p:transition spd="med">
+        <p:fade/>
+      </p:transition>
+    </mc:Fallback>
+  </mc:AlternateContent>
 </p:sld>
 </file>
 
@@ -14923,6 +15019,18 @@
   <p:clrMapOvr>
     <a:masterClrMapping/>
   </p:clrMapOvr>
+  <mc:AlternateContent xmlns:mc="http://schemas.openxmlformats.org/markup-compatibility/2006">
+    <mc:Choice xmlns:p14="http://schemas.microsoft.com/office/powerpoint/2010/main" Requires="p14">
+      <p:transition spd="med" p14:dur="700">
+        <p:fade/>
+      </p:transition>
+    </mc:Choice>
+    <mc:Fallback>
+      <p:transition spd="med">
+        <p:fade/>
+      </p:transition>
+    </mc:Fallback>
+  </mc:AlternateContent>
 </p:sld>
 </file>
 
@@ -16893,6 +17001,18 @@
   <p:clrMapOvr>
     <a:masterClrMapping/>
   </p:clrMapOvr>
+  <mc:AlternateContent xmlns:mc="http://schemas.openxmlformats.org/markup-compatibility/2006">
+    <mc:Choice xmlns:p14="http://schemas.microsoft.com/office/powerpoint/2010/main" Requires="p14">
+      <p:transition spd="med" p14:dur="700">
+        <p:fade/>
+      </p:transition>
+    </mc:Choice>
+    <mc:Fallback>
+      <p:transition spd="med">
+        <p:fade/>
+      </p:transition>
+    </mc:Fallback>
+  </mc:AlternateContent>
 </p:sld>
 </file>
 
@@ -17637,6 +17757,18 @@
   <p:clrMapOvr>
     <a:masterClrMapping/>
   </p:clrMapOvr>
+  <mc:AlternateContent xmlns:mc="http://schemas.openxmlformats.org/markup-compatibility/2006">
+    <mc:Choice xmlns:p14="http://schemas.microsoft.com/office/powerpoint/2010/main" Requires="p14">
+      <p:transition spd="med" p14:dur="700">
+        <p:fade/>
+      </p:transition>
+    </mc:Choice>
+    <mc:Fallback>
+      <p:transition spd="med">
+        <p:fade/>
+      </p:transition>
+    </mc:Fallback>
+  </mc:AlternateContent>
 </p:sld>
 </file>
 
@@ -18274,6 +18406,18 @@
   <p:clrMapOvr>
     <a:masterClrMapping/>
   </p:clrMapOvr>
+  <mc:AlternateContent xmlns:mc="http://schemas.openxmlformats.org/markup-compatibility/2006">
+    <mc:Choice xmlns:p14="http://schemas.microsoft.com/office/powerpoint/2010/main" Requires="p14">
+      <p:transition spd="med" p14:dur="700">
+        <p:fade/>
+      </p:transition>
+    </mc:Choice>
+    <mc:Fallback>
+      <p:transition spd="med">
+        <p:fade/>
+      </p:transition>
+    </mc:Fallback>
+  </mc:AlternateContent>
 </p:sld>
 </file>
 
@@ -19342,6 +19486,18 @@
   <p:clrMapOvr>
     <a:masterClrMapping/>
   </p:clrMapOvr>
+  <mc:AlternateContent xmlns:mc="http://schemas.openxmlformats.org/markup-compatibility/2006">
+    <mc:Choice xmlns:p14="http://schemas.microsoft.com/office/powerpoint/2010/main" Requires="p14">
+      <p:transition spd="med" p14:dur="700">
+        <p:fade/>
+      </p:transition>
+    </mc:Choice>
+    <mc:Fallback>
+      <p:transition spd="med">
+        <p:fade/>
+      </p:transition>
+    </mc:Fallback>
+  </mc:AlternateContent>
 </p:sld>
 </file>
 
@@ -20997,6 +21153,18 @@
   <p:clrMapOvr>
     <a:masterClrMapping/>
   </p:clrMapOvr>
+  <mc:AlternateContent xmlns:mc="http://schemas.openxmlformats.org/markup-compatibility/2006">
+    <mc:Choice xmlns:p14="http://schemas.microsoft.com/office/powerpoint/2010/main" Requires="p14">
+      <p:transition spd="med" p14:dur="700">
+        <p:fade/>
+      </p:transition>
+    </mc:Choice>
+    <mc:Fallback>
+      <p:transition spd="med">
+        <p:fade/>
+      </p:transition>
+    </mc:Fallback>
+  </mc:AlternateContent>
 </p:sld>
 </file>
 
@@ -22338,6 +22506,18 @@
   <p:clrMapOvr>
     <a:masterClrMapping/>
   </p:clrMapOvr>
+  <mc:AlternateContent xmlns:mc="http://schemas.openxmlformats.org/markup-compatibility/2006">
+    <mc:Choice xmlns:p14="http://schemas.microsoft.com/office/powerpoint/2010/main" Requires="p14">
+      <p:transition spd="med" p14:dur="700">
+        <p:fade/>
+      </p:transition>
+    </mc:Choice>
+    <mc:Fallback>
+      <p:transition spd="med">
+        <p:fade/>
+      </p:transition>
+    </mc:Fallback>
+  </mc:AlternateContent>
 </p:sld>
 </file>
 
@@ -22516,6 +22696,18 @@
   <p:clrMapOvr>
     <a:masterClrMapping/>
   </p:clrMapOvr>
+  <mc:AlternateContent xmlns:mc="http://schemas.openxmlformats.org/markup-compatibility/2006">
+    <mc:Choice xmlns:p14="http://schemas.microsoft.com/office/powerpoint/2010/main" Requires="p14">
+      <p:transition spd="med" p14:dur="700">
+        <p:fade/>
+      </p:transition>
+    </mc:Choice>
+    <mc:Fallback>
+      <p:transition spd="med">
+        <p:fade/>
+      </p:transition>
+    </mc:Fallback>
+  </mc:AlternateContent>
 </p:sld>
 </file>
 
@@ -23260,6 +23452,18 @@
   <p:clrMapOvr>
     <a:masterClrMapping/>
   </p:clrMapOvr>
+  <mc:AlternateContent xmlns:mc="http://schemas.openxmlformats.org/markup-compatibility/2006">
+    <mc:Choice xmlns:p14="http://schemas.microsoft.com/office/powerpoint/2010/main" Requires="p14">
+      <p:transition spd="med" p14:dur="700">
+        <p:fade/>
+      </p:transition>
+    </mc:Choice>
+    <mc:Fallback>
+      <p:transition spd="med">
+        <p:fade/>
+      </p:transition>
+    </mc:Fallback>
+  </mc:AlternateContent>
 </p:sld>
 </file>
 
@@ -23649,6 +23853,18 @@
   <p:clrMapOvr>
     <a:masterClrMapping/>
   </p:clrMapOvr>
+  <mc:AlternateContent xmlns:mc="http://schemas.openxmlformats.org/markup-compatibility/2006">
+    <mc:Choice xmlns:p14="http://schemas.microsoft.com/office/powerpoint/2010/main" Requires="p14">
+      <p:transition spd="med" p14:dur="700">
+        <p:fade/>
+      </p:transition>
+    </mc:Choice>
+    <mc:Fallback>
+      <p:transition spd="med">
+        <p:fade/>
+      </p:transition>
+    </mc:Fallback>
+  </mc:AlternateContent>
 </p:sld>
 </file>
 
